--- a/10-展示汇报/健身房运营管理系统答辩/健身房运营管理系统答辩.pptx
+++ b/10-展示汇报/健身房运营管理系统答辩/健身房运营管理系统答辩.pptx
@@ -27,6 +27,7 @@
     <p:sldId id="275" r:id="rId26"/>
     <p:sldId id="276" r:id="rId27"/>
     <p:sldId id="277" r:id="rId28"/>
+    <p:sldId id="278" r:id="rId29"/>
   </p:sldIdLst>
   <p:sldSz cx="12192000" cy="6858000" type="screen4x3"/>
   <p:notesSz cx="6858000" cy="9144000"/>
@@ -4744,7 +4745,7 @@
                 </a:solidFill>
                 <a:latin typeface="Microsoft YaHei"/>
               </a:rPr>
-              <a:t>10 / 22</a:t>
+              <a:t>10 / 23</a:t>
             </a:r>
           </a:p>
         </p:txBody>
@@ -5440,7 +5441,7 @@
                 </a:solidFill>
                 <a:latin typeface="Microsoft YaHei"/>
               </a:rPr>
-              <a:t>11 / 22</a:t>
+              <a:t>11 / 23</a:t>
             </a:r>
           </a:p>
         </p:txBody>
@@ -7116,7 +7117,7 @@
                 </a:solidFill>
                 <a:latin typeface="Microsoft YaHei"/>
               </a:rPr>
-              <a:t>12 / 22</a:t>
+              <a:t>12 / 23</a:t>
             </a:r>
           </a:p>
         </p:txBody>
@@ -8734,7 +8735,7 @@
                 </a:solidFill>
                 <a:latin typeface="Microsoft YaHei"/>
               </a:rPr>
-              <a:t>13 / 22</a:t>
+              <a:t>13 / 23</a:t>
             </a:r>
           </a:p>
         </p:txBody>
@@ -10459,7 +10460,7 @@
                 </a:solidFill>
                 <a:latin typeface="Microsoft YaHei"/>
               </a:rPr>
-              <a:t>14 / 22</a:t>
+              <a:t>14 / 23</a:t>
             </a:r>
           </a:p>
         </p:txBody>
@@ -11684,7 +11685,7 @@
                 </a:solidFill>
                 <a:latin typeface="Microsoft YaHei"/>
               </a:rPr>
-              <a:t>15 / 22</a:t>
+              <a:t>15 / 23</a:t>
             </a:r>
           </a:p>
         </p:txBody>
@@ -13121,7 +13122,7 @@
                 </a:solidFill>
                 <a:latin typeface="Microsoft YaHei"/>
               </a:rPr>
-              <a:t>16 / 22</a:t>
+              <a:t>16 / 23</a:t>
             </a:r>
           </a:p>
         </p:txBody>
@@ -13135,6 +13136,1288 @@
 </file>
 
 <file path=ppt/slides/slide17.xml><?xml version="1.0" encoding="utf-8"?>
+<p:sld xmlns:a="http://schemas.openxmlformats.org/drawingml/2006/main" xmlns:p="http://schemas.openxmlformats.org/presentationml/2006/main" xmlns:r="http://schemas.openxmlformats.org/officeDocument/2006/relationships">
+  <p:cSld>
+    <p:bg>
+      <p:bgPr>
+        <a:solidFill>
+          <a:srgbClr val="FFFFFF"/>
+        </a:solidFill>
+        <a:effectLst/>
+      </p:bgPr>
+    </p:bg>
+    <p:spTree>
+      <p:nvGrpSpPr>
+        <p:cNvPr id="1" name=""/>
+        <p:cNvGrpSpPr/>
+        <p:nvPr/>
+      </p:nvGrpSpPr>
+      <p:grpSpPr/>
+      <p:sp>
+        <p:nvSpPr>
+          <p:cNvPr id="2" name="Rectangle 1"/>
+          <p:cNvSpPr/>
+          <p:nvPr/>
+        </p:nvSpPr>
+        <p:spPr>
+          <a:xfrm>
+            <a:off x="0" y="0"/>
+            <a:ext cx="12192000" cy="762000"/>
+          </a:xfrm>
+          <a:prstGeom prst="rect">
+            <a:avLst/>
+          </a:prstGeom>
+          <a:solidFill>
+            <a:srgbClr val="1E4FA8"/>
+          </a:solidFill>
+          <a:ln>
+            <a:noFill/>
+          </a:ln>
+          <a:effectLst/>
+        </p:spPr>
+        <p:style>
+          <a:lnRef idx="1">
+            <a:schemeClr val="accent1"/>
+          </a:lnRef>
+          <a:fillRef idx="3">
+            <a:schemeClr val="accent1"/>
+          </a:fillRef>
+          <a:effectRef idx="2">
+            <a:schemeClr val="accent1"/>
+          </a:effectRef>
+          <a:fontRef idx="minor">
+            <a:schemeClr val="lt1"/>
+          </a:fontRef>
+        </p:style>
+        <p:txBody>
+          <a:bodyPr rtlCol="0" anchor="ctr" wrap="square"/>
+          <a:lstStyle/>
+          <a:p>
+            <a:pPr algn="ctr"/>
+          </a:p>
+        </p:txBody>
+      </p:sp>
+      <p:sp>
+        <p:nvSpPr>
+          <p:cNvPr id="3" name="TextBox 2"/>
+          <p:cNvSpPr txBox="1"/>
+          <p:nvPr/>
+        </p:nvSpPr>
+        <p:spPr>
+          <a:xfrm>
+            <a:off x="381000" y="0"/>
+            <a:ext cx="7239000" cy="762000"/>
+          </a:xfrm>
+          <a:prstGeom prst="rect">
+            <a:avLst/>
+          </a:prstGeom>
+          <a:noFill/>
+        </p:spPr>
+        <p:txBody>
+          <a:bodyPr wrap="square" lIns="0" rIns="0" tIns="0" bIns="0" anchor="ctr">
+            <a:spAutoFit/>
+          </a:bodyPr>
+          <a:lstStyle/>
+          <a:p>
+            <a:pPr algn="l">
+              <a:lnSpc>
+                <a:spcPct val="130000"/>
+              </a:lnSpc>
+            </a:pPr>
+            <a:r>
+              <a:rPr sz="2400" b="1">
+                <a:solidFill>
+                  <a:srgbClr val="FFFFFF"/>
+                </a:solidFill>
+                <a:latin typeface="Microsoft YaHei"/>
+              </a:rPr>
+              <a:t>管理员功能：课程维护（增删改查）</a:t>
+            </a:r>
+          </a:p>
+        </p:txBody>
+      </p:sp>
+      <p:sp>
+        <p:nvSpPr>
+          <p:cNvPr id="4" name="TextBox 3"/>
+          <p:cNvSpPr txBox="1"/>
+          <p:nvPr/>
+        </p:nvSpPr>
+        <p:spPr>
+          <a:xfrm>
+            <a:off x="7620000" y="0"/>
+            <a:ext cx="4191000" cy="762000"/>
+          </a:xfrm>
+          <a:prstGeom prst="rect">
+            <a:avLst/>
+          </a:prstGeom>
+          <a:noFill/>
+        </p:spPr>
+        <p:txBody>
+          <a:bodyPr wrap="square" lIns="0" rIns="0" tIns="0" bIns="0" anchor="ctr">
+            <a:spAutoFit/>
+          </a:bodyPr>
+          <a:lstStyle/>
+          <a:p>
+            <a:pPr algn="r">
+              <a:lnSpc>
+                <a:spcPct val="130000"/>
+              </a:lnSpc>
+            </a:pPr>
+            <a:r>
+              <a:rPr sz="1050" b="0">
+                <a:solidFill>
+                  <a:srgbClr val="BFD3F0"/>
+                </a:solidFill>
+                <a:latin typeface="Microsoft YaHei"/>
+              </a:rPr>
+              <a:t>健身房运营管理系统 · 课程答辩</a:t>
+            </a:r>
+          </a:p>
+        </p:txBody>
+      </p:sp>
+      <p:sp>
+        <p:nvSpPr>
+          <p:cNvPr id="5" name="Rounded Rectangle 4"/>
+          <p:cNvSpPr/>
+          <p:nvPr/>
+        </p:nvSpPr>
+        <p:spPr>
+          <a:xfrm>
+            <a:off x="381000" y="1047750"/>
+            <a:ext cx="11430000" cy="1104900"/>
+          </a:xfrm>
+          <a:prstGeom prst="roundRect">
+            <a:avLst>
+              <a:gd name="adj" fmla="val 10344"/>
+            </a:avLst>
+          </a:prstGeom>
+          <a:solidFill>
+            <a:srgbClr val="F7F9FC"/>
+          </a:solidFill>
+          <a:ln w="12700">
+            <a:solidFill>
+              <a:srgbClr val="D6DCE5"/>
+            </a:solidFill>
+          </a:ln>
+          <a:effectLst/>
+        </p:spPr>
+        <p:style>
+          <a:lnRef idx="1">
+            <a:schemeClr val="accent1"/>
+          </a:lnRef>
+          <a:fillRef idx="3">
+            <a:schemeClr val="accent1"/>
+          </a:fillRef>
+          <a:effectRef idx="2">
+            <a:schemeClr val="accent1"/>
+          </a:effectRef>
+          <a:fontRef idx="minor">
+            <a:schemeClr val="lt1"/>
+          </a:fontRef>
+        </p:style>
+        <p:txBody>
+          <a:bodyPr rtlCol="0" anchor="ctr" wrap="square"/>
+          <a:lstStyle/>
+          <a:p>
+            <a:pPr algn="ctr"/>
+          </a:p>
+        </p:txBody>
+      </p:sp>
+      <p:sp>
+        <p:nvSpPr>
+          <p:cNvPr id="6" name="Rounded Rectangle 5"/>
+          <p:cNvSpPr/>
+          <p:nvPr/>
+        </p:nvSpPr>
+        <p:spPr>
+          <a:xfrm>
+            <a:off x="590550" y="1371600"/>
+            <a:ext cx="457200" cy="457200"/>
+          </a:xfrm>
+          <a:prstGeom prst="roundRect">
+            <a:avLst>
+              <a:gd name="adj" fmla="val 16666"/>
+            </a:avLst>
+          </a:prstGeom>
+          <a:solidFill>
+            <a:srgbClr val="1E4FA8"/>
+          </a:solidFill>
+          <a:ln>
+            <a:noFill/>
+          </a:ln>
+          <a:effectLst/>
+        </p:spPr>
+        <p:style>
+          <a:lnRef idx="1">
+            <a:schemeClr val="accent1"/>
+          </a:lnRef>
+          <a:fillRef idx="3">
+            <a:schemeClr val="accent1"/>
+          </a:fillRef>
+          <a:effectRef idx="2">
+            <a:schemeClr val="accent1"/>
+          </a:effectRef>
+          <a:fontRef idx="minor">
+            <a:schemeClr val="lt1"/>
+          </a:fontRef>
+        </p:style>
+        <p:txBody>
+          <a:bodyPr rtlCol="0" anchor="ctr" wrap="square"/>
+          <a:lstStyle/>
+          <a:p>
+            <a:pPr algn="ctr"/>
+          </a:p>
+        </p:txBody>
+      </p:sp>
+      <p:sp>
+        <p:nvSpPr>
+          <p:cNvPr id="7" name="TextBox 6"/>
+          <p:cNvSpPr txBox="1"/>
+          <p:nvPr/>
+        </p:nvSpPr>
+        <p:spPr>
+          <a:xfrm>
+            <a:off x="590550" y="1371600"/>
+            <a:ext cx="457200" cy="457200"/>
+          </a:xfrm>
+          <a:prstGeom prst="rect">
+            <a:avLst/>
+          </a:prstGeom>
+          <a:noFill/>
+        </p:spPr>
+        <p:txBody>
+          <a:bodyPr wrap="square" lIns="0" rIns="0" tIns="0" bIns="0" anchor="ctr">
+            <a:spAutoFit/>
+          </a:bodyPr>
+          <a:lstStyle/>
+          <a:p>
+            <a:pPr algn="ctr">
+              <a:lnSpc>
+                <a:spcPct val="130000"/>
+              </a:lnSpc>
+            </a:pPr>
+            <a:r>
+              <a:rPr sz="1650" b="1">
+                <a:solidFill>
+                  <a:srgbClr val="FFFFFF"/>
+                </a:solidFill>
+                <a:latin typeface="Microsoft YaHei"/>
+              </a:rPr>
+              <a:t>01</a:t>
+            </a:r>
+          </a:p>
+        </p:txBody>
+      </p:sp>
+      <p:sp>
+        <p:nvSpPr>
+          <p:cNvPr id="8" name="TextBox 7"/>
+          <p:cNvSpPr txBox="1"/>
+          <p:nvPr/>
+        </p:nvSpPr>
+        <p:spPr>
+          <a:xfrm>
+            <a:off x="1238250" y="1200150"/>
+            <a:ext cx="10287000" cy="323850"/>
+          </a:xfrm>
+          <a:prstGeom prst="rect">
+            <a:avLst/>
+          </a:prstGeom>
+          <a:noFill/>
+        </p:spPr>
+        <p:txBody>
+          <a:bodyPr wrap="square" lIns="0" rIns="0" tIns="0" bIns="0" anchor="ctr">
+            <a:spAutoFit/>
+          </a:bodyPr>
+          <a:lstStyle/>
+          <a:p>
+            <a:pPr algn="l">
+              <a:lnSpc>
+                <a:spcPct val="130000"/>
+              </a:lnSpc>
+            </a:pPr>
+            <a:r>
+              <a:rPr sz="1875" b="1">
+                <a:solidFill>
+                  <a:srgbClr val="0E3F8C"/>
+                </a:solidFill>
+                <a:latin typeface="Microsoft YaHei"/>
+              </a:rPr>
+              <a:t>新建课程</a:t>
+            </a:r>
+          </a:p>
+        </p:txBody>
+      </p:sp>
+      <p:sp>
+        <p:nvSpPr>
+          <p:cNvPr id="9" name="TextBox 8"/>
+          <p:cNvSpPr txBox="1"/>
+          <p:nvPr/>
+        </p:nvSpPr>
+        <p:spPr>
+          <a:xfrm>
+            <a:off x="1238250" y="1562100"/>
+            <a:ext cx="10287000" cy="495300"/>
+          </a:xfrm>
+          <a:prstGeom prst="rect">
+            <a:avLst/>
+          </a:prstGeom>
+          <a:noFill/>
+        </p:spPr>
+        <p:txBody>
+          <a:bodyPr wrap="square" lIns="0" rIns="0" tIns="0" bIns="0" anchor="t">
+            <a:spAutoFit/>
+          </a:bodyPr>
+          <a:lstStyle/>
+          <a:p>
+            <a:pPr algn="l">
+              <a:lnSpc>
+                <a:spcPct val="145000"/>
+              </a:lnSpc>
+            </a:pPr>
+            <a:r>
+              <a:rPr sz="1350" b="0">
+                <a:solidFill>
+                  <a:srgbClr val="4A5568"/>
+                </a:solidFill>
+                <a:latin typeface="Microsoft YaHei"/>
+              </a:rPr>
+              <a:t>填写课程编号、名称、类型（团课 / 私教）、教练、场地、起止时间与容量；服务端校验编号唯一、时间合法、排课不冲突（SYS-R3）</a:t>
+            </a:r>
+          </a:p>
+        </p:txBody>
+      </p:sp>
+      <p:sp>
+        <p:nvSpPr>
+          <p:cNvPr id="10" name="Rounded Rectangle 9"/>
+          <p:cNvSpPr/>
+          <p:nvPr/>
+        </p:nvSpPr>
+        <p:spPr>
+          <a:xfrm>
+            <a:off x="381000" y="2266950"/>
+            <a:ext cx="11430000" cy="1104900"/>
+          </a:xfrm>
+          <a:prstGeom prst="roundRect">
+            <a:avLst>
+              <a:gd name="adj" fmla="val 10344"/>
+            </a:avLst>
+          </a:prstGeom>
+          <a:solidFill>
+            <a:srgbClr val="F7F9FC"/>
+          </a:solidFill>
+          <a:ln w="12700">
+            <a:solidFill>
+              <a:srgbClr val="D6DCE5"/>
+            </a:solidFill>
+          </a:ln>
+          <a:effectLst/>
+        </p:spPr>
+        <p:style>
+          <a:lnRef idx="1">
+            <a:schemeClr val="accent1"/>
+          </a:lnRef>
+          <a:fillRef idx="3">
+            <a:schemeClr val="accent1"/>
+          </a:fillRef>
+          <a:effectRef idx="2">
+            <a:schemeClr val="accent1"/>
+          </a:effectRef>
+          <a:fontRef idx="minor">
+            <a:schemeClr val="lt1"/>
+          </a:fontRef>
+        </p:style>
+        <p:txBody>
+          <a:bodyPr rtlCol="0" anchor="ctr" wrap="square"/>
+          <a:lstStyle/>
+          <a:p>
+            <a:pPr algn="ctr"/>
+          </a:p>
+        </p:txBody>
+      </p:sp>
+      <p:sp>
+        <p:nvSpPr>
+          <p:cNvPr id="11" name="Rounded Rectangle 10"/>
+          <p:cNvSpPr/>
+          <p:nvPr/>
+        </p:nvSpPr>
+        <p:spPr>
+          <a:xfrm>
+            <a:off x="590550" y="2590800"/>
+            <a:ext cx="457200" cy="457200"/>
+          </a:xfrm>
+          <a:prstGeom prst="roundRect">
+            <a:avLst>
+              <a:gd name="adj" fmla="val 16666"/>
+            </a:avLst>
+          </a:prstGeom>
+          <a:solidFill>
+            <a:srgbClr val="1E4FA8"/>
+          </a:solidFill>
+          <a:ln>
+            <a:noFill/>
+          </a:ln>
+          <a:effectLst/>
+        </p:spPr>
+        <p:style>
+          <a:lnRef idx="1">
+            <a:schemeClr val="accent1"/>
+          </a:lnRef>
+          <a:fillRef idx="3">
+            <a:schemeClr val="accent1"/>
+          </a:fillRef>
+          <a:effectRef idx="2">
+            <a:schemeClr val="accent1"/>
+          </a:effectRef>
+          <a:fontRef idx="minor">
+            <a:schemeClr val="lt1"/>
+          </a:fontRef>
+        </p:style>
+        <p:txBody>
+          <a:bodyPr rtlCol="0" anchor="ctr" wrap="square"/>
+          <a:lstStyle/>
+          <a:p>
+            <a:pPr algn="ctr"/>
+          </a:p>
+        </p:txBody>
+      </p:sp>
+      <p:sp>
+        <p:nvSpPr>
+          <p:cNvPr id="12" name="TextBox 11"/>
+          <p:cNvSpPr txBox="1"/>
+          <p:nvPr/>
+        </p:nvSpPr>
+        <p:spPr>
+          <a:xfrm>
+            <a:off x="590550" y="2590800"/>
+            <a:ext cx="457200" cy="457200"/>
+          </a:xfrm>
+          <a:prstGeom prst="rect">
+            <a:avLst/>
+          </a:prstGeom>
+          <a:noFill/>
+        </p:spPr>
+        <p:txBody>
+          <a:bodyPr wrap="square" lIns="0" rIns="0" tIns="0" bIns="0" anchor="ctr">
+            <a:spAutoFit/>
+          </a:bodyPr>
+          <a:lstStyle/>
+          <a:p>
+            <a:pPr algn="ctr">
+              <a:lnSpc>
+                <a:spcPct val="130000"/>
+              </a:lnSpc>
+            </a:pPr>
+            <a:r>
+              <a:rPr sz="1650" b="1">
+                <a:solidFill>
+                  <a:srgbClr val="FFFFFF"/>
+                </a:solidFill>
+                <a:latin typeface="Microsoft YaHei"/>
+              </a:rPr>
+              <a:t>02</a:t>
+            </a:r>
+          </a:p>
+        </p:txBody>
+      </p:sp>
+      <p:sp>
+        <p:nvSpPr>
+          <p:cNvPr id="13" name="TextBox 12"/>
+          <p:cNvSpPr txBox="1"/>
+          <p:nvPr/>
+        </p:nvSpPr>
+        <p:spPr>
+          <a:xfrm>
+            <a:off x="1238250" y="2419350"/>
+            <a:ext cx="10287000" cy="323850"/>
+          </a:xfrm>
+          <a:prstGeom prst="rect">
+            <a:avLst/>
+          </a:prstGeom>
+          <a:noFill/>
+        </p:spPr>
+        <p:txBody>
+          <a:bodyPr wrap="square" lIns="0" rIns="0" tIns="0" bIns="0" anchor="ctr">
+            <a:spAutoFit/>
+          </a:bodyPr>
+          <a:lstStyle/>
+          <a:p>
+            <a:pPr algn="l">
+              <a:lnSpc>
+                <a:spcPct val="130000"/>
+              </a:lnSpc>
+            </a:pPr>
+            <a:r>
+              <a:rPr sz="1875" b="1">
+                <a:solidFill>
+                  <a:srgbClr val="0E3F8C"/>
+                </a:solidFill>
+                <a:latin typeface="Microsoft YaHei"/>
+              </a:rPr>
+              <a:t>查询课程</a:t>
+            </a:r>
+          </a:p>
+        </p:txBody>
+      </p:sp>
+      <p:sp>
+        <p:nvSpPr>
+          <p:cNvPr id="14" name="TextBox 13"/>
+          <p:cNvSpPr txBox="1"/>
+          <p:nvPr/>
+        </p:nvSpPr>
+        <p:spPr>
+          <a:xfrm>
+            <a:off x="1238250" y="2781300"/>
+            <a:ext cx="10287000" cy="495300"/>
+          </a:xfrm>
+          <a:prstGeom prst="rect">
+            <a:avLst/>
+          </a:prstGeom>
+          <a:noFill/>
+        </p:spPr>
+        <p:txBody>
+          <a:bodyPr wrap="square" lIns="0" rIns="0" tIns="0" bIns="0" anchor="t">
+            <a:spAutoFit/>
+          </a:bodyPr>
+          <a:lstStyle/>
+          <a:p>
+            <a:pPr algn="l">
+              <a:lnSpc>
+                <a:spcPct val="145000"/>
+              </a:lnSpc>
+            </a:pPr>
+            <a:r>
+              <a:rPr sz="1350" b="0">
+                <a:solidFill>
+                  <a:srgbClr val="4A5568"/>
+                </a:solidFill>
+                <a:latin typeface="Microsoft YaHei"/>
+              </a:rPr>
+              <a:t>按列表查看全部课程，展示编号、名称、类型、教练、时间、已约 / 容量与状态；支持随时刷新</a:t>
+            </a:r>
+          </a:p>
+        </p:txBody>
+      </p:sp>
+      <p:sp>
+        <p:nvSpPr>
+          <p:cNvPr id="15" name="Rounded Rectangle 14"/>
+          <p:cNvSpPr/>
+          <p:nvPr/>
+        </p:nvSpPr>
+        <p:spPr>
+          <a:xfrm>
+            <a:off x="381000" y="3486150"/>
+            <a:ext cx="11430000" cy="1104900"/>
+          </a:xfrm>
+          <a:prstGeom prst="roundRect">
+            <a:avLst>
+              <a:gd name="adj" fmla="val 10344"/>
+            </a:avLst>
+          </a:prstGeom>
+          <a:solidFill>
+            <a:srgbClr val="F7F9FC"/>
+          </a:solidFill>
+          <a:ln w="12700">
+            <a:solidFill>
+              <a:srgbClr val="D6DCE5"/>
+            </a:solidFill>
+          </a:ln>
+          <a:effectLst/>
+        </p:spPr>
+        <p:style>
+          <a:lnRef idx="1">
+            <a:schemeClr val="accent1"/>
+          </a:lnRef>
+          <a:fillRef idx="3">
+            <a:schemeClr val="accent1"/>
+          </a:fillRef>
+          <a:effectRef idx="2">
+            <a:schemeClr val="accent1"/>
+          </a:effectRef>
+          <a:fontRef idx="minor">
+            <a:schemeClr val="lt1"/>
+          </a:fontRef>
+        </p:style>
+        <p:txBody>
+          <a:bodyPr rtlCol="0" anchor="ctr" wrap="square"/>
+          <a:lstStyle/>
+          <a:p>
+            <a:pPr algn="ctr"/>
+          </a:p>
+        </p:txBody>
+      </p:sp>
+      <p:sp>
+        <p:nvSpPr>
+          <p:cNvPr id="16" name="Rounded Rectangle 15"/>
+          <p:cNvSpPr/>
+          <p:nvPr/>
+        </p:nvSpPr>
+        <p:spPr>
+          <a:xfrm>
+            <a:off x="590550" y="3810000"/>
+            <a:ext cx="457200" cy="457200"/>
+          </a:xfrm>
+          <a:prstGeom prst="roundRect">
+            <a:avLst>
+              <a:gd name="adj" fmla="val 16666"/>
+            </a:avLst>
+          </a:prstGeom>
+          <a:solidFill>
+            <a:srgbClr val="1E4FA8"/>
+          </a:solidFill>
+          <a:ln>
+            <a:noFill/>
+          </a:ln>
+          <a:effectLst/>
+        </p:spPr>
+        <p:style>
+          <a:lnRef idx="1">
+            <a:schemeClr val="accent1"/>
+          </a:lnRef>
+          <a:fillRef idx="3">
+            <a:schemeClr val="accent1"/>
+          </a:fillRef>
+          <a:effectRef idx="2">
+            <a:schemeClr val="accent1"/>
+          </a:effectRef>
+          <a:fontRef idx="minor">
+            <a:schemeClr val="lt1"/>
+          </a:fontRef>
+        </p:style>
+        <p:txBody>
+          <a:bodyPr rtlCol="0" anchor="ctr" wrap="square"/>
+          <a:lstStyle/>
+          <a:p>
+            <a:pPr algn="ctr"/>
+          </a:p>
+        </p:txBody>
+      </p:sp>
+      <p:sp>
+        <p:nvSpPr>
+          <p:cNvPr id="17" name="TextBox 16"/>
+          <p:cNvSpPr txBox="1"/>
+          <p:nvPr/>
+        </p:nvSpPr>
+        <p:spPr>
+          <a:xfrm>
+            <a:off x="590550" y="3810000"/>
+            <a:ext cx="457200" cy="457200"/>
+          </a:xfrm>
+          <a:prstGeom prst="rect">
+            <a:avLst/>
+          </a:prstGeom>
+          <a:noFill/>
+        </p:spPr>
+        <p:txBody>
+          <a:bodyPr wrap="square" lIns="0" rIns="0" tIns="0" bIns="0" anchor="ctr">
+            <a:spAutoFit/>
+          </a:bodyPr>
+          <a:lstStyle/>
+          <a:p>
+            <a:pPr algn="ctr">
+              <a:lnSpc>
+                <a:spcPct val="130000"/>
+              </a:lnSpc>
+            </a:pPr>
+            <a:r>
+              <a:rPr sz="1650" b="1">
+                <a:solidFill>
+                  <a:srgbClr val="FFFFFF"/>
+                </a:solidFill>
+                <a:latin typeface="Microsoft YaHei"/>
+              </a:rPr>
+              <a:t>03</a:t>
+            </a:r>
+          </a:p>
+        </p:txBody>
+      </p:sp>
+      <p:sp>
+        <p:nvSpPr>
+          <p:cNvPr id="18" name="TextBox 17"/>
+          <p:cNvSpPr txBox="1"/>
+          <p:nvPr/>
+        </p:nvSpPr>
+        <p:spPr>
+          <a:xfrm>
+            <a:off x="1238250" y="3638550"/>
+            <a:ext cx="10287000" cy="323850"/>
+          </a:xfrm>
+          <a:prstGeom prst="rect">
+            <a:avLst/>
+          </a:prstGeom>
+          <a:noFill/>
+        </p:spPr>
+        <p:txBody>
+          <a:bodyPr wrap="square" lIns="0" rIns="0" tIns="0" bIns="0" anchor="ctr">
+            <a:spAutoFit/>
+          </a:bodyPr>
+          <a:lstStyle/>
+          <a:p>
+            <a:pPr algn="l">
+              <a:lnSpc>
+                <a:spcPct val="130000"/>
+              </a:lnSpc>
+            </a:pPr>
+            <a:r>
+              <a:rPr sz="1875" b="1">
+                <a:solidFill>
+                  <a:srgbClr val="0E3F8C"/>
+                </a:solidFill>
+                <a:latin typeface="Microsoft YaHei"/>
+              </a:rPr>
+              <a:t>编辑课程</a:t>
+            </a:r>
+          </a:p>
+        </p:txBody>
+      </p:sp>
+      <p:sp>
+        <p:nvSpPr>
+          <p:cNvPr id="19" name="TextBox 18"/>
+          <p:cNvSpPr txBox="1"/>
+          <p:nvPr/>
+        </p:nvSpPr>
+        <p:spPr>
+          <a:xfrm>
+            <a:off x="1238250" y="4000500"/>
+            <a:ext cx="10287000" cy="495300"/>
+          </a:xfrm>
+          <a:prstGeom prst="rect">
+            <a:avLst/>
+          </a:prstGeom>
+          <a:noFill/>
+        </p:spPr>
+        <p:txBody>
+          <a:bodyPr wrap="square" lIns="0" rIns="0" tIns="0" bIns="0" anchor="t">
+            <a:spAutoFit/>
+          </a:bodyPr>
+          <a:lstStyle/>
+          <a:p>
+            <a:pPr algn="l">
+              <a:lnSpc>
+                <a:spcPct val="145000"/>
+              </a:lnSpc>
+            </a:pPr>
+            <a:r>
+              <a:rPr sz="1350" b="0">
+                <a:solidFill>
+                  <a:srgbClr val="4A5568"/>
+                </a:solidFill>
+                <a:latin typeface="Microsoft YaHei"/>
+              </a:rPr>
+              <a:t>点列表中的「编辑」按钮载入原值；可修改名称、教练、场地、时间与容量；容量不得小于已预约人数（防超卖）</a:t>
+            </a:r>
+          </a:p>
+        </p:txBody>
+      </p:sp>
+      <p:sp>
+        <p:nvSpPr>
+          <p:cNvPr id="20" name="Rounded Rectangle 19"/>
+          <p:cNvSpPr/>
+          <p:nvPr/>
+        </p:nvSpPr>
+        <p:spPr>
+          <a:xfrm>
+            <a:off x="381000" y="4705350"/>
+            <a:ext cx="11430000" cy="1104900"/>
+          </a:xfrm>
+          <a:prstGeom prst="roundRect">
+            <a:avLst>
+              <a:gd name="adj" fmla="val 10344"/>
+            </a:avLst>
+          </a:prstGeom>
+          <a:solidFill>
+            <a:srgbClr val="F7F9FC"/>
+          </a:solidFill>
+          <a:ln w="12700">
+            <a:solidFill>
+              <a:srgbClr val="D6DCE5"/>
+            </a:solidFill>
+          </a:ln>
+          <a:effectLst/>
+        </p:spPr>
+        <p:style>
+          <a:lnRef idx="1">
+            <a:schemeClr val="accent1"/>
+          </a:lnRef>
+          <a:fillRef idx="3">
+            <a:schemeClr val="accent1"/>
+          </a:fillRef>
+          <a:effectRef idx="2">
+            <a:schemeClr val="accent1"/>
+          </a:effectRef>
+          <a:fontRef idx="minor">
+            <a:schemeClr val="lt1"/>
+          </a:fontRef>
+        </p:style>
+        <p:txBody>
+          <a:bodyPr rtlCol="0" anchor="ctr" wrap="square"/>
+          <a:lstStyle/>
+          <a:p>
+            <a:pPr algn="ctr"/>
+          </a:p>
+        </p:txBody>
+      </p:sp>
+      <p:sp>
+        <p:nvSpPr>
+          <p:cNvPr id="21" name="Rounded Rectangle 20"/>
+          <p:cNvSpPr/>
+          <p:nvPr/>
+        </p:nvSpPr>
+        <p:spPr>
+          <a:xfrm>
+            <a:off x="590550" y="5029200"/>
+            <a:ext cx="457200" cy="457200"/>
+          </a:xfrm>
+          <a:prstGeom prst="roundRect">
+            <a:avLst>
+              <a:gd name="adj" fmla="val 16666"/>
+            </a:avLst>
+          </a:prstGeom>
+          <a:solidFill>
+            <a:srgbClr val="1E4FA8"/>
+          </a:solidFill>
+          <a:ln>
+            <a:noFill/>
+          </a:ln>
+          <a:effectLst/>
+        </p:spPr>
+        <p:style>
+          <a:lnRef idx="1">
+            <a:schemeClr val="accent1"/>
+          </a:lnRef>
+          <a:fillRef idx="3">
+            <a:schemeClr val="accent1"/>
+          </a:fillRef>
+          <a:effectRef idx="2">
+            <a:schemeClr val="accent1"/>
+          </a:effectRef>
+          <a:fontRef idx="minor">
+            <a:schemeClr val="lt1"/>
+          </a:fontRef>
+        </p:style>
+        <p:txBody>
+          <a:bodyPr rtlCol="0" anchor="ctr" wrap="square"/>
+          <a:lstStyle/>
+          <a:p>
+            <a:pPr algn="ctr"/>
+          </a:p>
+        </p:txBody>
+      </p:sp>
+      <p:sp>
+        <p:nvSpPr>
+          <p:cNvPr id="22" name="TextBox 21"/>
+          <p:cNvSpPr txBox="1"/>
+          <p:nvPr/>
+        </p:nvSpPr>
+        <p:spPr>
+          <a:xfrm>
+            <a:off x="590550" y="5029200"/>
+            <a:ext cx="457200" cy="457200"/>
+          </a:xfrm>
+          <a:prstGeom prst="rect">
+            <a:avLst/>
+          </a:prstGeom>
+          <a:noFill/>
+        </p:spPr>
+        <p:txBody>
+          <a:bodyPr wrap="square" lIns="0" rIns="0" tIns="0" bIns="0" anchor="ctr">
+            <a:spAutoFit/>
+          </a:bodyPr>
+          <a:lstStyle/>
+          <a:p>
+            <a:pPr algn="ctr">
+              <a:lnSpc>
+                <a:spcPct val="130000"/>
+              </a:lnSpc>
+            </a:pPr>
+            <a:r>
+              <a:rPr sz="1650" b="1">
+                <a:solidFill>
+                  <a:srgbClr val="FFFFFF"/>
+                </a:solidFill>
+                <a:latin typeface="Microsoft YaHei"/>
+              </a:rPr>
+              <a:t>04</a:t>
+            </a:r>
+          </a:p>
+        </p:txBody>
+      </p:sp>
+      <p:sp>
+        <p:nvSpPr>
+          <p:cNvPr id="23" name="TextBox 22"/>
+          <p:cNvSpPr txBox="1"/>
+          <p:nvPr/>
+        </p:nvSpPr>
+        <p:spPr>
+          <a:xfrm>
+            <a:off x="1238250" y="4857750"/>
+            <a:ext cx="10287000" cy="323850"/>
+          </a:xfrm>
+          <a:prstGeom prst="rect">
+            <a:avLst/>
+          </a:prstGeom>
+          <a:noFill/>
+        </p:spPr>
+        <p:txBody>
+          <a:bodyPr wrap="square" lIns="0" rIns="0" tIns="0" bIns="0" anchor="ctr">
+            <a:spAutoFit/>
+          </a:bodyPr>
+          <a:lstStyle/>
+          <a:p>
+            <a:pPr algn="l">
+              <a:lnSpc>
+                <a:spcPct val="130000"/>
+              </a:lnSpc>
+            </a:pPr>
+            <a:r>
+              <a:rPr sz="1875" b="1">
+                <a:solidFill>
+                  <a:srgbClr val="0E3F8C"/>
+                </a:solidFill>
+                <a:latin typeface="Microsoft YaHei"/>
+              </a:rPr>
+              <a:t>下架 / 上架</a:t>
+            </a:r>
+          </a:p>
+        </p:txBody>
+      </p:sp>
+      <p:sp>
+        <p:nvSpPr>
+          <p:cNvPr id="24" name="TextBox 23"/>
+          <p:cNvSpPr txBox="1"/>
+          <p:nvPr/>
+        </p:nvSpPr>
+        <p:spPr>
+          <a:xfrm>
+            <a:off x="1238250" y="5219700"/>
+            <a:ext cx="10287000" cy="495300"/>
+          </a:xfrm>
+          <a:prstGeom prst="rect">
+            <a:avLst/>
+          </a:prstGeom>
+          <a:noFill/>
+        </p:spPr>
+        <p:txBody>
+          <a:bodyPr wrap="square" lIns="0" rIns="0" tIns="0" bIns="0" anchor="t">
+            <a:spAutoFit/>
+          </a:bodyPr>
+          <a:lstStyle/>
+          <a:p>
+            <a:pPr algn="l">
+              <a:lnSpc>
+                <a:spcPct val="145000"/>
+              </a:lnSpc>
+            </a:pPr>
+            <a:r>
+              <a:rPr sz="1350" b="0">
+                <a:solidFill>
+                  <a:srgbClr val="4A5568"/>
+                </a:solidFill>
+                <a:latin typeface="Microsoft YaHei"/>
+              </a:rPr>
+              <a:t>下架＝状态置为「已下架」（软删除，保留历史预约可追溯）；存在待上课预约时拒绝下架；可重新上架</a:t>
+            </a:r>
+          </a:p>
+        </p:txBody>
+      </p:sp>
+      <p:sp>
+        <p:nvSpPr>
+          <p:cNvPr id="25" name="Rounded Rectangle 24"/>
+          <p:cNvSpPr/>
+          <p:nvPr/>
+        </p:nvSpPr>
+        <p:spPr>
+          <a:xfrm>
+            <a:off x="381000" y="5162550"/>
+            <a:ext cx="11430000" cy="704850"/>
+          </a:xfrm>
+          <a:prstGeom prst="roundRect">
+            <a:avLst>
+              <a:gd name="adj" fmla="val 10810"/>
+            </a:avLst>
+          </a:prstGeom>
+          <a:solidFill>
+            <a:srgbClr val="E8EFF8"/>
+          </a:solidFill>
+          <a:ln>
+            <a:noFill/>
+          </a:ln>
+          <a:effectLst/>
+        </p:spPr>
+        <p:style>
+          <a:lnRef idx="1">
+            <a:schemeClr val="accent1"/>
+          </a:lnRef>
+          <a:fillRef idx="3">
+            <a:schemeClr val="accent1"/>
+          </a:fillRef>
+          <a:effectRef idx="2">
+            <a:schemeClr val="accent1"/>
+          </a:effectRef>
+          <a:fontRef idx="minor">
+            <a:schemeClr val="lt1"/>
+          </a:fontRef>
+        </p:style>
+        <p:txBody>
+          <a:bodyPr rtlCol="0" anchor="ctr" wrap="square"/>
+          <a:lstStyle/>
+          <a:p>
+            <a:pPr algn="ctr"/>
+          </a:p>
+        </p:txBody>
+      </p:sp>
+      <p:sp>
+        <p:nvSpPr>
+          <p:cNvPr id="26" name="Rectangle 25"/>
+          <p:cNvSpPr/>
+          <p:nvPr/>
+        </p:nvSpPr>
+        <p:spPr>
+          <a:xfrm>
+            <a:off x="381000" y="5162550"/>
+            <a:ext cx="38100" cy="704850"/>
+          </a:xfrm>
+          <a:prstGeom prst="rect">
+            <a:avLst/>
+          </a:prstGeom>
+          <a:solidFill>
+            <a:srgbClr val="1E4FA8"/>
+          </a:solidFill>
+          <a:ln>
+            <a:noFill/>
+          </a:ln>
+          <a:effectLst/>
+        </p:spPr>
+        <p:style>
+          <a:lnRef idx="1">
+            <a:schemeClr val="accent1"/>
+          </a:lnRef>
+          <a:fillRef idx="3">
+            <a:schemeClr val="accent1"/>
+          </a:fillRef>
+          <a:effectRef idx="2">
+            <a:schemeClr val="accent1"/>
+          </a:effectRef>
+          <a:fontRef idx="minor">
+            <a:schemeClr val="lt1"/>
+          </a:fontRef>
+        </p:style>
+        <p:txBody>
+          <a:bodyPr rtlCol="0" anchor="ctr" wrap="square"/>
+          <a:lstStyle/>
+          <a:p>
+            <a:pPr algn="ctr"/>
+          </a:p>
+        </p:txBody>
+      </p:sp>
+      <p:sp>
+        <p:nvSpPr>
+          <p:cNvPr id="27" name="TextBox 26"/>
+          <p:cNvSpPr txBox="1"/>
+          <p:nvPr/>
+        </p:nvSpPr>
+        <p:spPr>
+          <a:xfrm>
+            <a:off x="533400" y="5162550"/>
+            <a:ext cx="914400" cy="704850"/>
+          </a:xfrm>
+          <a:prstGeom prst="rect">
+            <a:avLst/>
+          </a:prstGeom>
+          <a:noFill/>
+        </p:spPr>
+        <p:txBody>
+          <a:bodyPr wrap="square" lIns="0" rIns="0" tIns="0" bIns="0" anchor="ctr">
+            <a:spAutoFit/>
+          </a:bodyPr>
+          <a:lstStyle/>
+          <a:p>
+            <a:pPr algn="l">
+              <a:lnSpc>
+                <a:spcPct val="130000"/>
+              </a:lnSpc>
+            </a:pPr>
+            <a:r>
+              <a:rPr sz="1500" b="1">
+                <a:solidFill>
+                  <a:srgbClr val="1E4FA8"/>
+                </a:solidFill>
+                <a:latin typeface="Microsoft YaHei"/>
+              </a:rPr>
+              <a:t>权限设计</a:t>
+            </a:r>
+          </a:p>
+        </p:txBody>
+      </p:sp>
+      <p:sp>
+        <p:nvSpPr>
+          <p:cNvPr id="28" name="TextBox 27"/>
+          <p:cNvSpPr txBox="1"/>
+          <p:nvPr/>
+        </p:nvSpPr>
+        <p:spPr>
+          <a:xfrm>
+            <a:off x="1504950" y="5162550"/>
+            <a:ext cx="10134600" cy="704850"/>
+          </a:xfrm>
+          <a:prstGeom prst="rect">
+            <a:avLst/>
+          </a:prstGeom>
+          <a:noFill/>
+        </p:spPr>
+        <p:txBody>
+          <a:bodyPr wrap="square" lIns="0" rIns="0" tIns="0" bIns="0" anchor="ctr">
+            <a:spAutoFit/>
+          </a:bodyPr>
+          <a:lstStyle/>
+          <a:p>
+            <a:pPr algn="l">
+              <a:lnSpc>
+                <a:spcPct val="135000"/>
+              </a:lnSpc>
+            </a:pPr>
+            <a:r>
+              <a:rPr sz="1500" b="0">
+                <a:solidFill>
+                  <a:srgbClr val="1A2230"/>
+                </a:solidFill>
+                <a:latin typeface="Microsoft YaHei"/>
+              </a:rPr>
+              <a:t>课程的新建、修改、下架、上架均在服务端强制校验管理员角色，非管理员一律返回 403</a:t>
+            </a:r>
+          </a:p>
+        </p:txBody>
+      </p:sp>
+      <p:sp>
+        <p:nvSpPr>
+          <p:cNvPr id="29" name="Rectangle 28"/>
+          <p:cNvSpPr/>
+          <p:nvPr/>
+        </p:nvSpPr>
+        <p:spPr>
+          <a:xfrm>
+            <a:off x="381000" y="6286500"/>
+            <a:ext cx="11430000" cy="9525"/>
+          </a:xfrm>
+          <a:prstGeom prst="rect">
+            <a:avLst/>
+          </a:prstGeom>
+          <a:solidFill>
+            <a:srgbClr val="E5E7EB"/>
+          </a:solidFill>
+          <a:ln>
+            <a:noFill/>
+          </a:ln>
+          <a:effectLst/>
+        </p:spPr>
+        <p:style>
+          <a:lnRef idx="1">
+            <a:schemeClr val="accent1"/>
+          </a:lnRef>
+          <a:fillRef idx="3">
+            <a:schemeClr val="accent1"/>
+          </a:fillRef>
+          <a:effectRef idx="2">
+            <a:schemeClr val="accent1"/>
+          </a:effectRef>
+          <a:fontRef idx="minor">
+            <a:schemeClr val="lt1"/>
+          </a:fontRef>
+        </p:style>
+        <p:txBody>
+          <a:bodyPr rtlCol="0" anchor="ctr" wrap="square"/>
+          <a:lstStyle/>
+          <a:p>
+            <a:pPr algn="ctr"/>
+          </a:p>
+        </p:txBody>
+      </p:sp>
+      <p:sp>
+        <p:nvSpPr>
+          <p:cNvPr id="30" name="TextBox 29"/>
+          <p:cNvSpPr txBox="1"/>
+          <p:nvPr/>
+        </p:nvSpPr>
+        <p:spPr>
+          <a:xfrm>
+            <a:off x="381000" y="6324600"/>
+            <a:ext cx="8763000" cy="285750"/>
+          </a:xfrm>
+          <a:prstGeom prst="rect">
+            <a:avLst/>
+          </a:prstGeom>
+          <a:noFill/>
+        </p:spPr>
+        <p:txBody>
+          <a:bodyPr wrap="square" lIns="0" rIns="0" tIns="0" bIns="0" anchor="ctr">
+            <a:spAutoFit/>
+          </a:bodyPr>
+          <a:lstStyle/>
+          <a:p>
+            <a:pPr algn="l">
+              <a:lnSpc>
+                <a:spcPct val="130000"/>
+              </a:lnSpc>
+            </a:pPr>
+            <a:r>
+              <a:rPr sz="1125" b="0">
+                <a:solidFill>
+                  <a:srgbClr val="8B97A8"/>
+                </a:solidFill>
+                <a:latin typeface="Microsoft YaHei"/>
+              </a:rPr>
+              <a:t>来源：系统测试文档 · 课程管理 CRUD 用例组</a:t>
+            </a:r>
+          </a:p>
+        </p:txBody>
+      </p:sp>
+      <p:sp>
+        <p:nvSpPr>
+          <p:cNvPr id="31" name="TextBox 30"/>
+          <p:cNvSpPr txBox="1"/>
+          <p:nvPr/>
+        </p:nvSpPr>
+        <p:spPr>
+          <a:xfrm>
+            <a:off x="9525000" y="6324600"/>
+            <a:ext cx="2286000" cy="285750"/>
+          </a:xfrm>
+          <a:prstGeom prst="rect">
+            <a:avLst/>
+          </a:prstGeom>
+          <a:noFill/>
+        </p:spPr>
+        <p:txBody>
+          <a:bodyPr wrap="square" lIns="0" rIns="0" tIns="0" bIns="0" anchor="ctr">
+            <a:spAutoFit/>
+          </a:bodyPr>
+          <a:lstStyle/>
+          <a:p>
+            <a:pPr algn="r">
+              <a:lnSpc>
+                <a:spcPct val="130000"/>
+              </a:lnSpc>
+            </a:pPr>
+            <a:r>
+              <a:rPr sz="1200" b="1">
+                <a:solidFill>
+                  <a:srgbClr val="1E4FA8"/>
+                </a:solidFill>
+                <a:latin typeface="Microsoft YaHei"/>
+              </a:rPr>
+              <a:t>22 / 23</a:t>
+            </a:r>
+          </a:p>
+        </p:txBody>
+      </p:sp>
+    </p:spTree>
+  </p:cSld>
+  <p:clrMapOvr>
+    <a:masterClrMapping/>
+  </p:clrMapOvr>
+</p:sld>
+</file>
+
+<file path=ppt/slides/slide18.xml><?xml version="1.0" encoding="utf-8"?>
 <p:sld xmlns:a="http://schemas.openxmlformats.org/drawingml/2006/main" xmlns:p="http://schemas.openxmlformats.org/presentationml/2006/main" xmlns:r="http://schemas.openxmlformats.org/officeDocument/2006/relationships">
   <p:cSld>
     <p:bg>
@@ -13730,1396 +15013,7 @@
                 </a:solidFill>
                 <a:latin typeface="Microsoft YaHei"/>
               </a:rPr>
-              <a:t>17 / 22</a:t>
-            </a:r>
-          </a:p>
-        </p:txBody>
-      </p:sp>
-    </p:spTree>
-  </p:cSld>
-  <p:clrMapOvr>
-    <a:masterClrMapping/>
-  </p:clrMapOvr>
-</p:sld>
-</file>
-
-<file path=ppt/slides/slide18.xml><?xml version="1.0" encoding="utf-8"?>
-<p:sld xmlns:a="http://schemas.openxmlformats.org/drawingml/2006/main" xmlns:p="http://schemas.openxmlformats.org/presentationml/2006/main" xmlns:r="http://schemas.openxmlformats.org/officeDocument/2006/relationships">
-  <p:cSld>
-    <p:bg>
-      <p:bgPr>
-        <a:solidFill>
-          <a:srgbClr val="FFFFFF"/>
-        </a:solidFill>
-        <a:effectLst/>
-      </p:bgPr>
-    </p:bg>
-    <p:spTree>
-      <p:nvGrpSpPr>
-        <p:cNvPr id="1" name=""/>
-        <p:cNvGrpSpPr/>
-        <p:nvPr/>
-      </p:nvGrpSpPr>
-      <p:grpSpPr/>
-      <p:sp>
-        <p:nvSpPr>
-          <p:cNvPr id="2" name="Rectangle 1"/>
-          <p:cNvSpPr/>
-          <p:nvPr/>
-        </p:nvSpPr>
-        <p:spPr>
-          <a:xfrm>
-            <a:off x="0" y="0"/>
-            <a:ext cx="12192000" cy="762000"/>
-          </a:xfrm>
-          <a:prstGeom prst="rect">
-            <a:avLst/>
-          </a:prstGeom>
-          <a:solidFill>
-            <a:srgbClr val="1E4FA8"/>
-          </a:solidFill>
-          <a:ln>
-            <a:noFill/>
-          </a:ln>
-          <a:effectLst/>
-        </p:spPr>
-        <p:style>
-          <a:lnRef idx="1">
-            <a:schemeClr val="accent1"/>
-          </a:lnRef>
-          <a:fillRef idx="3">
-            <a:schemeClr val="accent1"/>
-          </a:fillRef>
-          <a:effectRef idx="2">
-            <a:schemeClr val="accent1"/>
-          </a:effectRef>
-          <a:fontRef idx="minor">
-            <a:schemeClr val="lt1"/>
-          </a:fontRef>
-        </p:style>
-        <p:txBody>
-          <a:bodyPr rtlCol="0" anchor="ctr" wrap="square"/>
-          <a:lstStyle/>
-          <a:p>
-            <a:pPr algn="ctr"/>
-          </a:p>
-        </p:txBody>
-      </p:sp>
-      <p:sp>
-        <p:nvSpPr>
-          <p:cNvPr id="3" name="TextBox 2"/>
-          <p:cNvSpPr txBox="1"/>
-          <p:nvPr/>
-        </p:nvSpPr>
-        <p:spPr>
-          <a:xfrm>
-            <a:off x="381000" y="0"/>
-            <a:ext cx="7239000" cy="762000"/>
-          </a:xfrm>
-          <a:prstGeom prst="rect">
-            <a:avLst/>
-          </a:prstGeom>
-          <a:noFill/>
-        </p:spPr>
-        <p:txBody>
-          <a:bodyPr wrap="square" lIns="0" rIns="0" tIns="0" bIns="0" anchor="ctr">
-            <a:spAutoFit/>
-          </a:bodyPr>
-          <a:lstStyle/>
-          <a:p>
-            <a:pPr algn="l">
-              <a:lnSpc>
-                <a:spcPct val="130000"/>
-              </a:lnSpc>
-            </a:pPr>
-            <a:r>
-              <a:rPr sz="2400" b="1">
-                <a:solidFill>
-                  <a:srgbClr val="FFFFFF"/>
-                </a:solidFill>
-                <a:latin typeface="Microsoft YaHei"/>
-              </a:rPr>
-              <a:t>174 项检查，覆盖六个层次</a:t>
-            </a:r>
-          </a:p>
-        </p:txBody>
-      </p:sp>
-      <p:sp>
-        <p:nvSpPr>
-          <p:cNvPr id="4" name="TextBox 3"/>
-          <p:cNvSpPr txBox="1"/>
-          <p:nvPr/>
-        </p:nvSpPr>
-        <p:spPr>
-          <a:xfrm>
-            <a:off x="7620000" y="0"/>
-            <a:ext cx="4191000" cy="762000"/>
-          </a:xfrm>
-          <a:prstGeom prst="rect">
-            <a:avLst/>
-          </a:prstGeom>
-          <a:noFill/>
-        </p:spPr>
-        <p:txBody>
-          <a:bodyPr wrap="square" lIns="0" rIns="0" tIns="0" bIns="0" anchor="ctr">
-            <a:spAutoFit/>
-          </a:bodyPr>
-          <a:lstStyle/>
-          <a:p>
-            <a:pPr algn="r">
-              <a:lnSpc>
-                <a:spcPct val="130000"/>
-              </a:lnSpc>
-            </a:pPr>
-            <a:r>
-              <a:rPr sz="1050" b="0">
-                <a:solidFill>
-                  <a:srgbClr val="BFD3F0"/>
-                </a:solidFill>
-                <a:latin typeface="Microsoft YaHei"/>
-              </a:rPr>
-              <a:t>健身房运营管理系统 · 课程答辩</a:t>
-            </a:r>
-          </a:p>
-        </p:txBody>
-      </p:sp>
-      <p:sp>
-        <p:nvSpPr>
-          <p:cNvPr id="5" name="Rounded Rectangle 4"/>
-          <p:cNvSpPr/>
-          <p:nvPr/>
-        </p:nvSpPr>
-        <p:spPr>
-          <a:xfrm>
-            <a:off x="381000" y="1028700"/>
-            <a:ext cx="4000500" cy="4305300"/>
-          </a:xfrm>
-          <a:prstGeom prst="roundRect">
-            <a:avLst>
-              <a:gd name="adj" fmla="val 2857"/>
-            </a:avLst>
-          </a:prstGeom>
-          <a:solidFill>
-            <a:srgbClr val="E8EFF8"/>
-          </a:solidFill>
-          <a:ln>
-            <a:noFill/>
-          </a:ln>
-          <a:effectLst/>
-        </p:spPr>
-        <p:style>
-          <a:lnRef idx="1">
-            <a:schemeClr val="accent1"/>
-          </a:lnRef>
-          <a:fillRef idx="3">
-            <a:schemeClr val="accent1"/>
-          </a:fillRef>
-          <a:effectRef idx="2">
-            <a:schemeClr val="accent1"/>
-          </a:effectRef>
-          <a:fontRef idx="minor">
-            <a:schemeClr val="lt1"/>
-          </a:fontRef>
-        </p:style>
-        <p:txBody>
-          <a:bodyPr rtlCol="0" anchor="ctr" wrap="square"/>
-          <a:lstStyle/>
-          <a:p>
-            <a:pPr algn="ctr"/>
-          </a:p>
-        </p:txBody>
-      </p:sp>
-      <p:sp>
-        <p:nvSpPr>
-          <p:cNvPr id="6" name="TextBox 5"/>
-          <p:cNvSpPr txBox="1"/>
-          <p:nvPr/>
-        </p:nvSpPr>
-        <p:spPr>
-          <a:xfrm>
-            <a:off x="571500" y="1390650"/>
-            <a:ext cx="3619500" cy="1447800"/>
-          </a:xfrm>
-          <a:prstGeom prst="rect">
-            <a:avLst/>
-          </a:prstGeom>
-          <a:noFill/>
-        </p:spPr>
-        <p:txBody>
-          <a:bodyPr wrap="square" lIns="0" rIns="0" tIns="0" bIns="0" anchor="ctr">
-            <a:spAutoFit/>
-          </a:bodyPr>
-          <a:lstStyle/>
-          <a:p>
-            <a:pPr algn="l">
-              <a:lnSpc>
-                <a:spcPct val="100000"/>
-              </a:lnSpc>
-            </a:pPr>
-            <a:r>
-              <a:rPr sz="8700" b="1">
-                <a:solidFill>
-                  <a:srgbClr val="0E3F8C"/>
-                </a:solidFill>
-                <a:latin typeface="Microsoft YaHei"/>
-              </a:rPr>
-              <a:t>174</a:t>
-            </a:r>
-          </a:p>
-        </p:txBody>
-      </p:sp>
-      <p:sp>
-        <p:nvSpPr>
-          <p:cNvPr id="7" name="TextBox 6"/>
-          <p:cNvSpPr txBox="1"/>
-          <p:nvPr/>
-        </p:nvSpPr>
-        <p:spPr>
-          <a:xfrm>
-            <a:off x="571500" y="2914650"/>
-            <a:ext cx="3619500" cy="381000"/>
-          </a:xfrm>
-          <a:prstGeom prst="rect">
-            <a:avLst/>
-          </a:prstGeom>
-          <a:noFill/>
-        </p:spPr>
-        <p:txBody>
-          <a:bodyPr wrap="square" lIns="0" rIns="0" tIns="0" bIns="0" anchor="ctr">
-            <a:spAutoFit/>
-          </a:bodyPr>
-          <a:lstStyle/>
-          <a:p>
-            <a:pPr algn="l">
-              <a:lnSpc>
-                <a:spcPct val="130000"/>
-              </a:lnSpc>
-            </a:pPr>
-            <a:r>
-              <a:rPr sz="1650" b="0">
-                <a:solidFill>
-                  <a:srgbClr val="1A2230"/>
-                </a:solidFill>
-                <a:latin typeface="Microsoft YaHei"/>
-              </a:rPr>
-              <a:t>项自动化检查全部通过</a:t>
-            </a:r>
-          </a:p>
-        </p:txBody>
-      </p:sp>
-      <p:sp>
-        <p:nvSpPr>
-          <p:cNvPr id="8" name="TextBox 7"/>
-          <p:cNvSpPr txBox="1"/>
-          <p:nvPr/>
-        </p:nvSpPr>
-        <p:spPr>
-          <a:xfrm>
-            <a:off x="571500" y="3390900"/>
-            <a:ext cx="3619500" cy="1714500"/>
-          </a:xfrm>
-          <a:prstGeom prst="rect">
-            <a:avLst/>
-          </a:prstGeom>
-          <a:noFill/>
-        </p:spPr>
-        <p:txBody>
-          <a:bodyPr wrap="square" lIns="0" rIns="0" tIns="0" bIns="0" anchor="t">
-            <a:spAutoFit/>
-          </a:bodyPr>
-          <a:lstStyle/>
-          <a:p>
-            <a:pPr algn="l">
-              <a:lnSpc>
-                <a:spcPct val="160000"/>
-              </a:lnSpc>
-            </a:pPr>
-            <a:r>
-              <a:rPr sz="1425" b="0">
-                <a:solidFill>
-                  <a:srgbClr val="4A5568"/>
-                </a:solidFill>
-                <a:latin typeface="Microsoft YaHei"/>
-              </a:rPr>
-              <a:t>从单元测试到真实浏览器点击，</a:t>
-            </a:r>
-          </a:p>
-          <a:p>
-            <a:pPr algn="l">
-              <a:lnSpc>
-                <a:spcPct val="160000"/>
-              </a:lnSpc>
-            </a:pPr>
-            <a:r>
-              <a:rPr sz="1425" b="0">
-                <a:solidFill>
-                  <a:srgbClr val="4A5568"/>
-                </a:solidFill>
-                <a:latin typeface="Microsoft YaHei"/>
-              </a:rPr>
-              <a:t>每一层都有可复现的执行命令与</a:t>
-            </a:r>
-          </a:p>
-          <a:p>
-            <a:pPr algn="l">
-              <a:lnSpc>
-                <a:spcPct val="160000"/>
-              </a:lnSpc>
-            </a:pPr>
-            <a:r>
-              <a:rPr sz="1425" b="0">
-                <a:solidFill>
-                  <a:srgbClr val="4A5568"/>
-                </a:solidFill>
-                <a:latin typeface="Microsoft YaHei"/>
-              </a:rPr>
-              <a:t>报告文件，答辩现场可逐条演示。</a:t>
-            </a:r>
-          </a:p>
-        </p:txBody>
-      </p:sp>
-      <p:sp>
-        <p:nvSpPr>
-          <p:cNvPr id="9" name="Rounded Rectangle 8"/>
-          <p:cNvSpPr/>
-          <p:nvPr/>
-        </p:nvSpPr>
-        <p:spPr>
-          <a:xfrm>
-            <a:off x="4610100" y="1028700"/>
-            <a:ext cx="7200900" cy="628650"/>
-          </a:xfrm>
-          <a:prstGeom prst="roundRect">
-            <a:avLst>
-              <a:gd name="adj" fmla="val 15151"/>
-            </a:avLst>
-          </a:prstGeom>
-          <a:solidFill>
-            <a:srgbClr val="F7F9FC"/>
-          </a:solidFill>
-          <a:ln w="12700">
-            <a:solidFill>
-              <a:srgbClr val="D6DCE5"/>
-            </a:solidFill>
-          </a:ln>
-          <a:effectLst/>
-        </p:spPr>
-        <p:style>
-          <a:lnRef idx="1">
-            <a:schemeClr val="accent1"/>
-          </a:lnRef>
-          <a:fillRef idx="3">
-            <a:schemeClr val="accent1"/>
-          </a:fillRef>
-          <a:effectRef idx="2">
-            <a:schemeClr val="accent1"/>
-          </a:effectRef>
-          <a:fontRef idx="minor">
-            <a:schemeClr val="lt1"/>
-          </a:fontRef>
-        </p:style>
-        <p:txBody>
-          <a:bodyPr rtlCol="0" anchor="ctr" wrap="square"/>
-          <a:lstStyle/>
-          <a:p>
-            <a:pPr algn="ctr"/>
-          </a:p>
-        </p:txBody>
-      </p:sp>
-      <p:sp>
-        <p:nvSpPr>
-          <p:cNvPr id="10" name="TextBox 9"/>
-          <p:cNvSpPr txBox="1"/>
-          <p:nvPr/>
-        </p:nvSpPr>
-        <p:spPr>
-          <a:xfrm>
-            <a:off x="4838700" y="1028700"/>
-            <a:ext cx="5334000" cy="628650"/>
-          </a:xfrm>
-          <a:prstGeom prst="rect">
-            <a:avLst/>
-          </a:prstGeom>
-          <a:noFill/>
-        </p:spPr>
-        <p:txBody>
-          <a:bodyPr wrap="square" lIns="0" rIns="0" tIns="0" bIns="0" anchor="ctr">
-            <a:spAutoFit/>
-          </a:bodyPr>
-          <a:lstStyle/>
-          <a:p>
-            <a:pPr algn="l">
-              <a:lnSpc>
-                <a:spcPct val="130000"/>
-              </a:lnSpc>
-            </a:pPr>
-            <a:r>
-              <a:rPr sz="1575" b="0">
-                <a:solidFill>
-                  <a:srgbClr val="1A2230"/>
-                </a:solidFill>
-                <a:latin typeface="Microsoft YaHei"/>
-              </a:rPr>
-              <a:t>Java 单元 · 架构守卫 · 行为驱动</a:t>
-            </a:r>
-          </a:p>
-        </p:txBody>
-      </p:sp>
-      <p:sp>
-        <p:nvSpPr>
-          <p:cNvPr id="11" name="TextBox 10"/>
-          <p:cNvSpPr txBox="1"/>
-          <p:nvPr/>
-        </p:nvSpPr>
-        <p:spPr>
-          <a:xfrm>
-            <a:off x="10287000" y="1028700"/>
-            <a:ext cx="1333500" cy="628650"/>
-          </a:xfrm>
-          <a:prstGeom prst="rect">
-            <a:avLst/>
-          </a:prstGeom>
-          <a:noFill/>
-        </p:spPr>
-        <p:txBody>
-          <a:bodyPr wrap="square" lIns="0" rIns="0" tIns="0" bIns="0" anchor="ctr">
-            <a:spAutoFit/>
-          </a:bodyPr>
-          <a:lstStyle/>
-          <a:p>
-            <a:pPr algn="r">
-              <a:lnSpc>
-                <a:spcPct val="130000"/>
-              </a:lnSpc>
-            </a:pPr>
-            <a:r>
-              <a:rPr sz="2250" b="1">
-                <a:solidFill>
-                  <a:srgbClr val="1E4FA8"/>
-                </a:solidFill>
-                <a:latin typeface="Microsoft YaHei"/>
-              </a:rPr>
-              <a:t>56</a:t>
-            </a:r>
-          </a:p>
-        </p:txBody>
-      </p:sp>
-      <p:sp>
-        <p:nvSpPr>
-          <p:cNvPr id="12" name="Rounded Rectangle 11"/>
-          <p:cNvSpPr/>
-          <p:nvPr/>
-        </p:nvSpPr>
-        <p:spPr>
-          <a:xfrm>
-            <a:off x="4610100" y="1752600"/>
-            <a:ext cx="7200900" cy="628650"/>
-          </a:xfrm>
-          <a:prstGeom prst="roundRect">
-            <a:avLst>
-              <a:gd name="adj" fmla="val 15151"/>
-            </a:avLst>
-          </a:prstGeom>
-          <a:solidFill>
-            <a:srgbClr val="F7F9FC"/>
-          </a:solidFill>
-          <a:ln w="12700">
-            <a:solidFill>
-              <a:srgbClr val="D6DCE5"/>
-            </a:solidFill>
-          </a:ln>
-          <a:effectLst/>
-        </p:spPr>
-        <p:style>
-          <a:lnRef idx="1">
-            <a:schemeClr val="accent1"/>
-          </a:lnRef>
-          <a:fillRef idx="3">
-            <a:schemeClr val="accent1"/>
-          </a:fillRef>
-          <a:effectRef idx="2">
-            <a:schemeClr val="accent1"/>
-          </a:effectRef>
-          <a:fontRef idx="minor">
-            <a:schemeClr val="lt1"/>
-          </a:fontRef>
-        </p:style>
-        <p:txBody>
-          <a:bodyPr rtlCol="0" anchor="ctr" wrap="square"/>
-          <a:lstStyle/>
-          <a:p>
-            <a:pPr algn="ctr"/>
-          </a:p>
-        </p:txBody>
-      </p:sp>
-      <p:sp>
-        <p:nvSpPr>
-          <p:cNvPr id="13" name="TextBox 12"/>
-          <p:cNvSpPr txBox="1"/>
-          <p:nvPr/>
-        </p:nvSpPr>
-        <p:spPr>
-          <a:xfrm>
-            <a:off x="4838700" y="1752600"/>
-            <a:ext cx="5334000" cy="628650"/>
-          </a:xfrm>
-          <a:prstGeom prst="rect">
-            <a:avLst/>
-          </a:prstGeom>
-          <a:noFill/>
-        </p:spPr>
-        <p:txBody>
-          <a:bodyPr wrap="square" lIns="0" rIns="0" tIns="0" bIns="0" anchor="ctr">
-            <a:spAutoFit/>
-          </a:bodyPr>
-          <a:lstStyle/>
-          <a:p>
-            <a:pPr algn="l">
-              <a:lnSpc>
-                <a:spcPct val="130000"/>
-              </a:lnSpc>
-            </a:pPr>
-            <a:r>
-              <a:rPr sz="1575" b="0">
-                <a:solidFill>
-                  <a:srgbClr val="1A2230"/>
-                </a:solidFill>
-                <a:latin typeface="Microsoft YaHei"/>
-              </a:rPr>
-              <a:t>集成测试（登录 / 权限 / 全流程）</a:t>
-            </a:r>
-          </a:p>
-        </p:txBody>
-      </p:sp>
-      <p:sp>
-        <p:nvSpPr>
-          <p:cNvPr id="14" name="TextBox 13"/>
-          <p:cNvSpPr txBox="1"/>
-          <p:nvPr/>
-        </p:nvSpPr>
-        <p:spPr>
-          <a:xfrm>
-            <a:off x="10287000" y="1752600"/>
-            <a:ext cx="1333500" cy="628650"/>
-          </a:xfrm>
-          <a:prstGeom prst="rect">
-            <a:avLst/>
-          </a:prstGeom>
-          <a:noFill/>
-        </p:spPr>
-        <p:txBody>
-          <a:bodyPr wrap="square" lIns="0" rIns="0" tIns="0" bIns="0" anchor="ctr">
-            <a:spAutoFit/>
-          </a:bodyPr>
-          <a:lstStyle/>
-          <a:p>
-            <a:pPr algn="r">
-              <a:lnSpc>
-                <a:spcPct val="130000"/>
-              </a:lnSpc>
-            </a:pPr>
-            <a:r>
-              <a:rPr sz="2250" b="1">
-                <a:solidFill>
-                  <a:srgbClr val="1E4FA8"/>
-                </a:solidFill>
-                <a:latin typeface="Microsoft YaHei"/>
-              </a:rPr>
-              <a:t>45</a:t>
-            </a:r>
-          </a:p>
-        </p:txBody>
-      </p:sp>
-      <p:sp>
-        <p:nvSpPr>
-          <p:cNvPr id="15" name="Rounded Rectangle 14"/>
-          <p:cNvSpPr/>
-          <p:nvPr/>
-        </p:nvSpPr>
-        <p:spPr>
-          <a:xfrm>
-            <a:off x="4610100" y="2476500"/>
-            <a:ext cx="7200900" cy="628650"/>
-          </a:xfrm>
-          <a:prstGeom prst="roundRect">
-            <a:avLst>
-              <a:gd name="adj" fmla="val 15151"/>
-            </a:avLst>
-          </a:prstGeom>
-          <a:solidFill>
-            <a:srgbClr val="F7F9FC"/>
-          </a:solidFill>
-          <a:ln w="12700">
-            <a:solidFill>
-              <a:srgbClr val="D6DCE5"/>
-            </a:solidFill>
-          </a:ln>
-          <a:effectLst/>
-        </p:spPr>
-        <p:style>
-          <a:lnRef idx="1">
-            <a:schemeClr val="accent1"/>
-          </a:lnRef>
-          <a:fillRef idx="3">
-            <a:schemeClr val="accent1"/>
-          </a:fillRef>
-          <a:effectRef idx="2">
-            <a:schemeClr val="accent1"/>
-          </a:effectRef>
-          <a:fontRef idx="minor">
-            <a:schemeClr val="lt1"/>
-          </a:fontRef>
-        </p:style>
-        <p:txBody>
-          <a:bodyPr rtlCol="0" anchor="ctr" wrap="square"/>
-          <a:lstStyle/>
-          <a:p>
-            <a:pPr algn="ctr"/>
-          </a:p>
-        </p:txBody>
-      </p:sp>
-      <p:sp>
-        <p:nvSpPr>
-          <p:cNvPr id="16" name="TextBox 15"/>
-          <p:cNvSpPr txBox="1"/>
-          <p:nvPr/>
-        </p:nvSpPr>
-        <p:spPr>
-          <a:xfrm>
-            <a:off x="4838700" y="2476500"/>
-            <a:ext cx="5334000" cy="628650"/>
-          </a:xfrm>
-          <a:prstGeom prst="rect">
-            <a:avLst/>
-          </a:prstGeom>
-          <a:noFill/>
-        </p:spPr>
-        <p:txBody>
-          <a:bodyPr wrap="square" lIns="0" rIns="0" tIns="0" bIns="0" anchor="ctr">
-            <a:spAutoFit/>
-          </a:bodyPr>
-          <a:lstStyle/>
-          <a:p>
-            <a:pPr algn="l">
-              <a:lnSpc>
-                <a:spcPct val="130000"/>
-              </a:lnSpc>
-            </a:pPr>
-            <a:r>
-              <a:rPr sz="1575" b="0">
-                <a:solidFill>
-                  <a:srgbClr val="1A2230"/>
-                </a:solidFill>
-                <a:latin typeface="Microsoft YaHei"/>
-              </a:rPr>
-              <a:t>前端静态检查（防按钮无响应）</a:t>
-            </a:r>
-          </a:p>
-        </p:txBody>
-      </p:sp>
-      <p:sp>
-        <p:nvSpPr>
-          <p:cNvPr id="17" name="TextBox 16"/>
-          <p:cNvSpPr txBox="1"/>
-          <p:nvPr/>
-        </p:nvSpPr>
-        <p:spPr>
-          <a:xfrm>
-            <a:off x="10287000" y="2476500"/>
-            <a:ext cx="1333500" cy="628650"/>
-          </a:xfrm>
-          <a:prstGeom prst="rect">
-            <a:avLst/>
-          </a:prstGeom>
-          <a:noFill/>
-        </p:spPr>
-        <p:txBody>
-          <a:bodyPr wrap="square" lIns="0" rIns="0" tIns="0" bIns="0" anchor="ctr">
-            <a:spAutoFit/>
-          </a:bodyPr>
-          <a:lstStyle/>
-          <a:p>
-            <a:pPr algn="r">
-              <a:lnSpc>
-                <a:spcPct val="130000"/>
-              </a:lnSpc>
-            </a:pPr>
-            <a:r>
-              <a:rPr sz="2250" b="1">
-                <a:solidFill>
-                  <a:srgbClr val="1E4FA8"/>
-                </a:solidFill>
-                <a:latin typeface="Microsoft YaHei"/>
-              </a:rPr>
-              <a:t>5</a:t>
-            </a:r>
-          </a:p>
-        </p:txBody>
-      </p:sp>
-      <p:sp>
-        <p:nvSpPr>
-          <p:cNvPr id="18" name="Rounded Rectangle 17"/>
-          <p:cNvSpPr/>
-          <p:nvPr/>
-        </p:nvSpPr>
-        <p:spPr>
-          <a:xfrm>
-            <a:off x="4610100" y="3200400"/>
-            <a:ext cx="7200900" cy="628650"/>
-          </a:xfrm>
-          <a:prstGeom prst="roundRect">
-            <a:avLst>
-              <a:gd name="adj" fmla="val 15151"/>
-            </a:avLst>
-          </a:prstGeom>
-          <a:solidFill>
-            <a:srgbClr val="F7F9FC"/>
-          </a:solidFill>
-          <a:ln w="12700">
-            <a:solidFill>
-              <a:srgbClr val="D6DCE5"/>
-            </a:solidFill>
-          </a:ln>
-          <a:effectLst/>
-        </p:spPr>
-        <p:style>
-          <a:lnRef idx="1">
-            <a:schemeClr val="accent1"/>
-          </a:lnRef>
-          <a:fillRef idx="3">
-            <a:schemeClr val="accent1"/>
-          </a:fillRef>
-          <a:effectRef idx="2">
-            <a:schemeClr val="accent1"/>
-          </a:effectRef>
-          <a:fontRef idx="minor">
-            <a:schemeClr val="lt1"/>
-          </a:fontRef>
-        </p:style>
-        <p:txBody>
-          <a:bodyPr rtlCol="0" anchor="ctr" wrap="square"/>
-          <a:lstStyle/>
-          <a:p>
-            <a:pPr algn="ctr"/>
-          </a:p>
-        </p:txBody>
-      </p:sp>
-      <p:sp>
-        <p:nvSpPr>
-          <p:cNvPr id="19" name="TextBox 18"/>
-          <p:cNvSpPr txBox="1"/>
-          <p:nvPr/>
-        </p:nvSpPr>
-        <p:spPr>
-          <a:xfrm>
-            <a:off x="4838700" y="3200400"/>
-            <a:ext cx="5334000" cy="628650"/>
-          </a:xfrm>
-          <a:prstGeom prst="rect">
-            <a:avLst/>
-          </a:prstGeom>
-          <a:noFill/>
-        </p:spPr>
-        <p:txBody>
-          <a:bodyPr wrap="square" lIns="0" rIns="0" tIns="0" bIns="0" anchor="ctr">
-            <a:spAutoFit/>
-          </a:bodyPr>
-          <a:lstStyle/>
-          <a:p>
-            <a:pPr algn="l">
-              <a:lnSpc>
-                <a:spcPct val="130000"/>
-              </a:lnSpc>
-            </a:pPr>
-            <a:r>
-              <a:rPr sz="1575" b="0">
-                <a:solidFill>
-                  <a:srgbClr val="1A2230"/>
-                </a:solidFill>
-                <a:latin typeface="Microsoft YaHei"/>
-              </a:rPr>
-              <a:t>真实浏览器测试（自动点击验证）</a:t>
-            </a:r>
-          </a:p>
-        </p:txBody>
-      </p:sp>
-      <p:sp>
-        <p:nvSpPr>
-          <p:cNvPr id="20" name="TextBox 19"/>
-          <p:cNvSpPr txBox="1"/>
-          <p:nvPr/>
-        </p:nvSpPr>
-        <p:spPr>
-          <a:xfrm>
-            <a:off x="10287000" y="3200400"/>
-            <a:ext cx="1333500" cy="628650"/>
-          </a:xfrm>
-          <a:prstGeom prst="rect">
-            <a:avLst/>
-          </a:prstGeom>
-          <a:noFill/>
-        </p:spPr>
-        <p:txBody>
-          <a:bodyPr wrap="square" lIns="0" rIns="0" tIns="0" bIns="0" anchor="ctr">
-            <a:spAutoFit/>
-          </a:bodyPr>
-          <a:lstStyle/>
-          <a:p>
-            <a:pPr algn="r">
-              <a:lnSpc>
-                <a:spcPct val="130000"/>
-              </a:lnSpc>
-            </a:pPr>
-            <a:r>
-              <a:rPr sz="2250" b="1">
-                <a:solidFill>
-                  <a:srgbClr val="1E4FA8"/>
-                </a:solidFill>
-                <a:latin typeface="Microsoft YaHei"/>
-              </a:rPr>
-              <a:t>32</a:t>
-            </a:r>
-          </a:p>
-        </p:txBody>
-      </p:sp>
-      <p:sp>
-        <p:nvSpPr>
-          <p:cNvPr id="21" name="Rounded Rectangle 20"/>
-          <p:cNvSpPr/>
-          <p:nvPr/>
-        </p:nvSpPr>
-        <p:spPr>
-          <a:xfrm>
-            <a:off x="4610100" y="3924300"/>
-            <a:ext cx="7200900" cy="628650"/>
-          </a:xfrm>
-          <a:prstGeom prst="roundRect">
-            <a:avLst>
-              <a:gd name="adj" fmla="val 15151"/>
-            </a:avLst>
-          </a:prstGeom>
-          <a:solidFill>
-            <a:srgbClr val="F7F9FC"/>
-          </a:solidFill>
-          <a:ln w="12700">
-            <a:solidFill>
-              <a:srgbClr val="D6DCE5"/>
-            </a:solidFill>
-          </a:ln>
-          <a:effectLst/>
-        </p:spPr>
-        <p:style>
-          <a:lnRef idx="1">
-            <a:schemeClr val="accent1"/>
-          </a:lnRef>
-          <a:fillRef idx="3">
-            <a:schemeClr val="accent1"/>
-          </a:fillRef>
-          <a:effectRef idx="2">
-            <a:schemeClr val="accent1"/>
-          </a:effectRef>
-          <a:fontRef idx="minor">
-            <a:schemeClr val="lt1"/>
-          </a:fontRef>
-        </p:style>
-        <p:txBody>
-          <a:bodyPr rtlCol="0" anchor="ctr" wrap="square"/>
-          <a:lstStyle/>
-          <a:p>
-            <a:pPr algn="ctr"/>
-          </a:p>
-        </p:txBody>
-      </p:sp>
-      <p:sp>
-        <p:nvSpPr>
-          <p:cNvPr id="22" name="TextBox 21"/>
-          <p:cNvSpPr txBox="1"/>
-          <p:nvPr/>
-        </p:nvSpPr>
-        <p:spPr>
-          <a:xfrm>
-            <a:off x="4838700" y="3924300"/>
-            <a:ext cx="5334000" cy="628650"/>
-          </a:xfrm>
-          <a:prstGeom prst="rect">
-            <a:avLst/>
-          </a:prstGeom>
-          <a:noFill/>
-        </p:spPr>
-        <p:txBody>
-          <a:bodyPr wrap="square" lIns="0" rIns="0" tIns="0" bIns="0" anchor="ctr">
-            <a:spAutoFit/>
-          </a:bodyPr>
-          <a:lstStyle/>
-          <a:p>
-            <a:pPr algn="l">
-              <a:lnSpc>
-                <a:spcPct val="130000"/>
-              </a:lnSpc>
-            </a:pPr>
-            <a:r>
-              <a:rPr sz="1575" b="0">
-                <a:solidFill>
-                  <a:srgbClr val="1A2230"/>
-                </a:solidFill>
-                <a:latin typeface="Microsoft YaHei"/>
-              </a:rPr>
-              <a:t>参考实现行为驱动（对照）</a:t>
-            </a:r>
-          </a:p>
-        </p:txBody>
-      </p:sp>
-      <p:sp>
-        <p:nvSpPr>
-          <p:cNvPr id="23" name="TextBox 22"/>
-          <p:cNvSpPr txBox="1"/>
-          <p:nvPr/>
-        </p:nvSpPr>
-        <p:spPr>
-          <a:xfrm>
-            <a:off x="10287000" y="3924300"/>
-            <a:ext cx="1333500" cy="628650"/>
-          </a:xfrm>
-          <a:prstGeom prst="rect">
-            <a:avLst/>
-          </a:prstGeom>
-          <a:noFill/>
-        </p:spPr>
-        <p:txBody>
-          <a:bodyPr wrap="square" lIns="0" rIns="0" tIns="0" bIns="0" anchor="ctr">
-            <a:spAutoFit/>
-          </a:bodyPr>
-          <a:lstStyle/>
-          <a:p>
-            <a:pPr algn="r">
-              <a:lnSpc>
-                <a:spcPct val="130000"/>
-              </a:lnSpc>
-            </a:pPr>
-            <a:r>
-              <a:rPr sz="2250" b="1">
-                <a:solidFill>
-                  <a:srgbClr val="1E4FA8"/>
-                </a:solidFill>
-                <a:latin typeface="Microsoft YaHei"/>
-              </a:rPr>
-              <a:t>18</a:t>
-            </a:r>
-          </a:p>
-        </p:txBody>
-      </p:sp>
-      <p:sp>
-        <p:nvSpPr>
-          <p:cNvPr id="24" name="Rounded Rectangle 23"/>
-          <p:cNvSpPr/>
-          <p:nvPr/>
-        </p:nvSpPr>
-        <p:spPr>
-          <a:xfrm>
-            <a:off x="4610100" y="4648200"/>
-            <a:ext cx="7200900" cy="628650"/>
-          </a:xfrm>
-          <a:prstGeom prst="roundRect">
-            <a:avLst>
-              <a:gd name="adj" fmla="val 15151"/>
-            </a:avLst>
-          </a:prstGeom>
-          <a:solidFill>
-            <a:srgbClr val="F7F9FC"/>
-          </a:solidFill>
-          <a:ln w="12700">
-            <a:solidFill>
-              <a:srgbClr val="D6DCE5"/>
-            </a:solidFill>
-          </a:ln>
-          <a:effectLst/>
-        </p:spPr>
-        <p:style>
-          <a:lnRef idx="1">
-            <a:schemeClr val="accent1"/>
-          </a:lnRef>
-          <a:fillRef idx="3">
-            <a:schemeClr val="accent1"/>
-          </a:fillRef>
-          <a:effectRef idx="2">
-            <a:schemeClr val="accent1"/>
-          </a:effectRef>
-          <a:fontRef idx="minor">
-            <a:schemeClr val="lt1"/>
-          </a:fontRef>
-        </p:style>
-        <p:txBody>
-          <a:bodyPr rtlCol="0" anchor="ctr" wrap="square"/>
-          <a:lstStyle/>
-          <a:p>
-            <a:pPr algn="ctr"/>
-          </a:p>
-        </p:txBody>
-      </p:sp>
-      <p:sp>
-        <p:nvSpPr>
-          <p:cNvPr id="25" name="TextBox 24"/>
-          <p:cNvSpPr txBox="1"/>
-          <p:nvPr/>
-        </p:nvSpPr>
-        <p:spPr>
-          <a:xfrm>
-            <a:off x="4838700" y="4648200"/>
-            <a:ext cx="5334000" cy="628650"/>
-          </a:xfrm>
-          <a:prstGeom prst="rect">
-            <a:avLst/>
-          </a:prstGeom>
-          <a:noFill/>
-        </p:spPr>
-        <p:txBody>
-          <a:bodyPr wrap="square" lIns="0" rIns="0" tIns="0" bIns="0" anchor="ctr">
-            <a:spAutoFit/>
-          </a:bodyPr>
-          <a:lstStyle/>
-          <a:p>
-            <a:pPr algn="l">
-              <a:lnSpc>
-                <a:spcPct val="130000"/>
-              </a:lnSpc>
-            </a:pPr>
-            <a:r>
-              <a:rPr sz="1575" b="0">
-                <a:solidFill>
-                  <a:srgbClr val="1A2230"/>
-                </a:solidFill>
-                <a:latin typeface="Microsoft YaHei"/>
-              </a:rPr>
-              <a:t>参考实现接口冒烟（对照）</a:t>
-            </a:r>
-          </a:p>
-        </p:txBody>
-      </p:sp>
-      <p:sp>
-        <p:nvSpPr>
-          <p:cNvPr id="26" name="TextBox 25"/>
-          <p:cNvSpPr txBox="1"/>
-          <p:nvPr/>
-        </p:nvSpPr>
-        <p:spPr>
-          <a:xfrm>
-            <a:off x="10287000" y="4648200"/>
-            <a:ext cx="1333500" cy="628650"/>
-          </a:xfrm>
-          <a:prstGeom prst="rect">
-            <a:avLst/>
-          </a:prstGeom>
-          <a:noFill/>
-        </p:spPr>
-        <p:txBody>
-          <a:bodyPr wrap="square" lIns="0" rIns="0" tIns="0" bIns="0" anchor="ctr">
-            <a:spAutoFit/>
-          </a:bodyPr>
-          <a:lstStyle/>
-          <a:p>
-            <a:pPr algn="r">
-              <a:lnSpc>
-                <a:spcPct val="130000"/>
-              </a:lnSpc>
-            </a:pPr>
-            <a:r>
-              <a:rPr sz="2250" b="1">
-                <a:solidFill>
-                  <a:srgbClr val="1E4FA8"/>
-                </a:solidFill>
-                <a:latin typeface="Microsoft YaHei"/>
-              </a:rPr>
-              <a:t>18</a:t>
-            </a:r>
-          </a:p>
-        </p:txBody>
-      </p:sp>
-      <p:sp>
-        <p:nvSpPr>
-          <p:cNvPr id="27" name="Rounded Rectangle 26"/>
-          <p:cNvSpPr/>
-          <p:nvPr/>
-        </p:nvSpPr>
-        <p:spPr>
-          <a:xfrm>
-            <a:off x="381000" y="5505450"/>
-            <a:ext cx="11430000" cy="590550"/>
-          </a:xfrm>
-          <a:prstGeom prst="roundRect">
-            <a:avLst>
-              <a:gd name="adj" fmla="val 12903"/>
-            </a:avLst>
-          </a:prstGeom>
-          <a:solidFill>
-            <a:srgbClr val="E8EFF8"/>
-          </a:solidFill>
-          <a:ln>
-            <a:noFill/>
-          </a:ln>
-          <a:effectLst/>
-        </p:spPr>
-        <p:style>
-          <a:lnRef idx="1">
-            <a:schemeClr val="accent1"/>
-          </a:lnRef>
-          <a:fillRef idx="3">
-            <a:schemeClr val="accent1"/>
-          </a:fillRef>
-          <a:effectRef idx="2">
-            <a:schemeClr val="accent1"/>
-          </a:effectRef>
-          <a:fontRef idx="minor">
-            <a:schemeClr val="lt1"/>
-          </a:fontRef>
-        </p:style>
-        <p:txBody>
-          <a:bodyPr rtlCol="0" anchor="ctr" wrap="square"/>
-          <a:lstStyle/>
-          <a:p>
-            <a:pPr algn="ctr"/>
-          </a:p>
-        </p:txBody>
-      </p:sp>
-      <p:sp>
-        <p:nvSpPr>
-          <p:cNvPr id="28" name="Rectangle 27"/>
-          <p:cNvSpPr/>
-          <p:nvPr/>
-        </p:nvSpPr>
-        <p:spPr>
-          <a:xfrm>
-            <a:off x="381000" y="5505450"/>
-            <a:ext cx="38100" cy="590550"/>
-          </a:xfrm>
-          <a:prstGeom prst="rect">
-            <a:avLst/>
-          </a:prstGeom>
-          <a:solidFill>
-            <a:srgbClr val="1E4FA8"/>
-          </a:solidFill>
-          <a:ln>
-            <a:noFill/>
-          </a:ln>
-          <a:effectLst/>
-        </p:spPr>
-        <p:style>
-          <a:lnRef idx="1">
-            <a:schemeClr val="accent1"/>
-          </a:lnRef>
-          <a:fillRef idx="3">
-            <a:schemeClr val="accent1"/>
-          </a:fillRef>
-          <a:effectRef idx="2">
-            <a:schemeClr val="accent1"/>
-          </a:effectRef>
-          <a:fontRef idx="minor">
-            <a:schemeClr val="lt1"/>
-          </a:fontRef>
-        </p:style>
-        <p:txBody>
-          <a:bodyPr rtlCol="0" anchor="ctr" wrap="square"/>
-          <a:lstStyle/>
-          <a:p>
-            <a:pPr algn="ctr"/>
-          </a:p>
-        </p:txBody>
-      </p:sp>
-      <p:sp>
-        <p:nvSpPr>
-          <p:cNvPr id="29" name="TextBox 28"/>
-          <p:cNvSpPr txBox="1"/>
-          <p:nvPr/>
-        </p:nvSpPr>
-        <p:spPr>
-          <a:xfrm>
-            <a:off x="533400" y="5505450"/>
-            <a:ext cx="914400" cy="590550"/>
-          </a:xfrm>
-          <a:prstGeom prst="rect">
-            <a:avLst/>
-          </a:prstGeom>
-          <a:noFill/>
-        </p:spPr>
-        <p:txBody>
-          <a:bodyPr wrap="square" lIns="0" rIns="0" tIns="0" bIns="0" anchor="ctr">
-            <a:spAutoFit/>
-          </a:bodyPr>
-          <a:lstStyle/>
-          <a:p>
-            <a:pPr algn="l">
-              <a:lnSpc>
-                <a:spcPct val="130000"/>
-              </a:lnSpc>
-            </a:pPr>
-            <a:r>
-              <a:rPr sz="1500" b="1">
-                <a:solidFill>
-                  <a:srgbClr val="1E4FA8"/>
-                </a:solidFill>
-                <a:latin typeface="Microsoft YaHei"/>
-              </a:rPr>
-              <a:t>判断</a:t>
-            </a:r>
-          </a:p>
-        </p:txBody>
-      </p:sp>
-      <p:sp>
-        <p:nvSpPr>
-          <p:cNvPr id="30" name="TextBox 29"/>
-          <p:cNvSpPr txBox="1"/>
-          <p:nvPr/>
-        </p:nvSpPr>
-        <p:spPr>
-          <a:xfrm>
-            <a:off x="1504950" y="5505450"/>
-            <a:ext cx="10134600" cy="590550"/>
-          </a:xfrm>
-          <a:prstGeom prst="rect">
-            <a:avLst/>
-          </a:prstGeom>
-          <a:noFill/>
-        </p:spPr>
-        <p:txBody>
-          <a:bodyPr wrap="square" lIns="0" rIns="0" tIns="0" bIns="0" anchor="ctr">
-            <a:spAutoFit/>
-          </a:bodyPr>
-          <a:lstStyle/>
-          <a:p>
-            <a:pPr algn="l">
-              <a:lnSpc>
-                <a:spcPct val="135000"/>
-              </a:lnSpc>
-            </a:pPr>
-            <a:r>
-              <a:rPr sz="1500" b="0">
-                <a:solidFill>
-                  <a:srgbClr val="1A2230"/>
-                </a:solidFill>
-                <a:latin typeface="Microsoft YaHei"/>
-              </a:rPr>
-              <a:t>测试要能挡住"点了没反应"这类问题，所以既做静态检查，也做真实浏览器点击</a:t>
-            </a:r>
-          </a:p>
-        </p:txBody>
-      </p:sp>
-      <p:sp>
-        <p:nvSpPr>
-          <p:cNvPr id="31" name="Rectangle 30"/>
-          <p:cNvSpPr/>
-          <p:nvPr/>
-        </p:nvSpPr>
-        <p:spPr>
-          <a:xfrm>
-            <a:off x="381000" y="6286500"/>
-            <a:ext cx="11430000" cy="9525"/>
-          </a:xfrm>
-          <a:prstGeom prst="rect">
-            <a:avLst/>
-          </a:prstGeom>
-          <a:solidFill>
-            <a:srgbClr val="E5E7EB"/>
-          </a:solidFill>
-          <a:ln>
-            <a:noFill/>
-          </a:ln>
-          <a:effectLst/>
-        </p:spPr>
-        <p:style>
-          <a:lnRef idx="1">
-            <a:schemeClr val="accent1"/>
-          </a:lnRef>
-          <a:fillRef idx="3">
-            <a:schemeClr val="accent1"/>
-          </a:fillRef>
-          <a:effectRef idx="2">
-            <a:schemeClr val="accent1"/>
-          </a:effectRef>
-          <a:fontRef idx="minor">
-            <a:schemeClr val="lt1"/>
-          </a:fontRef>
-        </p:style>
-        <p:txBody>
-          <a:bodyPr rtlCol="0" anchor="ctr" wrap="square"/>
-          <a:lstStyle/>
-          <a:p>
-            <a:pPr algn="ctr"/>
-          </a:p>
-        </p:txBody>
-      </p:sp>
-      <p:sp>
-        <p:nvSpPr>
-          <p:cNvPr id="32" name="TextBox 31"/>
-          <p:cNvSpPr txBox="1"/>
-          <p:nvPr/>
-        </p:nvSpPr>
-        <p:spPr>
-          <a:xfrm>
-            <a:off x="381000" y="6324600"/>
-            <a:ext cx="8763000" cy="285750"/>
-          </a:xfrm>
-          <a:prstGeom prst="rect">
-            <a:avLst/>
-          </a:prstGeom>
-          <a:noFill/>
-        </p:spPr>
-        <p:txBody>
-          <a:bodyPr wrap="square" lIns="0" rIns="0" tIns="0" bIns="0" anchor="ctr">
-            <a:spAutoFit/>
-          </a:bodyPr>
-          <a:lstStyle/>
-          <a:p>
-            <a:pPr algn="l">
-              <a:lnSpc>
-                <a:spcPct val="130000"/>
-              </a:lnSpc>
-            </a:pPr>
-            <a:r>
-              <a:rPr sz="1125" b="0">
-                <a:solidFill>
-                  <a:srgbClr val="8B97A8"/>
-                </a:solidFill>
-                <a:latin typeface="Microsoft YaHei"/>
-              </a:rPr>
-              <a:t>来源：五份测试报告文件（verify/ 与 app/ 目录）</a:t>
-            </a:r>
-          </a:p>
-        </p:txBody>
-      </p:sp>
-      <p:sp>
-        <p:nvSpPr>
-          <p:cNvPr id="33" name="TextBox 32"/>
-          <p:cNvSpPr txBox="1"/>
-          <p:nvPr/>
-        </p:nvSpPr>
-        <p:spPr>
-          <a:xfrm>
-            <a:off x="9525000" y="6324600"/>
-            <a:ext cx="2286000" cy="285750"/>
-          </a:xfrm>
-          <a:prstGeom prst="rect">
-            <a:avLst/>
-          </a:prstGeom>
-          <a:noFill/>
-        </p:spPr>
-        <p:txBody>
-          <a:bodyPr wrap="square" lIns="0" rIns="0" tIns="0" bIns="0" anchor="ctr">
-            <a:spAutoFit/>
-          </a:bodyPr>
-          <a:lstStyle/>
-          <a:p>
-            <a:pPr algn="r">
-              <a:lnSpc>
-                <a:spcPct val="130000"/>
-              </a:lnSpc>
-            </a:pPr>
-            <a:r>
-              <a:rPr sz="1200" b="1">
-                <a:solidFill>
-                  <a:srgbClr val="1E4FA8"/>
-                </a:solidFill>
-                <a:latin typeface="Microsoft YaHei"/>
-              </a:rPr>
-              <a:t>18 / 22</a:t>
+              <a:t>17 / 23</a:t>
             </a:r>
           </a:p>
         </p:txBody>
@@ -15228,7 +15122,7 @@
                 </a:solidFill>
                 <a:latin typeface="Microsoft YaHei"/>
               </a:rPr>
-              <a:t>15 个缺陷：把踩过的坑讲清楚</a:t>
+              <a:t>200 项检查，覆盖六个层次</a:t>
             </a:r>
           </a:p>
         </p:txBody>
@@ -15281,11 +15175,206 @@
         <p:spPr>
           <a:xfrm>
             <a:off x="381000" y="1028700"/>
-            <a:ext cx="2381250" cy="1104900"/>
+            <a:ext cx="4000500" cy="4305300"/>
           </a:xfrm>
           <a:prstGeom prst="roundRect">
             <a:avLst>
-              <a:gd name="adj" fmla="val 8620"/>
+              <a:gd name="adj" fmla="val 2857"/>
+            </a:avLst>
+          </a:prstGeom>
+          <a:solidFill>
+            <a:srgbClr val="E8EFF8"/>
+          </a:solidFill>
+          <a:ln>
+            <a:noFill/>
+          </a:ln>
+          <a:effectLst/>
+        </p:spPr>
+        <p:style>
+          <a:lnRef idx="1">
+            <a:schemeClr val="accent1"/>
+          </a:lnRef>
+          <a:fillRef idx="3">
+            <a:schemeClr val="accent1"/>
+          </a:fillRef>
+          <a:effectRef idx="2">
+            <a:schemeClr val="accent1"/>
+          </a:effectRef>
+          <a:fontRef idx="minor">
+            <a:schemeClr val="lt1"/>
+          </a:fontRef>
+        </p:style>
+        <p:txBody>
+          <a:bodyPr rtlCol="0" anchor="ctr" wrap="square"/>
+          <a:lstStyle/>
+          <a:p>
+            <a:pPr algn="ctr"/>
+          </a:p>
+        </p:txBody>
+      </p:sp>
+      <p:sp>
+        <p:nvSpPr>
+          <p:cNvPr id="6" name="TextBox 5"/>
+          <p:cNvSpPr txBox="1"/>
+          <p:nvPr/>
+        </p:nvSpPr>
+        <p:spPr>
+          <a:xfrm>
+            <a:off x="571500" y="1390650"/>
+            <a:ext cx="3619500" cy="1447800"/>
+          </a:xfrm>
+          <a:prstGeom prst="rect">
+            <a:avLst/>
+          </a:prstGeom>
+          <a:noFill/>
+        </p:spPr>
+        <p:txBody>
+          <a:bodyPr wrap="square" lIns="0" rIns="0" tIns="0" bIns="0" anchor="ctr">
+            <a:spAutoFit/>
+          </a:bodyPr>
+          <a:lstStyle/>
+          <a:p>
+            <a:pPr algn="l">
+              <a:lnSpc>
+                <a:spcPct val="100000"/>
+              </a:lnSpc>
+            </a:pPr>
+            <a:r>
+              <a:rPr sz="8700" b="1">
+                <a:solidFill>
+                  <a:srgbClr val="0E3F8C"/>
+                </a:solidFill>
+                <a:latin typeface="Microsoft YaHei"/>
+              </a:rPr>
+              <a:t>200</a:t>
+            </a:r>
+          </a:p>
+        </p:txBody>
+      </p:sp>
+      <p:sp>
+        <p:nvSpPr>
+          <p:cNvPr id="7" name="TextBox 6"/>
+          <p:cNvSpPr txBox="1"/>
+          <p:nvPr/>
+        </p:nvSpPr>
+        <p:spPr>
+          <a:xfrm>
+            <a:off x="571500" y="2914650"/>
+            <a:ext cx="3619500" cy="381000"/>
+          </a:xfrm>
+          <a:prstGeom prst="rect">
+            <a:avLst/>
+          </a:prstGeom>
+          <a:noFill/>
+        </p:spPr>
+        <p:txBody>
+          <a:bodyPr wrap="square" lIns="0" rIns="0" tIns="0" bIns="0" anchor="ctr">
+            <a:spAutoFit/>
+          </a:bodyPr>
+          <a:lstStyle/>
+          <a:p>
+            <a:pPr algn="l">
+              <a:lnSpc>
+                <a:spcPct val="130000"/>
+              </a:lnSpc>
+            </a:pPr>
+            <a:r>
+              <a:rPr sz="1650" b="0">
+                <a:solidFill>
+                  <a:srgbClr val="1A2230"/>
+                </a:solidFill>
+                <a:latin typeface="Microsoft YaHei"/>
+              </a:rPr>
+              <a:t>项自动化检查全部通过</a:t>
+            </a:r>
+          </a:p>
+        </p:txBody>
+      </p:sp>
+      <p:sp>
+        <p:nvSpPr>
+          <p:cNvPr id="8" name="TextBox 7"/>
+          <p:cNvSpPr txBox="1"/>
+          <p:nvPr/>
+        </p:nvSpPr>
+        <p:spPr>
+          <a:xfrm>
+            <a:off x="571500" y="3390900"/>
+            <a:ext cx="3619500" cy="1714500"/>
+          </a:xfrm>
+          <a:prstGeom prst="rect">
+            <a:avLst/>
+          </a:prstGeom>
+          <a:noFill/>
+        </p:spPr>
+        <p:txBody>
+          <a:bodyPr wrap="square" lIns="0" rIns="0" tIns="0" bIns="0" anchor="t">
+            <a:spAutoFit/>
+          </a:bodyPr>
+          <a:lstStyle/>
+          <a:p>
+            <a:pPr algn="l">
+              <a:lnSpc>
+                <a:spcPct val="160000"/>
+              </a:lnSpc>
+            </a:pPr>
+            <a:r>
+              <a:rPr sz="1425" b="0">
+                <a:solidFill>
+                  <a:srgbClr val="4A5568"/>
+                </a:solidFill>
+                <a:latin typeface="Microsoft YaHei"/>
+              </a:rPr>
+              <a:t>从单元测试到真实浏览器点击，</a:t>
+            </a:r>
+          </a:p>
+          <a:p>
+            <a:pPr algn="l">
+              <a:lnSpc>
+                <a:spcPct val="160000"/>
+              </a:lnSpc>
+            </a:pPr>
+            <a:r>
+              <a:rPr sz="1425" b="0">
+                <a:solidFill>
+                  <a:srgbClr val="4A5568"/>
+                </a:solidFill>
+                <a:latin typeface="Microsoft YaHei"/>
+              </a:rPr>
+              <a:t>每一层都有可复现的执行命令与</a:t>
+            </a:r>
+          </a:p>
+          <a:p>
+            <a:pPr algn="l">
+              <a:lnSpc>
+                <a:spcPct val="160000"/>
+              </a:lnSpc>
+            </a:pPr>
+            <a:r>
+              <a:rPr sz="1425" b="0">
+                <a:solidFill>
+                  <a:srgbClr val="4A5568"/>
+                </a:solidFill>
+                <a:latin typeface="Microsoft YaHei"/>
+              </a:rPr>
+              <a:t>报告文件，答辩现场可逐条演示。</a:t>
+            </a:r>
+          </a:p>
+        </p:txBody>
+      </p:sp>
+      <p:sp>
+        <p:nvSpPr>
+          <p:cNvPr id="9" name="Rounded Rectangle 8"/>
+          <p:cNvSpPr/>
+          <p:nvPr/>
+        </p:nvSpPr>
+        <p:spPr>
+          <a:xfrm>
+            <a:off x="4610100" y="1028700"/>
+            <a:ext cx="7200900" cy="628650"/>
+          </a:xfrm>
+          <a:prstGeom prst="roundRect">
+            <a:avLst>
+              <a:gd name="adj" fmla="val 15151"/>
             </a:avLst>
           </a:prstGeom>
           <a:solidFill>
@@ -15322,14 +15411,14 @@
       </p:sp>
       <p:sp>
         <p:nvSpPr>
-          <p:cNvPr id="6" name="TextBox 5"/>
-          <p:cNvSpPr txBox="1"/>
-          <p:nvPr/>
-        </p:nvSpPr>
-        <p:spPr>
-          <a:xfrm>
-            <a:off x="590550" y="1162050"/>
-            <a:ext cx="1905000" cy="571500"/>
+          <p:cNvPr id="10" name="TextBox 9"/>
+          <p:cNvSpPr txBox="1"/>
+          <p:nvPr/>
+        </p:nvSpPr>
+        <p:spPr>
+          <a:xfrm>
+            <a:off x="4838700" y="1028700"/>
+            <a:ext cx="5334000" cy="628650"/>
           </a:xfrm>
           <a:prstGeom prst="rect">
             <a:avLst/>
@@ -15348,27 +15437,27 @@
               </a:lnSpc>
             </a:pPr>
             <a:r>
-              <a:rPr sz="3600" b="1">
-                <a:solidFill>
-                  <a:srgbClr val="D9534F"/>
-                </a:solidFill>
-                <a:latin typeface="Microsoft YaHei"/>
-              </a:rPr>
-              <a:t>2</a:t>
-            </a:r>
-          </a:p>
-        </p:txBody>
-      </p:sp>
-      <p:sp>
-        <p:nvSpPr>
-          <p:cNvPr id="7" name="TextBox 6"/>
-          <p:cNvSpPr txBox="1"/>
-          <p:nvPr/>
-        </p:nvSpPr>
-        <p:spPr>
-          <a:xfrm>
-            <a:off x="590550" y="1733550"/>
-            <a:ext cx="1905000" cy="285750"/>
+              <a:rPr sz="1575" b="0">
+                <a:solidFill>
+                  <a:srgbClr val="1A2230"/>
+                </a:solidFill>
+                <a:latin typeface="Microsoft YaHei"/>
+              </a:rPr>
+              <a:t>Java 单元 · 架构守卫 · 行为驱动</a:t>
+            </a:r>
+          </a:p>
+        </p:txBody>
+      </p:sp>
+      <p:sp>
+        <p:nvSpPr>
+          <p:cNvPr id="11" name="TextBox 10"/>
+          <p:cNvSpPr txBox="1"/>
+          <p:nvPr/>
+        </p:nvSpPr>
+        <p:spPr>
+          <a:xfrm>
+            <a:off x="10287000" y="1028700"/>
+            <a:ext cx="1333500" cy="628650"/>
           </a:xfrm>
           <a:prstGeom prst="rect">
             <a:avLst/>
@@ -15381,37 +15470,37 @@
           </a:bodyPr>
           <a:lstStyle/>
           <a:p>
-            <a:pPr algn="l">
+            <a:pPr algn="r">
               <a:lnSpc>
                 <a:spcPct val="130000"/>
               </a:lnSpc>
             </a:pPr>
             <a:r>
-              <a:rPr sz="1500" b="0">
-                <a:solidFill>
-                  <a:srgbClr val="1A2230"/>
-                </a:solidFill>
-                <a:latin typeface="Microsoft YaHei"/>
-              </a:rPr>
-              <a:t>严重缺陷</a:t>
-            </a:r>
-          </a:p>
-        </p:txBody>
-      </p:sp>
-      <p:sp>
-        <p:nvSpPr>
-          <p:cNvPr id="8" name="Rounded Rectangle 7"/>
+              <a:rPr sz="2250" b="1">
+                <a:solidFill>
+                  <a:srgbClr val="1E4FA8"/>
+                </a:solidFill>
+                <a:latin typeface="Microsoft YaHei"/>
+              </a:rPr>
+              <a:t>70</a:t>
+            </a:r>
+          </a:p>
+        </p:txBody>
+      </p:sp>
+      <p:sp>
+        <p:nvSpPr>
+          <p:cNvPr id="12" name="Rounded Rectangle 11"/>
           <p:cNvSpPr/>
           <p:nvPr/>
         </p:nvSpPr>
         <p:spPr>
           <a:xfrm>
-            <a:off x="2914650" y="1028700"/>
-            <a:ext cx="2381250" cy="1104900"/>
+            <a:off x="4610100" y="1752600"/>
+            <a:ext cx="7200900" cy="628650"/>
           </a:xfrm>
           <a:prstGeom prst="roundRect">
             <a:avLst>
-              <a:gd name="adj" fmla="val 8620"/>
+              <a:gd name="adj" fmla="val 15151"/>
             </a:avLst>
           </a:prstGeom>
           <a:solidFill>
@@ -15448,14 +15537,14 @@
       </p:sp>
       <p:sp>
         <p:nvSpPr>
-          <p:cNvPr id="9" name="TextBox 8"/>
-          <p:cNvSpPr txBox="1"/>
-          <p:nvPr/>
-        </p:nvSpPr>
-        <p:spPr>
-          <a:xfrm>
-            <a:off x="3124200" y="1162050"/>
-            <a:ext cx="1905000" cy="571500"/>
+          <p:cNvPr id="13" name="TextBox 12"/>
+          <p:cNvSpPr txBox="1"/>
+          <p:nvPr/>
+        </p:nvSpPr>
+        <p:spPr>
+          <a:xfrm>
+            <a:off x="4838700" y="1752600"/>
+            <a:ext cx="5334000" cy="628650"/>
           </a:xfrm>
           <a:prstGeom prst="rect">
             <a:avLst/>
@@ -15474,70 +15563,70 @@
               </a:lnSpc>
             </a:pPr>
             <a:r>
-              <a:rPr sz="3600" b="1">
+              <a:rPr sz="1575" b="0">
+                <a:solidFill>
+                  <a:srgbClr val="1A2230"/>
+                </a:solidFill>
+                <a:latin typeface="Microsoft YaHei"/>
+              </a:rPr>
+              <a:t>集成测试（登录 / 权限 / 全流程）</a:t>
+            </a:r>
+          </a:p>
+        </p:txBody>
+      </p:sp>
+      <p:sp>
+        <p:nvSpPr>
+          <p:cNvPr id="14" name="TextBox 13"/>
+          <p:cNvSpPr txBox="1"/>
+          <p:nvPr/>
+        </p:nvSpPr>
+        <p:spPr>
+          <a:xfrm>
+            <a:off x="10287000" y="1752600"/>
+            <a:ext cx="1333500" cy="628650"/>
+          </a:xfrm>
+          <a:prstGeom prst="rect">
+            <a:avLst/>
+          </a:prstGeom>
+          <a:noFill/>
+        </p:spPr>
+        <p:txBody>
+          <a:bodyPr wrap="square" lIns="0" rIns="0" tIns="0" bIns="0" anchor="ctr">
+            <a:spAutoFit/>
+          </a:bodyPr>
+          <a:lstStyle/>
+          <a:p>
+            <a:pPr algn="r">
+              <a:lnSpc>
+                <a:spcPct val="130000"/>
+              </a:lnSpc>
+            </a:pPr>
+            <a:r>
+              <a:rPr sz="2250" b="1">
                 <a:solidFill>
                   <a:srgbClr val="1E4FA8"/>
                 </a:solidFill>
                 <a:latin typeface="Microsoft YaHei"/>
               </a:rPr>
-              <a:t>9</a:t>
-            </a:r>
-          </a:p>
-        </p:txBody>
-      </p:sp>
-      <p:sp>
-        <p:nvSpPr>
-          <p:cNvPr id="10" name="TextBox 9"/>
-          <p:cNvSpPr txBox="1"/>
-          <p:nvPr/>
-        </p:nvSpPr>
-        <p:spPr>
-          <a:xfrm>
-            <a:off x="3124200" y="1733550"/>
-            <a:ext cx="1905000" cy="285750"/>
-          </a:xfrm>
-          <a:prstGeom prst="rect">
-            <a:avLst/>
-          </a:prstGeom>
-          <a:noFill/>
-        </p:spPr>
-        <p:txBody>
-          <a:bodyPr wrap="square" lIns="0" rIns="0" tIns="0" bIns="0" anchor="ctr">
-            <a:spAutoFit/>
-          </a:bodyPr>
-          <a:lstStyle/>
-          <a:p>
-            <a:pPr algn="l">
-              <a:lnSpc>
-                <a:spcPct val="130000"/>
-              </a:lnSpc>
-            </a:pPr>
-            <a:r>
-              <a:rPr sz="1500" b="0">
-                <a:solidFill>
-                  <a:srgbClr val="1A2230"/>
-                </a:solidFill>
-                <a:latin typeface="Microsoft YaHei"/>
-              </a:rPr>
-              <a:t>中等缺陷</a:t>
-            </a:r>
-          </a:p>
-        </p:txBody>
-      </p:sp>
-      <p:sp>
-        <p:nvSpPr>
-          <p:cNvPr id="11" name="Rounded Rectangle 10"/>
+              <a:t>54</a:t>
+            </a:r>
+          </a:p>
+        </p:txBody>
+      </p:sp>
+      <p:sp>
+        <p:nvSpPr>
+          <p:cNvPr id="15" name="Rounded Rectangle 14"/>
           <p:cNvSpPr/>
           <p:nvPr/>
         </p:nvSpPr>
         <p:spPr>
           <a:xfrm>
-            <a:off x="5448300" y="1028700"/>
-            <a:ext cx="2381250" cy="1104900"/>
+            <a:off x="4610100" y="2476500"/>
+            <a:ext cx="7200900" cy="628650"/>
           </a:xfrm>
           <a:prstGeom prst="roundRect">
             <a:avLst>
-              <a:gd name="adj" fmla="val 8620"/>
+              <a:gd name="adj" fmla="val 15151"/>
             </a:avLst>
           </a:prstGeom>
           <a:solidFill>
@@ -15574,14 +15663,14 @@
       </p:sp>
       <p:sp>
         <p:nvSpPr>
-          <p:cNvPr id="12" name="TextBox 11"/>
-          <p:cNvSpPr txBox="1"/>
-          <p:nvPr/>
-        </p:nvSpPr>
-        <p:spPr>
-          <a:xfrm>
-            <a:off x="5657850" y="1162050"/>
-            <a:ext cx="1905000" cy="571500"/>
+          <p:cNvPr id="16" name="TextBox 15"/>
+          <p:cNvSpPr txBox="1"/>
+          <p:nvPr/>
+        </p:nvSpPr>
+        <p:spPr>
+          <a:xfrm>
+            <a:off x="4838700" y="2476500"/>
+            <a:ext cx="5334000" cy="628650"/>
           </a:xfrm>
           <a:prstGeom prst="rect">
             <a:avLst/>
@@ -15600,27 +15689,27 @@
               </a:lnSpc>
             </a:pPr>
             <a:r>
-              <a:rPr sz="3600" b="1">
-                <a:solidFill>
-                  <a:srgbClr val="4A5568"/>
-                </a:solidFill>
-                <a:latin typeface="Microsoft YaHei"/>
-              </a:rPr>
-              <a:t>4</a:t>
-            </a:r>
-          </a:p>
-        </p:txBody>
-      </p:sp>
-      <p:sp>
-        <p:nvSpPr>
-          <p:cNvPr id="13" name="TextBox 12"/>
-          <p:cNvSpPr txBox="1"/>
-          <p:nvPr/>
-        </p:nvSpPr>
-        <p:spPr>
-          <a:xfrm>
-            <a:off x="5657850" y="1733550"/>
-            <a:ext cx="1905000" cy="285750"/>
+              <a:rPr sz="1575" b="0">
+                <a:solidFill>
+                  <a:srgbClr val="1A2230"/>
+                </a:solidFill>
+                <a:latin typeface="Microsoft YaHei"/>
+              </a:rPr>
+              <a:t>前端静态检查（防按钮无响应）</a:t>
+            </a:r>
+          </a:p>
+        </p:txBody>
+      </p:sp>
+      <p:sp>
+        <p:nvSpPr>
+          <p:cNvPr id="17" name="TextBox 16"/>
+          <p:cNvSpPr txBox="1"/>
+          <p:nvPr/>
+        </p:nvSpPr>
+        <p:spPr>
+          <a:xfrm>
+            <a:off x="10287000" y="2476500"/>
+            <a:ext cx="1333500" cy="628650"/>
           </a:xfrm>
           <a:prstGeom prst="rect">
             <a:avLst/>
@@ -15633,96 +15722,41 @@
           </a:bodyPr>
           <a:lstStyle/>
           <a:p>
-            <a:pPr algn="l">
+            <a:pPr algn="r">
               <a:lnSpc>
                 <a:spcPct val="130000"/>
               </a:lnSpc>
             </a:pPr>
             <a:r>
-              <a:rPr sz="1500" b="0">
-                <a:solidFill>
-                  <a:srgbClr val="1A2230"/>
-                </a:solidFill>
-                <a:latin typeface="Microsoft YaHei"/>
-              </a:rPr>
-              <a:t>轻微缺陷</a:t>
-            </a:r>
-          </a:p>
-        </p:txBody>
-      </p:sp>
-      <p:sp>
-        <p:nvSpPr>
-          <p:cNvPr id="14" name="TextBox 13"/>
-          <p:cNvSpPr txBox="1"/>
-          <p:nvPr/>
-        </p:nvSpPr>
-        <p:spPr>
-          <a:xfrm>
-            <a:off x="7981950" y="1028700"/>
-            <a:ext cx="3829050" cy="1104900"/>
-          </a:xfrm>
-          <a:prstGeom prst="rect">
-            <a:avLst/>
-          </a:prstGeom>
-          <a:noFill/>
-        </p:spPr>
-        <p:txBody>
-          <a:bodyPr wrap="square" lIns="0" rIns="0" tIns="0" bIns="0" anchor="t">
-            <a:spAutoFit/>
-          </a:bodyPr>
-          <a:lstStyle/>
-          <a:p>
-            <a:pPr algn="l">
-              <a:lnSpc>
-                <a:spcPct val="150000"/>
-              </a:lnSpc>
-            </a:pPr>
-            <a:r>
-              <a:rPr sz="1650" b="1">
-                <a:solidFill>
-                  <a:srgbClr val="0E3F8C"/>
-                </a:solidFill>
-                <a:latin typeface="Microsoft YaHei"/>
-              </a:rPr>
-              <a:t>全部已修复</a:t>
-            </a:r>
-          </a:p>
-          <a:p>
-            <a:pPr algn="l">
-              <a:lnSpc>
-                <a:spcPct val="150000"/>
-              </a:lnSpc>
-            </a:pPr>
-            <a:r>
-              <a:rPr sz="1650" b="1">
-                <a:solidFill>
-                  <a:srgbClr val="0E3F8C"/>
-                </a:solidFill>
-                <a:latin typeface="Microsoft YaHei"/>
-              </a:rPr>
-              <a:t>并补充了防回归手段</a:t>
-            </a:r>
-          </a:p>
-        </p:txBody>
-      </p:sp>
-      <p:sp>
-        <p:nvSpPr>
-          <p:cNvPr id="15" name="Rounded Rectangle 14"/>
+              <a:rPr sz="2250" b="1">
+                <a:solidFill>
+                  <a:srgbClr val="1E4FA8"/>
+                </a:solidFill>
+                <a:latin typeface="Microsoft YaHei"/>
+              </a:rPr>
+              <a:t>5</a:t>
+            </a:r>
+          </a:p>
+        </p:txBody>
+      </p:sp>
+      <p:sp>
+        <p:nvSpPr>
+          <p:cNvPr id="18" name="Rounded Rectangle 17"/>
           <p:cNvSpPr/>
           <p:nvPr/>
         </p:nvSpPr>
         <p:spPr>
           <a:xfrm>
-            <a:off x="381000" y="2324100"/>
-            <a:ext cx="11430000" cy="1009650"/>
+            <a:off x="4610100" y="3200400"/>
+            <a:ext cx="7200900" cy="628650"/>
           </a:xfrm>
           <a:prstGeom prst="roundRect">
             <a:avLst>
-              <a:gd name="adj" fmla="val 9433"/>
+              <a:gd name="adj" fmla="val 15151"/>
             </a:avLst>
           </a:prstGeom>
           <a:solidFill>
-            <a:srgbClr val="FFFFFF"/>
+            <a:srgbClr val="F7F9FC"/>
           </a:solidFill>
           <a:ln w="12700">
             <a:solidFill>
@@ -15755,185 +15789,100 @@
       </p:sp>
       <p:sp>
         <p:nvSpPr>
-          <p:cNvPr id="16" name="Rounded Rectangle 15"/>
+          <p:cNvPr id="19" name="TextBox 18"/>
+          <p:cNvSpPr txBox="1"/>
+          <p:nvPr/>
+        </p:nvSpPr>
+        <p:spPr>
+          <a:xfrm>
+            <a:off x="4838700" y="3200400"/>
+            <a:ext cx="5334000" cy="628650"/>
+          </a:xfrm>
+          <a:prstGeom prst="rect">
+            <a:avLst/>
+          </a:prstGeom>
+          <a:noFill/>
+        </p:spPr>
+        <p:txBody>
+          <a:bodyPr wrap="square" lIns="0" rIns="0" tIns="0" bIns="0" anchor="ctr">
+            <a:spAutoFit/>
+          </a:bodyPr>
+          <a:lstStyle/>
+          <a:p>
+            <a:pPr algn="l">
+              <a:lnSpc>
+                <a:spcPct val="130000"/>
+              </a:lnSpc>
+            </a:pPr>
+            <a:r>
+              <a:rPr sz="1575" b="0">
+                <a:solidFill>
+                  <a:srgbClr val="1A2230"/>
+                </a:solidFill>
+                <a:latin typeface="Microsoft YaHei"/>
+              </a:rPr>
+              <a:t>真实浏览器测试（自动点击验证）</a:t>
+            </a:r>
+          </a:p>
+        </p:txBody>
+      </p:sp>
+      <p:sp>
+        <p:nvSpPr>
+          <p:cNvPr id="20" name="TextBox 19"/>
+          <p:cNvSpPr txBox="1"/>
+          <p:nvPr/>
+        </p:nvSpPr>
+        <p:spPr>
+          <a:xfrm>
+            <a:off x="10287000" y="3200400"/>
+            <a:ext cx="1333500" cy="628650"/>
+          </a:xfrm>
+          <a:prstGeom prst="rect">
+            <a:avLst/>
+          </a:prstGeom>
+          <a:noFill/>
+        </p:spPr>
+        <p:txBody>
+          <a:bodyPr wrap="square" lIns="0" rIns="0" tIns="0" bIns="0" anchor="ctr">
+            <a:spAutoFit/>
+          </a:bodyPr>
+          <a:lstStyle/>
+          <a:p>
+            <a:pPr algn="r">
+              <a:lnSpc>
+                <a:spcPct val="130000"/>
+              </a:lnSpc>
+            </a:pPr>
+            <a:r>
+              <a:rPr sz="2250" b="1">
+                <a:solidFill>
+                  <a:srgbClr val="1E4FA8"/>
+                </a:solidFill>
+                <a:latin typeface="Microsoft YaHei"/>
+              </a:rPr>
+              <a:t>35</a:t>
+            </a:r>
+          </a:p>
+        </p:txBody>
+      </p:sp>
+      <p:sp>
+        <p:nvSpPr>
+          <p:cNvPr id="21" name="Rounded Rectangle 20"/>
           <p:cNvSpPr/>
           <p:nvPr/>
         </p:nvSpPr>
         <p:spPr>
           <a:xfrm>
-            <a:off x="571500" y="2647950"/>
-            <a:ext cx="666750" cy="361950"/>
+            <a:off x="4610100" y="3924300"/>
+            <a:ext cx="7200900" cy="628650"/>
           </a:xfrm>
           <a:prstGeom prst="roundRect">
             <a:avLst>
-              <a:gd name="adj" fmla="val 21052"/>
+              <a:gd name="adj" fmla="val 15151"/>
             </a:avLst>
           </a:prstGeom>
           <a:solidFill>
-            <a:srgbClr val="D9534F"/>
-          </a:solidFill>
-          <a:ln>
-            <a:noFill/>
-          </a:ln>
-          <a:effectLst/>
-        </p:spPr>
-        <p:style>
-          <a:lnRef idx="1">
-            <a:schemeClr val="accent1"/>
-          </a:lnRef>
-          <a:fillRef idx="3">
-            <a:schemeClr val="accent1"/>
-          </a:fillRef>
-          <a:effectRef idx="2">
-            <a:schemeClr val="accent1"/>
-          </a:effectRef>
-          <a:fontRef idx="minor">
-            <a:schemeClr val="lt1"/>
-          </a:fontRef>
-        </p:style>
-        <p:txBody>
-          <a:bodyPr rtlCol="0" anchor="ctr" wrap="square"/>
-          <a:lstStyle/>
-          <a:p>
-            <a:pPr algn="ctr"/>
-          </a:p>
-        </p:txBody>
-      </p:sp>
-      <p:sp>
-        <p:nvSpPr>
-          <p:cNvPr id="17" name="TextBox 16"/>
-          <p:cNvSpPr txBox="1"/>
-          <p:nvPr/>
-        </p:nvSpPr>
-        <p:spPr>
-          <a:xfrm>
-            <a:off x="571500" y="2647950"/>
-            <a:ext cx="666750" cy="361950"/>
-          </a:xfrm>
-          <a:prstGeom prst="rect">
-            <a:avLst/>
-          </a:prstGeom>
-          <a:noFill/>
-        </p:spPr>
-        <p:txBody>
-          <a:bodyPr wrap="square" lIns="0" rIns="0" tIns="0" bIns="0" anchor="ctr">
-            <a:spAutoFit/>
-          </a:bodyPr>
-          <a:lstStyle/>
-          <a:p>
-            <a:pPr algn="ctr">
-              <a:lnSpc>
-                <a:spcPct val="130000"/>
-              </a:lnSpc>
-            </a:pPr>
-            <a:r>
-              <a:rPr sz="1275" b="1">
-                <a:solidFill>
-                  <a:srgbClr val="FFFFFF"/>
-                </a:solidFill>
-                <a:latin typeface="Microsoft YaHei"/>
-              </a:rPr>
-              <a:t>严重</a:t>
-            </a:r>
-          </a:p>
-        </p:txBody>
-      </p:sp>
-      <p:sp>
-        <p:nvSpPr>
-          <p:cNvPr id="18" name="TextBox 17"/>
-          <p:cNvSpPr txBox="1"/>
-          <p:nvPr/>
-        </p:nvSpPr>
-        <p:spPr>
-          <a:xfrm>
-            <a:off x="1409700" y="2457450"/>
-            <a:ext cx="10191750" cy="323850"/>
-          </a:xfrm>
-          <a:prstGeom prst="rect">
-            <a:avLst/>
-          </a:prstGeom>
-          <a:noFill/>
-        </p:spPr>
-        <p:txBody>
-          <a:bodyPr wrap="square" lIns="0" rIns="0" tIns="0" bIns="0" anchor="ctr">
-            <a:spAutoFit/>
-          </a:bodyPr>
-          <a:lstStyle/>
-          <a:p>
-            <a:pPr algn="l">
-              <a:lnSpc>
-                <a:spcPct val="130000"/>
-              </a:lnSpc>
-            </a:pPr>
-            <a:r>
-              <a:rPr sz="1575" b="1">
-                <a:solidFill>
-                  <a:srgbClr val="1A2230"/>
-                </a:solidFill>
-                <a:latin typeface="Microsoft YaHei"/>
-              </a:rPr>
-              <a:t>账号初始化不幂等，后端第二次启动直接失败</a:t>
-            </a:r>
-          </a:p>
-        </p:txBody>
-      </p:sp>
-      <p:sp>
-        <p:nvSpPr>
-          <p:cNvPr id="19" name="TextBox 18"/>
-          <p:cNvSpPr txBox="1"/>
-          <p:nvPr/>
-        </p:nvSpPr>
-        <p:spPr>
-          <a:xfrm>
-            <a:off x="1409700" y="2819400"/>
-            <a:ext cx="10191750" cy="400050"/>
-          </a:xfrm>
-          <a:prstGeom prst="rect">
-            <a:avLst/>
-          </a:prstGeom>
-          <a:noFill/>
-        </p:spPr>
-        <p:txBody>
-          <a:bodyPr wrap="square" lIns="0" rIns="0" tIns="0" bIns="0" anchor="t">
-            <a:spAutoFit/>
-          </a:bodyPr>
-          <a:lstStyle/>
-          <a:p>
-            <a:pPr algn="l">
-              <a:lnSpc>
-                <a:spcPct val="140000"/>
-              </a:lnSpc>
-            </a:pPr>
-            <a:r>
-              <a:rPr sz="1350" b="0">
-                <a:solidFill>
-                  <a:srgbClr val="4A5568"/>
-                </a:solidFill>
-                <a:latin typeface="Microsoft YaHei"/>
-              </a:rPr>
-              <a:t>重复绑角色触发主键冲突，事务被标记回滚 → 改为 SQL 层幂等写入</a:t>
-            </a:r>
-          </a:p>
-        </p:txBody>
-      </p:sp>
-      <p:sp>
-        <p:nvSpPr>
-          <p:cNvPr id="20" name="Rounded Rectangle 19"/>
-          <p:cNvSpPr/>
-          <p:nvPr/>
-        </p:nvSpPr>
-        <p:spPr>
-          <a:xfrm>
-            <a:off x="381000" y="3448050"/>
-            <a:ext cx="11430000" cy="1009650"/>
-          </a:xfrm>
-          <a:prstGeom prst="roundRect">
-            <a:avLst>
-              <a:gd name="adj" fmla="val 9433"/>
-            </a:avLst>
-          </a:prstGeom>
-          <a:solidFill>
-            <a:srgbClr val="FFFFFF"/>
+            <a:srgbClr val="F7F9FC"/>
           </a:solidFill>
           <a:ln w="12700">
             <a:solidFill>
@@ -15966,19 +15915,267 @@
       </p:sp>
       <p:sp>
         <p:nvSpPr>
-          <p:cNvPr id="21" name="Rounded Rectangle 20"/>
+          <p:cNvPr id="22" name="TextBox 21"/>
+          <p:cNvSpPr txBox="1"/>
+          <p:nvPr/>
+        </p:nvSpPr>
+        <p:spPr>
+          <a:xfrm>
+            <a:off x="4838700" y="3924300"/>
+            <a:ext cx="5334000" cy="628650"/>
+          </a:xfrm>
+          <a:prstGeom prst="rect">
+            <a:avLst/>
+          </a:prstGeom>
+          <a:noFill/>
+        </p:spPr>
+        <p:txBody>
+          <a:bodyPr wrap="square" lIns="0" rIns="0" tIns="0" bIns="0" anchor="ctr">
+            <a:spAutoFit/>
+          </a:bodyPr>
+          <a:lstStyle/>
+          <a:p>
+            <a:pPr algn="l">
+              <a:lnSpc>
+                <a:spcPct val="130000"/>
+              </a:lnSpc>
+            </a:pPr>
+            <a:r>
+              <a:rPr sz="1575" b="0">
+                <a:solidFill>
+                  <a:srgbClr val="1A2230"/>
+                </a:solidFill>
+                <a:latin typeface="Microsoft YaHei"/>
+              </a:rPr>
+              <a:t>参考实现行为驱动（对照）</a:t>
+            </a:r>
+          </a:p>
+        </p:txBody>
+      </p:sp>
+      <p:sp>
+        <p:nvSpPr>
+          <p:cNvPr id="23" name="TextBox 22"/>
+          <p:cNvSpPr txBox="1"/>
+          <p:nvPr/>
+        </p:nvSpPr>
+        <p:spPr>
+          <a:xfrm>
+            <a:off x="10287000" y="3924300"/>
+            <a:ext cx="1333500" cy="628650"/>
+          </a:xfrm>
+          <a:prstGeom prst="rect">
+            <a:avLst/>
+          </a:prstGeom>
+          <a:noFill/>
+        </p:spPr>
+        <p:txBody>
+          <a:bodyPr wrap="square" lIns="0" rIns="0" tIns="0" bIns="0" anchor="ctr">
+            <a:spAutoFit/>
+          </a:bodyPr>
+          <a:lstStyle/>
+          <a:p>
+            <a:pPr algn="r">
+              <a:lnSpc>
+                <a:spcPct val="130000"/>
+              </a:lnSpc>
+            </a:pPr>
+            <a:r>
+              <a:rPr sz="2250" b="1">
+                <a:solidFill>
+                  <a:srgbClr val="1E4FA8"/>
+                </a:solidFill>
+                <a:latin typeface="Microsoft YaHei"/>
+              </a:rPr>
+              <a:t>18</a:t>
+            </a:r>
+          </a:p>
+        </p:txBody>
+      </p:sp>
+      <p:sp>
+        <p:nvSpPr>
+          <p:cNvPr id="24" name="Rounded Rectangle 23"/>
           <p:cNvSpPr/>
           <p:nvPr/>
         </p:nvSpPr>
         <p:spPr>
           <a:xfrm>
-            <a:off x="571500" y="3771900"/>
-            <a:ext cx="666750" cy="361950"/>
+            <a:off x="4610100" y="4648200"/>
+            <a:ext cx="7200900" cy="628650"/>
           </a:xfrm>
           <a:prstGeom prst="roundRect">
             <a:avLst>
-              <a:gd name="adj" fmla="val 21052"/>
+              <a:gd name="adj" fmla="val 15151"/>
             </a:avLst>
+          </a:prstGeom>
+          <a:solidFill>
+            <a:srgbClr val="F7F9FC"/>
+          </a:solidFill>
+          <a:ln w="12700">
+            <a:solidFill>
+              <a:srgbClr val="D6DCE5"/>
+            </a:solidFill>
+          </a:ln>
+          <a:effectLst/>
+        </p:spPr>
+        <p:style>
+          <a:lnRef idx="1">
+            <a:schemeClr val="accent1"/>
+          </a:lnRef>
+          <a:fillRef idx="3">
+            <a:schemeClr val="accent1"/>
+          </a:fillRef>
+          <a:effectRef idx="2">
+            <a:schemeClr val="accent1"/>
+          </a:effectRef>
+          <a:fontRef idx="minor">
+            <a:schemeClr val="lt1"/>
+          </a:fontRef>
+        </p:style>
+        <p:txBody>
+          <a:bodyPr rtlCol="0" anchor="ctr" wrap="square"/>
+          <a:lstStyle/>
+          <a:p>
+            <a:pPr algn="ctr"/>
+          </a:p>
+        </p:txBody>
+      </p:sp>
+      <p:sp>
+        <p:nvSpPr>
+          <p:cNvPr id="25" name="TextBox 24"/>
+          <p:cNvSpPr txBox="1"/>
+          <p:nvPr/>
+        </p:nvSpPr>
+        <p:spPr>
+          <a:xfrm>
+            <a:off x="4838700" y="4648200"/>
+            <a:ext cx="5334000" cy="628650"/>
+          </a:xfrm>
+          <a:prstGeom prst="rect">
+            <a:avLst/>
+          </a:prstGeom>
+          <a:noFill/>
+        </p:spPr>
+        <p:txBody>
+          <a:bodyPr wrap="square" lIns="0" rIns="0" tIns="0" bIns="0" anchor="ctr">
+            <a:spAutoFit/>
+          </a:bodyPr>
+          <a:lstStyle/>
+          <a:p>
+            <a:pPr algn="l">
+              <a:lnSpc>
+                <a:spcPct val="130000"/>
+              </a:lnSpc>
+            </a:pPr>
+            <a:r>
+              <a:rPr sz="1575" b="0">
+                <a:solidFill>
+                  <a:srgbClr val="1A2230"/>
+                </a:solidFill>
+                <a:latin typeface="Microsoft YaHei"/>
+              </a:rPr>
+              <a:t>参考实现接口冒烟（对照）</a:t>
+            </a:r>
+          </a:p>
+        </p:txBody>
+      </p:sp>
+      <p:sp>
+        <p:nvSpPr>
+          <p:cNvPr id="26" name="TextBox 25"/>
+          <p:cNvSpPr txBox="1"/>
+          <p:nvPr/>
+        </p:nvSpPr>
+        <p:spPr>
+          <a:xfrm>
+            <a:off x="10287000" y="4648200"/>
+            <a:ext cx="1333500" cy="628650"/>
+          </a:xfrm>
+          <a:prstGeom prst="rect">
+            <a:avLst/>
+          </a:prstGeom>
+          <a:noFill/>
+        </p:spPr>
+        <p:txBody>
+          <a:bodyPr wrap="square" lIns="0" rIns="0" tIns="0" bIns="0" anchor="ctr">
+            <a:spAutoFit/>
+          </a:bodyPr>
+          <a:lstStyle/>
+          <a:p>
+            <a:pPr algn="r">
+              <a:lnSpc>
+                <a:spcPct val="130000"/>
+              </a:lnSpc>
+            </a:pPr>
+            <a:r>
+              <a:rPr sz="2250" b="1">
+                <a:solidFill>
+                  <a:srgbClr val="1E4FA8"/>
+                </a:solidFill>
+                <a:latin typeface="Microsoft YaHei"/>
+              </a:rPr>
+              <a:t>18</a:t>
+            </a:r>
+          </a:p>
+        </p:txBody>
+      </p:sp>
+      <p:sp>
+        <p:nvSpPr>
+          <p:cNvPr id="27" name="Rounded Rectangle 26"/>
+          <p:cNvSpPr/>
+          <p:nvPr/>
+        </p:nvSpPr>
+        <p:spPr>
+          <a:xfrm>
+            <a:off x="381000" y="5505450"/>
+            <a:ext cx="11430000" cy="590550"/>
+          </a:xfrm>
+          <a:prstGeom prst="roundRect">
+            <a:avLst>
+              <a:gd name="adj" fmla="val 12903"/>
+            </a:avLst>
+          </a:prstGeom>
+          <a:solidFill>
+            <a:srgbClr val="E8EFF8"/>
+          </a:solidFill>
+          <a:ln>
+            <a:noFill/>
+          </a:ln>
+          <a:effectLst/>
+        </p:spPr>
+        <p:style>
+          <a:lnRef idx="1">
+            <a:schemeClr val="accent1"/>
+          </a:lnRef>
+          <a:fillRef idx="3">
+            <a:schemeClr val="accent1"/>
+          </a:fillRef>
+          <a:effectRef idx="2">
+            <a:schemeClr val="accent1"/>
+          </a:effectRef>
+          <a:fontRef idx="minor">
+            <a:schemeClr val="lt1"/>
+          </a:fontRef>
+        </p:style>
+        <p:txBody>
+          <a:bodyPr rtlCol="0" anchor="ctr" wrap="square"/>
+          <a:lstStyle/>
+          <a:p>
+            <a:pPr algn="ctr"/>
+          </a:p>
+        </p:txBody>
+      </p:sp>
+      <p:sp>
+        <p:nvSpPr>
+          <p:cNvPr id="28" name="Rectangle 27"/>
+          <p:cNvSpPr/>
+          <p:nvPr/>
+        </p:nvSpPr>
+        <p:spPr>
+          <a:xfrm>
+            <a:off x="381000" y="5505450"/>
+            <a:ext cx="38100" cy="590550"/>
+          </a:xfrm>
+          <a:prstGeom prst="rect">
+            <a:avLst/>
           </a:prstGeom>
           <a:solidFill>
             <a:srgbClr val="1E4FA8"/>
@@ -16012,14 +16209,14 @@
       </p:sp>
       <p:sp>
         <p:nvSpPr>
-          <p:cNvPr id="22" name="TextBox 21"/>
-          <p:cNvSpPr txBox="1"/>
-          <p:nvPr/>
-        </p:nvSpPr>
-        <p:spPr>
-          <a:xfrm>
-            <a:off x="571500" y="3771900"/>
-            <a:ext cx="666750" cy="361950"/>
+          <p:cNvPr id="29" name="TextBox 28"/>
+          <p:cNvSpPr txBox="1"/>
+          <p:nvPr/>
+        </p:nvSpPr>
+        <p:spPr>
+          <a:xfrm>
+            <a:off x="533400" y="5505450"/>
+            <a:ext cx="914400" cy="590550"/>
           </a:xfrm>
           <a:prstGeom prst="rect">
             <a:avLst/>
@@ -16032,33 +16229,33 @@
           </a:bodyPr>
           <a:lstStyle/>
           <a:p>
-            <a:pPr algn="ctr">
+            <a:pPr algn="l">
               <a:lnSpc>
                 <a:spcPct val="130000"/>
               </a:lnSpc>
             </a:pPr>
             <a:r>
-              <a:rPr sz="1275" b="1">
-                <a:solidFill>
-                  <a:srgbClr val="FFFFFF"/>
-                </a:solidFill>
-                <a:latin typeface="Microsoft YaHei"/>
-              </a:rPr>
-              <a:t>中等</a:t>
-            </a:r>
-          </a:p>
-        </p:txBody>
-      </p:sp>
-      <p:sp>
-        <p:nvSpPr>
-          <p:cNvPr id="23" name="TextBox 22"/>
-          <p:cNvSpPr txBox="1"/>
-          <p:nvPr/>
-        </p:nvSpPr>
-        <p:spPr>
-          <a:xfrm>
-            <a:off x="1409700" y="3581400"/>
-            <a:ext cx="10191750" cy="323850"/>
+              <a:rPr sz="1500" b="1">
+                <a:solidFill>
+                  <a:srgbClr val="1E4FA8"/>
+                </a:solidFill>
+                <a:latin typeface="Microsoft YaHei"/>
+              </a:rPr>
+              <a:t>判断</a:t>
+            </a:r>
+          </a:p>
+        </p:txBody>
+      </p:sp>
+      <p:sp>
+        <p:nvSpPr>
+          <p:cNvPr id="30" name="TextBox 29"/>
+          <p:cNvSpPr txBox="1"/>
+          <p:nvPr/>
+        </p:nvSpPr>
+        <p:spPr>
+          <a:xfrm>
+            <a:off x="1504950" y="5505450"/>
+            <a:ext cx="10134600" cy="590550"/>
           </a:xfrm>
           <a:prstGeom prst="rect">
             <a:avLst/>
@@ -16073,442 +16270,24 @@
           <a:p>
             <a:pPr algn="l">
               <a:lnSpc>
-                <a:spcPct val="130000"/>
-              </a:lnSpc>
-            </a:pPr>
-            <a:r>
-              <a:rPr sz="1575" b="1">
+                <a:spcPct val="135000"/>
+              </a:lnSpc>
+            </a:pPr>
+            <a:r>
+              <a:rPr sz="1500" b="0">
                 <a:solidFill>
                   <a:srgbClr val="1A2230"/>
                 </a:solidFill>
                 <a:latin typeface="Microsoft YaHei"/>
               </a:rPr>
-              <a:t>字符串预约号未加引号，按钮点了没反应</a:t>
-            </a:r>
-          </a:p>
-        </p:txBody>
-      </p:sp>
-      <p:sp>
-        <p:nvSpPr>
-          <p:cNvPr id="24" name="TextBox 23"/>
-          <p:cNvSpPr txBox="1"/>
-          <p:nvPr/>
-        </p:nvSpPr>
-        <p:spPr>
-          <a:xfrm>
-            <a:off x="1409700" y="3943350"/>
-            <a:ext cx="10191750" cy="400050"/>
-          </a:xfrm>
-          <a:prstGeom prst="rect">
-            <a:avLst/>
-          </a:prstGeom>
-          <a:noFill/>
-        </p:spPr>
-        <p:txBody>
-          <a:bodyPr wrap="square" lIns="0" rIns="0" tIns="0" bIns="0" anchor="t">
-            <a:spAutoFit/>
-          </a:bodyPr>
-          <a:lstStyle/>
-          <a:p>
-            <a:pPr algn="l">
-              <a:lnSpc>
-                <a:spcPct val="140000"/>
-              </a:lnSpc>
-            </a:pPr>
-            <a:r>
-              <a:rPr sz="1350" b="0">
-                <a:solidFill>
-                  <a:srgbClr val="4A5568"/>
-                </a:solidFill>
-                <a:latin typeface="Microsoft YaHei"/>
-              </a:rPr>
-              <a:t>前端拼接事件参数时少了引号，被当成变量 → 修复并加静态检查永久防回归</a:t>
-            </a:r>
-          </a:p>
-        </p:txBody>
-      </p:sp>
-      <p:sp>
-        <p:nvSpPr>
-          <p:cNvPr id="25" name="Rounded Rectangle 24"/>
-          <p:cNvSpPr/>
-          <p:nvPr/>
-        </p:nvSpPr>
-        <p:spPr>
-          <a:xfrm>
-            <a:off x="381000" y="4572000"/>
-            <a:ext cx="11430000" cy="1009650"/>
-          </a:xfrm>
-          <a:prstGeom prst="roundRect">
-            <a:avLst>
-              <a:gd name="adj" fmla="val 9433"/>
-            </a:avLst>
-          </a:prstGeom>
-          <a:solidFill>
-            <a:srgbClr val="FFFFFF"/>
-          </a:solidFill>
-          <a:ln w="12700">
-            <a:solidFill>
-              <a:srgbClr val="D6DCE5"/>
-            </a:solidFill>
-          </a:ln>
-          <a:effectLst/>
-        </p:spPr>
-        <p:style>
-          <a:lnRef idx="1">
-            <a:schemeClr val="accent1"/>
-          </a:lnRef>
-          <a:fillRef idx="3">
-            <a:schemeClr val="accent1"/>
-          </a:fillRef>
-          <a:effectRef idx="2">
-            <a:schemeClr val="accent1"/>
-          </a:effectRef>
-          <a:fontRef idx="minor">
-            <a:schemeClr val="lt1"/>
-          </a:fontRef>
-        </p:style>
-        <p:txBody>
-          <a:bodyPr rtlCol="0" anchor="ctr" wrap="square"/>
-          <a:lstStyle/>
-          <a:p>
-            <a:pPr algn="ctr"/>
-          </a:p>
-        </p:txBody>
-      </p:sp>
-      <p:sp>
-        <p:nvSpPr>
-          <p:cNvPr id="26" name="Rounded Rectangle 25"/>
-          <p:cNvSpPr/>
-          <p:nvPr/>
-        </p:nvSpPr>
-        <p:spPr>
-          <a:xfrm>
-            <a:off x="571500" y="4895850"/>
-            <a:ext cx="666750" cy="361950"/>
-          </a:xfrm>
-          <a:prstGeom prst="roundRect">
-            <a:avLst>
-              <a:gd name="adj" fmla="val 21052"/>
-            </a:avLst>
-          </a:prstGeom>
-          <a:solidFill>
-            <a:srgbClr val="1E4FA8"/>
-          </a:solidFill>
-          <a:ln>
-            <a:noFill/>
-          </a:ln>
-          <a:effectLst/>
-        </p:spPr>
-        <p:style>
-          <a:lnRef idx="1">
-            <a:schemeClr val="accent1"/>
-          </a:lnRef>
-          <a:fillRef idx="3">
-            <a:schemeClr val="accent1"/>
-          </a:fillRef>
-          <a:effectRef idx="2">
-            <a:schemeClr val="accent1"/>
-          </a:effectRef>
-          <a:fontRef idx="minor">
-            <a:schemeClr val="lt1"/>
-          </a:fontRef>
-        </p:style>
-        <p:txBody>
-          <a:bodyPr rtlCol="0" anchor="ctr" wrap="square"/>
-          <a:lstStyle/>
-          <a:p>
-            <a:pPr algn="ctr"/>
-          </a:p>
-        </p:txBody>
-      </p:sp>
-      <p:sp>
-        <p:nvSpPr>
-          <p:cNvPr id="27" name="TextBox 26"/>
-          <p:cNvSpPr txBox="1"/>
-          <p:nvPr/>
-        </p:nvSpPr>
-        <p:spPr>
-          <a:xfrm>
-            <a:off x="571500" y="4895850"/>
-            <a:ext cx="666750" cy="361950"/>
-          </a:xfrm>
-          <a:prstGeom prst="rect">
-            <a:avLst/>
-          </a:prstGeom>
-          <a:noFill/>
-        </p:spPr>
-        <p:txBody>
-          <a:bodyPr wrap="square" lIns="0" rIns="0" tIns="0" bIns="0" anchor="ctr">
-            <a:spAutoFit/>
-          </a:bodyPr>
-          <a:lstStyle/>
-          <a:p>
-            <a:pPr algn="ctr">
-              <a:lnSpc>
-                <a:spcPct val="130000"/>
-              </a:lnSpc>
-            </a:pPr>
-            <a:r>
-              <a:rPr sz="1275" b="1">
-                <a:solidFill>
-                  <a:srgbClr val="FFFFFF"/>
-                </a:solidFill>
-                <a:latin typeface="Microsoft YaHei"/>
-              </a:rPr>
-              <a:t>中等</a:t>
-            </a:r>
-          </a:p>
-        </p:txBody>
-      </p:sp>
-      <p:sp>
-        <p:nvSpPr>
-          <p:cNvPr id="28" name="TextBox 27"/>
-          <p:cNvSpPr txBox="1"/>
-          <p:nvPr/>
-        </p:nvSpPr>
-        <p:spPr>
-          <a:xfrm>
-            <a:off x="1409700" y="4705350"/>
-            <a:ext cx="10191750" cy="323850"/>
-          </a:xfrm>
-          <a:prstGeom prst="rect">
-            <a:avLst/>
-          </a:prstGeom>
-          <a:noFill/>
-        </p:spPr>
-        <p:txBody>
-          <a:bodyPr wrap="square" lIns="0" rIns="0" tIns="0" bIns="0" anchor="ctr">
-            <a:spAutoFit/>
-          </a:bodyPr>
-          <a:lstStyle/>
-          <a:p>
-            <a:pPr algn="l">
-              <a:lnSpc>
-                <a:spcPct val="130000"/>
-              </a:lnSpc>
-            </a:pPr>
-            <a:r>
-              <a:rPr sz="1575" b="1">
-                <a:solidFill>
-                  <a:srgbClr val="1A2230"/>
-                </a:solidFill>
-                <a:latin typeface="Microsoft YaHei"/>
-              </a:rPr>
-              <a:t>切换标签时的请求竞态，面板偶发空白</a:t>
-            </a:r>
-          </a:p>
-        </p:txBody>
-      </p:sp>
-      <p:sp>
-        <p:nvSpPr>
-          <p:cNvPr id="29" name="TextBox 28"/>
-          <p:cNvSpPr txBox="1"/>
-          <p:nvPr/>
-        </p:nvSpPr>
-        <p:spPr>
-          <a:xfrm>
-            <a:off x="1409700" y="5067300"/>
-            <a:ext cx="10191750" cy="400050"/>
-          </a:xfrm>
-          <a:prstGeom prst="rect">
-            <a:avLst/>
-          </a:prstGeom>
-          <a:noFill/>
-        </p:spPr>
-        <p:txBody>
-          <a:bodyPr wrap="square" lIns="0" rIns="0" tIns="0" bIns="0" anchor="t">
-            <a:spAutoFit/>
-          </a:bodyPr>
-          <a:lstStyle/>
-          <a:p>
-            <a:pPr algn="l">
-              <a:lnSpc>
-                <a:spcPct val="140000"/>
-              </a:lnSpc>
-            </a:pPr>
-            <a:r>
-              <a:rPr sz="1350" b="0">
-                <a:solidFill>
-                  <a:srgbClr val="4A5568"/>
-                </a:solidFill>
-                <a:latin typeface="Microsoft YaHei"/>
-              </a:rPr>
-              <a:t>自动加载的旧响应覆盖了新结果 → 统一响应结构并丢弃过期响应</a:t>
-            </a:r>
-          </a:p>
-        </p:txBody>
-      </p:sp>
-      <p:sp>
-        <p:nvSpPr>
-          <p:cNvPr id="30" name="Rounded Rectangle 29"/>
-          <p:cNvSpPr/>
-          <p:nvPr/>
-        </p:nvSpPr>
-        <p:spPr>
-          <a:xfrm>
-            <a:off x="381000" y="5695950"/>
-            <a:ext cx="11430000" cy="438150"/>
-          </a:xfrm>
-          <a:prstGeom prst="roundRect">
-            <a:avLst>
-              <a:gd name="adj" fmla="val 17391"/>
-            </a:avLst>
-          </a:prstGeom>
-          <a:solidFill>
-            <a:srgbClr val="E8EFF8"/>
-          </a:solidFill>
-          <a:ln>
-            <a:noFill/>
-          </a:ln>
-          <a:effectLst/>
-        </p:spPr>
-        <p:style>
-          <a:lnRef idx="1">
-            <a:schemeClr val="accent1"/>
-          </a:lnRef>
-          <a:fillRef idx="3">
-            <a:schemeClr val="accent1"/>
-          </a:fillRef>
-          <a:effectRef idx="2">
-            <a:schemeClr val="accent1"/>
-          </a:effectRef>
-          <a:fontRef idx="minor">
-            <a:schemeClr val="lt1"/>
-          </a:fontRef>
-        </p:style>
-        <p:txBody>
-          <a:bodyPr rtlCol="0" anchor="ctr" wrap="square"/>
-          <a:lstStyle/>
-          <a:p>
-            <a:pPr algn="ctr"/>
+              <a:t>测试要能挡住"点了没反应"这类问题，所以既做静态检查，也做真实浏览器点击</a:t>
+            </a:r>
           </a:p>
         </p:txBody>
       </p:sp>
       <p:sp>
         <p:nvSpPr>
           <p:cNvPr id="31" name="Rectangle 30"/>
-          <p:cNvSpPr/>
-          <p:nvPr/>
-        </p:nvSpPr>
-        <p:spPr>
-          <a:xfrm>
-            <a:off x="381000" y="5695950"/>
-            <a:ext cx="38100" cy="438150"/>
-          </a:xfrm>
-          <a:prstGeom prst="rect">
-            <a:avLst/>
-          </a:prstGeom>
-          <a:solidFill>
-            <a:srgbClr val="1E4FA8"/>
-          </a:solidFill>
-          <a:ln>
-            <a:noFill/>
-          </a:ln>
-          <a:effectLst/>
-        </p:spPr>
-        <p:style>
-          <a:lnRef idx="1">
-            <a:schemeClr val="accent1"/>
-          </a:lnRef>
-          <a:fillRef idx="3">
-            <a:schemeClr val="accent1"/>
-          </a:fillRef>
-          <a:effectRef idx="2">
-            <a:schemeClr val="accent1"/>
-          </a:effectRef>
-          <a:fontRef idx="minor">
-            <a:schemeClr val="lt1"/>
-          </a:fontRef>
-        </p:style>
-        <p:txBody>
-          <a:bodyPr rtlCol="0" anchor="ctr" wrap="square"/>
-          <a:lstStyle/>
-          <a:p>
-            <a:pPr algn="ctr"/>
-          </a:p>
-        </p:txBody>
-      </p:sp>
-      <p:sp>
-        <p:nvSpPr>
-          <p:cNvPr id="32" name="TextBox 31"/>
-          <p:cNvSpPr txBox="1"/>
-          <p:nvPr/>
-        </p:nvSpPr>
-        <p:spPr>
-          <a:xfrm>
-            <a:off x="533400" y="5695950"/>
-            <a:ext cx="914400" cy="438150"/>
-          </a:xfrm>
-          <a:prstGeom prst="rect">
-            <a:avLst/>
-          </a:prstGeom>
-          <a:noFill/>
-        </p:spPr>
-        <p:txBody>
-          <a:bodyPr wrap="square" lIns="0" rIns="0" tIns="0" bIns="0" anchor="ctr">
-            <a:spAutoFit/>
-          </a:bodyPr>
-          <a:lstStyle/>
-          <a:p>
-            <a:pPr algn="l">
-              <a:lnSpc>
-                <a:spcPct val="130000"/>
-              </a:lnSpc>
-            </a:pPr>
-            <a:r>
-              <a:rPr sz="1500" b="1">
-                <a:solidFill>
-                  <a:srgbClr val="1E4FA8"/>
-                </a:solidFill>
-                <a:latin typeface="Microsoft YaHei"/>
-              </a:rPr>
-              <a:t>判断</a:t>
-            </a:r>
-          </a:p>
-        </p:txBody>
-      </p:sp>
-      <p:sp>
-        <p:nvSpPr>
-          <p:cNvPr id="33" name="TextBox 32"/>
-          <p:cNvSpPr txBox="1"/>
-          <p:nvPr/>
-        </p:nvSpPr>
-        <p:spPr>
-          <a:xfrm>
-            <a:off x="1504950" y="5695950"/>
-            <a:ext cx="10134600" cy="438150"/>
-          </a:xfrm>
-          <a:prstGeom prst="rect">
-            <a:avLst/>
-          </a:prstGeom>
-          <a:noFill/>
-        </p:spPr>
-        <p:txBody>
-          <a:bodyPr wrap="square" lIns="0" rIns="0" tIns="0" bIns="0" anchor="ctr">
-            <a:spAutoFit/>
-          </a:bodyPr>
-          <a:lstStyle/>
-          <a:p>
-            <a:pPr algn="l">
-              <a:lnSpc>
-                <a:spcPct val="135000"/>
-              </a:lnSpc>
-            </a:pPr>
-            <a:r>
-              <a:rPr sz="1500" b="0">
-                <a:solidFill>
-                  <a:srgbClr val="1A2230"/>
-                </a:solidFill>
-                <a:latin typeface="Microsoft YaHei"/>
-              </a:rPr>
-              <a:t>能复现、能定位、能防回归，缺陷才是资产；只写"已修复"等于没讲</a:t>
-            </a:r>
-          </a:p>
-        </p:txBody>
-      </p:sp>
-      <p:sp>
-        <p:nvSpPr>
-          <p:cNvPr id="34" name="Rectangle 33"/>
           <p:cNvSpPr/>
           <p:nvPr/>
         </p:nvSpPr>
@@ -16552,7 +16331,7 @@
       </p:sp>
       <p:sp>
         <p:nvSpPr>
-          <p:cNvPr id="35" name="TextBox 34"/>
+          <p:cNvPr id="32" name="TextBox 31"/>
           <p:cNvSpPr txBox="1"/>
           <p:nvPr/>
         </p:nvSpPr>
@@ -16584,14 +16363,14 @@
                 </a:solidFill>
                 <a:latin typeface="Microsoft YaHei"/>
               </a:rPr>
-              <a:t>来源：系统测试文档 · 缺陷记录章节</a:t>
-            </a:r>
-          </a:p>
-        </p:txBody>
-      </p:sp>
-      <p:sp>
-        <p:nvSpPr>
-          <p:cNvPr id="36" name="TextBox 35"/>
+              <a:t>来源：五份测试报告文件（verify/ 与 app/ 目录）</a:t>
+            </a:r>
+          </a:p>
+        </p:txBody>
+      </p:sp>
+      <p:sp>
+        <p:nvSpPr>
+          <p:cNvPr id="33" name="TextBox 32"/>
           <p:cNvSpPr txBox="1"/>
           <p:nvPr/>
         </p:nvSpPr>
@@ -16623,7 +16402,7 @@
                 </a:solidFill>
                 <a:latin typeface="Microsoft YaHei"/>
               </a:rPr>
-              <a:t>19 / 22</a:t>
+              <a:t>18 / 23</a:t>
             </a:r>
           </a:p>
         </p:txBody>
@@ -17918,7 +17697,7 @@
     <p:bg>
       <p:bgPr>
         <a:solidFill>
-          <a:srgbClr val="F7F9FC"/>
+          <a:srgbClr val="FFFFFF"/>
         </a:solidFill>
         <a:effectLst/>
       </p:bgPr>
@@ -17932,131 +17711,14 @@
       <p:grpSpPr/>
       <p:sp>
         <p:nvSpPr>
-          <p:cNvPr id="2" name="TextBox 1"/>
-          <p:cNvSpPr txBox="1"/>
-          <p:nvPr/>
-        </p:nvSpPr>
-        <p:spPr>
-          <a:xfrm>
-            <a:off x="0" y="1238250"/>
-            <a:ext cx="12192000" cy="3048000"/>
-          </a:xfrm>
-          <a:prstGeom prst="rect">
-            <a:avLst/>
-          </a:prstGeom>
-          <a:noFill/>
-        </p:spPr>
-        <p:txBody>
-          <a:bodyPr wrap="square" lIns="0" rIns="0" tIns="0" bIns="0" anchor="ctr">
-            <a:spAutoFit/>
-          </a:bodyPr>
-          <a:lstStyle/>
-          <a:p>
-            <a:pPr algn="ctr">
-              <a:lnSpc>
-                <a:spcPct val="130000"/>
-              </a:lnSpc>
-            </a:pPr>
-            <a:r>
-              <a:rPr sz="18000" b="1">
-                <a:solidFill>
-                  <a:srgbClr val="E8EFF8"/>
-                </a:solidFill>
-                <a:latin typeface="Microsoft YaHei"/>
-              </a:rPr>
-              <a:t>05</a:t>
-            </a:r>
-          </a:p>
-        </p:txBody>
-      </p:sp>
-      <p:sp>
-        <p:nvSpPr>
-          <p:cNvPr id="3" name="TextBox 2"/>
-          <p:cNvSpPr txBox="1"/>
-          <p:nvPr/>
-        </p:nvSpPr>
-        <p:spPr>
-          <a:xfrm>
-            <a:off x="1333500" y="2286000"/>
-            <a:ext cx="9525000" cy="342900"/>
-          </a:xfrm>
-          <a:prstGeom prst="rect">
-            <a:avLst/>
-          </a:prstGeom>
-          <a:noFill/>
-        </p:spPr>
-        <p:txBody>
-          <a:bodyPr wrap="square" lIns="0" rIns="0" tIns="0" bIns="0" anchor="ctr">
-            <a:spAutoFit/>
-          </a:bodyPr>
-          <a:lstStyle/>
-          <a:p>
-            <a:pPr algn="ctr">
-              <a:lnSpc>
-                <a:spcPct val="130000"/>
-              </a:lnSpc>
-            </a:pPr>
-            <a:r>
-              <a:rPr sz="1650" b="0">
-                <a:solidFill>
-                  <a:srgbClr val="3D7BD9"/>
-                </a:solidFill>
-                <a:latin typeface="Microsoft YaHei"/>
-              </a:rPr>
-              <a:t>第五部分</a:t>
-            </a:r>
-          </a:p>
-        </p:txBody>
-      </p:sp>
-      <p:sp>
-        <p:nvSpPr>
-          <p:cNvPr id="4" name="TextBox 3"/>
-          <p:cNvSpPr txBox="1"/>
-          <p:nvPr/>
-        </p:nvSpPr>
-        <p:spPr>
-          <a:xfrm>
-            <a:off x="1333500" y="2686050"/>
-            <a:ext cx="9525000" cy="819150"/>
-          </a:xfrm>
-          <a:prstGeom prst="rect">
-            <a:avLst/>
-          </a:prstGeom>
-          <a:noFill/>
-        </p:spPr>
-        <p:txBody>
-          <a:bodyPr wrap="square" lIns="0" rIns="0" tIns="0" bIns="0" anchor="ctr">
-            <a:spAutoFit/>
-          </a:bodyPr>
-          <a:lstStyle/>
-          <a:p>
-            <a:pPr algn="ctr">
-              <a:lnSpc>
-                <a:spcPct val="130000"/>
-              </a:lnSpc>
-            </a:pPr>
-            <a:r>
-              <a:rPr sz="4050" b="1">
-                <a:solidFill>
-                  <a:srgbClr val="0E3F8C"/>
-                </a:solidFill>
-                <a:latin typeface="Microsoft YaHei"/>
-              </a:rPr>
-              <a:t>总结与展望</a:t>
-            </a:r>
-          </a:p>
-        </p:txBody>
-      </p:sp>
-      <p:sp>
-        <p:nvSpPr>
-          <p:cNvPr id="5" name="Rectangle 4"/>
+          <p:cNvPr id="2" name="Rectangle 1"/>
           <p:cNvSpPr/>
           <p:nvPr/>
         </p:nvSpPr>
         <p:spPr>
           <a:xfrm>
-            <a:off x="5524500" y="3600450"/>
-            <a:ext cx="1143000" cy="38100"/>
+            <a:off x="0" y="0"/>
+            <a:ext cx="12192000" cy="762000"/>
           </a:xfrm>
           <a:prstGeom prst="rect">
             <a:avLst/>
@@ -18093,14 +17755,14 @@
       </p:sp>
       <p:sp>
         <p:nvSpPr>
-          <p:cNvPr id="6" name="TextBox 5"/>
-          <p:cNvSpPr txBox="1"/>
-          <p:nvPr/>
-        </p:nvSpPr>
-        <p:spPr>
-          <a:xfrm>
-            <a:off x="1905000" y="3810000"/>
-            <a:ext cx="8382000" cy="571500"/>
+          <p:cNvPr id="3" name="TextBox 2"/>
+          <p:cNvSpPr txBox="1"/>
+          <p:nvPr/>
+        </p:nvSpPr>
+        <p:spPr>
+          <a:xfrm>
+            <a:off x="381000" y="0"/>
+            <a:ext cx="7239000" cy="762000"/>
           </a:xfrm>
           <a:prstGeom prst="rect">
             <a:avLst/>
@@ -18113,37 +17775,509 @@
           </a:bodyPr>
           <a:lstStyle/>
           <a:p>
-            <a:pPr algn="ctr">
-              <a:lnSpc>
-                <a:spcPct val="150000"/>
-              </a:lnSpc>
-            </a:pPr>
-            <a:r>
-              <a:rPr sz="1575" b="0">
-                <a:solidFill>
-                  <a:srgbClr val="4A5568"/>
-                </a:solidFill>
-                <a:latin typeface="Microsoft YaHei"/>
-              </a:rPr>
-              <a:t>做完的说清楚，没做完的也交代明白</a:t>
-            </a:r>
-          </a:p>
-        </p:txBody>
-      </p:sp>
-      <p:sp>
-        <p:nvSpPr>
-          <p:cNvPr id="7" name="Rounded Rectangle 6"/>
+            <a:pPr algn="l">
+              <a:lnSpc>
+                <a:spcPct val="130000"/>
+              </a:lnSpc>
+            </a:pPr>
+            <a:r>
+              <a:rPr sz="2400" b="1">
+                <a:solidFill>
+                  <a:srgbClr val="FFFFFF"/>
+                </a:solidFill>
+                <a:latin typeface="Microsoft YaHei"/>
+              </a:rPr>
+              <a:t>15 个缺陷：把踩过的坑讲清楚</a:t>
+            </a:r>
+          </a:p>
+        </p:txBody>
+      </p:sp>
+      <p:sp>
+        <p:nvSpPr>
+          <p:cNvPr id="4" name="TextBox 3"/>
+          <p:cNvSpPr txBox="1"/>
+          <p:nvPr/>
+        </p:nvSpPr>
+        <p:spPr>
+          <a:xfrm>
+            <a:off x="7620000" y="0"/>
+            <a:ext cx="4191000" cy="762000"/>
+          </a:xfrm>
+          <a:prstGeom prst="rect">
+            <a:avLst/>
+          </a:prstGeom>
+          <a:noFill/>
+        </p:spPr>
+        <p:txBody>
+          <a:bodyPr wrap="square" lIns="0" rIns="0" tIns="0" bIns="0" anchor="ctr">
+            <a:spAutoFit/>
+          </a:bodyPr>
+          <a:lstStyle/>
+          <a:p>
+            <a:pPr algn="r">
+              <a:lnSpc>
+                <a:spcPct val="130000"/>
+              </a:lnSpc>
+            </a:pPr>
+            <a:r>
+              <a:rPr sz="1050" b="0">
+                <a:solidFill>
+                  <a:srgbClr val="BFD3F0"/>
+                </a:solidFill>
+                <a:latin typeface="Microsoft YaHei"/>
+              </a:rPr>
+              <a:t>健身房运营管理系统 · 课程答辩</a:t>
+            </a:r>
+          </a:p>
+        </p:txBody>
+      </p:sp>
+      <p:sp>
+        <p:nvSpPr>
+          <p:cNvPr id="5" name="Rounded Rectangle 4"/>
           <p:cNvSpPr/>
           <p:nvPr/>
         </p:nvSpPr>
         <p:spPr>
           <a:xfrm>
-            <a:off x="4476750" y="4629150"/>
-            <a:ext cx="1028700" cy="381000"/>
+            <a:off x="381000" y="1028700"/>
+            <a:ext cx="2381250" cy="1104900"/>
           </a:xfrm>
           <a:prstGeom prst="roundRect">
             <a:avLst>
-              <a:gd name="adj" fmla="val 50000"/>
+              <a:gd name="adj" fmla="val 8620"/>
+            </a:avLst>
+          </a:prstGeom>
+          <a:solidFill>
+            <a:srgbClr val="F7F9FC"/>
+          </a:solidFill>
+          <a:ln w="12700">
+            <a:solidFill>
+              <a:srgbClr val="D6DCE5"/>
+            </a:solidFill>
+          </a:ln>
+          <a:effectLst/>
+        </p:spPr>
+        <p:style>
+          <a:lnRef idx="1">
+            <a:schemeClr val="accent1"/>
+          </a:lnRef>
+          <a:fillRef idx="3">
+            <a:schemeClr val="accent1"/>
+          </a:fillRef>
+          <a:effectRef idx="2">
+            <a:schemeClr val="accent1"/>
+          </a:effectRef>
+          <a:fontRef idx="minor">
+            <a:schemeClr val="lt1"/>
+          </a:fontRef>
+        </p:style>
+        <p:txBody>
+          <a:bodyPr rtlCol="0" anchor="ctr" wrap="square"/>
+          <a:lstStyle/>
+          <a:p>
+            <a:pPr algn="ctr"/>
+          </a:p>
+        </p:txBody>
+      </p:sp>
+      <p:sp>
+        <p:nvSpPr>
+          <p:cNvPr id="6" name="TextBox 5"/>
+          <p:cNvSpPr txBox="1"/>
+          <p:nvPr/>
+        </p:nvSpPr>
+        <p:spPr>
+          <a:xfrm>
+            <a:off x="590550" y="1162050"/>
+            <a:ext cx="1905000" cy="571500"/>
+          </a:xfrm>
+          <a:prstGeom prst="rect">
+            <a:avLst/>
+          </a:prstGeom>
+          <a:noFill/>
+        </p:spPr>
+        <p:txBody>
+          <a:bodyPr wrap="square" lIns="0" rIns="0" tIns="0" bIns="0" anchor="ctr">
+            <a:spAutoFit/>
+          </a:bodyPr>
+          <a:lstStyle/>
+          <a:p>
+            <a:pPr algn="l">
+              <a:lnSpc>
+                <a:spcPct val="130000"/>
+              </a:lnSpc>
+            </a:pPr>
+            <a:r>
+              <a:rPr sz="3600" b="1">
+                <a:solidFill>
+                  <a:srgbClr val="D9534F"/>
+                </a:solidFill>
+                <a:latin typeface="Microsoft YaHei"/>
+              </a:rPr>
+              <a:t>2</a:t>
+            </a:r>
+          </a:p>
+        </p:txBody>
+      </p:sp>
+      <p:sp>
+        <p:nvSpPr>
+          <p:cNvPr id="7" name="TextBox 6"/>
+          <p:cNvSpPr txBox="1"/>
+          <p:nvPr/>
+        </p:nvSpPr>
+        <p:spPr>
+          <a:xfrm>
+            <a:off x="590550" y="1733550"/>
+            <a:ext cx="1905000" cy="285750"/>
+          </a:xfrm>
+          <a:prstGeom prst="rect">
+            <a:avLst/>
+          </a:prstGeom>
+          <a:noFill/>
+        </p:spPr>
+        <p:txBody>
+          <a:bodyPr wrap="square" lIns="0" rIns="0" tIns="0" bIns="0" anchor="ctr">
+            <a:spAutoFit/>
+          </a:bodyPr>
+          <a:lstStyle/>
+          <a:p>
+            <a:pPr algn="l">
+              <a:lnSpc>
+                <a:spcPct val="130000"/>
+              </a:lnSpc>
+            </a:pPr>
+            <a:r>
+              <a:rPr sz="1500" b="0">
+                <a:solidFill>
+                  <a:srgbClr val="1A2230"/>
+                </a:solidFill>
+                <a:latin typeface="Microsoft YaHei"/>
+              </a:rPr>
+              <a:t>严重缺陷</a:t>
+            </a:r>
+          </a:p>
+        </p:txBody>
+      </p:sp>
+      <p:sp>
+        <p:nvSpPr>
+          <p:cNvPr id="8" name="Rounded Rectangle 7"/>
+          <p:cNvSpPr/>
+          <p:nvPr/>
+        </p:nvSpPr>
+        <p:spPr>
+          <a:xfrm>
+            <a:off x="2914650" y="1028700"/>
+            <a:ext cx="2381250" cy="1104900"/>
+          </a:xfrm>
+          <a:prstGeom prst="roundRect">
+            <a:avLst>
+              <a:gd name="adj" fmla="val 8620"/>
+            </a:avLst>
+          </a:prstGeom>
+          <a:solidFill>
+            <a:srgbClr val="F7F9FC"/>
+          </a:solidFill>
+          <a:ln w="12700">
+            <a:solidFill>
+              <a:srgbClr val="D6DCE5"/>
+            </a:solidFill>
+          </a:ln>
+          <a:effectLst/>
+        </p:spPr>
+        <p:style>
+          <a:lnRef idx="1">
+            <a:schemeClr val="accent1"/>
+          </a:lnRef>
+          <a:fillRef idx="3">
+            <a:schemeClr val="accent1"/>
+          </a:fillRef>
+          <a:effectRef idx="2">
+            <a:schemeClr val="accent1"/>
+          </a:effectRef>
+          <a:fontRef idx="minor">
+            <a:schemeClr val="lt1"/>
+          </a:fontRef>
+        </p:style>
+        <p:txBody>
+          <a:bodyPr rtlCol="0" anchor="ctr" wrap="square"/>
+          <a:lstStyle/>
+          <a:p>
+            <a:pPr algn="ctr"/>
+          </a:p>
+        </p:txBody>
+      </p:sp>
+      <p:sp>
+        <p:nvSpPr>
+          <p:cNvPr id="9" name="TextBox 8"/>
+          <p:cNvSpPr txBox="1"/>
+          <p:nvPr/>
+        </p:nvSpPr>
+        <p:spPr>
+          <a:xfrm>
+            <a:off x="3124200" y="1162050"/>
+            <a:ext cx="1905000" cy="571500"/>
+          </a:xfrm>
+          <a:prstGeom prst="rect">
+            <a:avLst/>
+          </a:prstGeom>
+          <a:noFill/>
+        </p:spPr>
+        <p:txBody>
+          <a:bodyPr wrap="square" lIns="0" rIns="0" tIns="0" bIns="0" anchor="ctr">
+            <a:spAutoFit/>
+          </a:bodyPr>
+          <a:lstStyle/>
+          <a:p>
+            <a:pPr algn="l">
+              <a:lnSpc>
+                <a:spcPct val="130000"/>
+              </a:lnSpc>
+            </a:pPr>
+            <a:r>
+              <a:rPr sz="3600" b="1">
+                <a:solidFill>
+                  <a:srgbClr val="1E4FA8"/>
+                </a:solidFill>
+                <a:latin typeface="Microsoft YaHei"/>
+              </a:rPr>
+              <a:t>9</a:t>
+            </a:r>
+          </a:p>
+        </p:txBody>
+      </p:sp>
+      <p:sp>
+        <p:nvSpPr>
+          <p:cNvPr id="10" name="TextBox 9"/>
+          <p:cNvSpPr txBox="1"/>
+          <p:nvPr/>
+        </p:nvSpPr>
+        <p:spPr>
+          <a:xfrm>
+            <a:off x="3124200" y="1733550"/>
+            <a:ext cx="1905000" cy="285750"/>
+          </a:xfrm>
+          <a:prstGeom prst="rect">
+            <a:avLst/>
+          </a:prstGeom>
+          <a:noFill/>
+        </p:spPr>
+        <p:txBody>
+          <a:bodyPr wrap="square" lIns="0" rIns="0" tIns="0" bIns="0" anchor="ctr">
+            <a:spAutoFit/>
+          </a:bodyPr>
+          <a:lstStyle/>
+          <a:p>
+            <a:pPr algn="l">
+              <a:lnSpc>
+                <a:spcPct val="130000"/>
+              </a:lnSpc>
+            </a:pPr>
+            <a:r>
+              <a:rPr sz="1500" b="0">
+                <a:solidFill>
+                  <a:srgbClr val="1A2230"/>
+                </a:solidFill>
+                <a:latin typeface="Microsoft YaHei"/>
+              </a:rPr>
+              <a:t>中等缺陷</a:t>
+            </a:r>
+          </a:p>
+        </p:txBody>
+      </p:sp>
+      <p:sp>
+        <p:nvSpPr>
+          <p:cNvPr id="11" name="Rounded Rectangle 10"/>
+          <p:cNvSpPr/>
+          <p:nvPr/>
+        </p:nvSpPr>
+        <p:spPr>
+          <a:xfrm>
+            <a:off x="5448300" y="1028700"/>
+            <a:ext cx="2381250" cy="1104900"/>
+          </a:xfrm>
+          <a:prstGeom prst="roundRect">
+            <a:avLst>
+              <a:gd name="adj" fmla="val 8620"/>
+            </a:avLst>
+          </a:prstGeom>
+          <a:solidFill>
+            <a:srgbClr val="F7F9FC"/>
+          </a:solidFill>
+          <a:ln w="12700">
+            <a:solidFill>
+              <a:srgbClr val="D6DCE5"/>
+            </a:solidFill>
+          </a:ln>
+          <a:effectLst/>
+        </p:spPr>
+        <p:style>
+          <a:lnRef idx="1">
+            <a:schemeClr val="accent1"/>
+          </a:lnRef>
+          <a:fillRef idx="3">
+            <a:schemeClr val="accent1"/>
+          </a:fillRef>
+          <a:effectRef idx="2">
+            <a:schemeClr val="accent1"/>
+          </a:effectRef>
+          <a:fontRef idx="minor">
+            <a:schemeClr val="lt1"/>
+          </a:fontRef>
+        </p:style>
+        <p:txBody>
+          <a:bodyPr rtlCol="0" anchor="ctr" wrap="square"/>
+          <a:lstStyle/>
+          <a:p>
+            <a:pPr algn="ctr"/>
+          </a:p>
+        </p:txBody>
+      </p:sp>
+      <p:sp>
+        <p:nvSpPr>
+          <p:cNvPr id="12" name="TextBox 11"/>
+          <p:cNvSpPr txBox="1"/>
+          <p:nvPr/>
+        </p:nvSpPr>
+        <p:spPr>
+          <a:xfrm>
+            <a:off x="5657850" y="1162050"/>
+            <a:ext cx="1905000" cy="571500"/>
+          </a:xfrm>
+          <a:prstGeom prst="rect">
+            <a:avLst/>
+          </a:prstGeom>
+          <a:noFill/>
+        </p:spPr>
+        <p:txBody>
+          <a:bodyPr wrap="square" lIns="0" rIns="0" tIns="0" bIns="0" anchor="ctr">
+            <a:spAutoFit/>
+          </a:bodyPr>
+          <a:lstStyle/>
+          <a:p>
+            <a:pPr algn="l">
+              <a:lnSpc>
+                <a:spcPct val="130000"/>
+              </a:lnSpc>
+            </a:pPr>
+            <a:r>
+              <a:rPr sz="3600" b="1">
+                <a:solidFill>
+                  <a:srgbClr val="4A5568"/>
+                </a:solidFill>
+                <a:latin typeface="Microsoft YaHei"/>
+              </a:rPr>
+              <a:t>4</a:t>
+            </a:r>
+          </a:p>
+        </p:txBody>
+      </p:sp>
+      <p:sp>
+        <p:nvSpPr>
+          <p:cNvPr id="13" name="TextBox 12"/>
+          <p:cNvSpPr txBox="1"/>
+          <p:nvPr/>
+        </p:nvSpPr>
+        <p:spPr>
+          <a:xfrm>
+            <a:off x="5657850" y="1733550"/>
+            <a:ext cx="1905000" cy="285750"/>
+          </a:xfrm>
+          <a:prstGeom prst="rect">
+            <a:avLst/>
+          </a:prstGeom>
+          <a:noFill/>
+        </p:spPr>
+        <p:txBody>
+          <a:bodyPr wrap="square" lIns="0" rIns="0" tIns="0" bIns="0" anchor="ctr">
+            <a:spAutoFit/>
+          </a:bodyPr>
+          <a:lstStyle/>
+          <a:p>
+            <a:pPr algn="l">
+              <a:lnSpc>
+                <a:spcPct val="130000"/>
+              </a:lnSpc>
+            </a:pPr>
+            <a:r>
+              <a:rPr sz="1500" b="0">
+                <a:solidFill>
+                  <a:srgbClr val="1A2230"/>
+                </a:solidFill>
+                <a:latin typeface="Microsoft YaHei"/>
+              </a:rPr>
+              <a:t>轻微缺陷</a:t>
+            </a:r>
+          </a:p>
+        </p:txBody>
+      </p:sp>
+      <p:sp>
+        <p:nvSpPr>
+          <p:cNvPr id="14" name="TextBox 13"/>
+          <p:cNvSpPr txBox="1"/>
+          <p:nvPr/>
+        </p:nvSpPr>
+        <p:spPr>
+          <a:xfrm>
+            <a:off x="7981950" y="1028700"/>
+            <a:ext cx="3829050" cy="1104900"/>
+          </a:xfrm>
+          <a:prstGeom prst="rect">
+            <a:avLst/>
+          </a:prstGeom>
+          <a:noFill/>
+        </p:spPr>
+        <p:txBody>
+          <a:bodyPr wrap="square" lIns="0" rIns="0" tIns="0" bIns="0" anchor="t">
+            <a:spAutoFit/>
+          </a:bodyPr>
+          <a:lstStyle/>
+          <a:p>
+            <a:pPr algn="l">
+              <a:lnSpc>
+                <a:spcPct val="150000"/>
+              </a:lnSpc>
+            </a:pPr>
+            <a:r>
+              <a:rPr sz="1650" b="1">
+                <a:solidFill>
+                  <a:srgbClr val="0E3F8C"/>
+                </a:solidFill>
+                <a:latin typeface="Microsoft YaHei"/>
+              </a:rPr>
+              <a:t>全部已修复</a:t>
+            </a:r>
+          </a:p>
+          <a:p>
+            <a:pPr algn="l">
+              <a:lnSpc>
+                <a:spcPct val="150000"/>
+              </a:lnSpc>
+            </a:pPr>
+            <a:r>
+              <a:rPr sz="1650" b="1">
+                <a:solidFill>
+                  <a:srgbClr val="0E3F8C"/>
+                </a:solidFill>
+                <a:latin typeface="Microsoft YaHei"/>
+              </a:rPr>
+              <a:t>并补充了防回归手段</a:t>
+            </a:r>
+          </a:p>
+        </p:txBody>
+      </p:sp>
+      <p:sp>
+        <p:nvSpPr>
+          <p:cNvPr id="15" name="Rounded Rectangle 14"/>
+          <p:cNvSpPr/>
+          <p:nvPr/>
+        </p:nvSpPr>
+        <p:spPr>
+          <a:xfrm>
+            <a:off x="381000" y="2324100"/>
+            <a:ext cx="11430000" cy="1009650"/>
+          </a:xfrm>
+          <a:prstGeom prst="roundRect">
+            <a:avLst>
+              <a:gd name="adj" fmla="val 9433"/>
             </a:avLst>
           </a:prstGeom>
           <a:solidFill>
@@ -18180,57 +18314,181 @@
       </p:sp>
       <p:sp>
         <p:nvSpPr>
-          <p:cNvPr id="8" name="TextBox 7"/>
-          <p:cNvSpPr txBox="1"/>
-          <p:nvPr/>
-        </p:nvSpPr>
-        <p:spPr>
-          <a:xfrm>
-            <a:off x="4476750" y="4629150"/>
-            <a:ext cx="1028700" cy="381000"/>
-          </a:xfrm>
-          <a:prstGeom prst="rect">
-            <a:avLst/>
-          </a:prstGeom>
-          <a:noFill/>
-        </p:spPr>
-        <p:txBody>
-          <a:bodyPr wrap="square" lIns="0" rIns="0" tIns="0" bIns="0" anchor="ctr">
-            <a:spAutoFit/>
-          </a:bodyPr>
-          <a:lstStyle/>
-          <a:p>
-            <a:pPr algn="ctr">
-              <a:lnSpc>
-                <a:spcPct val="130000"/>
-              </a:lnSpc>
-            </a:pPr>
-            <a:r>
-              <a:rPr sz="1425" b="0">
-                <a:solidFill>
-                  <a:srgbClr val="1A2230"/>
-                </a:solidFill>
-                <a:latin typeface="Microsoft YaHei"/>
-              </a:rPr>
-              <a:t>已完成</a:t>
-            </a:r>
-          </a:p>
-        </p:txBody>
-      </p:sp>
-      <p:sp>
-        <p:nvSpPr>
-          <p:cNvPr id="9" name="Rounded Rectangle 8"/>
+          <p:cNvPr id="16" name="Rounded Rectangle 15"/>
           <p:cNvSpPr/>
           <p:nvPr/>
         </p:nvSpPr>
         <p:spPr>
           <a:xfrm>
-            <a:off x="5638800" y="4629150"/>
-            <a:ext cx="1028700" cy="381000"/>
+            <a:off x="571500" y="2647950"/>
+            <a:ext cx="666750" cy="361950"/>
           </a:xfrm>
           <a:prstGeom prst="roundRect">
             <a:avLst>
-              <a:gd name="adj" fmla="val 50000"/>
+              <a:gd name="adj" fmla="val 21052"/>
+            </a:avLst>
+          </a:prstGeom>
+          <a:solidFill>
+            <a:srgbClr val="D9534F"/>
+          </a:solidFill>
+          <a:ln>
+            <a:noFill/>
+          </a:ln>
+          <a:effectLst/>
+        </p:spPr>
+        <p:style>
+          <a:lnRef idx="1">
+            <a:schemeClr val="accent1"/>
+          </a:lnRef>
+          <a:fillRef idx="3">
+            <a:schemeClr val="accent1"/>
+          </a:fillRef>
+          <a:effectRef idx="2">
+            <a:schemeClr val="accent1"/>
+          </a:effectRef>
+          <a:fontRef idx="minor">
+            <a:schemeClr val="lt1"/>
+          </a:fontRef>
+        </p:style>
+        <p:txBody>
+          <a:bodyPr rtlCol="0" anchor="ctr" wrap="square"/>
+          <a:lstStyle/>
+          <a:p>
+            <a:pPr algn="ctr"/>
+          </a:p>
+        </p:txBody>
+      </p:sp>
+      <p:sp>
+        <p:nvSpPr>
+          <p:cNvPr id="17" name="TextBox 16"/>
+          <p:cNvSpPr txBox="1"/>
+          <p:nvPr/>
+        </p:nvSpPr>
+        <p:spPr>
+          <a:xfrm>
+            <a:off x="571500" y="2647950"/>
+            <a:ext cx="666750" cy="361950"/>
+          </a:xfrm>
+          <a:prstGeom prst="rect">
+            <a:avLst/>
+          </a:prstGeom>
+          <a:noFill/>
+        </p:spPr>
+        <p:txBody>
+          <a:bodyPr wrap="square" lIns="0" rIns="0" tIns="0" bIns="0" anchor="ctr">
+            <a:spAutoFit/>
+          </a:bodyPr>
+          <a:lstStyle/>
+          <a:p>
+            <a:pPr algn="ctr">
+              <a:lnSpc>
+                <a:spcPct val="130000"/>
+              </a:lnSpc>
+            </a:pPr>
+            <a:r>
+              <a:rPr sz="1275" b="1">
+                <a:solidFill>
+                  <a:srgbClr val="FFFFFF"/>
+                </a:solidFill>
+                <a:latin typeface="Microsoft YaHei"/>
+              </a:rPr>
+              <a:t>严重</a:t>
+            </a:r>
+          </a:p>
+        </p:txBody>
+      </p:sp>
+      <p:sp>
+        <p:nvSpPr>
+          <p:cNvPr id="18" name="TextBox 17"/>
+          <p:cNvSpPr txBox="1"/>
+          <p:nvPr/>
+        </p:nvSpPr>
+        <p:spPr>
+          <a:xfrm>
+            <a:off x="1409700" y="2457450"/>
+            <a:ext cx="10191750" cy="323850"/>
+          </a:xfrm>
+          <a:prstGeom prst="rect">
+            <a:avLst/>
+          </a:prstGeom>
+          <a:noFill/>
+        </p:spPr>
+        <p:txBody>
+          <a:bodyPr wrap="square" lIns="0" rIns="0" tIns="0" bIns="0" anchor="ctr">
+            <a:spAutoFit/>
+          </a:bodyPr>
+          <a:lstStyle/>
+          <a:p>
+            <a:pPr algn="l">
+              <a:lnSpc>
+                <a:spcPct val="130000"/>
+              </a:lnSpc>
+            </a:pPr>
+            <a:r>
+              <a:rPr sz="1575" b="1">
+                <a:solidFill>
+                  <a:srgbClr val="1A2230"/>
+                </a:solidFill>
+                <a:latin typeface="Microsoft YaHei"/>
+              </a:rPr>
+              <a:t>账号初始化不幂等，后端第二次启动直接失败</a:t>
+            </a:r>
+          </a:p>
+        </p:txBody>
+      </p:sp>
+      <p:sp>
+        <p:nvSpPr>
+          <p:cNvPr id="19" name="TextBox 18"/>
+          <p:cNvSpPr txBox="1"/>
+          <p:nvPr/>
+        </p:nvSpPr>
+        <p:spPr>
+          <a:xfrm>
+            <a:off x="1409700" y="2819400"/>
+            <a:ext cx="10191750" cy="400050"/>
+          </a:xfrm>
+          <a:prstGeom prst="rect">
+            <a:avLst/>
+          </a:prstGeom>
+          <a:noFill/>
+        </p:spPr>
+        <p:txBody>
+          <a:bodyPr wrap="square" lIns="0" rIns="0" tIns="0" bIns="0" anchor="t">
+            <a:spAutoFit/>
+          </a:bodyPr>
+          <a:lstStyle/>
+          <a:p>
+            <a:pPr algn="l">
+              <a:lnSpc>
+                <a:spcPct val="140000"/>
+              </a:lnSpc>
+            </a:pPr>
+            <a:r>
+              <a:rPr sz="1350" b="0">
+                <a:solidFill>
+                  <a:srgbClr val="4A5568"/>
+                </a:solidFill>
+                <a:latin typeface="Microsoft YaHei"/>
+              </a:rPr>
+              <a:t>重复绑角色触发主键冲突，事务被标记回滚 → 改为 SQL 层幂等写入</a:t>
+            </a:r>
+          </a:p>
+        </p:txBody>
+      </p:sp>
+      <p:sp>
+        <p:nvSpPr>
+          <p:cNvPr id="20" name="Rounded Rectangle 19"/>
+          <p:cNvSpPr/>
+          <p:nvPr/>
+        </p:nvSpPr>
+        <p:spPr>
+          <a:xfrm>
+            <a:off x="381000" y="3448050"/>
+            <a:ext cx="11430000" cy="1009650"/>
+          </a:xfrm>
+          <a:prstGeom prst="roundRect">
+            <a:avLst>
+              <a:gd name="adj" fmla="val 9433"/>
             </a:avLst>
           </a:prstGeom>
           <a:solidFill>
@@ -18267,57 +18525,181 @@
       </p:sp>
       <p:sp>
         <p:nvSpPr>
-          <p:cNvPr id="10" name="TextBox 9"/>
-          <p:cNvSpPr txBox="1"/>
-          <p:nvPr/>
-        </p:nvSpPr>
-        <p:spPr>
-          <a:xfrm>
-            <a:off x="5638800" y="4629150"/>
-            <a:ext cx="1028700" cy="381000"/>
-          </a:xfrm>
-          <a:prstGeom prst="rect">
-            <a:avLst/>
-          </a:prstGeom>
-          <a:noFill/>
-        </p:spPr>
-        <p:txBody>
-          <a:bodyPr wrap="square" lIns="0" rIns="0" tIns="0" bIns="0" anchor="ctr">
-            <a:spAutoFit/>
-          </a:bodyPr>
-          <a:lstStyle/>
-          <a:p>
-            <a:pPr algn="ctr">
-              <a:lnSpc>
-                <a:spcPct val="130000"/>
-              </a:lnSpc>
-            </a:pPr>
-            <a:r>
-              <a:rPr sz="1425" b="0">
-                <a:solidFill>
-                  <a:srgbClr val="1A2230"/>
-                </a:solidFill>
-                <a:latin typeface="Microsoft YaHei"/>
-              </a:rPr>
-              <a:t>未完成</a:t>
-            </a:r>
-          </a:p>
-        </p:txBody>
-      </p:sp>
-      <p:sp>
-        <p:nvSpPr>
-          <p:cNvPr id="11" name="Rounded Rectangle 10"/>
+          <p:cNvPr id="21" name="Rounded Rectangle 20"/>
           <p:cNvSpPr/>
           <p:nvPr/>
         </p:nvSpPr>
         <p:spPr>
           <a:xfrm>
-            <a:off x="6800850" y="4629150"/>
-            <a:ext cx="1028700" cy="381000"/>
+            <a:off x="571500" y="3771900"/>
+            <a:ext cx="666750" cy="361950"/>
           </a:xfrm>
           <a:prstGeom prst="roundRect">
             <a:avLst>
-              <a:gd name="adj" fmla="val 50000"/>
+              <a:gd name="adj" fmla="val 21052"/>
+            </a:avLst>
+          </a:prstGeom>
+          <a:solidFill>
+            <a:srgbClr val="1E4FA8"/>
+          </a:solidFill>
+          <a:ln>
+            <a:noFill/>
+          </a:ln>
+          <a:effectLst/>
+        </p:spPr>
+        <p:style>
+          <a:lnRef idx="1">
+            <a:schemeClr val="accent1"/>
+          </a:lnRef>
+          <a:fillRef idx="3">
+            <a:schemeClr val="accent1"/>
+          </a:fillRef>
+          <a:effectRef idx="2">
+            <a:schemeClr val="accent1"/>
+          </a:effectRef>
+          <a:fontRef idx="minor">
+            <a:schemeClr val="lt1"/>
+          </a:fontRef>
+        </p:style>
+        <p:txBody>
+          <a:bodyPr rtlCol="0" anchor="ctr" wrap="square"/>
+          <a:lstStyle/>
+          <a:p>
+            <a:pPr algn="ctr"/>
+          </a:p>
+        </p:txBody>
+      </p:sp>
+      <p:sp>
+        <p:nvSpPr>
+          <p:cNvPr id="22" name="TextBox 21"/>
+          <p:cNvSpPr txBox="1"/>
+          <p:nvPr/>
+        </p:nvSpPr>
+        <p:spPr>
+          <a:xfrm>
+            <a:off x="571500" y="3771900"/>
+            <a:ext cx="666750" cy="361950"/>
+          </a:xfrm>
+          <a:prstGeom prst="rect">
+            <a:avLst/>
+          </a:prstGeom>
+          <a:noFill/>
+        </p:spPr>
+        <p:txBody>
+          <a:bodyPr wrap="square" lIns="0" rIns="0" tIns="0" bIns="0" anchor="ctr">
+            <a:spAutoFit/>
+          </a:bodyPr>
+          <a:lstStyle/>
+          <a:p>
+            <a:pPr algn="ctr">
+              <a:lnSpc>
+                <a:spcPct val="130000"/>
+              </a:lnSpc>
+            </a:pPr>
+            <a:r>
+              <a:rPr sz="1275" b="1">
+                <a:solidFill>
+                  <a:srgbClr val="FFFFFF"/>
+                </a:solidFill>
+                <a:latin typeface="Microsoft YaHei"/>
+              </a:rPr>
+              <a:t>中等</a:t>
+            </a:r>
+          </a:p>
+        </p:txBody>
+      </p:sp>
+      <p:sp>
+        <p:nvSpPr>
+          <p:cNvPr id="23" name="TextBox 22"/>
+          <p:cNvSpPr txBox="1"/>
+          <p:nvPr/>
+        </p:nvSpPr>
+        <p:spPr>
+          <a:xfrm>
+            <a:off x="1409700" y="3581400"/>
+            <a:ext cx="10191750" cy="323850"/>
+          </a:xfrm>
+          <a:prstGeom prst="rect">
+            <a:avLst/>
+          </a:prstGeom>
+          <a:noFill/>
+        </p:spPr>
+        <p:txBody>
+          <a:bodyPr wrap="square" lIns="0" rIns="0" tIns="0" bIns="0" anchor="ctr">
+            <a:spAutoFit/>
+          </a:bodyPr>
+          <a:lstStyle/>
+          <a:p>
+            <a:pPr algn="l">
+              <a:lnSpc>
+                <a:spcPct val="130000"/>
+              </a:lnSpc>
+            </a:pPr>
+            <a:r>
+              <a:rPr sz="1575" b="1">
+                <a:solidFill>
+                  <a:srgbClr val="1A2230"/>
+                </a:solidFill>
+                <a:latin typeface="Microsoft YaHei"/>
+              </a:rPr>
+              <a:t>字符串预约号未加引号，按钮点了没反应</a:t>
+            </a:r>
+          </a:p>
+        </p:txBody>
+      </p:sp>
+      <p:sp>
+        <p:nvSpPr>
+          <p:cNvPr id="24" name="TextBox 23"/>
+          <p:cNvSpPr txBox="1"/>
+          <p:nvPr/>
+        </p:nvSpPr>
+        <p:spPr>
+          <a:xfrm>
+            <a:off x="1409700" y="3943350"/>
+            <a:ext cx="10191750" cy="400050"/>
+          </a:xfrm>
+          <a:prstGeom prst="rect">
+            <a:avLst/>
+          </a:prstGeom>
+          <a:noFill/>
+        </p:spPr>
+        <p:txBody>
+          <a:bodyPr wrap="square" lIns="0" rIns="0" tIns="0" bIns="0" anchor="t">
+            <a:spAutoFit/>
+          </a:bodyPr>
+          <a:lstStyle/>
+          <a:p>
+            <a:pPr algn="l">
+              <a:lnSpc>
+                <a:spcPct val="140000"/>
+              </a:lnSpc>
+            </a:pPr>
+            <a:r>
+              <a:rPr sz="1350" b="0">
+                <a:solidFill>
+                  <a:srgbClr val="4A5568"/>
+                </a:solidFill>
+                <a:latin typeface="Microsoft YaHei"/>
+              </a:rPr>
+              <a:t>前端拼接事件参数时少了引号，被当成变量 → 修复并加静态检查永久防回归</a:t>
+            </a:r>
+          </a:p>
+        </p:txBody>
+      </p:sp>
+      <p:sp>
+        <p:nvSpPr>
+          <p:cNvPr id="25" name="Rounded Rectangle 24"/>
+          <p:cNvSpPr/>
+          <p:nvPr/>
+        </p:nvSpPr>
+        <p:spPr>
+          <a:xfrm>
+            <a:off x="381000" y="4572000"/>
+            <a:ext cx="11430000" cy="1009650"/>
+          </a:xfrm>
+          <a:prstGeom prst="roundRect">
+            <a:avLst>
+              <a:gd name="adj" fmla="val 9433"/>
             </a:avLst>
           </a:prstGeom>
           <a:solidFill>
@@ -18354,14 +18736,60 @@
       </p:sp>
       <p:sp>
         <p:nvSpPr>
-          <p:cNvPr id="12" name="TextBox 11"/>
-          <p:cNvSpPr txBox="1"/>
-          <p:nvPr/>
-        </p:nvSpPr>
-        <p:spPr>
-          <a:xfrm>
-            <a:off x="6800850" y="4629150"/>
-            <a:ext cx="1028700" cy="381000"/>
+          <p:cNvPr id="26" name="Rounded Rectangle 25"/>
+          <p:cNvSpPr/>
+          <p:nvPr/>
+        </p:nvSpPr>
+        <p:spPr>
+          <a:xfrm>
+            <a:off x="571500" y="4895850"/>
+            <a:ext cx="666750" cy="361950"/>
+          </a:xfrm>
+          <a:prstGeom prst="roundRect">
+            <a:avLst>
+              <a:gd name="adj" fmla="val 21052"/>
+            </a:avLst>
+          </a:prstGeom>
+          <a:solidFill>
+            <a:srgbClr val="1E4FA8"/>
+          </a:solidFill>
+          <a:ln>
+            <a:noFill/>
+          </a:ln>
+          <a:effectLst/>
+        </p:spPr>
+        <p:style>
+          <a:lnRef idx="1">
+            <a:schemeClr val="accent1"/>
+          </a:lnRef>
+          <a:fillRef idx="3">
+            <a:schemeClr val="accent1"/>
+          </a:fillRef>
+          <a:effectRef idx="2">
+            <a:schemeClr val="accent1"/>
+          </a:effectRef>
+          <a:fontRef idx="minor">
+            <a:schemeClr val="lt1"/>
+          </a:fontRef>
+        </p:style>
+        <p:txBody>
+          <a:bodyPr rtlCol="0" anchor="ctr" wrap="square"/>
+          <a:lstStyle/>
+          <a:p>
+            <a:pPr algn="ctr"/>
+          </a:p>
+        </p:txBody>
+      </p:sp>
+      <p:sp>
+        <p:nvSpPr>
+          <p:cNvPr id="27" name="TextBox 26"/>
+          <p:cNvSpPr txBox="1"/>
+          <p:nvPr/>
+        </p:nvSpPr>
+        <p:spPr>
+          <a:xfrm>
+            <a:off x="571500" y="4895850"/>
+            <a:ext cx="666750" cy="361950"/>
           </a:xfrm>
           <a:prstGeom prst="rect">
             <a:avLst/>
@@ -18380,20 +18808,266 @@
               </a:lnSpc>
             </a:pPr>
             <a:r>
-              <a:rPr sz="1425" b="0">
+              <a:rPr sz="1275" b="1">
+                <a:solidFill>
+                  <a:srgbClr val="FFFFFF"/>
+                </a:solidFill>
+                <a:latin typeface="Microsoft YaHei"/>
+              </a:rPr>
+              <a:t>中等</a:t>
+            </a:r>
+          </a:p>
+        </p:txBody>
+      </p:sp>
+      <p:sp>
+        <p:nvSpPr>
+          <p:cNvPr id="28" name="TextBox 27"/>
+          <p:cNvSpPr txBox="1"/>
+          <p:nvPr/>
+        </p:nvSpPr>
+        <p:spPr>
+          <a:xfrm>
+            <a:off x="1409700" y="4705350"/>
+            <a:ext cx="10191750" cy="323850"/>
+          </a:xfrm>
+          <a:prstGeom prst="rect">
+            <a:avLst/>
+          </a:prstGeom>
+          <a:noFill/>
+        </p:spPr>
+        <p:txBody>
+          <a:bodyPr wrap="square" lIns="0" rIns="0" tIns="0" bIns="0" anchor="ctr">
+            <a:spAutoFit/>
+          </a:bodyPr>
+          <a:lstStyle/>
+          <a:p>
+            <a:pPr algn="l">
+              <a:lnSpc>
+                <a:spcPct val="130000"/>
+              </a:lnSpc>
+            </a:pPr>
+            <a:r>
+              <a:rPr sz="1575" b="1">
                 <a:solidFill>
                   <a:srgbClr val="1A2230"/>
                 </a:solidFill>
                 <a:latin typeface="Microsoft YaHei"/>
               </a:rPr>
-              <a:t>下一步</a:t>
-            </a:r>
-          </a:p>
-        </p:txBody>
-      </p:sp>
-      <p:sp>
-        <p:nvSpPr>
-          <p:cNvPr id="13" name="Rectangle 12"/>
+              <a:t>切换标签时的请求竞态，面板偶发空白</a:t>
+            </a:r>
+          </a:p>
+        </p:txBody>
+      </p:sp>
+      <p:sp>
+        <p:nvSpPr>
+          <p:cNvPr id="29" name="TextBox 28"/>
+          <p:cNvSpPr txBox="1"/>
+          <p:nvPr/>
+        </p:nvSpPr>
+        <p:spPr>
+          <a:xfrm>
+            <a:off x="1409700" y="5067300"/>
+            <a:ext cx="10191750" cy="400050"/>
+          </a:xfrm>
+          <a:prstGeom prst="rect">
+            <a:avLst/>
+          </a:prstGeom>
+          <a:noFill/>
+        </p:spPr>
+        <p:txBody>
+          <a:bodyPr wrap="square" lIns="0" rIns="0" tIns="0" bIns="0" anchor="t">
+            <a:spAutoFit/>
+          </a:bodyPr>
+          <a:lstStyle/>
+          <a:p>
+            <a:pPr algn="l">
+              <a:lnSpc>
+                <a:spcPct val="140000"/>
+              </a:lnSpc>
+            </a:pPr>
+            <a:r>
+              <a:rPr sz="1350" b="0">
+                <a:solidFill>
+                  <a:srgbClr val="4A5568"/>
+                </a:solidFill>
+                <a:latin typeface="Microsoft YaHei"/>
+              </a:rPr>
+              <a:t>自动加载的旧响应覆盖了新结果 → 统一响应结构并丢弃过期响应</a:t>
+            </a:r>
+          </a:p>
+        </p:txBody>
+      </p:sp>
+      <p:sp>
+        <p:nvSpPr>
+          <p:cNvPr id="30" name="Rounded Rectangle 29"/>
+          <p:cNvSpPr/>
+          <p:nvPr/>
+        </p:nvSpPr>
+        <p:spPr>
+          <a:xfrm>
+            <a:off x="381000" y="5695950"/>
+            <a:ext cx="11430000" cy="438150"/>
+          </a:xfrm>
+          <a:prstGeom prst="roundRect">
+            <a:avLst>
+              <a:gd name="adj" fmla="val 17391"/>
+            </a:avLst>
+          </a:prstGeom>
+          <a:solidFill>
+            <a:srgbClr val="E8EFF8"/>
+          </a:solidFill>
+          <a:ln>
+            <a:noFill/>
+          </a:ln>
+          <a:effectLst/>
+        </p:spPr>
+        <p:style>
+          <a:lnRef idx="1">
+            <a:schemeClr val="accent1"/>
+          </a:lnRef>
+          <a:fillRef idx="3">
+            <a:schemeClr val="accent1"/>
+          </a:fillRef>
+          <a:effectRef idx="2">
+            <a:schemeClr val="accent1"/>
+          </a:effectRef>
+          <a:fontRef idx="minor">
+            <a:schemeClr val="lt1"/>
+          </a:fontRef>
+        </p:style>
+        <p:txBody>
+          <a:bodyPr rtlCol="0" anchor="ctr" wrap="square"/>
+          <a:lstStyle/>
+          <a:p>
+            <a:pPr algn="ctr"/>
+          </a:p>
+        </p:txBody>
+      </p:sp>
+      <p:sp>
+        <p:nvSpPr>
+          <p:cNvPr id="31" name="Rectangle 30"/>
+          <p:cNvSpPr/>
+          <p:nvPr/>
+        </p:nvSpPr>
+        <p:spPr>
+          <a:xfrm>
+            <a:off x="381000" y="5695950"/>
+            <a:ext cx="38100" cy="438150"/>
+          </a:xfrm>
+          <a:prstGeom prst="rect">
+            <a:avLst/>
+          </a:prstGeom>
+          <a:solidFill>
+            <a:srgbClr val="1E4FA8"/>
+          </a:solidFill>
+          <a:ln>
+            <a:noFill/>
+          </a:ln>
+          <a:effectLst/>
+        </p:spPr>
+        <p:style>
+          <a:lnRef idx="1">
+            <a:schemeClr val="accent1"/>
+          </a:lnRef>
+          <a:fillRef idx="3">
+            <a:schemeClr val="accent1"/>
+          </a:fillRef>
+          <a:effectRef idx="2">
+            <a:schemeClr val="accent1"/>
+          </a:effectRef>
+          <a:fontRef idx="minor">
+            <a:schemeClr val="lt1"/>
+          </a:fontRef>
+        </p:style>
+        <p:txBody>
+          <a:bodyPr rtlCol="0" anchor="ctr" wrap="square"/>
+          <a:lstStyle/>
+          <a:p>
+            <a:pPr algn="ctr"/>
+          </a:p>
+        </p:txBody>
+      </p:sp>
+      <p:sp>
+        <p:nvSpPr>
+          <p:cNvPr id="32" name="TextBox 31"/>
+          <p:cNvSpPr txBox="1"/>
+          <p:nvPr/>
+        </p:nvSpPr>
+        <p:spPr>
+          <a:xfrm>
+            <a:off x="533400" y="5695950"/>
+            <a:ext cx="914400" cy="438150"/>
+          </a:xfrm>
+          <a:prstGeom prst="rect">
+            <a:avLst/>
+          </a:prstGeom>
+          <a:noFill/>
+        </p:spPr>
+        <p:txBody>
+          <a:bodyPr wrap="square" lIns="0" rIns="0" tIns="0" bIns="0" anchor="ctr">
+            <a:spAutoFit/>
+          </a:bodyPr>
+          <a:lstStyle/>
+          <a:p>
+            <a:pPr algn="l">
+              <a:lnSpc>
+                <a:spcPct val="130000"/>
+              </a:lnSpc>
+            </a:pPr>
+            <a:r>
+              <a:rPr sz="1500" b="1">
+                <a:solidFill>
+                  <a:srgbClr val="1E4FA8"/>
+                </a:solidFill>
+                <a:latin typeface="Microsoft YaHei"/>
+              </a:rPr>
+              <a:t>判断</a:t>
+            </a:r>
+          </a:p>
+        </p:txBody>
+      </p:sp>
+      <p:sp>
+        <p:nvSpPr>
+          <p:cNvPr id="33" name="TextBox 32"/>
+          <p:cNvSpPr txBox="1"/>
+          <p:nvPr/>
+        </p:nvSpPr>
+        <p:spPr>
+          <a:xfrm>
+            <a:off x="1504950" y="5695950"/>
+            <a:ext cx="10134600" cy="438150"/>
+          </a:xfrm>
+          <a:prstGeom prst="rect">
+            <a:avLst/>
+          </a:prstGeom>
+          <a:noFill/>
+        </p:spPr>
+        <p:txBody>
+          <a:bodyPr wrap="square" lIns="0" rIns="0" tIns="0" bIns="0" anchor="ctr">
+            <a:spAutoFit/>
+          </a:bodyPr>
+          <a:lstStyle/>
+          <a:p>
+            <a:pPr algn="l">
+              <a:lnSpc>
+                <a:spcPct val="135000"/>
+              </a:lnSpc>
+            </a:pPr>
+            <a:r>
+              <a:rPr sz="1500" b="0">
+                <a:solidFill>
+                  <a:srgbClr val="1A2230"/>
+                </a:solidFill>
+                <a:latin typeface="Microsoft YaHei"/>
+              </a:rPr>
+              <a:t>能复现、能定位、能防回归，缺陷才是资产；只写"已修复"等于没讲</a:t>
+            </a:r>
+          </a:p>
+        </p:txBody>
+      </p:sp>
+      <p:sp>
+        <p:nvSpPr>
+          <p:cNvPr id="34" name="Rectangle 33"/>
           <p:cNvSpPr/>
           <p:nvPr/>
         </p:nvSpPr>
@@ -18437,7 +19111,7 @@
       </p:sp>
       <p:sp>
         <p:nvSpPr>
-          <p:cNvPr id="14" name="TextBox 13"/>
+          <p:cNvPr id="35" name="TextBox 34"/>
           <p:cNvSpPr txBox="1"/>
           <p:nvPr/>
         </p:nvSpPr>
@@ -18469,14 +19143,14 @@
                 </a:solidFill>
                 <a:latin typeface="Microsoft YaHei"/>
               </a:rPr>
-              <a:t>健身房运营管理系统 · 课程答辩</a:t>
-            </a:r>
-          </a:p>
-        </p:txBody>
-      </p:sp>
-      <p:sp>
-        <p:nvSpPr>
-          <p:cNvPr id="15" name="TextBox 14"/>
+              <a:t>来源：系统测试文档 · 缺陷记录章节</a:t>
+            </a:r>
+          </a:p>
+        </p:txBody>
+      </p:sp>
+      <p:sp>
+        <p:nvSpPr>
+          <p:cNvPr id="36" name="TextBox 35"/>
           <p:cNvSpPr txBox="1"/>
           <p:nvPr/>
         </p:nvSpPr>
@@ -18508,7 +19182,7 @@
                 </a:solidFill>
                 <a:latin typeface="Microsoft YaHei"/>
               </a:rPr>
-              <a:t>20 / 22</a:t>
+              <a:t>19 / 23</a:t>
             </a:r>
           </a:p>
         </p:txBody>
@@ -18527,7 +19201,7 @@
     <p:bg>
       <p:bgPr>
         <a:solidFill>
-          <a:srgbClr val="FFFFFF"/>
+          <a:srgbClr val="F7F9FC"/>
         </a:solidFill>
         <a:effectLst/>
       </p:bgPr>
@@ -18541,14 +19215,131 @@
       <p:grpSpPr/>
       <p:sp>
         <p:nvSpPr>
-          <p:cNvPr id="2" name="Rectangle 1"/>
+          <p:cNvPr id="2" name="TextBox 1"/>
+          <p:cNvSpPr txBox="1"/>
+          <p:nvPr/>
+        </p:nvSpPr>
+        <p:spPr>
+          <a:xfrm>
+            <a:off x="0" y="1238250"/>
+            <a:ext cx="12192000" cy="3048000"/>
+          </a:xfrm>
+          <a:prstGeom prst="rect">
+            <a:avLst/>
+          </a:prstGeom>
+          <a:noFill/>
+        </p:spPr>
+        <p:txBody>
+          <a:bodyPr wrap="square" lIns="0" rIns="0" tIns="0" bIns="0" anchor="ctr">
+            <a:spAutoFit/>
+          </a:bodyPr>
+          <a:lstStyle/>
+          <a:p>
+            <a:pPr algn="ctr">
+              <a:lnSpc>
+                <a:spcPct val="130000"/>
+              </a:lnSpc>
+            </a:pPr>
+            <a:r>
+              <a:rPr sz="18000" b="1">
+                <a:solidFill>
+                  <a:srgbClr val="E8EFF8"/>
+                </a:solidFill>
+                <a:latin typeface="Microsoft YaHei"/>
+              </a:rPr>
+              <a:t>05</a:t>
+            </a:r>
+          </a:p>
+        </p:txBody>
+      </p:sp>
+      <p:sp>
+        <p:nvSpPr>
+          <p:cNvPr id="3" name="TextBox 2"/>
+          <p:cNvSpPr txBox="1"/>
+          <p:nvPr/>
+        </p:nvSpPr>
+        <p:spPr>
+          <a:xfrm>
+            <a:off x="1333500" y="2286000"/>
+            <a:ext cx="9525000" cy="342900"/>
+          </a:xfrm>
+          <a:prstGeom prst="rect">
+            <a:avLst/>
+          </a:prstGeom>
+          <a:noFill/>
+        </p:spPr>
+        <p:txBody>
+          <a:bodyPr wrap="square" lIns="0" rIns="0" tIns="0" bIns="0" anchor="ctr">
+            <a:spAutoFit/>
+          </a:bodyPr>
+          <a:lstStyle/>
+          <a:p>
+            <a:pPr algn="ctr">
+              <a:lnSpc>
+                <a:spcPct val="130000"/>
+              </a:lnSpc>
+            </a:pPr>
+            <a:r>
+              <a:rPr sz="1650" b="0">
+                <a:solidFill>
+                  <a:srgbClr val="3D7BD9"/>
+                </a:solidFill>
+                <a:latin typeface="Microsoft YaHei"/>
+              </a:rPr>
+              <a:t>第五部分</a:t>
+            </a:r>
+          </a:p>
+        </p:txBody>
+      </p:sp>
+      <p:sp>
+        <p:nvSpPr>
+          <p:cNvPr id="4" name="TextBox 3"/>
+          <p:cNvSpPr txBox="1"/>
+          <p:nvPr/>
+        </p:nvSpPr>
+        <p:spPr>
+          <a:xfrm>
+            <a:off x="1333500" y="2686050"/>
+            <a:ext cx="9525000" cy="819150"/>
+          </a:xfrm>
+          <a:prstGeom prst="rect">
+            <a:avLst/>
+          </a:prstGeom>
+          <a:noFill/>
+        </p:spPr>
+        <p:txBody>
+          <a:bodyPr wrap="square" lIns="0" rIns="0" tIns="0" bIns="0" anchor="ctr">
+            <a:spAutoFit/>
+          </a:bodyPr>
+          <a:lstStyle/>
+          <a:p>
+            <a:pPr algn="ctr">
+              <a:lnSpc>
+                <a:spcPct val="130000"/>
+              </a:lnSpc>
+            </a:pPr>
+            <a:r>
+              <a:rPr sz="4050" b="1">
+                <a:solidFill>
+                  <a:srgbClr val="0E3F8C"/>
+                </a:solidFill>
+                <a:latin typeface="Microsoft YaHei"/>
+              </a:rPr>
+              <a:t>总结与展望</a:t>
+            </a:r>
+          </a:p>
+        </p:txBody>
+      </p:sp>
+      <p:sp>
+        <p:nvSpPr>
+          <p:cNvPr id="5" name="Rectangle 4"/>
           <p:cNvSpPr/>
           <p:nvPr/>
         </p:nvSpPr>
         <p:spPr>
           <a:xfrm>
-            <a:off x="0" y="0"/>
-            <a:ext cx="12192000" cy="762000"/>
+            <a:off x="5524500" y="3600450"/>
+            <a:ext cx="1143000" cy="38100"/>
           </a:xfrm>
           <a:prstGeom prst="rect">
             <a:avLst/>
@@ -18585,14 +19376,14 @@
       </p:sp>
       <p:sp>
         <p:nvSpPr>
-          <p:cNvPr id="3" name="TextBox 2"/>
-          <p:cNvSpPr txBox="1"/>
-          <p:nvPr/>
-        </p:nvSpPr>
-        <p:spPr>
-          <a:xfrm>
-            <a:off x="381000" y="0"/>
-            <a:ext cx="7239000" cy="762000"/>
+          <p:cNvPr id="6" name="TextBox 5"/>
+          <p:cNvSpPr txBox="1"/>
+          <p:nvPr/>
+        </p:nvSpPr>
+        <p:spPr>
+          <a:xfrm>
+            <a:off x="1905000" y="3810000"/>
+            <a:ext cx="8382000" cy="571500"/>
           </a:xfrm>
           <a:prstGeom prst="rect">
             <a:avLst/>
@@ -18605,161 +19396,37 @@
           </a:bodyPr>
           <a:lstStyle/>
           <a:p>
-            <a:pPr algn="l">
-              <a:lnSpc>
-                <a:spcPct val="130000"/>
-              </a:lnSpc>
-            </a:pPr>
-            <a:r>
-              <a:rPr sz="2400" b="1">
-                <a:solidFill>
-                  <a:srgbClr val="FFFFFF"/>
-                </a:solidFill>
-                <a:latin typeface="Microsoft YaHei"/>
-              </a:rPr>
-              <a:t>没做完的部分，以及下一步</a:t>
-            </a:r>
-          </a:p>
-        </p:txBody>
-      </p:sp>
-      <p:sp>
-        <p:nvSpPr>
-          <p:cNvPr id="4" name="TextBox 3"/>
-          <p:cNvSpPr txBox="1"/>
-          <p:nvPr/>
-        </p:nvSpPr>
-        <p:spPr>
-          <a:xfrm>
-            <a:off x="7620000" y="0"/>
-            <a:ext cx="4191000" cy="762000"/>
-          </a:xfrm>
-          <a:prstGeom prst="rect">
-            <a:avLst/>
-          </a:prstGeom>
-          <a:noFill/>
-        </p:spPr>
-        <p:txBody>
-          <a:bodyPr wrap="square" lIns="0" rIns="0" tIns="0" bIns="0" anchor="ctr">
-            <a:spAutoFit/>
-          </a:bodyPr>
-          <a:lstStyle/>
-          <a:p>
-            <a:pPr algn="r">
-              <a:lnSpc>
-                <a:spcPct val="130000"/>
-              </a:lnSpc>
-            </a:pPr>
-            <a:r>
-              <a:rPr sz="1050" b="0">
-                <a:solidFill>
-                  <a:srgbClr val="BFD3F0"/>
-                </a:solidFill>
-                <a:latin typeface="Microsoft YaHei"/>
-              </a:rPr>
-              <a:t>健身房运营管理系统 · 课程答辩</a:t>
-            </a:r>
-          </a:p>
-        </p:txBody>
-      </p:sp>
-      <p:sp>
-        <p:nvSpPr>
-          <p:cNvPr id="5" name="Rounded Rectangle 4"/>
+            <a:pPr algn="ctr">
+              <a:lnSpc>
+                <a:spcPct val="150000"/>
+              </a:lnSpc>
+            </a:pPr>
+            <a:r>
+              <a:rPr sz="1575" b="0">
+                <a:solidFill>
+                  <a:srgbClr val="4A5568"/>
+                </a:solidFill>
+                <a:latin typeface="Microsoft YaHei"/>
+              </a:rPr>
+              <a:t>做完的说清楚，没做完的也交代明白</a:t>
+            </a:r>
+          </a:p>
+        </p:txBody>
+      </p:sp>
+      <p:sp>
+        <p:nvSpPr>
+          <p:cNvPr id="7" name="Rounded Rectangle 6"/>
           <p:cNvSpPr/>
           <p:nvPr/>
         </p:nvSpPr>
         <p:spPr>
           <a:xfrm>
-            <a:off x="381000" y="1028700"/>
-            <a:ext cx="6667500" cy="4305300"/>
+            <a:off x="4476750" y="4629150"/>
+            <a:ext cx="1028700" cy="381000"/>
           </a:xfrm>
           <a:prstGeom prst="roundRect">
             <a:avLst>
-              <a:gd name="adj" fmla="val 2654"/>
-            </a:avLst>
-          </a:prstGeom>
-          <a:solidFill>
-            <a:srgbClr val="E8EFF8"/>
-          </a:solidFill>
-          <a:ln>
-            <a:noFill/>
-          </a:ln>
-          <a:effectLst/>
-        </p:spPr>
-        <p:style>
-          <a:lnRef idx="1">
-            <a:schemeClr val="accent1"/>
-          </a:lnRef>
-          <a:fillRef idx="3">
-            <a:schemeClr val="accent1"/>
-          </a:fillRef>
-          <a:effectRef idx="2">
-            <a:schemeClr val="accent1"/>
-          </a:effectRef>
-          <a:fontRef idx="minor">
-            <a:schemeClr val="lt1"/>
-          </a:fontRef>
-        </p:style>
-        <p:txBody>
-          <a:bodyPr rtlCol="0" anchor="ctr" wrap="square"/>
-          <a:lstStyle/>
-          <a:p>
-            <a:pPr algn="ctr"/>
-          </a:p>
-        </p:txBody>
-      </p:sp>
-      <p:sp>
-        <p:nvSpPr>
-          <p:cNvPr id="6" name="TextBox 5"/>
-          <p:cNvSpPr txBox="1"/>
-          <p:nvPr/>
-        </p:nvSpPr>
-        <p:spPr>
-          <a:xfrm>
-            <a:off x="590550" y="1219200"/>
-            <a:ext cx="6248400" cy="323850"/>
-          </a:xfrm>
-          <a:prstGeom prst="rect">
-            <a:avLst/>
-          </a:prstGeom>
-          <a:noFill/>
-        </p:spPr>
-        <p:txBody>
-          <a:bodyPr wrap="square" lIns="0" rIns="0" tIns="0" bIns="0" anchor="ctr">
-            <a:spAutoFit/>
-          </a:bodyPr>
-          <a:lstStyle/>
-          <a:p>
-            <a:pPr algn="l">
-              <a:lnSpc>
-                <a:spcPct val="130000"/>
-              </a:lnSpc>
-            </a:pPr>
-            <a:r>
-              <a:rPr sz="1800" b="1">
-                <a:solidFill>
-                  <a:srgbClr val="0E3F8C"/>
-                </a:solidFill>
-                <a:latin typeface="Microsoft YaHei"/>
-              </a:rPr>
-              <a:t>已完成并验证</a:t>
-            </a:r>
-          </a:p>
-        </p:txBody>
-      </p:sp>
-      <p:sp>
-        <p:nvSpPr>
-          <p:cNvPr id="7" name="Rounded Rectangle 6"/>
-          <p:cNvSpPr/>
-          <p:nvPr/>
-        </p:nvSpPr>
-        <p:spPr>
-          <a:xfrm>
-            <a:off x="590550" y="1676400"/>
-            <a:ext cx="6248400" cy="628650"/>
-          </a:xfrm>
-          <a:prstGeom prst="roundRect">
-            <a:avLst>
-              <a:gd name="adj" fmla="val 12121"/>
+              <a:gd name="adj" fmla="val 50000"/>
             </a:avLst>
           </a:prstGeom>
           <a:solidFill>
@@ -18802,8 +19469,8 @@
         </p:nvSpPr>
         <p:spPr>
           <a:xfrm>
-            <a:off x="781050" y="1676400"/>
-            <a:ext cx="5905500" cy="628650"/>
+            <a:off x="4476750" y="4629150"/>
+            <a:ext cx="1028700" cy="381000"/>
           </a:xfrm>
           <a:prstGeom prst="rect">
             <a:avLst/>
@@ -18816,7 +19483,7 @@
           </a:bodyPr>
           <a:lstStyle/>
           <a:p>
-            <a:pPr algn="l">
+            <a:pPr algn="ctr">
               <a:lnSpc>
                 <a:spcPct val="130000"/>
               </a:lnSpc>
@@ -18828,7 +19495,7 @@
                 </a:solidFill>
                 <a:latin typeface="Microsoft YaHei"/>
               </a:rPr>
-              <a:t>✓  S1 约课与签到主线（含取消与爽约惩罚）</a:t>
+              <a:t>已完成</a:t>
             </a:r>
           </a:p>
         </p:txBody>
@@ -18841,12 +19508,12 @@
         </p:nvSpPr>
         <p:spPr>
           <a:xfrm>
-            <a:off x="590550" y="2381250"/>
-            <a:ext cx="6248400" cy="628650"/>
+            <a:off x="5638800" y="4629150"/>
+            <a:ext cx="1028700" cy="381000"/>
           </a:xfrm>
           <a:prstGeom prst="roundRect">
             <a:avLst>
-              <a:gd name="adj" fmla="val 12121"/>
+              <a:gd name="adj" fmla="val 50000"/>
             </a:avLst>
           </a:prstGeom>
           <a:solidFill>
@@ -18889,8 +19556,8 @@
         </p:nvSpPr>
         <p:spPr>
           <a:xfrm>
-            <a:off x="781050" y="2381250"/>
-            <a:ext cx="5905500" cy="628650"/>
+            <a:off x="5638800" y="4629150"/>
+            <a:ext cx="1028700" cy="381000"/>
           </a:xfrm>
           <a:prstGeom prst="rect">
             <a:avLst/>
@@ -18903,7 +19570,7 @@
           </a:bodyPr>
           <a:lstStyle/>
           <a:p>
-            <a:pPr algn="l">
+            <a:pPr algn="ctr">
               <a:lnSpc>
                 <a:spcPct val="130000"/>
               </a:lnSpc>
@@ -18915,7 +19582,7 @@
                 </a:solidFill>
                 <a:latin typeface="Microsoft YaHei"/>
               </a:rPr>
-              <a:t>✓  S2 收费：下单、支付、回调幂等、异常订单、对账</a:t>
+              <a:t>未完成</a:t>
             </a:r>
           </a:p>
         </p:txBody>
@@ -18928,12 +19595,12 @@
         </p:nvSpPr>
         <p:spPr>
           <a:xfrm>
-            <a:off x="590550" y="3086100"/>
-            <a:ext cx="6248400" cy="628650"/>
+            <a:off x="6800850" y="4629150"/>
+            <a:ext cx="1028700" cy="381000"/>
           </a:xfrm>
           <a:prstGeom prst="roundRect">
             <a:avLst>
-              <a:gd name="adj" fmla="val 12121"/>
+              <a:gd name="adj" fmla="val 50000"/>
             </a:avLst>
           </a:prstGeom>
           <a:solidFill>
@@ -18976,8 +19643,8 @@
         </p:nvSpPr>
         <p:spPr>
           <a:xfrm>
-            <a:off x="781050" y="3086100"/>
-            <a:ext cx="5905500" cy="628650"/>
+            <a:off x="6800850" y="4629150"/>
+            <a:ext cx="1028700" cy="381000"/>
           </a:xfrm>
           <a:prstGeom prst="rect">
             <a:avLst/>
@@ -18990,7 +19657,7 @@
           </a:bodyPr>
           <a:lstStyle/>
           <a:p>
-            <a:pPr algn="l">
+            <a:pPr algn="ctr">
               <a:lnSpc>
                 <a:spcPct val="130000"/>
               </a:lnSpc>
@@ -19002,561 +19669,6 @@
                 </a:solidFill>
                 <a:latin typeface="Microsoft YaHei"/>
               </a:rPr>
-              <a:t>✓  S4 预警：流失风险、爽约预测、新会员跟进</a:t>
-            </a:r>
-          </a:p>
-        </p:txBody>
-      </p:sp>
-      <p:sp>
-        <p:nvSpPr>
-          <p:cNvPr id="13" name="Rounded Rectangle 12"/>
-          <p:cNvSpPr/>
-          <p:nvPr/>
-        </p:nvSpPr>
-        <p:spPr>
-          <a:xfrm>
-            <a:off x="590550" y="3790950"/>
-            <a:ext cx="6248400" cy="628650"/>
-          </a:xfrm>
-          <a:prstGeom prst="roundRect">
-            <a:avLst>
-              <a:gd name="adj" fmla="val 12121"/>
-            </a:avLst>
-          </a:prstGeom>
-          <a:solidFill>
-            <a:srgbClr val="FFFFFF"/>
-          </a:solidFill>
-          <a:ln w="12700">
-            <a:solidFill>
-              <a:srgbClr val="D6DCE5"/>
-            </a:solidFill>
-          </a:ln>
-          <a:effectLst/>
-        </p:spPr>
-        <p:style>
-          <a:lnRef idx="1">
-            <a:schemeClr val="accent1"/>
-          </a:lnRef>
-          <a:fillRef idx="3">
-            <a:schemeClr val="accent1"/>
-          </a:fillRef>
-          <a:effectRef idx="2">
-            <a:schemeClr val="accent1"/>
-          </a:effectRef>
-          <a:fontRef idx="minor">
-            <a:schemeClr val="lt1"/>
-          </a:fontRef>
-        </p:style>
-        <p:txBody>
-          <a:bodyPr rtlCol="0" anchor="ctr" wrap="square"/>
-          <a:lstStyle/>
-          <a:p>
-            <a:pPr algn="ctr"/>
-          </a:p>
-        </p:txBody>
-      </p:sp>
-      <p:sp>
-        <p:nvSpPr>
-          <p:cNvPr id="14" name="TextBox 13"/>
-          <p:cNvSpPr txBox="1"/>
-          <p:nvPr/>
-        </p:nvSpPr>
-        <p:spPr>
-          <a:xfrm>
-            <a:off x="781050" y="3790950"/>
-            <a:ext cx="5905500" cy="628650"/>
-          </a:xfrm>
-          <a:prstGeom prst="rect">
-            <a:avLst/>
-          </a:prstGeom>
-          <a:noFill/>
-        </p:spPr>
-        <p:txBody>
-          <a:bodyPr wrap="square" lIns="0" rIns="0" tIns="0" bIns="0" anchor="ctr">
-            <a:spAutoFit/>
-          </a:bodyPr>
-          <a:lstStyle/>
-          <a:p>
-            <a:pPr algn="l">
-              <a:lnSpc>
-                <a:spcPct val="130000"/>
-              </a:lnSpc>
-            </a:pPr>
-            <a:r>
-              <a:rPr sz="1425" b="0">
-                <a:solidFill>
-                  <a:srgbClr val="1A2230"/>
-                </a:solidFill>
-                <a:latin typeface="Microsoft YaHei"/>
-              </a:rPr>
-              <a:t>✓  登录与角色鉴权（服务端强制，越权拦截已测）</a:t>
-            </a:r>
-          </a:p>
-        </p:txBody>
-      </p:sp>
-      <p:sp>
-        <p:nvSpPr>
-          <p:cNvPr id="15" name="Rounded Rectangle 14"/>
-          <p:cNvSpPr/>
-          <p:nvPr/>
-        </p:nvSpPr>
-        <p:spPr>
-          <a:xfrm>
-            <a:off x="590550" y="4495800"/>
-            <a:ext cx="6248400" cy="628650"/>
-          </a:xfrm>
-          <a:prstGeom prst="roundRect">
-            <a:avLst>
-              <a:gd name="adj" fmla="val 12121"/>
-            </a:avLst>
-          </a:prstGeom>
-          <a:solidFill>
-            <a:srgbClr val="FFFFFF"/>
-          </a:solidFill>
-          <a:ln w="12700">
-            <a:solidFill>
-              <a:srgbClr val="D6DCE5"/>
-            </a:solidFill>
-          </a:ln>
-          <a:effectLst/>
-        </p:spPr>
-        <p:style>
-          <a:lnRef idx="1">
-            <a:schemeClr val="accent1"/>
-          </a:lnRef>
-          <a:fillRef idx="3">
-            <a:schemeClr val="accent1"/>
-          </a:fillRef>
-          <a:effectRef idx="2">
-            <a:schemeClr val="accent1"/>
-          </a:effectRef>
-          <a:fontRef idx="minor">
-            <a:schemeClr val="lt1"/>
-          </a:fontRef>
-        </p:style>
-        <p:txBody>
-          <a:bodyPr rtlCol="0" anchor="ctr" wrap="square"/>
-          <a:lstStyle/>
-          <a:p>
-            <a:pPr algn="ctr"/>
-          </a:p>
-        </p:txBody>
-      </p:sp>
-      <p:sp>
-        <p:nvSpPr>
-          <p:cNvPr id="16" name="TextBox 15"/>
-          <p:cNvSpPr txBox="1"/>
-          <p:nvPr/>
-        </p:nvSpPr>
-        <p:spPr>
-          <a:xfrm>
-            <a:off x="781050" y="4495800"/>
-            <a:ext cx="5905500" cy="628650"/>
-          </a:xfrm>
-          <a:prstGeom prst="rect">
-            <a:avLst/>
-          </a:prstGeom>
-          <a:noFill/>
-        </p:spPr>
-        <p:txBody>
-          <a:bodyPr wrap="square" lIns="0" rIns="0" tIns="0" bIns="0" anchor="ctr">
-            <a:spAutoFit/>
-          </a:bodyPr>
-          <a:lstStyle/>
-          <a:p>
-            <a:pPr algn="l">
-              <a:lnSpc>
-                <a:spcPct val="130000"/>
-              </a:lnSpc>
-            </a:pPr>
-            <a:r>
-              <a:rPr sz="1425" b="0">
-                <a:solidFill>
-                  <a:srgbClr val="1A2230"/>
-                </a:solidFill>
-                <a:latin typeface="Microsoft YaHei"/>
-              </a:rPr>
-              <a:t>✓  六层 174 项自动化检查 + 一键启动脚本</a:t>
-            </a:r>
-          </a:p>
-        </p:txBody>
-      </p:sp>
-      <p:sp>
-        <p:nvSpPr>
-          <p:cNvPr id="17" name="Rounded Rectangle 16"/>
-          <p:cNvSpPr/>
-          <p:nvPr/>
-        </p:nvSpPr>
-        <p:spPr>
-          <a:xfrm>
-            <a:off x="7277100" y="1028700"/>
-            <a:ext cx="4533900" cy="2057400"/>
-          </a:xfrm>
-          <a:prstGeom prst="roundRect">
-            <a:avLst>
-              <a:gd name="adj" fmla="val 5555"/>
-            </a:avLst>
-          </a:prstGeom>
-          <a:solidFill>
-            <a:srgbClr val="FFFFFF"/>
-          </a:solidFill>
-          <a:ln w="12700">
-            <a:solidFill>
-              <a:srgbClr val="D6DCE5"/>
-            </a:solidFill>
-          </a:ln>
-          <a:effectLst/>
-        </p:spPr>
-        <p:style>
-          <a:lnRef idx="1">
-            <a:schemeClr val="accent1"/>
-          </a:lnRef>
-          <a:fillRef idx="3">
-            <a:schemeClr val="accent1"/>
-          </a:fillRef>
-          <a:effectRef idx="2">
-            <a:schemeClr val="accent1"/>
-          </a:effectRef>
-          <a:fontRef idx="minor">
-            <a:schemeClr val="lt1"/>
-          </a:fontRef>
-        </p:style>
-        <p:txBody>
-          <a:bodyPr rtlCol="0" anchor="ctr" wrap="square"/>
-          <a:lstStyle/>
-          <a:p>
-            <a:pPr algn="ctr"/>
-          </a:p>
-        </p:txBody>
-      </p:sp>
-      <p:sp>
-        <p:nvSpPr>
-          <p:cNvPr id="18" name="TextBox 17"/>
-          <p:cNvSpPr txBox="1"/>
-          <p:nvPr/>
-        </p:nvSpPr>
-        <p:spPr>
-          <a:xfrm>
-            <a:off x="7486650" y="1219200"/>
-            <a:ext cx="4114800" cy="323850"/>
-          </a:xfrm>
-          <a:prstGeom prst="rect">
-            <a:avLst/>
-          </a:prstGeom>
-          <a:noFill/>
-        </p:spPr>
-        <p:txBody>
-          <a:bodyPr wrap="square" lIns="0" rIns="0" tIns="0" bIns="0" anchor="ctr">
-            <a:spAutoFit/>
-          </a:bodyPr>
-          <a:lstStyle/>
-          <a:p>
-            <a:pPr algn="l">
-              <a:lnSpc>
-                <a:spcPct val="130000"/>
-              </a:lnSpc>
-            </a:pPr>
-            <a:r>
-              <a:rPr sz="1725" b="1">
-                <a:solidFill>
-                  <a:srgbClr val="0E3F8C"/>
-                </a:solidFill>
-                <a:latin typeface="Microsoft YaHei"/>
-              </a:rPr>
-              <a:t>仅有表结构与骨架</a:t>
-            </a:r>
-          </a:p>
-        </p:txBody>
-      </p:sp>
-      <p:sp>
-        <p:nvSpPr>
-          <p:cNvPr id="19" name="TextBox 18"/>
-          <p:cNvSpPr txBox="1"/>
-          <p:nvPr/>
-        </p:nvSpPr>
-        <p:spPr>
-          <a:xfrm>
-            <a:off x="7486650" y="1619250"/>
-            <a:ext cx="4114800" cy="1276350"/>
-          </a:xfrm>
-          <a:prstGeom prst="rect">
-            <a:avLst/>
-          </a:prstGeom>
-          <a:noFill/>
-        </p:spPr>
-        <p:txBody>
-          <a:bodyPr wrap="square" lIns="0" rIns="0" tIns="0" bIns="0" anchor="t">
-            <a:spAutoFit/>
-          </a:bodyPr>
-          <a:lstStyle/>
-          <a:p>
-            <a:pPr algn="l">
-              <a:lnSpc>
-                <a:spcPct val="155000"/>
-              </a:lnSpc>
-            </a:pPr>
-            <a:r>
-              <a:rPr sz="1425" b="0">
-                <a:solidFill>
-                  <a:srgbClr val="1A2230"/>
-                </a:solidFill>
-                <a:latin typeface="Microsoft YaHei"/>
-              </a:rPr>
-              <a:t>S5 设备与工单：已完成数据库设计与迁移（V5），Java 侧仅保留模块骨架，尚未实现业务逻辑。</a:t>
-            </a:r>
-          </a:p>
-        </p:txBody>
-      </p:sp>
-      <p:sp>
-        <p:nvSpPr>
-          <p:cNvPr id="20" name="Rounded Rectangle 19"/>
-          <p:cNvSpPr/>
-          <p:nvPr/>
-        </p:nvSpPr>
-        <p:spPr>
-          <a:xfrm>
-            <a:off x="7277100" y="3276600"/>
-            <a:ext cx="4533900" cy="2057400"/>
-          </a:xfrm>
-          <a:prstGeom prst="roundRect">
-            <a:avLst>
-              <a:gd name="adj" fmla="val 5555"/>
-            </a:avLst>
-          </a:prstGeom>
-          <a:solidFill>
-            <a:srgbClr val="FFFFFF"/>
-          </a:solidFill>
-          <a:ln w="12700">
-            <a:solidFill>
-              <a:srgbClr val="D6DCE5"/>
-            </a:solidFill>
-          </a:ln>
-          <a:effectLst/>
-        </p:spPr>
-        <p:style>
-          <a:lnRef idx="1">
-            <a:schemeClr val="accent1"/>
-          </a:lnRef>
-          <a:fillRef idx="3">
-            <a:schemeClr val="accent1"/>
-          </a:fillRef>
-          <a:effectRef idx="2">
-            <a:schemeClr val="accent1"/>
-          </a:effectRef>
-          <a:fontRef idx="minor">
-            <a:schemeClr val="lt1"/>
-          </a:fontRef>
-        </p:style>
-        <p:txBody>
-          <a:bodyPr rtlCol="0" anchor="ctr" wrap="square"/>
-          <a:lstStyle/>
-          <a:p>
-            <a:pPr algn="ctr"/>
-          </a:p>
-        </p:txBody>
-      </p:sp>
-      <p:sp>
-        <p:nvSpPr>
-          <p:cNvPr id="21" name="TextBox 20"/>
-          <p:cNvSpPr txBox="1"/>
-          <p:nvPr/>
-        </p:nvSpPr>
-        <p:spPr>
-          <a:xfrm>
-            <a:off x="7486650" y="3467100"/>
-            <a:ext cx="4114800" cy="323850"/>
-          </a:xfrm>
-          <a:prstGeom prst="rect">
-            <a:avLst/>
-          </a:prstGeom>
-          <a:noFill/>
-        </p:spPr>
-        <p:txBody>
-          <a:bodyPr wrap="square" lIns="0" rIns="0" tIns="0" bIns="0" anchor="ctr">
-            <a:spAutoFit/>
-          </a:bodyPr>
-          <a:lstStyle/>
-          <a:p>
-            <a:pPr algn="l">
-              <a:lnSpc>
-                <a:spcPct val="130000"/>
-              </a:lnSpc>
-            </a:pPr>
-            <a:r>
-              <a:rPr sz="1725" b="1">
-                <a:solidFill>
-                  <a:srgbClr val="0E3F8C"/>
-                </a:solidFill>
-                <a:latin typeface="Microsoft YaHei"/>
-              </a:rPr>
-              <a:t>完全未开始</a:t>
-            </a:r>
-          </a:p>
-        </p:txBody>
-      </p:sp>
-      <p:sp>
-        <p:nvSpPr>
-          <p:cNvPr id="22" name="TextBox 21"/>
-          <p:cNvSpPr txBox="1"/>
-          <p:nvPr/>
-        </p:nvSpPr>
-        <p:spPr>
-          <a:xfrm>
-            <a:off x="7486650" y="3867150"/>
-            <a:ext cx="4114800" cy="1276350"/>
-          </a:xfrm>
-          <a:prstGeom prst="rect">
-            <a:avLst/>
-          </a:prstGeom>
-          <a:noFill/>
-        </p:spPr>
-        <p:txBody>
-          <a:bodyPr wrap="square" lIns="0" rIns="0" tIns="0" bIns="0" anchor="t">
-            <a:spAutoFit/>
-          </a:bodyPr>
-          <a:lstStyle/>
-          <a:p>
-            <a:pPr algn="l">
-              <a:lnSpc>
-                <a:spcPct val="155000"/>
-              </a:lnSpc>
-            </a:pPr>
-            <a:r>
-              <a:rPr sz="1425" b="0">
-                <a:solidFill>
-                  <a:srgbClr val="1A2230"/>
-                </a:solidFill>
-                <a:latin typeface="Microsoft YaHei"/>
-              </a:rPr>
-              <a:t>真实微信支付对接（当前为 Mock 回调）、JWT 无状态令牌（当前为内存会话）、CI 流水线。</a:t>
-            </a:r>
-          </a:p>
-        </p:txBody>
-      </p:sp>
-      <p:sp>
-        <p:nvSpPr>
-          <p:cNvPr id="23" name="Rounded Rectangle 22"/>
-          <p:cNvSpPr/>
-          <p:nvPr/>
-        </p:nvSpPr>
-        <p:spPr>
-          <a:xfrm>
-            <a:off x="381000" y="5505450"/>
-            <a:ext cx="11430000" cy="590550"/>
-          </a:xfrm>
-          <a:prstGeom prst="roundRect">
-            <a:avLst>
-              <a:gd name="adj" fmla="val 12903"/>
-            </a:avLst>
-          </a:prstGeom>
-          <a:solidFill>
-            <a:srgbClr val="E8EFF8"/>
-          </a:solidFill>
-          <a:ln>
-            <a:noFill/>
-          </a:ln>
-          <a:effectLst/>
-        </p:spPr>
-        <p:style>
-          <a:lnRef idx="1">
-            <a:schemeClr val="accent1"/>
-          </a:lnRef>
-          <a:fillRef idx="3">
-            <a:schemeClr val="accent1"/>
-          </a:fillRef>
-          <a:effectRef idx="2">
-            <a:schemeClr val="accent1"/>
-          </a:effectRef>
-          <a:fontRef idx="minor">
-            <a:schemeClr val="lt1"/>
-          </a:fontRef>
-        </p:style>
-        <p:txBody>
-          <a:bodyPr rtlCol="0" anchor="ctr" wrap="square"/>
-          <a:lstStyle/>
-          <a:p>
-            <a:pPr algn="ctr"/>
-          </a:p>
-        </p:txBody>
-      </p:sp>
-      <p:sp>
-        <p:nvSpPr>
-          <p:cNvPr id="24" name="Rectangle 23"/>
-          <p:cNvSpPr/>
-          <p:nvPr/>
-        </p:nvSpPr>
-        <p:spPr>
-          <a:xfrm>
-            <a:off x="381000" y="5505450"/>
-            <a:ext cx="38100" cy="590550"/>
-          </a:xfrm>
-          <a:prstGeom prst="rect">
-            <a:avLst/>
-          </a:prstGeom>
-          <a:solidFill>
-            <a:srgbClr val="1E4FA8"/>
-          </a:solidFill>
-          <a:ln>
-            <a:noFill/>
-          </a:ln>
-          <a:effectLst/>
-        </p:spPr>
-        <p:style>
-          <a:lnRef idx="1">
-            <a:schemeClr val="accent1"/>
-          </a:lnRef>
-          <a:fillRef idx="3">
-            <a:schemeClr val="accent1"/>
-          </a:fillRef>
-          <a:effectRef idx="2">
-            <a:schemeClr val="accent1"/>
-          </a:effectRef>
-          <a:fontRef idx="minor">
-            <a:schemeClr val="lt1"/>
-          </a:fontRef>
-        </p:style>
-        <p:txBody>
-          <a:bodyPr rtlCol="0" anchor="ctr" wrap="square"/>
-          <a:lstStyle/>
-          <a:p>
-            <a:pPr algn="ctr"/>
-          </a:p>
-        </p:txBody>
-      </p:sp>
-      <p:sp>
-        <p:nvSpPr>
-          <p:cNvPr id="25" name="TextBox 24"/>
-          <p:cNvSpPr txBox="1"/>
-          <p:nvPr/>
-        </p:nvSpPr>
-        <p:spPr>
-          <a:xfrm>
-            <a:off x="533400" y="5505450"/>
-            <a:ext cx="914400" cy="590550"/>
-          </a:xfrm>
-          <a:prstGeom prst="rect">
-            <a:avLst/>
-          </a:prstGeom>
-          <a:noFill/>
-        </p:spPr>
-        <p:txBody>
-          <a:bodyPr wrap="square" lIns="0" rIns="0" tIns="0" bIns="0" anchor="ctr">
-            <a:spAutoFit/>
-          </a:bodyPr>
-          <a:lstStyle/>
-          <a:p>
-            <a:pPr algn="l">
-              <a:lnSpc>
-                <a:spcPct val="130000"/>
-              </a:lnSpc>
-            </a:pPr>
-            <a:r>
-              <a:rPr sz="1500" b="1">
-                <a:solidFill>
-                  <a:srgbClr val="1E4FA8"/>
-                </a:solidFill>
-                <a:latin typeface="Microsoft YaHei"/>
-              </a:rPr>
               <a:t>下一步</a:t>
             </a:r>
           </a:p>
@@ -19564,46 +19676,7 @@
       </p:sp>
       <p:sp>
         <p:nvSpPr>
-          <p:cNvPr id="26" name="TextBox 25"/>
-          <p:cNvSpPr txBox="1"/>
-          <p:nvPr/>
-        </p:nvSpPr>
-        <p:spPr>
-          <a:xfrm>
-            <a:off x="1504950" y="5505450"/>
-            <a:ext cx="10134600" cy="590550"/>
-          </a:xfrm>
-          <a:prstGeom prst="rect">
-            <a:avLst/>
-          </a:prstGeom>
-          <a:noFill/>
-        </p:spPr>
-        <p:txBody>
-          <a:bodyPr wrap="square" lIns="0" rIns="0" tIns="0" bIns="0" anchor="ctr">
-            <a:spAutoFit/>
-          </a:bodyPr>
-          <a:lstStyle/>
-          <a:p>
-            <a:pPr algn="l">
-              <a:lnSpc>
-                <a:spcPct val="135000"/>
-              </a:lnSpc>
-            </a:pPr>
-            <a:r>
-              <a:rPr sz="1500" b="0">
-                <a:solidFill>
-                  <a:srgbClr val="1A2230"/>
-                </a:solidFill>
-                <a:latin typeface="Microsoft YaHei"/>
-              </a:rPr>
-              <a:t>先补 S5 业务逻辑，再把会话改为 JWT，最后接入支付沙箱与 CI</a:t>
-            </a:r>
-          </a:p>
-        </p:txBody>
-      </p:sp>
-      <p:sp>
-        <p:nvSpPr>
-          <p:cNvPr id="27" name="Rectangle 26"/>
+          <p:cNvPr id="13" name="Rectangle 12"/>
           <p:cNvSpPr/>
           <p:nvPr/>
         </p:nvSpPr>
@@ -19647,7 +19720,7 @@
       </p:sp>
       <p:sp>
         <p:nvSpPr>
-          <p:cNvPr id="28" name="TextBox 27"/>
+          <p:cNvPr id="14" name="TextBox 13"/>
           <p:cNvSpPr txBox="1"/>
           <p:nvPr/>
         </p:nvSpPr>
@@ -19679,14 +19752,14 @@
                 </a:solidFill>
                 <a:latin typeface="Microsoft YaHei"/>
               </a:rPr>
-              <a:t>来源：代码实现与测试报告 · 开放问题台账</a:t>
-            </a:r>
-          </a:p>
-        </p:txBody>
-      </p:sp>
-      <p:sp>
-        <p:nvSpPr>
-          <p:cNvPr id="29" name="TextBox 28"/>
+              <a:t>健身房运营管理系统 · 课程答辩</a:t>
+            </a:r>
+          </a:p>
+        </p:txBody>
+      </p:sp>
+      <p:sp>
+        <p:nvSpPr>
+          <p:cNvPr id="15" name="TextBox 14"/>
           <p:cNvSpPr txBox="1"/>
           <p:nvPr/>
         </p:nvSpPr>
@@ -19718,7 +19791,7 @@
                 </a:solidFill>
                 <a:latin typeface="Microsoft YaHei"/>
               </a:rPr>
-              <a:t>21 / 22</a:t>
+              <a:t>20 / 23</a:t>
             </a:r>
           </a:p>
         </p:txBody>
@@ -19758,6 +19831,1216 @@
         <p:spPr>
           <a:xfrm>
             <a:off x="0" y="0"/>
+            <a:ext cx="12192000" cy="762000"/>
+          </a:xfrm>
+          <a:prstGeom prst="rect">
+            <a:avLst/>
+          </a:prstGeom>
+          <a:solidFill>
+            <a:srgbClr val="1E4FA8"/>
+          </a:solidFill>
+          <a:ln>
+            <a:noFill/>
+          </a:ln>
+          <a:effectLst/>
+        </p:spPr>
+        <p:style>
+          <a:lnRef idx="1">
+            <a:schemeClr val="accent1"/>
+          </a:lnRef>
+          <a:fillRef idx="3">
+            <a:schemeClr val="accent1"/>
+          </a:fillRef>
+          <a:effectRef idx="2">
+            <a:schemeClr val="accent1"/>
+          </a:effectRef>
+          <a:fontRef idx="minor">
+            <a:schemeClr val="lt1"/>
+          </a:fontRef>
+        </p:style>
+        <p:txBody>
+          <a:bodyPr rtlCol="0" anchor="ctr" wrap="square"/>
+          <a:lstStyle/>
+          <a:p>
+            <a:pPr algn="ctr"/>
+          </a:p>
+        </p:txBody>
+      </p:sp>
+      <p:sp>
+        <p:nvSpPr>
+          <p:cNvPr id="3" name="TextBox 2"/>
+          <p:cNvSpPr txBox="1"/>
+          <p:nvPr/>
+        </p:nvSpPr>
+        <p:spPr>
+          <a:xfrm>
+            <a:off x="381000" y="0"/>
+            <a:ext cx="7239000" cy="762000"/>
+          </a:xfrm>
+          <a:prstGeom prst="rect">
+            <a:avLst/>
+          </a:prstGeom>
+          <a:noFill/>
+        </p:spPr>
+        <p:txBody>
+          <a:bodyPr wrap="square" lIns="0" rIns="0" tIns="0" bIns="0" anchor="ctr">
+            <a:spAutoFit/>
+          </a:bodyPr>
+          <a:lstStyle/>
+          <a:p>
+            <a:pPr algn="l">
+              <a:lnSpc>
+                <a:spcPct val="130000"/>
+              </a:lnSpc>
+            </a:pPr>
+            <a:r>
+              <a:rPr sz="2400" b="1">
+                <a:solidFill>
+                  <a:srgbClr val="FFFFFF"/>
+                </a:solidFill>
+                <a:latin typeface="Microsoft YaHei"/>
+              </a:rPr>
+              <a:t>没做完的部分，以及下一步</a:t>
+            </a:r>
+          </a:p>
+        </p:txBody>
+      </p:sp>
+      <p:sp>
+        <p:nvSpPr>
+          <p:cNvPr id="4" name="TextBox 3"/>
+          <p:cNvSpPr txBox="1"/>
+          <p:nvPr/>
+        </p:nvSpPr>
+        <p:spPr>
+          <a:xfrm>
+            <a:off x="7620000" y="0"/>
+            <a:ext cx="4191000" cy="762000"/>
+          </a:xfrm>
+          <a:prstGeom prst="rect">
+            <a:avLst/>
+          </a:prstGeom>
+          <a:noFill/>
+        </p:spPr>
+        <p:txBody>
+          <a:bodyPr wrap="square" lIns="0" rIns="0" tIns="0" bIns="0" anchor="ctr">
+            <a:spAutoFit/>
+          </a:bodyPr>
+          <a:lstStyle/>
+          <a:p>
+            <a:pPr algn="r">
+              <a:lnSpc>
+                <a:spcPct val="130000"/>
+              </a:lnSpc>
+            </a:pPr>
+            <a:r>
+              <a:rPr sz="1050" b="0">
+                <a:solidFill>
+                  <a:srgbClr val="BFD3F0"/>
+                </a:solidFill>
+                <a:latin typeface="Microsoft YaHei"/>
+              </a:rPr>
+              <a:t>健身房运营管理系统 · 课程答辩</a:t>
+            </a:r>
+          </a:p>
+        </p:txBody>
+      </p:sp>
+      <p:sp>
+        <p:nvSpPr>
+          <p:cNvPr id="5" name="Rounded Rectangle 4"/>
+          <p:cNvSpPr/>
+          <p:nvPr/>
+        </p:nvSpPr>
+        <p:spPr>
+          <a:xfrm>
+            <a:off x="381000" y="1028700"/>
+            <a:ext cx="6667500" cy="4305300"/>
+          </a:xfrm>
+          <a:prstGeom prst="roundRect">
+            <a:avLst>
+              <a:gd name="adj" fmla="val 2654"/>
+            </a:avLst>
+          </a:prstGeom>
+          <a:solidFill>
+            <a:srgbClr val="E8EFF8"/>
+          </a:solidFill>
+          <a:ln>
+            <a:noFill/>
+          </a:ln>
+          <a:effectLst/>
+        </p:spPr>
+        <p:style>
+          <a:lnRef idx="1">
+            <a:schemeClr val="accent1"/>
+          </a:lnRef>
+          <a:fillRef idx="3">
+            <a:schemeClr val="accent1"/>
+          </a:fillRef>
+          <a:effectRef idx="2">
+            <a:schemeClr val="accent1"/>
+          </a:effectRef>
+          <a:fontRef idx="minor">
+            <a:schemeClr val="lt1"/>
+          </a:fontRef>
+        </p:style>
+        <p:txBody>
+          <a:bodyPr rtlCol="0" anchor="ctr" wrap="square"/>
+          <a:lstStyle/>
+          <a:p>
+            <a:pPr algn="ctr"/>
+          </a:p>
+        </p:txBody>
+      </p:sp>
+      <p:sp>
+        <p:nvSpPr>
+          <p:cNvPr id="6" name="TextBox 5"/>
+          <p:cNvSpPr txBox="1"/>
+          <p:nvPr/>
+        </p:nvSpPr>
+        <p:spPr>
+          <a:xfrm>
+            <a:off x="590550" y="1219200"/>
+            <a:ext cx="6248400" cy="323850"/>
+          </a:xfrm>
+          <a:prstGeom prst="rect">
+            <a:avLst/>
+          </a:prstGeom>
+          <a:noFill/>
+        </p:spPr>
+        <p:txBody>
+          <a:bodyPr wrap="square" lIns="0" rIns="0" tIns="0" bIns="0" anchor="ctr">
+            <a:spAutoFit/>
+          </a:bodyPr>
+          <a:lstStyle/>
+          <a:p>
+            <a:pPr algn="l">
+              <a:lnSpc>
+                <a:spcPct val="130000"/>
+              </a:lnSpc>
+            </a:pPr>
+            <a:r>
+              <a:rPr sz="1800" b="1">
+                <a:solidFill>
+                  <a:srgbClr val="0E3F8C"/>
+                </a:solidFill>
+                <a:latin typeface="Microsoft YaHei"/>
+              </a:rPr>
+              <a:t>已完成并验证</a:t>
+            </a:r>
+          </a:p>
+        </p:txBody>
+      </p:sp>
+      <p:sp>
+        <p:nvSpPr>
+          <p:cNvPr id="7" name="Rounded Rectangle 6"/>
+          <p:cNvSpPr/>
+          <p:nvPr/>
+        </p:nvSpPr>
+        <p:spPr>
+          <a:xfrm>
+            <a:off x="590550" y="1676400"/>
+            <a:ext cx="6248400" cy="628650"/>
+          </a:xfrm>
+          <a:prstGeom prst="roundRect">
+            <a:avLst>
+              <a:gd name="adj" fmla="val 12121"/>
+            </a:avLst>
+          </a:prstGeom>
+          <a:solidFill>
+            <a:srgbClr val="FFFFFF"/>
+          </a:solidFill>
+          <a:ln w="12700">
+            <a:solidFill>
+              <a:srgbClr val="D6DCE5"/>
+            </a:solidFill>
+          </a:ln>
+          <a:effectLst/>
+        </p:spPr>
+        <p:style>
+          <a:lnRef idx="1">
+            <a:schemeClr val="accent1"/>
+          </a:lnRef>
+          <a:fillRef idx="3">
+            <a:schemeClr val="accent1"/>
+          </a:fillRef>
+          <a:effectRef idx="2">
+            <a:schemeClr val="accent1"/>
+          </a:effectRef>
+          <a:fontRef idx="minor">
+            <a:schemeClr val="lt1"/>
+          </a:fontRef>
+        </p:style>
+        <p:txBody>
+          <a:bodyPr rtlCol="0" anchor="ctr" wrap="square"/>
+          <a:lstStyle/>
+          <a:p>
+            <a:pPr algn="ctr"/>
+          </a:p>
+        </p:txBody>
+      </p:sp>
+      <p:sp>
+        <p:nvSpPr>
+          <p:cNvPr id="8" name="TextBox 7"/>
+          <p:cNvSpPr txBox="1"/>
+          <p:nvPr/>
+        </p:nvSpPr>
+        <p:spPr>
+          <a:xfrm>
+            <a:off x="781050" y="1676400"/>
+            <a:ext cx="5905500" cy="628650"/>
+          </a:xfrm>
+          <a:prstGeom prst="rect">
+            <a:avLst/>
+          </a:prstGeom>
+          <a:noFill/>
+        </p:spPr>
+        <p:txBody>
+          <a:bodyPr wrap="square" lIns="0" rIns="0" tIns="0" bIns="0" anchor="ctr">
+            <a:spAutoFit/>
+          </a:bodyPr>
+          <a:lstStyle/>
+          <a:p>
+            <a:pPr algn="l">
+              <a:lnSpc>
+                <a:spcPct val="130000"/>
+              </a:lnSpc>
+            </a:pPr>
+            <a:r>
+              <a:rPr sz="1425" b="0">
+                <a:solidFill>
+                  <a:srgbClr val="1A2230"/>
+                </a:solidFill>
+                <a:latin typeface="Microsoft YaHei"/>
+              </a:rPr>
+              <a:t>✓  S1 约课与签到主线（含取消与爽约惩罚）</a:t>
+            </a:r>
+          </a:p>
+        </p:txBody>
+      </p:sp>
+      <p:sp>
+        <p:nvSpPr>
+          <p:cNvPr id="9" name="Rounded Rectangle 8"/>
+          <p:cNvSpPr/>
+          <p:nvPr/>
+        </p:nvSpPr>
+        <p:spPr>
+          <a:xfrm>
+            <a:off x="590550" y="2381250"/>
+            <a:ext cx="6248400" cy="628650"/>
+          </a:xfrm>
+          <a:prstGeom prst="roundRect">
+            <a:avLst>
+              <a:gd name="adj" fmla="val 12121"/>
+            </a:avLst>
+          </a:prstGeom>
+          <a:solidFill>
+            <a:srgbClr val="FFFFFF"/>
+          </a:solidFill>
+          <a:ln w="12700">
+            <a:solidFill>
+              <a:srgbClr val="D6DCE5"/>
+            </a:solidFill>
+          </a:ln>
+          <a:effectLst/>
+        </p:spPr>
+        <p:style>
+          <a:lnRef idx="1">
+            <a:schemeClr val="accent1"/>
+          </a:lnRef>
+          <a:fillRef idx="3">
+            <a:schemeClr val="accent1"/>
+          </a:fillRef>
+          <a:effectRef idx="2">
+            <a:schemeClr val="accent1"/>
+          </a:effectRef>
+          <a:fontRef idx="minor">
+            <a:schemeClr val="lt1"/>
+          </a:fontRef>
+        </p:style>
+        <p:txBody>
+          <a:bodyPr rtlCol="0" anchor="ctr" wrap="square"/>
+          <a:lstStyle/>
+          <a:p>
+            <a:pPr algn="ctr"/>
+          </a:p>
+        </p:txBody>
+      </p:sp>
+      <p:sp>
+        <p:nvSpPr>
+          <p:cNvPr id="10" name="TextBox 9"/>
+          <p:cNvSpPr txBox="1"/>
+          <p:nvPr/>
+        </p:nvSpPr>
+        <p:spPr>
+          <a:xfrm>
+            <a:off x="781050" y="2381250"/>
+            <a:ext cx="5905500" cy="628650"/>
+          </a:xfrm>
+          <a:prstGeom prst="rect">
+            <a:avLst/>
+          </a:prstGeom>
+          <a:noFill/>
+        </p:spPr>
+        <p:txBody>
+          <a:bodyPr wrap="square" lIns="0" rIns="0" tIns="0" bIns="0" anchor="ctr">
+            <a:spAutoFit/>
+          </a:bodyPr>
+          <a:lstStyle/>
+          <a:p>
+            <a:pPr algn="l">
+              <a:lnSpc>
+                <a:spcPct val="130000"/>
+              </a:lnSpc>
+            </a:pPr>
+            <a:r>
+              <a:rPr sz="1425" b="0">
+                <a:solidFill>
+                  <a:srgbClr val="1A2230"/>
+                </a:solidFill>
+                <a:latin typeface="Microsoft YaHei"/>
+              </a:rPr>
+              <a:t>✓  S2 收费：下单、支付、回调幂等、异常订单、对账</a:t>
+            </a:r>
+          </a:p>
+        </p:txBody>
+      </p:sp>
+      <p:sp>
+        <p:nvSpPr>
+          <p:cNvPr id="11" name="Rounded Rectangle 10"/>
+          <p:cNvSpPr/>
+          <p:nvPr/>
+        </p:nvSpPr>
+        <p:spPr>
+          <a:xfrm>
+            <a:off x="590550" y="3086100"/>
+            <a:ext cx="6248400" cy="628650"/>
+          </a:xfrm>
+          <a:prstGeom prst="roundRect">
+            <a:avLst>
+              <a:gd name="adj" fmla="val 12121"/>
+            </a:avLst>
+          </a:prstGeom>
+          <a:solidFill>
+            <a:srgbClr val="FFFFFF"/>
+          </a:solidFill>
+          <a:ln w="12700">
+            <a:solidFill>
+              <a:srgbClr val="D6DCE5"/>
+            </a:solidFill>
+          </a:ln>
+          <a:effectLst/>
+        </p:spPr>
+        <p:style>
+          <a:lnRef idx="1">
+            <a:schemeClr val="accent1"/>
+          </a:lnRef>
+          <a:fillRef idx="3">
+            <a:schemeClr val="accent1"/>
+          </a:fillRef>
+          <a:effectRef idx="2">
+            <a:schemeClr val="accent1"/>
+          </a:effectRef>
+          <a:fontRef idx="minor">
+            <a:schemeClr val="lt1"/>
+          </a:fontRef>
+        </p:style>
+        <p:txBody>
+          <a:bodyPr rtlCol="0" anchor="ctr" wrap="square"/>
+          <a:lstStyle/>
+          <a:p>
+            <a:pPr algn="ctr"/>
+          </a:p>
+        </p:txBody>
+      </p:sp>
+      <p:sp>
+        <p:nvSpPr>
+          <p:cNvPr id="12" name="TextBox 11"/>
+          <p:cNvSpPr txBox="1"/>
+          <p:nvPr/>
+        </p:nvSpPr>
+        <p:spPr>
+          <a:xfrm>
+            <a:off x="781050" y="3086100"/>
+            <a:ext cx="5905500" cy="628650"/>
+          </a:xfrm>
+          <a:prstGeom prst="rect">
+            <a:avLst/>
+          </a:prstGeom>
+          <a:noFill/>
+        </p:spPr>
+        <p:txBody>
+          <a:bodyPr wrap="square" lIns="0" rIns="0" tIns="0" bIns="0" anchor="ctr">
+            <a:spAutoFit/>
+          </a:bodyPr>
+          <a:lstStyle/>
+          <a:p>
+            <a:pPr algn="l">
+              <a:lnSpc>
+                <a:spcPct val="130000"/>
+              </a:lnSpc>
+            </a:pPr>
+            <a:r>
+              <a:rPr sz="1425" b="0">
+                <a:solidFill>
+                  <a:srgbClr val="1A2230"/>
+                </a:solidFill>
+                <a:latin typeface="Microsoft YaHei"/>
+              </a:rPr>
+              <a:t>✓  S4 预警：流失风险、爽约预测、新会员跟进</a:t>
+            </a:r>
+          </a:p>
+        </p:txBody>
+      </p:sp>
+      <p:sp>
+        <p:nvSpPr>
+          <p:cNvPr id="13" name="Rounded Rectangle 12"/>
+          <p:cNvSpPr/>
+          <p:nvPr/>
+        </p:nvSpPr>
+        <p:spPr>
+          <a:xfrm>
+            <a:off x="590550" y="3790950"/>
+            <a:ext cx="6248400" cy="628650"/>
+          </a:xfrm>
+          <a:prstGeom prst="roundRect">
+            <a:avLst>
+              <a:gd name="adj" fmla="val 12121"/>
+            </a:avLst>
+          </a:prstGeom>
+          <a:solidFill>
+            <a:srgbClr val="FFFFFF"/>
+          </a:solidFill>
+          <a:ln w="12700">
+            <a:solidFill>
+              <a:srgbClr val="D6DCE5"/>
+            </a:solidFill>
+          </a:ln>
+          <a:effectLst/>
+        </p:spPr>
+        <p:style>
+          <a:lnRef idx="1">
+            <a:schemeClr val="accent1"/>
+          </a:lnRef>
+          <a:fillRef idx="3">
+            <a:schemeClr val="accent1"/>
+          </a:fillRef>
+          <a:effectRef idx="2">
+            <a:schemeClr val="accent1"/>
+          </a:effectRef>
+          <a:fontRef idx="minor">
+            <a:schemeClr val="lt1"/>
+          </a:fontRef>
+        </p:style>
+        <p:txBody>
+          <a:bodyPr rtlCol="0" anchor="ctr" wrap="square"/>
+          <a:lstStyle/>
+          <a:p>
+            <a:pPr algn="ctr"/>
+          </a:p>
+        </p:txBody>
+      </p:sp>
+      <p:sp>
+        <p:nvSpPr>
+          <p:cNvPr id="14" name="TextBox 13"/>
+          <p:cNvSpPr txBox="1"/>
+          <p:nvPr/>
+        </p:nvSpPr>
+        <p:spPr>
+          <a:xfrm>
+            <a:off x="781050" y="3790950"/>
+            <a:ext cx="5905500" cy="628650"/>
+          </a:xfrm>
+          <a:prstGeom prst="rect">
+            <a:avLst/>
+          </a:prstGeom>
+          <a:noFill/>
+        </p:spPr>
+        <p:txBody>
+          <a:bodyPr wrap="square" lIns="0" rIns="0" tIns="0" bIns="0" anchor="ctr">
+            <a:spAutoFit/>
+          </a:bodyPr>
+          <a:lstStyle/>
+          <a:p>
+            <a:pPr algn="l">
+              <a:lnSpc>
+                <a:spcPct val="130000"/>
+              </a:lnSpc>
+            </a:pPr>
+            <a:r>
+              <a:rPr sz="1425" b="0">
+                <a:solidFill>
+                  <a:srgbClr val="1A2230"/>
+                </a:solidFill>
+                <a:latin typeface="Microsoft YaHei"/>
+              </a:rPr>
+              <a:t>✓  登录与角色鉴权（服务端强制，越权拦截已测）</a:t>
+            </a:r>
+          </a:p>
+        </p:txBody>
+      </p:sp>
+      <p:sp>
+        <p:nvSpPr>
+          <p:cNvPr id="15" name="Rounded Rectangle 14"/>
+          <p:cNvSpPr/>
+          <p:nvPr/>
+        </p:nvSpPr>
+        <p:spPr>
+          <a:xfrm>
+            <a:off x="590550" y="4495800"/>
+            <a:ext cx="6248400" cy="628650"/>
+          </a:xfrm>
+          <a:prstGeom prst="roundRect">
+            <a:avLst>
+              <a:gd name="adj" fmla="val 12121"/>
+            </a:avLst>
+          </a:prstGeom>
+          <a:solidFill>
+            <a:srgbClr val="FFFFFF"/>
+          </a:solidFill>
+          <a:ln w="12700">
+            <a:solidFill>
+              <a:srgbClr val="D6DCE5"/>
+            </a:solidFill>
+          </a:ln>
+          <a:effectLst/>
+        </p:spPr>
+        <p:style>
+          <a:lnRef idx="1">
+            <a:schemeClr val="accent1"/>
+          </a:lnRef>
+          <a:fillRef idx="3">
+            <a:schemeClr val="accent1"/>
+          </a:fillRef>
+          <a:effectRef idx="2">
+            <a:schemeClr val="accent1"/>
+          </a:effectRef>
+          <a:fontRef idx="minor">
+            <a:schemeClr val="lt1"/>
+          </a:fontRef>
+        </p:style>
+        <p:txBody>
+          <a:bodyPr rtlCol="0" anchor="ctr" wrap="square"/>
+          <a:lstStyle/>
+          <a:p>
+            <a:pPr algn="ctr"/>
+          </a:p>
+        </p:txBody>
+      </p:sp>
+      <p:sp>
+        <p:nvSpPr>
+          <p:cNvPr id="16" name="TextBox 15"/>
+          <p:cNvSpPr txBox="1"/>
+          <p:nvPr/>
+        </p:nvSpPr>
+        <p:spPr>
+          <a:xfrm>
+            <a:off x="781050" y="4495800"/>
+            <a:ext cx="5905500" cy="628650"/>
+          </a:xfrm>
+          <a:prstGeom prst="rect">
+            <a:avLst/>
+          </a:prstGeom>
+          <a:noFill/>
+        </p:spPr>
+        <p:txBody>
+          <a:bodyPr wrap="square" lIns="0" rIns="0" tIns="0" bIns="0" anchor="ctr">
+            <a:spAutoFit/>
+          </a:bodyPr>
+          <a:lstStyle/>
+          <a:p>
+            <a:pPr algn="l">
+              <a:lnSpc>
+                <a:spcPct val="130000"/>
+              </a:lnSpc>
+            </a:pPr>
+            <a:r>
+              <a:rPr sz="1425" b="0">
+                <a:solidFill>
+                  <a:srgbClr val="1A2230"/>
+                </a:solidFill>
+                <a:latin typeface="Microsoft YaHei"/>
+              </a:rPr>
+              <a:t>✓  六层 200 项自动化检查 + 一键启动脚本</a:t>
+            </a:r>
+          </a:p>
+        </p:txBody>
+      </p:sp>
+      <p:sp>
+        <p:nvSpPr>
+          <p:cNvPr id="17" name="Rounded Rectangle 16"/>
+          <p:cNvSpPr/>
+          <p:nvPr/>
+        </p:nvSpPr>
+        <p:spPr>
+          <a:xfrm>
+            <a:off x="7277100" y="1028700"/>
+            <a:ext cx="4533900" cy="2057400"/>
+          </a:xfrm>
+          <a:prstGeom prst="roundRect">
+            <a:avLst>
+              <a:gd name="adj" fmla="val 5555"/>
+            </a:avLst>
+          </a:prstGeom>
+          <a:solidFill>
+            <a:srgbClr val="FFFFFF"/>
+          </a:solidFill>
+          <a:ln w="12700">
+            <a:solidFill>
+              <a:srgbClr val="D6DCE5"/>
+            </a:solidFill>
+          </a:ln>
+          <a:effectLst/>
+        </p:spPr>
+        <p:style>
+          <a:lnRef idx="1">
+            <a:schemeClr val="accent1"/>
+          </a:lnRef>
+          <a:fillRef idx="3">
+            <a:schemeClr val="accent1"/>
+          </a:fillRef>
+          <a:effectRef idx="2">
+            <a:schemeClr val="accent1"/>
+          </a:effectRef>
+          <a:fontRef idx="minor">
+            <a:schemeClr val="lt1"/>
+          </a:fontRef>
+        </p:style>
+        <p:txBody>
+          <a:bodyPr rtlCol="0" anchor="ctr" wrap="square"/>
+          <a:lstStyle/>
+          <a:p>
+            <a:pPr algn="ctr"/>
+          </a:p>
+        </p:txBody>
+      </p:sp>
+      <p:sp>
+        <p:nvSpPr>
+          <p:cNvPr id="18" name="TextBox 17"/>
+          <p:cNvSpPr txBox="1"/>
+          <p:nvPr/>
+        </p:nvSpPr>
+        <p:spPr>
+          <a:xfrm>
+            <a:off x="7486650" y="1219200"/>
+            <a:ext cx="4114800" cy="323850"/>
+          </a:xfrm>
+          <a:prstGeom prst="rect">
+            <a:avLst/>
+          </a:prstGeom>
+          <a:noFill/>
+        </p:spPr>
+        <p:txBody>
+          <a:bodyPr wrap="square" lIns="0" rIns="0" tIns="0" bIns="0" anchor="ctr">
+            <a:spAutoFit/>
+          </a:bodyPr>
+          <a:lstStyle/>
+          <a:p>
+            <a:pPr algn="l">
+              <a:lnSpc>
+                <a:spcPct val="130000"/>
+              </a:lnSpc>
+            </a:pPr>
+            <a:r>
+              <a:rPr sz="1725" b="1">
+                <a:solidFill>
+                  <a:srgbClr val="0E3F8C"/>
+                </a:solidFill>
+                <a:latin typeface="Microsoft YaHei"/>
+              </a:rPr>
+              <a:t>仅有表结构与骨架</a:t>
+            </a:r>
+          </a:p>
+        </p:txBody>
+      </p:sp>
+      <p:sp>
+        <p:nvSpPr>
+          <p:cNvPr id="19" name="TextBox 18"/>
+          <p:cNvSpPr txBox="1"/>
+          <p:nvPr/>
+        </p:nvSpPr>
+        <p:spPr>
+          <a:xfrm>
+            <a:off x="7486650" y="1619250"/>
+            <a:ext cx="4114800" cy="1276350"/>
+          </a:xfrm>
+          <a:prstGeom prst="rect">
+            <a:avLst/>
+          </a:prstGeom>
+          <a:noFill/>
+        </p:spPr>
+        <p:txBody>
+          <a:bodyPr wrap="square" lIns="0" rIns="0" tIns="0" bIns="0" anchor="t">
+            <a:spAutoFit/>
+          </a:bodyPr>
+          <a:lstStyle/>
+          <a:p>
+            <a:pPr algn="l">
+              <a:lnSpc>
+                <a:spcPct val="155000"/>
+              </a:lnSpc>
+            </a:pPr>
+            <a:r>
+              <a:rPr sz="1425" b="0">
+                <a:solidFill>
+                  <a:srgbClr val="1A2230"/>
+                </a:solidFill>
+                <a:latin typeface="Microsoft YaHei"/>
+              </a:rPr>
+              <a:t>S5 设备与工单：已完成数据库设计与迁移（V5），Java 侧仅保留模块骨架，尚未实现业务逻辑。</a:t>
+            </a:r>
+          </a:p>
+        </p:txBody>
+      </p:sp>
+      <p:sp>
+        <p:nvSpPr>
+          <p:cNvPr id="20" name="Rounded Rectangle 19"/>
+          <p:cNvSpPr/>
+          <p:nvPr/>
+        </p:nvSpPr>
+        <p:spPr>
+          <a:xfrm>
+            <a:off x="7277100" y="3276600"/>
+            <a:ext cx="4533900" cy="2057400"/>
+          </a:xfrm>
+          <a:prstGeom prst="roundRect">
+            <a:avLst>
+              <a:gd name="adj" fmla="val 5555"/>
+            </a:avLst>
+          </a:prstGeom>
+          <a:solidFill>
+            <a:srgbClr val="FFFFFF"/>
+          </a:solidFill>
+          <a:ln w="12700">
+            <a:solidFill>
+              <a:srgbClr val="D6DCE5"/>
+            </a:solidFill>
+          </a:ln>
+          <a:effectLst/>
+        </p:spPr>
+        <p:style>
+          <a:lnRef idx="1">
+            <a:schemeClr val="accent1"/>
+          </a:lnRef>
+          <a:fillRef idx="3">
+            <a:schemeClr val="accent1"/>
+          </a:fillRef>
+          <a:effectRef idx="2">
+            <a:schemeClr val="accent1"/>
+          </a:effectRef>
+          <a:fontRef idx="minor">
+            <a:schemeClr val="lt1"/>
+          </a:fontRef>
+        </p:style>
+        <p:txBody>
+          <a:bodyPr rtlCol="0" anchor="ctr" wrap="square"/>
+          <a:lstStyle/>
+          <a:p>
+            <a:pPr algn="ctr"/>
+          </a:p>
+        </p:txBody>
+      </p:sp>
+      <p:sp>
+        <p:nvSpPr>
+          <p:cNvPr id="21" name="TextBox 20"/>
+          <p:cNvSpPr txBox="1"/>
+          <p:nvPr/>
+        </p:nvSpPr>
+        <p:spPr>
+          <a:xfrm>
+            <a:off x="7486650" y="3467100"/>
+            <a:ext cx="4114800" cy="323850"/>
+          </a:xfrm>
+          <a:prstGeom prst="rect">
+            <a:avLst/>
+          </a:prstGeom>
+          <a:noFill/>
+        </p:spPr>
+        <p:txBody>
+          <a:bodyPr wrap="square" lIns="0" rIns="0" tIns="0" bIns="0" anchor="ctr">
+            <a:spAutoFit/>
+          </a:bodyPr>
+          <a:lstStyle/>
+          <a:p>
+            <a:pPr algn="l">
+              <a:lnSpc>
+                <a:spcPct val="130000"/>
+              </a:lnSpc>
+            </a:pPr>
+            <a:r>
+              <a:rPr sz="1725" b="1">
+                <a:solidFill>
+                  <a:srgbClr val="0E3F8C"/>
+                </a:solidFill>
+                <a:latin typeface="Microsoft YaHei"/>
+              </a:rPr>
+              <a:t>完全未开始</a:t>
+            </a:r>
+          </a:p>
+        </p:txBody>
+      </p:sp>
+      <p:sp>
+        <p:nvSpPr>
+          <p:cNvPr id="22" name="TextBox 21"/>
+          <p:cNvSpPr txBox="1"/>
+          <p:nvPr/>
+        </p:nvSpPr>
+        <p:spPr>
+          <a:xfrm>
+            <a:off x="7486650" y="3867150"/>
+            <a:ext cx="4114800" cy="1276350"/>
+          </a:xfrm>
+          <a:prstGeom prst="rect">
+            <a:avLst/>
+          </a:prstGeom>
+          <a:noFill/>
+        </p:spPr>
+        <p:txBody>
+          <a:bodyPr wrap="square" lIns="0" rIns="0" tIns="0" bIns="0" anchor="t">
+            <a:spAutoFit/>
+          </a:bodyPr>
+          <a:lstStyle/>
+          <a:p>
+            <a:pPr algn="l">
+              <a:lnSpc>
+                <a:spcPct val="155000"/>
+              </a:lnSpc>
+            </a:pPr>
+            <a:r>
+              <a:rPr sz="1425" b="0">
+                <a:solidFill>
+                  <a:srgbClr val="1A2230"/>
+                </a:solidFill>
+                <a:latin typeface="Microsoft YaHei"/>
+              </a:rPr>
+              <a:t>真实微信支付对接（当前为 Mock 回调）、JWT 无状态令牌（当前为内存会话）、CI 流水线。</a:t>
+            </a:r>
+          </a:p>
+        </p:txBody>
+      </p:sp>
+      <p:sp>
+        <p:nvSpPr>
+          <p:cNvPr id="23" name="Rounded Rectangle 22"/>
+          <p:cNvSpPr/>
+          <p:nvPr/>
+        </p:nvSpPr>
+        <p:spPr>
+          <a:xfrm>
+            <a:off x="381000" y="5505450"/>
+            <a:ext cx="11430000" cy="590550"/>
+          </a:xfrm>
+          <a:prstGeom prst="roundRect">
+            <a:avLst>
+              <a:gd name="adj" fmla="val 12903"/>
+            </a:avLst>
+          </a:prstGeom>
+          <a:solidFill>
+            <a:srgbClr val="E8EFF8"/>
+          </a:solidFill>
+          <a:ln>
+            <a:noFill/>
+          </a:ln>
+          <a:effectLst/>
+        </p:spPr>
+        <p:style>
+          <a:lnRef idx="1">
+            <a:schemeClr val="accent1"/>
+          </a:lnRef>
+          <a:fillRef idx="3">
+            <a:schemeClr val="accent1"/>
+          </a:fillRef>
+          <a:effectRef idx="2">
+            <a:schemeClr val="accent1"/>
+          </a:effectRef>
+          <a:fontRef idx="minor">
+            <a:schemeClr val="lt1"/>
+          </a:fontRef>
+        </p:style>
+        <p:txBody>
+          <a:bodyPr rtlCol="0" anchor="ctr" wrap="square"/>
+          <a:lstStyle/>
+          <a:p>
+            <a:pPr algn="ctr"/>
+          </a:p>
+        </p:txBody>
+      </p:sp>
+      <p:sp>
+        <p:nvSpPr>
+          <p:cNvPr id="24" name="Rectangle 23"/>
+          <p:cNvSpPr/>
+          <p:nvPr/>
+        </p:nvSpPr>
+        <p:spPr>
+          <a:xfrm>
+            <a:off x="381000" y="5505450"/>
+            <a:ext cx="38100" cy="590550"/>
+          </a:xfrm>
+          <a:prstGeom prst="rect">
+            <a:avLst/>
+          </a:prstGeom>
+          <a:solidFill>
+            <a:srgbClr val="1E4FA8"/>
+          </a:solidFill>
+          <a:ln>
+            <a:noFill/>
+          </a:ln>
+          <a:effectLst/>
+        </p:spPr>
+        <p:style>
+          <a:lnRef idx="1">
+            <a:schemeClr val="accent1"/>
+          </a:lnRef>
+          <a:fillRef idx="3">
+            <a:schemeClr val="accent1"/>
+          </a:fillRef>
+          <a:effectRef idx="2">
+            <a:schemeClr val="accent1"/>
+          </a:effectRef>
+          <a:fontRef idx="minor">
+            <a:schemeClr val="lt1"/>
+          </a:fontRef>
+        </p:style>
+        <p:txBody>
+          <a:bodyPr rtlCol="0" anchor="ctr" wrap="square"/>
+          <a:lstStyle/>
+          <a:p>
+            <a:pPr algn="ctr"/>
+          </a:p>
+        </p:txBody>
+      </p:sp>
+      <p:sp>
+        <p:nvSpPr>
+          <p:cNvPr id="25" name="TextBox 24"/>
+          <p:cNvSpPr txBox="1"/>
+          <p:nvPr/>
+        </p:nvSpPr>
+        <p:spPr>
+          <a:xfrm>
+            <a:off x="533400" y="5505450"/>
+            <a:ext cx="914400" cy="590550"/>
+          </a:xfrm>
+          <a:prstGeom prst="rect">
+            <a:avLst/>
+          </a:prstGeom>
+          <a:noFill/>
+        </p:spPr>
+        <p:txBody>
+          <a:bodyPr wrap="square" lIns="0" rIns="0" tIns="0" bIns="0" anchor="ctr">
+            <a:spAutoFit/>
+          </a:bodyPr>
+          <a:lstStyle/>
+          <a:p>
+            <a:pPr algn="l">
+              <a:lnSpc>
+                <a:spcPct val="130000"/>
+              </a:lnSpc>
+            </a:pPr>
+            <a:r>
+              <a:rPr sz="1500" b="1">
+                <a:solidFill>
+                  <a:srgbClr val="1E4FA8"/>
+                </a:solidFill>
+                <a:latin typeface="Microsoft YaHei"/>
+              </a:rPr>
+              <a:t>下一步</a:t>
+            </a:r>
+          </a:p>
+        </p:txBody>
+      </p:sp>
+      <p:sp>
+        <p:nvSpPr>
+          <p:cNvPr id="26" name="TextBox 25"/>
+          <p:cNvSpPr txBox="1"/>
+          <p:nvPr/>
+        </p:nvSpPr>
+        <p:spPr>
+          <a:xfrm>
+            <a:off x="1504950" y="5505450"/>
+            <a:ext cx="10134600" cy="590550"/>
+          </a:xfrm>
+          <a:prstGeom prst="rect">
+            <a:avLst/>
+          </a:prstGeom>
+          <a:noFill/>
+        </p:spPr>
+        <p:txBody>
+          <a:bodyPr wrap="square" lIns="0" rIns="0" tIns="0" bIns="0" anchor="ctr">
+            <a:spAutoFit/>
+          </a:bodyPr>
+          <a:lstStyle/>
+          <a:p>
+            <a:pPr algn="l">
+              <a:lnSpc>
+                <a:spcPct val="135000"/>
+              </a:lnSpc>
+            </a:pPr>
+            <a:r>
+              <a:rPr sz="1500" b="0">
+                <a:solidFill>
+                  <a:srgbClr val="1A2230"/>
+                </a:solidFill>
+                <a:latin typeface="Microsoft YaHei"/>
+              </a:rPr>
+              <a:t>先补 S5 业务逻辑，再把会话改为 JWT，最后接入支付沙箱与 CI</a:t>
+            </a:r>
+          </a:p>
+        </p:txBody>
+      </p:sp>
+      <p:sp>
+        <p:nvSpPr>
+          <p:cNvPr id="27" name="Rectangle 26"/>
+          <p:cNvSpPr/>
+          <p:nvPr/>
+        </p:nvSpPr>
+        <p:spPr>
+          <a:xfrm>
+            <a:off x="381000" y="6286500"/>
+            <a:ext cx="11430000" cy="9525"/>
+          </a:xfrm>
+          <a:prstGeom prst="rect">
+            <a:avLst/>
+          </a:prstGeom>
+          <a:solidFill>
+            <a:srgbClr val="E5E7EB"/>
+          </a:solidFill>
+          <a:ln>
+            <a:noFill/>
+          </a:ln>
+          <a:effectLst/>
+        </p:spPr>
+        <p:style>
+          <a:lnRef idx="1">
+            <a:schemeClr val="accent1"/>
+          </a:lnRef>
+          <a:fillRef idx="3">
+            <a:schemeClr val="accent1"/>
+          </a:fillRef>
+          <a:effectRef idx="2">
+            <a:schemeClr val="accent1"/>
+          </a:effectRef>
+          <a:fontRef idx="minor">
+            <a:schemeClr val="lt1"/>
+          </a:fontRef>
+        </p:style>
+        <p:txBody>
+          <a:bodyPr rtlCol="0" anchor="ctr" wrap="square"/>
+          <a:lstStyle/>
+          <a:p>
+            <a:pPr algn="ctr"/>
+          </a:p>
+        </p:txBody>
+      </p:sp>
+      <p:sp>
+        <p:nvSpPr>
+          <p:cNvPr id="28" name="TextBox 27"/>
+          <p:cNvSpPr txBox="1"/>
+          <p:nvPr/>
+        </p:nvSpPr>
+        <p:spPr>
+          <a:xfrm>
+            <a:off x="381000" y="6324600"/>
+            <a:ext cx="8763000" cy="285750"/>
+          </a:xfrm>
+          <a:prstGeom prst="rect">
+            <a:avLst/>
+          </a:prstGeom>
+          <a:noFill/>
+        </p:spPr>
+        <p:txBody>
+          <a:bodyPr wrap="square" lIns="0" rIns="0" tIns="0" bIns="0" anchor="ctr">
+            <a:spAutoFit/>
+          </a:bodyPr>
+          <a:lstStyle/>
+          <a:p>
+            <a:pPr algn="l">
+              <a:lnSpc>
+                <a:spcPct val="130000"/>
+              </a:lnSpc>
+            </a:pPr>
+            <a:r>
+              <a:rPr sz="1125" b="0">
+                <a:solidFill>
+                  <a:srgbClr val="8B97A8"/>
+                </a:solidFill>
+                <a:latin typeface="Microsoft YaHei"/>
+              </a:rPr>
+              <a:t>来源：代码实现与测试报告 · 开放问题台账</a:t>
+            </a:r>
+          </a:p>
+        </p:txBody>
+      </p:sp>
+      <p:sp>
+        <p:nvSpPr>
+          <p:cNvPr id="29" name="TextBox 28"/>
+          <p:cNvSpPr txBox="1"/>
+          <p:nvPr/>
+        </p:nvSpPr>
+        <p:spPr>
+          <a:xfrm>
+            <a:off x="9525000" y="6324600"/>
+            <a:ext cx="2286000" cy="285750"/>
+          </a:xfrm>
+          <a:prstGeom prst="rect">
+            <a:avLst/>
+          </a:prstGeom>
+          <a:noFill/>
+        </p:spPr>
+        <p:txBody>
+          <a:bodyPr wrap="square" lIns="0" rIns="0" tIns="0" bIns="0" anchor="ctr">
+            <a:spAutoFit/>
+          </a:bodyPr>
+          <a:lstStyle/>
+          <a:p>
+            <a:pPr algn="r">
+              <a:lnSpc>
+                <a:spcPct val="130000"/>
+              </a:lnSpc>
+            </a:pPr>
+            <a:r>
+              <a:rPr sz="1200" b="1">
+                <a:solidFill>
+                  <a:srgbClr val="1E4FA8"/>
+                </a:solidFill>
+                <a:latin typeface="Microsoft YaHei"/>
+              </a:rPr>
+              <a:t>21 / 23</a:t>
+            </a:r>
+          </a:p>
+        </p:txBody>
+      </p:sp>
+    </p:spTree>
+  </p:cSld>
+  <p:clrMapOvr>
+    <a:masterClrMapping/>
+  </p:clrMapOvr>
+</p:sld>
+</file>
+
+<file path=ppt/slides/slide23.xml><?xml version="1.0" encoding="utf-8"?>
+<p:sld xmlns:a="http://schemas.openxmlformats.org/drawingml/2006/main" xmlns:p="http://schemas.openxmlformats.org/presentationml/2006/main" xmlns:r="http://schemas.openxmlformats.org/officeDocument/2006/relationships">
+  <p:cSld>
+    <p:bg>
+      <p:bgPr>
+        <a:solidFill>
+          <a:srgbClr val="FFFFFF"/>
+        </a:solidFill>
+        <a:effectLst/>
+      </p:bgPr>
+    </p:bg>
+    <p:spTree>
+      <p:nvGrpSpPr>
+        <p:cNvPr id="1" name=""/>
+        <p:cNvGrpSpPr/>
+        <p:nvPr/>
+      </p:nvGrpSpPr>
+      <p:grpSpPr/>
+      <p:sp>
+        <p:nvSpPr>
+          <p:cNvPr id="2" name="Rectangle 1"/>
+          <p:cNvSpPr/>
+          <p:nvPr/>
+        </p:nvSpPr>
+        <p:spPr>
+          <a:xfrm>
+            <a:off x="0" y="0"/>
             <a:ext cx="12192000" cy="133350"/>
           </a:xfrm>
           <a:prstGeom prst="rect">
@@ -20772,7 +22055,7 @@
                 </a:solidFill>
                 <a:latin typeface="Microsoft YaHei"/>
               </a:rPr>
-              <a:t>03 / 22</a:t>
+              <a:t>03 / 23</a:t>
             </a:r>
           </a:p>
         </p:txBody>
@@ -22031,7 +23314,7 @@
                 </a:solidFill>
                 <a:latin typeface="Microsoft YaHei"/>
               </a:rPr>
-              <a:t>04 / 22</a:t>
+              <a:t>04 / 23</a:t>
             </a:r>
           </a:p>
         </p:txBody>
@@ -22955,7 +24238,7 @@
                 </a:solidFill>
                 <a:latin typeface="Microsoft YaHei"/>
               </a:rPr>
-              <a:t>05 / 22</a:t>
+              <a:t>05 / 23</a:t>
             </a:r>
           </a:p>
         </p:txBody>
@@ -24191,7 +25474,7 @@
                 </a:solidFill>
                 <a:latin typeface="Microsoft YaHei"/>
               </a:rPr>
-              <a:t>06 / 22</a:t>
+              <a:t>06 / 23</a:t>
             </a:r>
           </a:p>
         </p:txBody>
@@ -24887,7 +26170,7 @@
                 </a:solidFill>
                 <a:latin typeface="Microsoft YaHei"/>
               </a:rPr>
-              <a:t>07 / 22</a:t>
+              <a:t>07 / 23</a:t>
             </a:r>
           </a:p>
         </p:txBody>
@@ -26530,7 +27813,7 @@
                 </a:solidFill>
                 <a:latin typeface="Microsoft YaHei"/>
               </a:rPr>
-              <a:t>08 / 22</a:t>
+              <a:t>08 / 23</a:t>
             </a:r>
           </a:p>
         </p:txBody>
@@ -27609,7 +28892,7 @@
                 </a:solidFill>
                 <a:latin typeface="Microsoft YaHei"/>
               </a:rPr>
-              <a:t>09 / 22</a:t>
+              <a:t>09 / 23</a:t>
             </a:r>
           </a:p>
         </p:txBody>

--- a/10-展示汇报/健身房运营管理系统答辩/健身房运营管理系统答辩.pptx
+++ b/10-展示汇报/健身房运营管理系统答辩/健身房运营管理系统答辩.pptx
@@ -28,6 +28,7 @@
     <p:sldId id="276" r:id="rId27"/>
     <p:sldId id="277" r:id="rId28"/>
     <p:sldId id="278" r:id="rId29"/>
+    <p:sldId id="279" r:id="rId30"/>
   </p:sldIdLst>
   <p:sldSz cx="12192000" cy="6858000" type="screen4x3"/>
   <p:notesSz cx="6858000" cy="9144000"/>
@@ -4745,7 +4746,7 @@
                 </a:solidFill>
                 <a:latin typeface="Microsoft YaHei"/>
               </a:rPr>
-              <a:t>10 / 23</a:t>
+              <a:t>10 / 24</a:t>
             </a:r>
           </a:p>
         </p:txBody>
@@ -5441,7 +5442,7 @@
                 </a:solidFill>
                 <a:latin typeface="Microsoft YaHei"/>
               </a:rPr>
-              <a:t>11 / 23</a:t>
+              <a:t>11 / 24</a:t>
             </a:r>
           </a:p>
         </p:txBody>
@@ -7117,7 +7118,7 @@
                 </a:solidFill>
                 <a:latin typeface="Microsoft YaHei"/>
               </a:rPr>
-              <a:t>12 / 23</a:t>
+              <a:t>12 / 24</a:t>
             </a:r>
           </a:p>
         </p:txBody>
@@ -8735,7 +8736,7 @@
                 </a:solidFill>
                 <a:latin typeface="Microsoft YaHei"/>
               </a:rPr>
-              <a:t>13 / 23</a:t>
+              <a:t>13 / 24</a:t>
             </a:r>
           </a:p>
         </p:txBody>
@@ -10460,7 +10461,7 @@
                 </a:solidFill>
                 <a:latin typeface="Microsoft YaHei"/>
               </a:rPr>
-              <a:t>14 / 23</a:t>
+              <a:t>14 / 24</a:t>
             </a:r>
           </a:p>
         </p:txBody>
@@ -11685,7 +11686,7 @@
                 </a:solidFill>
                 <a:latin typeface="Microsoft YaHei"/>
               </a:rPr>
-              <a:t>15 / 23</a:t>
+              <a:t>15 / 24</a:t>
             </a:r>
           </a:p>
         </p:txBody>
@@ -13122,7 +13123,7 @@
                 </a:solidFill>
                 <a:latin typeface="Microsoft YaHei"/>
               </a:rPr>
-              <a:t>16 / 23</a:t>
+              <a:t>16 / 24</a:t>
             </a:r>
           </a:p>
         </p:txBody>
@@ -13231,7 +13232,7 @@
                 </a:solidFill>
                 <a:latin typeface="Microsoft YaHei"/>
               </a:rPr>
-              <a:t>管理员功能：课程维护（增删改查）</a:t>
+              <a:t>排课、选课与课程维护</a:t>
             </a:r>
           </a:p>
         </p:txBody>
@@ -13283,12 +13284,12 @@
         </p:nvSpPr>
         <p:spPr>
           <a:xfrm>
-            <a:off x="381000" y="1047750"/>
-            <a:ext cx="11430000" cy="1104900"/>
+            <a:off x="381000" y="952500"/>
+            <a:ext cx="11430000" cy="1009650"/>
           </a:xfrm>
           <a:prstGeom prst="roundRect">
             <a:avLst>
-              <a:gd name="adj" fmla="val 10344"/>
+              <a:gd name="adj" fmla="val 11320"/>
             </a:avLst>
           </a:prstGeom>
           <a:solidFill>
@@ -13331,12 +13332,12 @@
         </p:nvSpPr>
         <p:spPr>
           <a:xfrm>
-            <a:off x="590550" y="1371600"/>
-            <a:ext cx="457200" cy="457200"/>
+            <a:off x="590550" y="1238250"/>
+            <a:ext cx="438150" cy="438150"/>
           </a:xfrm>
           <a:prstGeom prst="roundRect">
             <a:avLst>
-              <a:gd name="adj" fmla="val 16666"/>
+              <a:gd name="adj" fmla="val 17391"/>
             </a:avLst>
           </a:prstGeom>
           <a:solidFill>
@@ -13377,8 +13378,8 @@
         </p:nvSpPr>
         <p:spPr>
           <a:xfrm>
-            <a:off x="590550" y="1371600"/>
-            <a:ext cx="457200" cy="457200"/>
+            <a:off x="590550" y="1238250"/>
+            <a:ext cx="438150" cy="438150"/>
           </a:xfrm>
           <a:prstGeom prst="rect">
             <a:avLst/>
@@ -13397,7 +13398,7 @@
               </a:lnSpc>
             </a:pPr>
             <a:r>
-              <a:rPr sz="1650" b="1">
+              <a:rPr sz="1575" b="1">
                 <a:solidFill>
                   <a:srgbClr val="FFFFFF"/>
                 </a:solidFill>
@@ -13416,8 +13417,8 @@
         </p:nvSpPr>
         <p:spPr>
           <a:xfrm>
-            <a:off x="1238250" y="1200150"/>
-            <a:ext cx="10287000" cy="323850"/>
+            <a:off x="1200150" y="1085850"/>
+            <a:ext cx="10287000" cy="285750"/>
           </a:xfrm>
           <a:prstGeom prst="rect">
             <a:avLst/>
@@ -13436,13 +13437,13 @@
               </a:lnSpc>
             </a:pPr>
             <a:r>
-              <a:rPr sz="1875" b="1">
+              <a:rPr sz="1725" b="1">
                 <a:solidFill>
                   <a:srgbClr val="0E3F8C"/>
                 </a:solidFill>
                 <a:latin typeface="Microsoft YaHei"/>
               </a:rPr>
-              <a:t>新建课程</a:t>
+              <a:t>排课：管理员与店长均可新建课程</a:t>
             </a:r>
           </a:p>
         </p:txBody>
@@ -13455,8 +13456,8 @@
         </p:nvSpPr>
         <p:spPr>
           <a:xfrm>
-            <a:off x="1238250" y="1562100"/>
-            <a:ext cx="10287000" cy="495300"/>
+            <a:off x="1200150" y="1409700"/>
+            <a:ext cx="10287000" cy="457200"/>
           </a:xfrm>
           <a:prstGeom prst="rect">
             <a:avLst/>
@@ -13471,17 +13472,17 @@
           <a:p>
             <a:pPr algn="l">
               <a:lnSpc>
-                <a:spcPct val="145000"/>
-              </a:lnSpc>
-            </a:pPr>
-            <a:r>
-              <a:rPr sz="1350" b="0">
+                <a:spcPct val="142000"/>
+              </a:lnSpc>
+            </a:pPr>
+            <a:r>
+              <a:rPr sz="1275" b="0">
                 <a:solidFill>
                   <a:srgbClr val="4A5568"/>
                 </a:solidFill>
                 <a:latin typeface="Microsoft YaHei"/>
               </a:rPr>
-              <a:t>填写课程编号、名称、类型（团课 / 私教）、教练、场地、起止时间与容量；服务端校验编号唯一、时间合法、排课不冲突（SYS-R3）</a:t>
+              <a:t>填写编号、名称、类型、教练、场地、起止时间与容量；校验编号唯一、时间合法，并按 SYS-R3 检测教练或场地时段冲突</a:t>
             </a:r>
           </a:p>
         </p:txBody>
@@ -13494,12 +13495,12 @@
         </p:nvSpPr>
         <p:spPr>
           <a:xfrm>
-            <a:off x="381000" y="2266950"/>
-            <a:ext cx="11430000" cy="1104900"/>
+            <a:off x="381000" y="2057400"/>
+            <a:ext cx="11430000" cy="1009650"/>
           </a:xfrm>
           <a:prstGeom prst="roundRect">
             <a:avLst>
-              <a:gd name="adj" fmla="val 10344"/>
+              <a:gd name="adj" fmla="val 11320"/>
             </a:avLst>
           </a:prstGeom>
           <a:solidFill>
@@ -13542,12 +13543,12 @@
         </p:nvSpPr>
         <p:spPr>
           <a:xfrm>
-            <a:off x="590550" y="2590800"/>
-            <a:ext cx="457200" cy="457200"/>
+            <a:off x="590550" y="2343150"/>
+            <a:ext cx="438150" cy="438150"/>
           </a:xfrm>
           <a:prstGeom prst="roundRect">
             <a:avLst>
-              <a:gd name="adj" fmla="val 16666"/>
+              <a:gd name="adj" fmla="val 17391"/>
             </a:avLst>
           </a:prstGeom>
           <a:solidFill>
@@ -13588,8 +13589,8 @@
         </p:nvSpPr>
         <p:spPr>
           <a:xfrm>
-            <a:off x="590550" y="2590800"/>
-            <a:ext cx="457200" cy="457200"/>
+            <a:off x="590550" y="2343150"/>
+            <a:ext cx="438150" cy="438150"/>
           </a:xfrm>
           <a:prstGeom prst="rect">
             <a:avLst/>
@@ -13608,7 +13609,7 @@
               </a:lnSpc>
             </a:pPr>
             <a:r>
-              <a:rPr sz="1650" b="1">
+              <a:rPr sz="1575" b="1">
                 <a:solidFill>
                   <a:srgbClr val="FFFFFF"/>
                 </a:solidFill>
@@ -13627,8 +13628,8 @@
         </p:nvSpPr>
         <p:spPr>
           <a:xfrm>
-            <a:off x="1238250" y="2419350"/>
-            <a:ext cx="10287000" cy="323850"/>
+            <a:off x="1200150" y="2190750"/>
+            <a:ext cx="10287000" cy="285750"/>
           </a:xfrm>
           <a:prstGeom prst="rect">
             <a:avLst/>
@@ -13647,13 +13648,13 @@
               </a:lnSpc>
             </a:pPr>
             <a:r>
-              <a:rPr sz="1875" b="1">
+              <a:rPr sz="1725" b="1">
                 <a:solidFill>
                   <a:srgbClr val="0E3F8C"/>
                 </a:solidFill>
                 <a:latin typeface="Microsoft YaHei"/>
               </a:rPr>
-              <a:t>查询课程</a:t>
+              <a:t>选课：所有登录用户可自愿报名</a:t>
             </a:r>
           </a:p>
         </p:txBody>
@@ -13666,8 +13667,8 @@
         </p:nvSpPr>
         <p:spPr>
           <a:xfrm>
-            <a:off x="1238250" y="2781300"/>
-            <a:ext cx="10287000" cy="495300"/>
+            <a:off x="1200150" y="2514600"/>
+            <a:ext cx="10287000" cy="457200"/>
           </a:xfrm>
           <a:prstGeom prst="rect">
             <a:avLst/>
@@ -13682,17 +13683,17 @@
           <a:p>
             <a:pPr algn="l">
               <a:lnSpc>
-                <a:spcPct val="145000"/>
-              </a:lnSpc>
-            </a:pPr>
-            <a:r>
-              <a:rPr sz="1350" b="0">
+                <a:spcPct val="142000"/>
+              </a:lnSpc>
+            </a:pPr>
+            <a:r>
+              <a:rPr sz="1275" b="0">
                 <a:solidFill>
                   <a:srgbClr val="4A5568"/>
                 </a:solidFill>
                 <a:latin typeface="Microsoft YaHei"/>
               </a:rPr>
-              <a:t>按列表查看全部课程，展示编号、名称、类型、教练、时间、已约 / 容量与状态；支持随时刷新</a:t>
+              <a:t>会员账号固定作用于本人（伪造 memberId 会被改写）；重复选课幂等，返回同一预约号；会籍过期或爽约受限会被拦截</a:t>
             </a:r>
           </a:p>
         </p:txBody>
@@ -13705,12 +13706,12 @@
         </p:nvSpPr>
         <p:spPr>
           <a:xfrm>
-            <a:off x="381000" y="3486150"/>
-            <a:ext cx="11430000" cy="1104900"/>
+            <a:off x="381000" y="3162300"/>
+            <a:ext cx="11430000" cy="1009650"/>
           </a:xfrm>
           <a:prstGeom prst="roundRect">
             <a:avLst>
-              <a:gd name="adj" fmla="val 10344"/>
+              <a:gd name="adj" fmla="val 11320"/>
             </a:avLst>
           </a:prstGeom>
           <a:solidFill>
@@ -13753,12 +13754,12 @@
         </p:nvSpPr>
         <p:spPr>
           <a:xfrm>
-            <a:off x="590550" y="3810000"/>
-            <a:ext cx="457200" cy="457200"/>
+            <a:off x="590550" y="3448050"/>
+            <a:ext cx="438150" cy="438150"/>
           </a:xfrm>
           <a:prstGeom prst="roundRect">
             <a:avLst>
-              <a:gd name="adj" fmla="val 16666"/>
+              <a:gd name="adj" fmla="val 17391"/>
             </a:avLst>
           </a:prstGeom>
           <a:solidFill>
@@ -13799,8 +13800,8 @@
         </p:nvSpPr>
         <p:spPr>
           <a:xfrm>
-            <a:off x="590550" y="3810000"/>
-            <a:ext cx="457200" cy="457200"/>
+            <a:off x="590550" y="3448050"/>
+            <a:ext cx="438150" cy="438150"/>
           </a:xfrm>
           <a:prstGeom prst="rect">
             <a:avLst/>
@@ -13819,7 +13820,7 @@
               </a:lnSpc>
             </a:pPr>
             <a:r>
-              <a:rPr sz="1650" b="1">
+              <a:rPr sz="1575" b="1">
                 <a:solidFill>
                   <a:srgbClr val="FFFFFF"/>
                 </a:solidFill>
@@ -13838,8 +13839,8 @@
         </p:nvSpPr>
         <p:spPr>
           <a:xfrm>
-            <a:off x="1238250" y="3638550"/>
-            <a:ext cx="10287000" cy="323850"/>
+            <a:off x="1200150" y="3295650"/>
+            <a:ext cx="10287000" cy="285750"/>
           </a:xfrm>
           <a:prstGeom prst="rect">
             <a:avLst/>
@@ -13858,13 +13859,13 @@
               </a:lnSpc>
             </a:pPr>
             <a:r>
-              <a:rPr sz="1875" b="1">
+              <a:rPr sz="1725" b="1">
                 <a:solidFill>
                   <a:srgbClr val="0E3F8C"/>
                 </a:solidFill>
                 <a:latin typeface="Microsoft YaHei"/>
               </a:rPr>
-              <a:t>编辑课程</a:t>
+              <a:t>退课：自愿退出，规则明确</a:t>
             </a:r>
           </a:p>
         </p:txBody>
@@ -13877,8 +13878,8 @@
         </p:nvSpPr>
         <p:spPr>
           <a:xfrm>
-            <a:off x="1238250" y="4000500"/>
-            <a:ext cx="10287000" cy="495300"/>
+            <a:off x="1200150" y="3619500"/>
+            <a:ext cx="10287000" cy="457200"/>
           </a:xfrm>
           <a:prstGeom prst="rect">
             <a:avLst/>
@@ -13893,17 +13894,17 @@
           <a:p>
             <a:pPr algn="l">
               <a:lnSpc>
-                <a:spcPct val="145000"/>
-              </a:lnSpc>
-            </a:pPr>
-            <a:r>
-              <a:rPr sz="1350" b="0">
+                <a:spcPct val="142000"/>
+              </a:lnSpc>
+            </a:pPr>
+            <a:r>
+              <a:rPr sz="1275" b="0">
                 <a:solidFill>
                   <a:srgbClr val="4A5568"/>
                 </a:solidFill>
                 <a:latin typeface="Microsoft YaHei"/>
               </a:rPr>
-              <a:t>点列表中的「编辑」按钮载入原值；可修改名称、教练、场地、时间与容量；容量不得小于已预约人数（防超卖）</a:t>
+              <a:t>仅「已预约」状态可退；课程开始后不可退；重复退课返回 409；退课后名额立即释放</a:t>
             </a:r>
           </a:p>
         </p:txBody>
@@ -13916,12 +13917,12 @@
         </p:nvSpPr>
         <p:spPr>
           <a:xfrm>
-            <a:off x="381000" y="4705350"/>
-            <a:ext cx="11430000" cy="1104900"/>
+            <a:off x="381000" y="4267200"/>
+            <a:ext cx="11430000" cy="1009650"/>
           </a:xfrm>
           <a:prstGeom prst="roundRect">
             <a:avLst>
-              <a:gd name="adj" fmla="val 10344"/>
+              <a:gd name="adj" fmla="val 11320"/>
             </a:avLst>
           </a:prstGeom>
           <a:solidFill>
@@ -13964,12 +13965,12 @@
         </p:nvSpPr>
         <p:spPr>
           <a:xfrm>
-            <a:off x="590550" y="5029200"/>
-            <a:ext cx="457200" cy="457200"/>
+            <a:off x="590550" y="4552950"/>
+            <a:ext cx="438150" cy="438150"/>
           </a:xfrm>
           <a:prstGeom prst="roundRect">
             <a:avLst>
-              <a:gd name="adj" fmla="val 16666"/>
+              <a:gd name="adj" fmla="val 17391"/>
             </a:avLst>
           </a:prstGeom>
           <a:solidFill>
@@ -14010,8 +14011,8 @@
         </p:nvSpPr>
         <p:spPr>
           <a:xfrm>
-            <a:off x="590550" y="5029200"/>
-            <a:ext cx="457200" cy="457200"/>
+            <a:off x="590550" y="4552950"/>
+            <a:ext cx="438150" cy="438150"/>
           </a:xfrm>
           <a:prstGeom prst="rect">
             <a:avLst/>
@@ -14030,7 +14031,7 @@
               </a:lnSpc>
             </a:pPr>
             <a:r>
-              <a:rPr sz="1650" b="1">
+              <a:rPr sz="1575" b="1">
                 <a:solidFill>
                   <a:srgbClr val="FFFFFF"/>
                 </a:solidFill>
@@ -14049,8 +14050,8 @@
         </p:nvSpPr>
         <p:spPr>
           <a:xfrm>
-            <a:off x="1238250" y="4857750"/>
-            <a:ext cx="10287000" cy="323850"/>
+            <a:off x="1200150" y="4400550"/>
+            <a:ext cx="10287000" cy="285750"/>
           </a:xfrm>
           <a:prstGeom prst="rect">
             <a:avLst/>
@@ -14069,13 +14070,13 @@
               </a:lnSpc>
             </a:pPr>
             <a:r>
-              <a:rPr sz="1875" b="1">
+              <a:rPr sz="1725" b="1">
                 <a:solidFill>
                   <a:srgbClr val="0E3F8C"/>
                 </a:solidFill>
                 <a:latin typeface="Microsoft YaHei"/>
               </a:rPr>
-              <a:t>下架 / 上架</a:t>
+              <a:t>维护：编辑、下架与重新上架</a:t>
             </a:r>
           </a:p>
         </p:txBody>
@@ -14088,8 +14089,8 @@
         </p:nvSpPr>
         <p:spPr>
           <a:xfrm>
-            <a:off x="1238250" y="5219700"/>
-            <a:ext cx="10287000" cy="495300"/>
+            <a:off x="1200150" y="4724400"/>
+            <a:ext cx="10287000" cy="457200"/>
           </a:xfrm>
           <a:prstGeom prst="rect">
             <a:avLst/>
@@ -14104,17 +14105,17 @@
           <a:p>
             <a:pPr algn="l">
               <a:lnSpc>
-                <a:spcPct val="145000"/>
-              </a:lnSpc>
-            </a:pPr>
-            <a:r>
-              <a:rPr sz="1350" b="0">
+                <a:spcPct val="142000"/>
+              </a:lnSpc>
+            </a:pPr>
+            <a:r>
+              <a:rPr sz="1275" b="0">
                 <a:solidFill>
                   <a:srgbClr val="4A5568"/>
                 </a:solidFill>
                 <a:latin typeface="Microsoft YaHei"/>
               </a:rPr>
-              <a:t>下架＝状态置为「已下架」（软删除，保留历史预约可追溯）；存在待上课预约时拒绝下架；可重新上架</a:t>
+              <a:t>修改时容量不得小于已预约人数；下架为软删除（保留历史预约可追溯），存在待上课预约时拒绝下架</a:t>
             </a:r>
           </a:p>
         </p:txBody>
@@ -14127,12 +14128,12 @@
         </p:nvSpPr>
         <p:spPr>
           <a:xfrm>
-            <a:off x="381000" y="5162550"/>
-            <a:ext cx="11430000" cy="704850"/>
+            <a:off x="381000" y="5391150"/>
+            <a:ext cx="11430000" cy="609600"/>
           </a:xfrm>
           <a:prstGeom prst="roundRect">
             <a:avLst>
-              <a:gd name="adj" fmla="val 10810"/>
+              <a:gd name="adj" fmla="val 12500"/>
             </a:avLst>
           </a:prstGeom>
           <a:solidFill>
@@ -14173,8 +14174,8 @@
         </p:nvSpPr>
         <p:spPr>
           <a:xfrm>
-            <a:off x="381000" y="5162550"/>
-            <a:ext cx="38100" cy="704850"/>
+            <a:off x="381000" y="5391150"/>
+            <a:ext cx="38100" cy="609600"/>
           </a:xfrm>
           <a:prstGeom prst="rect">
             <a:avLst/>
@@ -14217,8 +14218,8 @@
         </p:nvSpPr>
         <p:spPr>
           <a:xfrm>
-            <a:off x="533400" y="5162550"/>
-            <a:ext cx="914400" cy="704850"/>
+            <a:off x="533400" y="5391150"/>
+            <a:ext cx="914400" cy="609600"/>
           </a:xfrm>
           <a:prstGeom prst="rect">
             <a:avLst/>
@@ -14256,8 +14257,8 @@
         </p:nvSpPr>
         <p:spPr>
           <a:xfrm>
-            <a:off x="1504950" y="5162550"/>
-            <a:ext cx="10134600" cy="704850"/>
+            <a:off x="1504950" y="5391150"/>
+            <a:ext cx="10134600" cy="609600"/>
           </a:xfrm>
           <a:prstGeom prst="rect">
             <a:avLst/>
@@ -14282,7 +14283,7 @@
                 </a:solidFill>
                 <a:latin typeface="Microsoft YaHei"/>
               </a:rPr>
-              <a:t>课程的新建、修改、下架、上架均在服务端强制校验管理员角色，非管理员一律返回 403</a:t>
+              <a:t>会员调用排课接口返回 403；排课与课程维护对管理员和店长开放，数据重置仍仅管理员</a:t>
             </a:r>
           </a:p>
         </p:txBody>
@@ -14365,7 +14366,7 @@
                 </a:solidFill>
                 <a:latin typeface="Microsoft YaHei"/>
               </a:rPr>
-              <a:t>来源：系统测试文档 · 课程管理 CRUD 用例组</a:t>
+              <a:t>来源：系统测试文档 · E2 排课与课程维护、E3 会员自愿选课退课</a:t>
             </a:r>
           </a:p>
         </p:txBody>
@@ -14404,7 +14405,7 @@
                 </a:solidFill>
                 <a:latin typeface="Microsoft YaHei"/>
               </a:rPr>
-              <a:t>22 / 23</a:t>
+              <a:t>17 / 24</a:t>
             </a:r>
           </a:p>
         </p:txBody>
@@ -14418,6 +14419,1446 @@
 </file>
 
 <file path=ppt/slides/slide18.xml><?xml version="1.0" encoding="utf-8"?>
+<p:sld xmlns:a="http://schemas.openxmlformats.org/drawingml/2006/main" xmlns:p="http://schemas.openxmlformats.org/presentationml/2006/main" xmlns:r="http://schemas.openxmlformats.org/officeDocument/2006/relationships">
+  <p:cSld>
+    <p:bg>
+      <p:bgPr>
+        <a:solidFill>
+          <a:srgbClr val="FFFFFF"/>
+        </a:solidFill>
+        <a:effectLst/>
+      </p:bgPr>
+    </p:bg>
+    <p:spTree>
+      <p:nvGrpSpPr>
+        <p:cNvPr id="1" name=""/>
+        <p:cNvGrpSpPr/>
+        <p:nvPr/>
+      </p:nvGrpSpPr>
+      <p:grpSpPr/>
+      <p:sp>
+        <p:nvSpPr>
+          <p:cNvPr id="2" name="Rectangle 1"/>
+          <p:cNvSpPr/>
+          <p:nvPr/>
+        </p:nvSpPr>
+        <p:spPr>
+          <a:xfrm>
+            <a:off x="0" y="0"/>
+            <a:ext cx="12192000" cy="762000"/>
+          </a:xfrm>
+          <a:prstGeom prst="rect">
+            <a:avLst/>
+          </a:prstGeom>
+          <a:solidFill>
+            <a:srgbClr val="1E4FA8"/>
+          </a:solidFill>
+          <a:ln>
+            <a:noFill/>
+          </a:ln>
+          <a:effectLst/>
+        </p:spPr>
+        <p:style>
+          <a:lnRef idx="1">
+            <a:schemeClr val="accent1"/>
+          </a:lnRef>
+          <a:fillRef idx="3">
+            <a:schemeClr val="accent1"/>
+          </a:fillRef>
+          <a:effectRef idx="2">
+            <a:schemeClr val="accent1"/>
+          </a:effectRef>
+          <a:fontRef idx="minor">
+            <a:schemeClr val="lt1"/>
+          </a:fontRef>
+        </p:style>
+        <p:txBody>
+          <a:bodyPr rtlCol="0" anchor="ctr" wrap="square"/>
+          <a:lstStyle/>
+          <a:p>
+            <a:pPr algn="ctr"/>
+          </a:p>
+        </p:txBody>
+      </p:sp>
+      <p:sp>
+        <p:nvSpPr>
+          <p:cNvPr id="3" name="TextBox 2"/>
+          <p:cNvSpPr txBox="1"/>
+          <p:nvPr/>
+        </p:nvSpPr>
+        <p:spPr>
+          <a:xfrm>
+            <a:off x="381000" y="0"/>
+            <a:ext cx="7239000" cy="762000"/>
+          </a:xfrm>
+          <a:prstGeom prst="rect">
+            <a:avLst/>
+          </a:prstGeom>
+          <a:noFill/>
+        </p:spPr>
+        <p:txBody>
+          <a:bodyPr wrap="square" lIns="0" rIns="0" tIns="0" bIns="0" anchor="ctr">
+            <a:spAutoFit/>
+          </a:bodyPr>
+          <a:lstStyle/>
+          <a:p>
+            <a:pPr algn="l">
+              <a:lnSpc>
+                <a:spcPct val="130000"/>
+              </a:lnSpc>
+            </a:pPr>
+            <a:r>
+              <a:rPr sz="2400" b="1">
+                <a:solidFill>
+                  <a:srgbClr val="FFFFFF"/>
+                </a:solidFill>
+                <a:latin typeface="Microsoft YaHei"/>
+              </a:rPr>
+              <a:t>会员注册与前后台联动</a:t>
+            </a:r>
+          </a:p>
+        </p:txBody>
+      </p:sp>
+      <p:sp>
+        <p:nvSpPr>
+          <p:cNvPr id="4" name="TextBox 3"/>
+          <p:cNvSpPr txBox="1"/>
+          <p:nvPr/>
+        </p:nvSpPr>
+        <p:spPr>
+          <a:xfrm>
+            <a:off x="7620000" y="0"/>
+            <a:ext cx="4191000" cy="762000"/>
+          </a:xfrm>
+          <a:prstGeom prst="rect">
+            <a:avLst/>
+          </a:prstGeom>
+          <a:noFill/>
+        </p:spPr>
+        <p:txBody>
+          <a:bodyPr wrap="square" lIns="0" rIns="0" tIns="0" bIns="0" anchor="ctr">
+            <a:spAutoFit/>
+          </a:bodyPr>
+          <a:lstStyle/>
+          <a:p>
+            <a:pPr algn="r">
+              <a:lnSpc>
+                <a:spcPct val="130000"/>
+              </a:lnSpc>
+            </a:pPr>
+            <a:r>
+              <a:rPr sz="1050" b="0">
+                <a:solidFill>
+                  <a:srgbClr val="BFD3F0"/>
+                </a:solidFill>
+                <a:latin typeface="Microsoft YaHei"/>
+              </a:rPr>
+              <a:t>健身房运营管理系统 · 课程答辩</a:t>
+            </a:r>
+          </a:p>
+        </p:txBody>
+      </p:sp>
+      <p:sp>
+        <p:nvSpPr>
+          <p:cNvPr id="5" name="TextBox 4"/>
+          <p:cNvSpPr txBox="1"/>
+          <p:nvPr/>
+        </p:nvSpPr>
+        <p:spPr>
+          <a:xfrm>
+            <a:off x="381000" y="1009650"/>
+            <a:ext cx="6286500" cy="304800"/>
+          </a:xfrm>
+          <a:prstGeom prst="rect">
+            <a:avLst/>
+          </a:prstGeom>
+          <a:noFill/>
+        </p:spPr>
+        <p:txBody>
+          <a:bodyPr wrap="square" lIns="0" rIns="0" tIns="0" bIns="0" anchor="ctr">
+            <a:spAutoFit/>
+          </a:bodyPr>
+          <a:lstStyle/>
+          <a:p>
+            <a:pPr algn="l">
+              <a:lnSpc>
+                <a:spcPct val="130000"/>
+              </a:lnSpc>
+            </a:pPr>
+            <a:r>
+              <a:rPr sz="1800" b="1">
+                <a:solidFill>
+                  <a:srgbClr val="0E3F8C"/>
+                </a:solidFill>
+                <a:latin typeface="Microsoft YaHei"/>
+              </a:rPr>
+              <a:t>会员自助注册（免登录）</a:t>
+            </a:r>
+          </a:p>
+        </p:txBody>
+      </p:sp>
+      <p:sp>
+        <p:nvSpPr>
+          <p:cNvPr id="6" name="Rounded Rectangle 5"/>
+          <p:cNvSpPr/>
+          <p:nvPr/>
+        </p:nvSpPr>
+        <p:spPr>
+          <a:xfrm>
+            <a:off x="381000" y="1409700"/>
+            <a:ext cx="6286500" cy="990600"/>
+          </a:xfrm>
+          <a:prstGeom prst="roundRect">
+            <a:avLst>
+              <a:gd name="adj" fmla="val 9615"/>
+            </a:avLst>
+          </a:prstGeom>
+          <a:solidFill>
+            <a:srgbClr val="F7F9FC"/>
+          </a:solidFill>
+          <a:ln w="12700">
+            <a:solidFill>
+              <a:srgbClr val="D6DCE5"/>
+            </a:solidFill>
+          </a:ln>
+          <a:effectLst/>
+        </p:spPr>
+        <p:style>
+          <a:lnRef idx="1">
+            <a:schemeClr val="accent1"/>
+          </a:lnRef>
+          <a:fillRef idx="3">
+            <a:schemeClr val="accent1"/>
+          </a:fillRef>
+          <a:effectRef idx="2">
+            <a:schemeClr val="accent1"/>
+          </a:effectRef>
+          <a:fontRef idx="minor">
+            <a:schemeClr val="lt1"/>
+          </a:fontRef>
+        </p:style>
+        <p:txBody>
+          <a:bodyPr rtlCol="0" anchor="ctr" wrap="square"/>
+          <a:lstStyle/>
+          <a:p>
+            <a:pPr algn="ctr"/>
+          </a:p>
+        </p:txBody>
+      </p:sp>
+      <p:sp>
+        <p:nvSpPr>
+          <p:cNvPr id="7" name="Rounded Rectangle 6"/>
+          <p:cNvSpPr/>
+          <p:nvPr/>
+        </p:nvSpPr>
+        <p:spPr>
+          <a:xfrm>
+            <a:off x="571500" y="1695450"/>
+            <a:ext cx="438150" cy="438150"/>
+          </a:xfrm>
+          <a:prstGeom prst="roundRect">
+            <a:avLst>
+              <a:gd name="adj" fmla="val 17391"/>
+            </a:avLst>
+          </a:prstGeom>
+          <a:solidFill>
+            <a:srgbClr val="1E4FA8"/>
+          </a:solidFill>
+          <a:ln>
+            <a:noFill/>
+          </a:ln>
+          <a:effectLst/>
+        </p:spPr>
+        <p:style>
+          <a:lnRef idx="1">
+            <a:schemeClr val="accent1"/>
+          </a:lnRef>
+          <a:fillRef idx="3">
+            <a:schemeClr val="accent1"/>
+          </a:fillRef>
+          <a:effectRef idx="2">
+            <a:schemeClr val="accent1"/>
+          </a:effectRef>
+          <a:fontRef idx="minor">
+            <a:schemeClr val="lt1"/>
+          </a:fontRef>
+        </p:style>
+        <p:txBody>
+          <a:bodyPr rtlCol="0" anchor="ctr" wrap="square"/>
+          <a:lstStyle/>
+          <a:p>
+            <a:pPr algn="ctr"/>
+          </a:p>
+        </p:txBody>
+      </p:sp>
+      <p:sp>
+        <p:nvSpPr>
+          <p:cNvPr id="8" name="TextBox 7"/>
+          <p:cNvSpPr txBox="1"/>
+          <p:nvPr/>
+        </p:nvSpPr>
+        <p:spPr>
+          <a:xfrm>
+            <a:off x="571500" y="1695450"/>
+            <a:ext cx="438150" cy="438150"/>
+          </a:xfrm>
+          <a:prstGeom prst="rect">
+            <a:avLst/>
+          </a:prstGeom>
+          <a:noFill/>
+        </p:spPr>
+        <p:txBody>
+          <a:bodyPr wrap="square" lIns="0" rIns="0" tIns="0" bIns="0" anchor="ctr">
+            <a:spAutoFit/>
+          </a:bodyPr>
+          <a:lstStyle/>
+          <a:p>
+            <a:pPr algn="ctr">
+              <a:lnSpc>
+                <a:spcPct val="130000"/>
+              </a:lnSpc>
+            </a:pPr>
+            <a:r>
+              <a:rPr sz="1575" b="1">
+                <a:solidFill>
+                  <a:srgbClr val="FFFFFF"/>
+                </a:solidFill>
+                <a:latin typeface="Microsoft YaHei"/>
+              </a:rPr>
+              <a:t>01</a:t>
+            </a:r>
+          </a:p>
+        </p:txBody>
+      </p:sp>
+      <p:sp>
+        <p:nvSpPr>
+          <p:cNvPr id="9" name="TextBox 8"/>
+          <p:cNvSpPr txBox="1"/>
+          <p:nvPr/>
+        </p:nvSpPr>
+        <p:spPr>
+          <a:xfrm>
+            <a:off x="1162050" y="1562100"/>
+            <a:ext cx="5295900" cy="285750"/>
+          </a:xfrm>
+          <a:prstGeom prst="rect">
+            <a:avLst/>
+          </a:prstGeom>
+          <a:noFill/>
+        </p:spPr>
+        <p:txBody>
+          <a:bodyPr wrap="square" lIns="0" rIns="0" tIns="0" bIns="0" anchor="ctr">
+            <a:spAutoFit/>
+          </a:bodyPr>
+          <a:lstStyle/>
+          <a:p>
+            <a:pPr algn="l">
+              <a:lnSpc>
+                <a:spcPct val="130000"/>
+              </a:lnSpc>
+            </a:pPr>
+            <a:r>
+              <a:rPr sz="1650" b="1">
+                <a:solidFill>
+                  <a:srgbClr val="0E3F8C"/>
+                </a:solidFill>
+                <a:latin typeface="Microsoft YaHei"/>
+              </a:rPr>
+              <a:t>填写信息</a:t>
+            </a:r>
+          </a:p>
+        </p:txBody>
+      </p:sp>
+      <p:sp>
+        <p:nvSpPr>
+          <p:cNvPr id="10" name="TextBox 9"/>
+          <p:cNvSpPr txBox="1"/>
+          <p:nvPr/>
+        </p:nvSpPr>
+        <p:spPr>
+          <a:xfrm>
+            <a:off x="1162050" y="1885950"/>
+            <a:ext cx="5295900" cy="419100"/>
+          </a:xfrm>
+          <a:prstGeom prst="rect">
+            <a:avLst/>
+          </a:prstGeom>
+          <a:noFill/>
+        </p:spPr>
+        <p:txBody>
+          <a:bodyPr wrap="square" lIns="0" rIns="0" tIns="0" bIns="0" anchor="t">
+            <a:spAutoFit/>
+          </a:bodyPr>
+          <a:lstStyle/>
+          <a:p>
+            <a:pPr algn="l">
+              <a:lnSpc>
+                <a:spcPct val="140000"/>
+              </a:lnSpc>
+            </a:pPr>
+            <a:r>
+              <a:rPr sz="1275" b="0">
+                <a:solidFill>
+                  <a:srgbClr val="4A5568"/>
+                </a:solidFill>
+                <a:latin typeface="Microsoft YaHei"/>
+              </a:rPr>
+              <a:t>用户名、密码（至少 6 位）、姓名、手机号</a:t>
+            </a:r>
+          </a:p>
+        </p:txBody>
+      </p:sp>
+      <p:sp>
+        <p:nvSpPr>
+          <p:cNvPr id="11" name="Rounded Rectangle 10"/>
+          <p:cNvSpPr/>
+          <p:nvPr/>
+        </p:nvSpPr>
+        <p:spPr>
+          <a:xfrm>
+            <a:off x="381000" y="2495550"/>
+            <a:ext cx="6286500" cy="990600"/>
+          </a:xfrm>
+          <a:prstGeom prst="roundRect">
+            <a:avLst>
+              <a:gd name="adj" fmla="val 9615"/>
+            </a:avLst>
+          </a:prstGeom>
+          <a:solidFill>
+            <a:srgbClr val="F7F9FC"/>
+          </a:solidFill>
+          <a:ln w="12700">
+            <a:solidFill>
+              <a:srgbClr val="D6DCE5"/>
+            </a:solidFill>
+          </a:ln>
+          <a:effectLst/>
+        </p:spPr>
+        <p:style>
+          <a:lnRef idx="1">
+            <a:schemeClr val="accent1"/>
+          </a:lnRef>
+          <a:fillRef idx="3">
+            <a:schemeClr val="accent1"/>
+          </a:fillRef>
+          <a:effectRef idx="2">
+            <a:schemeClr val="accent1"/>
+          </a:effectRef>
+          <a:fontRef idx="minor">
+            <a:schemeClr val="lt1"/>
+          </a:fontRef>
+        </p:style>
+        <p:txBody>
+          <a:bodyPr rtlCol="0" anchor="ctr" wrap="square"/>
+          <a:lstStyle/>
+          <a:p>
+            <a:pPr algn="ctr"/>
+          </a:p>
+        </p:txBody>
+      </p:sp>
+      <p:sp>
+        <p:nvSpPr>
+          <p:cNvPr id="12" name="Rounded Rectangle 11"/>
+          <p:cNvSpPr/>
+          <p:nvPr/>
+        </p:nvSpPr>
+        <p:spPr>
+          <a:xfrm>
+            <a:off x="571500" y="2781300"/>
+            <a:ext cx="438150" cy="438150"/>
+          </a:xfrm>
+          <a:prstGeom prst="roundRect">
+            <a:avLst>
+              <a:gd name="adj" fmla="val 17391"/>
+            </a:avLst>
+          </a:prstGeom>
+          <a:solidFill>
+            <a:srgbClr val="1E4FA8"/>
+          </a:solidFill>
+          <a:ln>
+            <a:noFill/>
+          </a:ln>
+          <a:effectLst/>
+        </p:spPr>
+        <p:style>
+          <a:lnRef idx="1">
+            <a:schemeClr val="accent1"/>
+          </a:lnRef>
+          <a:fillRef idx="3">
+            <a:schemeClr val="accent1"/>
+          </a:fillRef>
+          <a:effectRef idx="2">
+            <a:schemeClr val="accent1"/>
+          </a:effectRef>
+          <a:fontRef idx="minor">
+            <a:schemeClr val="lt1"/>
+          </a:fontRef>
+        </p:style>
+        <p:txBody>
+          <a:bodyPr rtlCol="0" anchor="ctr" wrap="square"/>
+          <a:lstStyle/>
+          <a:p>
+            <a:pPr algn="ctr"/>
+          </a:p>
+        </p:txBody>
+      </p:sp>
+      <p:sp>
+        <p:nvSpPr>
+          <p:cNvPr id="13" name="TextBox 12"/>
+          <p:cNvSpPr txBox="1"/>
+          <p:nvPr/>
+        </p:nvSpPr>
+        <p:spPr>
+          <a:xfrm>
+            <a:off x="571500" y="2781300"/>
+            <a:ext cx="438150" cy="438150"/>
+          </a:xfrm>
+          <a:prstGeom prst="rect">
+            <a:avLst/>
+          </a:prstGeom>
+          <a:noFill/>
+        </p:spPr>
+        <p:txBody>
+          <a:bodyPr wrap="square" lIns="0" rIns="0" tIns="0" bIns="0" anchor="ctr">
+            <a:spAutoFit/>
+          </a:bodyPr>
+          <a:lstStyle/>
+          <a:p>
+            <a:pPr algn="ctr">
+              <a:lnSpc>
+                <a:spcPct val="130000"/>
+              </a:lnSpc>
+            </a:pPr>
+            <a:r>
+              <a:rPr sz="1575" b="1">
+                <a:solidFill>
+                  <a:srgbClr val="FFFFFF"/>
+                </a:solidFill>
+                <a:latin typeface="Microsoft YaHei"/>
+              </a:rPr>
+              <a:t>02</a:t>
+            </a:r>
+          </a:p>
+        </p:txBody>
+      </p:sp>
+      <p:sp>
+        <p:nvSpPr>
+          <p:cNvPr id="14" name="TextBox 13"/>
+          <p:cNvSpPr txBox="1"/>
+          <p:nvPr/>
+        </p:nvSpPr>
+        <p:spPr>
+          <a:xfrm>
+            <a:off x="1162050" y="2647950"/>
+            <a:ext cx="5295900" cy="285750"/>
+          </a:xfrm>
+          <a:prstGeom prst="rect">
+            <a:avLst/>
+          </a:prstGeom>
+          <a:noFill/>
+        </p:spPr>
+        <p:txBody>
+          <a:bodyPr wrap="square" lIns="0" rIns="0" tIns="0" bIns="0" anchor="ctr">
+            <a:spAutoFit/>
+          </a:bodyPr>
+          <a:lstStyle/>
+          <a:p>
+            <a:pPr algn="l">
+              <a:lnSpc>
+                <a:spcPct val="130000"/>
+              </a:lnSpc>
+            </a:pPr>
+            <a:r>
+              <a:rPr sz="1650" b="1">
+                <a:solidFill>
+                  <a:srgbClr val="0E3F8C"/>
+                </a:solidFill>
+                <a:latin typeface="Microsoft YaHei"/>
+              </a:rPr>
+              <a:t>一次事务创建</a:t>
+            </a:r>
+          </a:p>
+        </p:txBody>
+      </p:sp>
+      <p:sp>
+        <p:nvSpPr>
+          <p:cNvPr id="15" name="TextBox 14"/>
+          <p:cNvSpPr txBox="1"/>
+          <p:nvPr/>
+        </p:nvSpPr>
+        <p:spPr>
+          <a:xfrm>
+            <a:off x="1162050" y="2971800"/>
+            <a:ext cx="5295900" cy="419100"/>
+          </a:xfrm>
+          <a:prstGeom prst="rect">
+            <a:avLst/>
+          </a:prstGeom>
+          <a:noFill/>
+        </p:spPr>
+        <p:txBody>
+          <a:bodyPr wrap="square" lIns="0" rIns="0" tIns="0" bIns="0" anchor="t">
+            <a:spAutoFit/>
+          </a:bodyPr>
+          <a:lstStyle/>
+          <a:p>
+            <a:pPr algn="l">
+              <a:lnSpc>
+                <a:spcPct val="140000"/>
+              </a:lnSpc>
+            </a:pPr>
+            <a:r>
+              <a:rPr sz="1275" b="0">
+                <a:solidFill>
+                  <a:srgbClr val="4A5568"/>
+                </a:solidFill>
+                <a:latin typeface="Microsoft YaHei"/>
+              </a:rPr>
+              <a:t>登录账号 + 会员档案 + 角色绑定，不留半成品数据</a:t>
+            </a:r>
+          </a:p>
+        </p:txBody>
+      </p:sp>
+      <p:sp>
+        <p:nvSpPr>
+          <p:cNvPr id="16" name="Rounded Rectangle 15"/>
+          <p:cNvSpPr/>
+          <p:nvPr/>
+        </p:nvSpPr>
+        <p:spPr>
+          <a:xfrm>
+            <a:off x="381000" y="3581400"/>
+            <a:ext cx="6286500" cy="990600"/>
+          </a:xfrm>
+          <a:prstGeom prst="roundRect">
+            <a:avLst>
+              <a:gd name="adj" fmla="val 9615"/>
+            </a:avLst>
+          </a:prstGeom>
+          <a:solidFill>
+            <a:srgbClr val="F7F9FC"/>
+          </a:solidFill>
+          <a:ln w="12700">
+            <a:solidFill>
+              <a:srgbClr val="D6DCE5"/>
+            </a:solidFill>
+          </a:ln>
+          <a:effectLst/>
+        </p:spPr>
+        <p:style>
+          <a:lnRef idx="1">
+            <a:schemeClr val="accent1"/>
+          </a:lnRef>
+          <a:fillRef idx="3">
+            <a:schemeClr val="accent1"/>
+          </a:fillRef>
+          <a:effectRef idx="2">
+            <a:schemeClr val="accent1"/>
+          </a:effectRef>
+          <a:fontRef idx="minor">
+            <a:schemeClr val="lt1"/>
+          </a:fontRef>
+        </p:style>
+        <p:txBody>
+          <a:bodyPr rtlCol="0" anchor="ctr" wrap="square"/>
+          <a:lstStyle/>
+          <a:p>
+            <a:pPr algn="ctr"/>
+          </a:p>
+        </p:txBody>
+      </p:sp>
+      <p:sp>
+        <p:nvSpPr>
+          <p:cNvPr id="17" name="Rounded Rectangle 16"/>
+          <p:cNvSpPr/>
+          <p:nvPr/>
+        </p:nvSpPr>
+        <p:spPr>
+          <a:xfrm>
+            <a:off x="571500" y="3867150"/>
+            <a:ext cx="438150" cy="438150"/>
+          </a:xfrm>
+          <a:prstGeom prst="roundRect">
+            <a:avLst>
+              <a:gd name="adj" fmla="val 17391"/>
+            </a:avLst>
+          </a:prstGeom>
+          <a:solidFill>
+            <a:srgbClr val="1E4FA8"/>
+          </a:solidFill>
+          <a:ln>
+            <a:noFill/>
+          </a:ln>
+          <a:effectLst/>
+        </p:spPr>
+        <p:style>
+          <a:lnRef idx="1">
+            <a:schemeClr val="accent1"/>
+          </a:lnRef>
+          <a:fillRef idx="3">
+            <a:schemeClr val="accent1"/>
+          </a:fillRef>
+          <a:effectRef idx="2">
+            <a:schemeClr val="accent1"/>
+          </a:effectRef>
+          <a:fontRef idx="minor">
+            <a:schemeClr val="lt1"/>
+          </a:fontRef>
+        </p:style>
+        <p:txBody>
+          <a:bodyPr rtlCol="0" anchor="ctr" wrap="square"/>
+          <a:lstStyle/>
+          <a:p>
+            <a:pPr algn="ctr"/>
+          </a:p>
+        </p:txBody>
+      </p:sp>
+      <p:sp>
+        <p:nvSpPr>
+          <p:cNvPr id="18" name="TextBox 17"/>
+          <p:cNvSpPr txBox="1"/>
+          <p:nvPr/>
+        </p:nvSpPr>
+        <p:spPr>
+          <a:xfrm>
+            <a:off x="571500" y="3867150"/>
+            <a:ext cx="438150" cy="438150"/>
+          </a:xfrm>
+          <a:prstGeom prst="rect">
+            <a:avLst/>
+          </a:prstGeom>
+          <a:noFill/>
+        </p:spPr>
+        <p:txBody>
+          <a:bodyPr wrap="square" lIns="0" rIns="0" tIns="0" bIns="0" anchor="ctr">
+            <a:spAutoFit/>
+          </a:bodyPr>
+          <a:lstStyle/>
+          <a:p>
+            <a:pPr algn="ctr">
+              <a:lnSpc>
+                <a:spcPct val="130000"/>
+              </a:lnSpc>
+            </a:pPr>
+            <a:r>
+              <a:rPr sz="1575" b="1">
+                <a:solidFill>
+                  <a:srgbClr val="FFFFFF"/>
+                </a:solidFill>
+                <a:latin typeface="Microsoft YaHei"/>
+              </a:rPr>
+              <a:t>03</a:t>
+            </a:r>
+          </a:p>
+        </p:txBody>
+      </p:sp>
+      <p:sp>
+        <p:nvSpPr>
+          <p:cNvPr id="19" name="TextBox 18"/>
+          <p:cNvSpPr txBox="1"/>
+          <p:nvPr/>
+        </p:nvSpPr>
+        <p:spPr>
+          <a:xfrm>
+            <a:off x="1162050" y="3733800"/>
+            <a:ext cx="5295900" cy="285750"/>
+          </a:xfrm>
+          <a:prstGeom prst="rect">
+            <a:avLst/>
+          </a:prstGeom>
+          <a:noFill/>
+        </p:spPr>
+        <p:txBody>
+          <a:bodyPr wrap="square" lIns="0" rIns="0" tIns="0" bIns="0" anchor="ctr">
+            <a:spAutoFit/>
+          </a:bodyPr>
+          <a:lstStyle/>
+          <a:p>
+            <a:pPr algn="l">
+              <a:lnSpc>
+                <a:spcPct val="130000"/>
+              </a:lnSpc>
+            </a:pPr>
+            <a:r>
+              <a:rPr sz="1650" b="1">
+                <a:solidFill>
+                  <a:srgbClr val="0E3F8C"/>
+                </a:solidFill>
+                <a:latin typeface="Microsoft YaHei"/>
+              </a:rPr>
+              <a:t>自动编号并登录</a:t>
+            </a:r>
+          </a:p>
+        </p:txBody>
+      </p:sp>
+      <p:sp>
+        <p:nvSpPr>
+          <p:cNvPr id="20" name="TextBox 19"/>
+          <p:cNvSpPr txBox="1"/>
+          <p:nvPr/>
+        </p:nvSpPr>
+        <p:spPr>
+          <a:xfrm>
+            <a:off x="1162050" y="4057650"/>
+            <a:ext cx="5295900" cy="419100"/>
+          </a:xfrm>
+          <a:prstGeom prst="rect">
+            <a:avLst/>
+          </a:prstGeom>
+          <a:noFill/>
+        </p:spPr>
+        <p:txBody>
+          <a:bodyPr wrap="square" lIns="0" rIns="0" tIns="0" bIns="0" anchor="t">
+            <a:spAutoFit/>
+          </a:bodyPr>
+          <a:lstStyle/>
+          <a:p>
+            <a:pPr algn="l">
+              <a:lnSpc>
+                <a:spcPct val="140000"/>
+              </a:lnSpc>
+            </a:pPr>
+            <a:r>
+              <a:rPr sz="1275" b="0">
+                <a:solidFill>
+                  <a:srgbClr val="4A5568"/>
+                </a:solidFill>
+                <a:latin typeface="Microsoft YaHei"/>
+              </a:rPr>
+              <a:t>会员编号自动生成 M001…，注册成功即签发令牌</a:t>
+            </a:r>
+          </a:p>
+        </p:txBody>
+      </p:sp>
+      <p:sp>
+        <p:nvSpPr>
+          <p:cNvPr id="21" name="Rounded Rectangle 20"/>
+          <p:cNvSpPr/>
+          <p:nvPr/>
+        </p:nvSpPr>
+        <p:spPr>
+          <a:xfrm>
+            <a:off x="6896100" y="1009650"/>
+            <a:ext cx="4914900" cy="2209800"/>
+          </a:xfrm>
+          <a:prstGeom prst="roundRect">
+            <a:avLst>
+              <a:gd name="adj" fmla="val 5172"/>
+            </a:avLst>
+          </a:prstGeom>
+          <a:solidFill>
+            <a:srgbClr val="F0F5FC"/>
+          </a:solidFill>
+          <a:ln>
+            <a:noFill/>
+          </a:ln>
+          <a:effectLst/>
+        </p:spPr>
+        <p:style>
+          <a:lnRef idx="1">
+            <a:schemeClr val="accent1"/>
+          </a:lnRef>
+          <a:fillRef idx="3">
+            <a:schemeClr val="accent1"/>
+          </a:fillRef>
+          <a:effectRef idx="2">
+            <a:schemeClr val="accent1"/>
+          </a:effectRef>
+          <a:fontRef idx="minor">
+            <a:schemeClr val="lt1"/>
+          </a:fontRef>
+        </p:style>
+        <p:txBody>
+          <a:bodyPr rtlCol="0" anchor="ctr" wrap="square"/>
+          <a:lstStyle/>
+          <a:p>
+            <a:pPr algn="ctr"/>
+          </a:p>
+        </p:txBody>
+      </p:sp>
+      <p:sp>
+        <p:nvSpPr>
+          <p:cNvPr id="22" name="TextBox 21"/>
+          <p:cNvSpPr txBox="1"/>
+          <p:nvPr/>
+        </p:nvSpPr>
+        <p:spPr>
+          <a:xfrm>
+            <a:off x="7105650" y="1200150"/>
+            <a:ext cx="4495800" cy="304800"/>
+          </a:xfrm>
+          <a:prstGeom prst="rect">
+            <a:avLst/>
+          </a:prstGeom>
+          <a:noFill/>
+        </p:spPr>
+        <p:txBody>
+          <a:bodyPr wrap="square" lIns="0" rIns="0" tIns="0" bIns="0" anchor="ctr">
+            <a:spAutoFit/>
+          </a:bodyPr>
+          <a:lstStyle/>
+          <a:p>
+            <a:pPr algn="l">
+              <a:lnSpc>
+                <a:spcPct val="130000"/>
+              </a:lnSpc>
+            </a:pPr>
+            <a:r>
+              <a:rPr sz="1725" b="1">
+                <a:solidFill>
+                  <a:srgbClr val="0E3F8C"/>
+                </a:solidFill>
+                <a:latin typeface="Microsoft YaHei"/>
+              </a:rPr>
+              <a:t>门店后台：会员 ↔ 课程联动</a:t>
+            </a:r>
+          </a:p>
+        </p:txBody>
+      </p:sp>
+      <p:sp>
+        <p:nvSpPr>
+          <p:cNvPr id="23" name="TextBox 22"/>
+          <p:cNvSpPr txBox="1"/>
+          <p:nvPr/>
+        </p:nvSpPr>
+        <p:spPr>
+          <a:xfrm>
+            <a:off x="7105650" y="1581150"/>
+            <a:ext cx="4495800" cy="1524000"/>
+          </a:xfrm>
+          <a:prstGeom prst="rect">
+            <a:avLst/>
+          </a:prstGeom>
+          <a:noFill/>
+        </p:spPr>
+        <p:txBody>
+          <a:bodyPr wrap="square" lIns="0" rIns="0" tIns="0" bIns="0" anchor="t">
+            <a:spAutoFit/>
+          </a:bodyPr>
+          <a:lstStyle/>
+          <a:p>
+            <a:pPr algn="l">
+              <a:lnSpc>
+                <a:spcPct val="155000"/>
+              </a:lnSpc>
+            </a:pPr>
+            <a:r>
+              <a:rPr sz="1275" b="0">
+                <a:solidFill>
+                  <a:srgbClr val="1A2230"/>
+                </a:solidFill>
+                <a:latin typeface="Microsoft YaHei"/>
+              </a:rPr>
+              <a:t>① 选中会员卡片 → 每门课出现「为 TA 约课」</a:t>
+            </a:r>
+          </a:p>
+          <a:p>
+            <a:pPr algn="l">
+              <a:lnSpc>
+                <a:spcPct val="155000"/>
+              </a:lnSpc>
+            </a:pPr>
+            <a:r>
+              <a:rPr sz="1275" b="0">
+                <a:solidFill>
+                  <a:srgbClr val="1A2230"/>
+                </a:solidFill>
+                <a:latin typeface="Microsoft YaHei"/>
+              </a:rPr>
+              <a:t>② 课程卡显示「已报名（N）：姓名…」与余位</a:t>
+            </a:r>
+          </a:p>
+          <a:p>
+            <a:pPr algn="l">
+              <a:lnSpc>
+                <a:spcPct val="155000"/>
+              </a:lnSpc>
+            </a:pPr>
+            <a:r>
+              <a:rPr sz="1275" b="0">
+                <a:solidFill>
+                  <a:srgbClr val="1A2230"/>
+                </a:solidFill>
+                <a:latin typeface="Microsoft YaHei"/>
+              </a:rPr>
+              <a:t>③ 未选会员时只提示，不显示代客按钮</a:t>
+            </a:r>
+          </a:p>
+          <a:p>
+            <a:pPr algn="l">
+              <a:lnSpc>
+                <a:spcPct val="155000"/>
+              </a:lnSpc>
+            </a:pPr>
+            <a:r>
+              <a:rPr sz="1275" b="0">
+                <a:solidFill>
+                  <a:srgbClr val="1A2230"/>
+                </a:solidFill>
+                <a:latin typeface="Microsoft YaHei"/>
+              </a:rPr>
+              <a:t>④ 约课 / 签到 / 取消后，预约、余位与名单、已约门数三级联动</a:t>
+            </a:r>
+          </a:p>
+        </p:txBody>
+      </p:sp>
+      <p:sp>
+        <p:nvSpPr>
+          <p:cNvPr id="24" name="Rounded Rectangle 23"/>
+          <p:cNvSpPr/>
+          <p:nvPr/>
+        </p:nvSpPr>
+        <p:spPr>
+          <a:xfrm>
+            <a:off x="6896100" y="3333750"/>
+            <a:ext cx="4914900" cy="1676400"/>
+          </a:xfrm>
+          <a:prstGeom prst="roundRect">
+            <a:avLst>
+              <a:gd name="adj" fmla="val 6818"/>
+            </a:avLst>
+          </a:prstGeom>
+          <a:solidFill>
+            <a:srgbClr val="FFFFFF"/>
+          </a:solidFill>
+          <a:ln w="12700">
+            <a:solidFill>
+              <a:srgbClr val="D6DCE5"/>
+            </a:solidFill>
+          </a:ln>
+          <a:effectLst/>
+        </p:spPr>
+        <p:style>
+          <a:lnRef idx="1">
+            <a:schemeClr val="accent1"/>
+          </a:lnRef>
+          <a:fillRef idx="3">
+            <a:schemeClr val="accent1"/>
+          </a:fillRef>
+          <a:effectRef idx="2">
+            <a:schemeClr val="accent1"/>
+          </a:effectRef>
+          <a:fontRef idx="minor">
+            <a:schemeClr val="lt1"/>
+          </a:fontRef>
+        </p:style>
+        <p:txBody>
+          <a:bodyPr rtlCol="0" anchor="ctr" wrap="square"/>
+          <a:lstStyle/>
+          <a:p>
+            <a:pPr algn="ctr"/>
+          </a:p>
+        </p:txBody>
+      </p:sp>
+      <p:sp>
+        <p:nvSpPr>
+          <p:cNvPr id="25" name="TextBox 24"/>
+          <p:cNvSpPr txBox="1"/>
+          <p:nvPr/>
+        </p:nvSpPr>
+        <p:spPr>
+          <a:xfrm>
+            <a:off x="7105650" y="3486150"/>
+            <a:ext cx="4495800" cy="285750"/>
+          </a:xfrm>
+          <a:prstGeom prst="rect">
+            <a:avLst/>
+          </a:prstGeom>
+          <a:noFill/>
+        </p:spPr>
+        <p:txBody>
+          <a:bodyPr wrap="square" lIns="0" rIns="0" tIns="0" bIns="0" anchor="ctr">
+            <a:spAutoFit/>
+          </a:bodyPr>
+          <a:lstStyle/>
+          <a:p>
+            <a:pPr algn="l">
+              <a:lnSpc>
+                <a:spcPct val="130000"/>
+              </a:lnSpc>
+            </a:pPr>
+            <a:r>
+              <a:rPr sz="1650" b="1">
+                <a:solidFill>
+                  <a:srgbClr val="0E3F8C"/>
+                </a:solidFill>
+                <a:latin typeface="Microsoft YaHei"/>
+              </a:rPr>
+              <a:t>角色与能力</a:t>
+            </a:r>
+          </a:p>
+        </p:txBody>
+      </p:sp>
+      <p:sp>
+        <p:nvSpPr>
+          <p:cNvPr id="26" name="TextBox 25"/>
+          <p:cNvSpPr txBox="1"/>
+          <p:nvPr/>
+        </p:nvSpPr>
+        <p:spPr>
+          <a:xfrm>
+            <a:off x="7105650" y="3829050"/>
+            <a:ext cx="4495800" cy="1066800"/>
+          </a:xfrm>
+          <a:prstGeom prst="rect">
+            <a:avLst/>
+          </a:prstGeom>
+          <a:noFill/>
+        </p:spPr>
+        <p:txBody>
+          <a:bodyPr wrap="square" lIns="0" rIns="0" tIns="0" bIns="0" anchor="t">
+            <a:spAutoFit/>
+          </a:bodyPr>
+          <a:lstStyle/>
+          <a:p>
+            <a:pPr algn="l">
+              <a:lnSpc>
+                <a:spcPct val="160000"/>
+              </a:lnSpc>
+            </a:pPr>
+            <a:r>
+              <a:rPr sz="1275" b="0">
+                <a:solidFill>
+                  <a:srgbClr val="1A2230"/>
+                </a:solidFill>
+                <a:latin typeface="Microsoft YaHei"/>
+              </a:rPr>
+              <a:t>会员：选课 / 退课 / 签到（仅本人）</a:t>
+            </a:r>
+          </a:p>
+          <a:p>
+            <a:pPr algn="l">
+              <a:lnSpc>
+                <a:spcPct val="160000"/>
+              </a:lnSpc>
+            </a:pPr>
+            <a:r>
+              <a:rPr sz="1275" b="0">
+                <a:solidFill>
+                  <a:srgbClr val="1A2230"/>
+                </a:solidFill>
+                <a:latin typeface="Microsoft YaHei"/>
+              </a:rPr>
+              <a:t>店长：以上 + 排课与课程维护</a:t>
+            </a:r>
+          </a:p>
+          <a:p>
+            <a:pPr algn="l">
+              <a:lnSpc>
+                <a:spcPct val="160000"/>
+              </a:lnSpc>
+            </a:pPr>
+            <a:r>
+              <a:rPr sz="1275" b="0">
+                <a:solidFill>
+                  <a:srgbClr val="1A2230"/>
+                </a:solidFill>
+                <a:latin typeface="Microsoft YaHei"/>
+              </a:rPr>
+              <a:t>管理员：以上 + 数据重置</a:t>
+            </a:r>
+          </a:p>
+        </p:txBody>
+      </p:sp>
+      <p:sp>
+        <p:nvSpPr>
+          <p:cNvPr id="27" name="Rounded Rectangle 26"/>
+          <p:cNvSpPr/>
+          <p:nvPr/>
+        </p:nvSpPr>
+        <p:spPr>
+          <a:xfrm>
+            <a:off x="381000" y="5143500"/>
+            <a:ext cx="11430000" cy="628650"/>
+          </a:xfrm>
+          <a:prstGeom prst="roundRect">
+            <a:avLst>
+              <a:gd name="adj" fmla="val 12121"/>
+            </a:avLst>
+          </a:prstGeom>
+          <a:solidFill>
+            <a:srgbClr val="E8EFF8"/>
+          </a:solidFill>
+          <a:ln>
+            <a:noFill/>
+          </a:ln>
+          <a:effectLst/>
+        </p:spPr>
+        <p:style>
+          <a:lnRef idx="1">
+            <a:schemeClr val="accent1"/>
+          </a:lnRef>
+          <a:fillRef idx="3">
+            <a:schemeClr val="accent1"/>
+          </a:fillRef>
+          <a:effectRef idx="2">
+            <a:schemeClr val="accent1"/>
+          </a:effectRef>
+          <a:fontRef idx="minor">
+            <a:schemeClr val="lt1"/>
+          </a:fontRef>
+        </p:style>
+        <p:txBody>
+          <a:bodyPr rtlCol="0" anchor="ctr" wrap="square"/>
+          <a:lstStyle/>
+          <a:p>
+            <a:pPr algn="ctr"/>
+          </a:p>
+        </p:txBody>
+      </p:sp>
+      <p:sp>
+        <p:nvSpPr>
+          <p:cNvPr id="28" name="Rectangle 27"/>
+          <p:cNvSpPr/>
+          <p:nvPr/>
+        </p:nvSpPr>
+        <p:spPr>
+          <a:xfrm>
+            <a:off x="381000" y="5143500"/>
+            <a:ext cx="38100" cy="628650"/>
+          </a:xfrm>
+          <a:prstGeom prst="rect">
+            <a:avLst/>
+          </a:prstGeom>
+          <a:solidFill>
+            <a:srgbClr val="1E4FA8"/>
+          </a:solidFill>
+          <a:ln>
+            <a:noFill/>
+          </a:ln>
+          <a:effectLst/>
+        </p:spPr>
+        <p:style>
+          <a:lnRef idx="1">
+            <a:schemeClr val="accent1"/>
+          </a:lnRef>
+          <a:fillRef idx="3">
+            <a:schemeClr val="accent1"/>
+          </a:fillRef>
+          <a:effectRef idx="2">
+            <a:schemeClr val="accent1"/>
+          </a:effectRef>
+          <a:fontRef idx="minor">
+            <a:schemeClr val="lt1"/>
+          </a:fontRef>
+        </p:style>
+        <p:txBody>
+          <a:bodyPr rtlCol="0" anchor="ctr" wrap="square"/>
+          <a:lstStyle/>
+          <a:p>
+            <a:pPr algn="ctr"/>
+          </a:p>
+        </p:txBody>
+      </p:sp>
+      <p:sp>
+        <p:nvSpPr>
+          <p:cNvPr id="29" name="TextBox 28"/>
+          <p:cNvSpPr txBox="1"/>
+          <p:nvPr/>
+        </p:nvSpPr>
+        <p:spPr>
+          <a:xfrm>
+            <a:off x="533400" y="5143500"/>
+            <a:ext cx="914400" cy="628650"/>
+          </a:xfrm>
+          <a:prstGeom prst="rect">
+            <a:avLst/>
+          </a:prstGeom>
+          <a:noFill/>
+        </p:spPr>
+        <p:txBody>
+          <a:bodyPr wrap="square" lIns="0" rIns="0" tIns="0" bIns="0" anchor="ctr">
+            <a:spAutoFit/>
+          </a:bodyPr>
+          <a:lstStyle/>
+          <a:p>
+            <a:pPr algn="l">
+              <a:lnSpc>
+                <a:spcPct val="130000"/>
+              </a:lnSpc>
+            </a:pPr>
+            <a:r>
+              <a:rPr sz="1500" b="1">
+                <a:solidFill>
+                  <a:srgbClr val="1E4FA8"/>
+                </a:solidFill>
+                <a:latin typeface="Microsoft YaHei"/>
+              </a:rPr>
+              <a:t>联动价值</a:t>
+            </a:r>
+          </a:p>
+        </p:txBody>
+      </p:sp>
+      <p:sp>
+        <p:nvSpPr>
+          <p:cNvPr id="30" name="TextBox 29"/>
+          <p:cNvSpPr txBox="1"/>
+          <p:nvPr/>
+        </p:nvSpPr>
+        <p:spPr>
+          <a:xfrm>
+            <a:off x="1504950" y="5143500"/>
+            <a:ext cx="10134600" cy="628650"/>
+          </a:xfrm>
+          <a:prstGeom prst="rect">
+            <a:avLst/>
+          </a:prstGeom>
+          <a:noFill/>
+        </p:spPr>
+        <p:txBody>
+          <a:bodyPr wrap="square" lIns="0" rIns="0" tIns="0" bIns="0" anchor="ctr">
+            <a:spAutoFit/>
+          </a:bodyPr>
+          <a:lstStyle/>
+          <a:p>
+            <a:pPr algn="l">
+              <a:lnSpc>
+                <a:spcPct val="135000"/>
+              </a:lnSpc>
+            </a:pPr>
+            <a:r>
+              <a:rPr sz="1500" b="0">
+                <a:solidFill>
+                  <a:srgbClr val="1A2230"/>
+                </a:solidFill>
+                <a:latin typeface="Microsoft YaHei"/>
+              </a:rPr>
+              <a:t>注册把潜在会员纳入系统；联动让门店一眼看清每门课的真实报名情况</a:t>
+            </a:r>
+          </a:p>
+        </p:txBody>
+      </p:sp>
+      <p:sp>
+        <p:nvSpPr>
+          <p:cNvPr id="31" name="Rectangle 30"/>
+          <p:cNvSpPr/>
+          <p:nvPr/>
+        </p:nvSpPr>
+        <p:spPr>
+          <a:xfrm>
+            <a:off x="381000" y="6286500"/>
+            <a:ext cx="11430000" cy="9525"/>
+          </a:xfrm>
+          <a:prstGeom prst="rect">
+            <a:avLst/>
+          </a:prstGeom>
+          <a:solidFill>
+            <a:srgbClr val="E5E7EB"/>
+          </a:solidFill>
+          <a:ln>
+            <a:noFill/>
+          </a:ln>
+          <a:effectLst/>
+        </p:spPr>
+        <p:style>
+          <a:lnRef idx="1">
+            <a:schemeClr val="accent1"/>
+          </a:lnRef>
+          <a:fillRef idx="3">
+            <a:schemeClr val="accent1"/>
+          </a:fillRef>
+          <a:effectRef idx="2">
+            <a:schemeClr val="accent1"/>
+          </a:effectRef>
+          <a:fontRef idx="minor">
+            <a:schemeClr val="lt1"/>
+          </a:fontRef>
+        </p:style>
+        <p:txBody>
+          <a:bodyPr rtlCol="0" anchor="ctr" wrap="square"/>
+          <a:lstStyle/>
+          <a:p>
+            <a:pPr algn="ctr"/>
+          </a:p>
+        </p:txBody>
+      </p:sp>
+      <p:sp>
+        <p:nvSpPr>
+          <p:cNvPr id="32" name="TextBox 31"/>
+          <p:cNvSpPr txBox="1"/>
+          <p:nvPr/>
+        </p:nvSpPr>
+        <p:spPr>
+          <a:xfrm>
+            <a:off x="381000" y="6324600"/>
+            <a:ext cx="8763000" cy="285750"/>
+          </a:xfrm>
+          <a:prstGeom prst="rect">
+            <a:avLst/>
+          </a:prstGeom>
+          <a:noFill/>
+        </p:spPr>
+        <p:txBody>
+          <a:bodyPr wrap="square" lIns="0" rIns="0" tIns="0" bIns="0" anchor="ctr">
+            <a:spAutoFit/>
+          </a:bodyPr>
+          <a:lstStyle/>
+          <a:p>
+            <a:pPr algn="l">
+              <a:lnSpc>
+                <a:spcPct val="130000"/>
+              </a:lnSpc>
+            </a:pPr>
+            <a:r>
+              <a:rPr sz="1125" b="0">
+                <a:solidFill>
+                  <a:srgbClr val="8B97A8"/>
+                </a:solidFill>
+                <a:latin typeface="Microsoft YaHei"/>
+              </a:rPr>
+              <a:t>来源：系统测试文档 · A2 会员自助注册、G 会员↔课程余位联动</a:t>
+            </a:r>
+          </a:p>
+        </p:txBody>
+      </p:sp>
+      <p:sp>
+        <p:nvSpPr>
+          <p:cNvPr id="33" name="TextBox 32"/>
+          <p:cNvSpPr txBox="1"/>
+          <p:nvPr/>
+        </p:nvSpPr>
+        <p:spPr>
+          <a:xfrm>
+            <a:off x="9525000" y="6324600"/>
+            <a:ext cx="2286000" cy="285750"/>
+          </a:xfrm>
+          <a:prstGeom prst="rect">
+            <a:avLst/>
+          </a:prstGeom>
+          <a:noFill/>
+        </p:spPr>
+        <p:txBody>
+          <a:bodyPr wrap="square" lIns="0" rIns="0" tIns="0" bIns="0" anchor="ctr">
+            <a:spAutoFit/>
+          </a:bodyPr>
+          <a:lstStyle/>
+          <a:p>
+            <a:pPr algn="r">
+              <a:lnSpc>
+                <a:spcPct val="130000"/>
+              </a:lnSpc>
+            </a:pPr>
+            <a:r>
+              <a:rPr sz="1200" b="1">
+                <a:solidFill>
+                  <a:srgbClr val="1E4FA8"/>
+                </a:solidFill>
+                <a:latin typeface="Microsoft YaHei"/>
+              </a:rPr>
+              <a:t>18 / 24</a:t>
+            </a:r>
+          </a:p>
+        </p:txBody>
+      </p:sp>
+    </p:spTree>
+  </p:cSld>
+  <p:clrMapOvr>
+    <a:masterClrMapping/>
+  </p:clrMapOvr>
+</p:sld>
+</file>
+
+<file path=ppt/slides/slide19.xml><?xml version="1.0" encoding="utf-8"?>
 <p:sld xmlns:a="http://schemas.openxmlformats.org/drawingml/2006/main" xmlns:p="http://schemas.openxmlformats.org/presentationml/2006/main" xmlns:r="http://schemas.openxmlformats.org/officeDocument/2006/relationships">
   <p:cSld>
     <p:bg>
@@ -15013,1396 +16454,7 @@
                 </a:solidFill>
                 <a:latin typeface="Microsoft YaHei"/>
               </a:rPr>
-              <a:t>17 / 23</a:t>
-            </a:r>
-          </a:p>
-        </p:txBody>
-      </p:sp>
-    </p:spTree>
-  </p:cSld>
-  <p:clrMapOvr>
-    <a:masterClrMapping/>
-  </p:clrMapOvr>
-</p:sld>
-</file>
-
-<file path=ppt/slides/slide19.xml><?xml version="1.0" encoding="utf-8"?>
-<p:sld xmlns:a="http://schemas.openxmlformats.org/drawingml/2006/main" xmlns:p="http://schemas.openxmlformats.org/presentationml/2006/main" xmlns:r="http://schemas.openxmlformats.org/officeDocument/2006/relationships">
-  <p:cSld>
-    <p:bg>
-      <p:bgPr>
-        <a:solidFill>
-          <a:srgbClr val="FFFFFF"/>
-        </a:solidFill>
-        <a:effectLst/>
-      </p:bgPr>
-    </p:bg>
-    <p:spTree>
-      <p:nvGrpSpPr>
-        <p:cNvPr id="1" name=""/>
-        <p:cNvGrpSpPr/>
-        <p:nvPr/>
-      </p:nvGrpSpPr>
-      <p:grpSpPr/>
-      <p:sp>
-        <p:nvSpPr>
-          <p:cNvPr id="2" name="Rectangle 1"/>
-          <p:cNvSpPr/>
-          <p:nvPr/>
-        </p:nvSpPr>
-        <p:spPr>
-          <a:xfrm>
-            <a:off x="0" y="0"/>
-            <a:ext cx="12192000" cy="762000"/>
-          </a:xfrm>
-          <a:prstGeom prst="rect">
-            <a:avLst/>
-          </a:prstGeom>
-          <a:solidFill>
-            <a:srgbClr val="1E4FA8"/>
-          </a:solidFill>
-          <a:ln>
-            <a:noFill/>
-          </a:ln>
-          <a:effectLst/>
-        </p:spPr>
-        <p:style>
-          <a:lnRef idx="1">
-            <a:schemeClr val="accent1"/>
-          </a:lnRef>
-          <a:fillRef idx="3">
-            <a:schemeClr val="accent1"/>
-          </a:fillRef>
-          <a:effectRef idx="2">
-            <a:schemeClr val="accent1"/>
-          </a:effectRef>
-          <a:fontRef idx="minor">
-            <a:schemeClr val="lt1"/>
-          </a:fontRef>
-        </p:style>
-        <p:txBody>
-          <a:bodyPr rtlCol="0" anchor="ctr" wrap="square"/>
-          <a:lstStyle/>
-          <a:p>
-            <a:pPr algn="ctr"/>
-          </a:p>
-        </p:txBody>
-      </p:sp>
-      <p:sp>
-        <p:nvSpPr>
-          <p:cNvPr id="3" name="TextBox 2"/>
-          <p:cNvSpPr txBox="1"/>
-          <p:nvPr/>
-        </p:nvSpPr>
-        <p:spPr>
-          <a:xfrm>
-            <a:off x="381000" y="0"/>
-            <a:ext cx="7239000" cy="762000"/>
-          </a:xfrm>
-          <a:prstGeom prst="rect">
-            <a:avLst/>
-          </a:prstGeom>
-          <a:noFill/>
-        </p:spPr>
-        <p:txBody>
-          <a:bodyPr wrap="square" lIns="0" rIns="0" tIns="0" bIns="0" anchor="ctr">
-            <a:spAutoFit/>
-          </a:bodyPr>
-          <a:lstStyle/>
-          <a:p>
-            <a:pPr algn="l">
-              <a:lnSpc>
-                <a:spcPct val="130000"/>
-              </a:lnSpc>
-            </a:pPr>
-            <a:r>
-              <a:rPr sz="2400" b="1">
-                <a:solidFill>
-                  <a:srgbClr val="FFFFFF"/>
-                </a:solidFill>
-                <a:latin typeface="Microsoft YaHei"/>
-              </a:rPr>
-              <a:t>200 项检查，覆盖六个层次</a:t>
-            </a:r>
-          </a:p>
-        </p:txBody>
-      </p:sp>
-      <p:sp>
-        <p:nvSpPr>
-          <p:cNvPr id="4" name="TextBox 3"/>
-          <p:cNvSpPr txBox="1"/>
-          <p:nvPr/>
-        </p:nvSpPr>
-        <p:spPr>
-          <a:xfrm>
-            <a:off x="7620000" y="0"/>
-            <a:ext cx="4191000" cy="762000"/>
-          </a:xfrm>
-          <a:prstGeom prst="rect">
-            <a:avLst/>
-          </a:prstGeom>
-          <a:noFill/>
-        </p:spPr>
-        <p:txBody>
-          <a:bodyPr wrap="square" lIns="0" rIns="0" tIns="0" bIns="0" anchor="ctr">
-            <a:spAutoFit/>
-          </a:bodyPr>
-          <a:lstStyle/>
-          <a:p>
-            <a:pPr algn="r">
-              <a:lnSpc>
-                <a:spcPct val="130000"/>
-              </a:lnSpc>
-            </a:pPr>
-            <a:r>
-              <a:rPr sz="1050" b="0">
-                <a:solidFill>
-                  <a:srgbClr val="BFD3F0"/>
-                </a:solidFill>
-                <a:latin typeface="Microsoft YaHei"/>
-              </a:rPr>
-              <a:t>健身房运营管理系统 · 课程答辩</a:t>
-            </a:r>
-          </a:p>
-        </p:txBody>
-      </p:sp>
-      <p:sp>
-        <p:nvSpPr>
-          <p:cNvPr id="5" name="Rounded Rectangle 4"/>
-          <p:cNvSpPr/>
-          <p:nvPr/>
-        </p:nvSpPr>
-        <p:spPr>
-          <a:xfrm>
-            <a:off x="381000" y="1028700"/>
-            <a:ext cx="4000500" cy="4305300"/>
-          </a:xfrm>
-          <a:prstGeom prst="roundRect">
-            <a:avLst>
-              <a:gd name="adj" fmla="val 2857"/>
-            </a:avLst>
-          </a:prstGeom>
-          <a:solidFill>
-            <a:srgbClr val="E8EFF8"/>
-          </a:solidFill>
-          <a:ln>
-            <a:noFill/>
-          </a:ln>
-          <a:effectLst/>
-        </p:spPr>
-        <p:style>
-          <a:lnRef idx="1">
-            <a:schemeClr val="accent1"/>
-          </a:lnRef>
-          <a:fillRef idx="3">
-            <a:schemeClr val="accent1"/>
-          </a:fillRef>
-          <a:effectRef idx="2">
-            <a:schemeClr val="accent1"/>
-          </a:effectRef>
-          <a:fontRef idx="minor">
-            <a:schemeClr val="lt1"/>
-          </a:fontRef>
-        </p:style>
-        <p:txBody>
-          <a:bodyPr rtlCol="0" anchor="ctr" wrap="square"/>
-          <a:lstStyle/>
-          <a:p>
-            <a:pPr algn="ctr"/>
-          </a:p>
-        </p:txBody>
-      </p:sp>
-      <p:sp>
-        <p:nvSpPr>
-          <p:cNvPr id="6" name="TextBox 5"/>
-          <p:cNvSpPr txBox="1"/>
-          <p:nvPr/>
-        </p:nvSpPr>
-        <p:spPr>
-          <a:xfrm>
-            <a:off x="571500" y="1390650"/>
-            <a:ext cx="3619500" cy="1447800"/>
-          </a:xfrm>
-          <a:prstGeom prst="rect">
-            <a:avLst/>
-          </a:prstGeom>
-          <a:noFill/>
-        </p:spPr>
-        <p:txBody>
-          <a:bodyPr wrap="square" lIns="0" rIns="0" tIns="0" bIns="0" anchor="ctr">
-            <a:spAutoFit/>
-          </a:bodyPr>
-          <a:lstStyle/>
-          <a:p>
-            <a:pPr algn="l">
-              <a:lnSpc>
-                <a:spcPct val="100000"/>
-              </a:lnSpc>
-            </a:pPr>
-            <a:r>
-              <a:rPr sz="8700" b="1">
-                <a:solidFill>
-                  <a:srgbClr val="0E3F8C"/>
-                </a:solidFill>
-                <a:latin typeface="Microsoft YaHei"/>
-              </a:rPr>
-              <a:t>200</a:t>
-            </a:r>
-          </a:p>
-        </p:txBody>
-      </p:sp>
-      <p:sp>
-        <p:nvSpPr>
-          <p:cNvPr id="7" name="TextBox 6"/>
-          <p:cNvSpPr txBox="1"/>
-          <p:nvPr/>
-        </p:nvSpPr>
-        <p:spPr>
-          <a:xfrm>
-            <a:off x="571500" y="2914650"/>
-            <a:ext cx="3619500" cy="381000"/>
-          </a:xfrm>
-          <a:prstGeom prst="rect">
-            <a:avLst/>
-          </a:prstGeom>
-          <a:noFill/>
-        </p:spPr>
-        <p:txBody>
-          <a:bodyPr wrap="square" lIns="0" rIns="0" tIns="0" bIns="0" anchor="ctr">
-            <a:spAutoFit/>
-          </a:bodyPr>
-          <a:lstStyle/>
-          <a:p>
-            <a:pPr algn="l">
-              <a:lnSpc>
-                <a:spcPct val="130000"/>
-              </a:lnSpc>
-            </a:pPr>
-            <a:r>
-              <a:rPr sz="1650" b="0">
-                <a:solidFill>
-                  <a:srgbClr val="1A2230"/>
-                </a:solidFill>
-                <a:latin typeface="Microsoft YaHei"/>
-              </a:rPr>
-              <a:t>项自动化检查全部通过</a:t>
-            </a:r>
-          </a:p>
-        </p:txBody>
-      </p:sp>
-      <p:sp>
-        <p:nvSpPr>
-          <p:cNvPr id="8" name="TextBox 7"/>
-          <p:cNvSpPr txBox="1"/>
-          <p:nvPr/>
-        </p:nvSpPr>
-        <p:spPr>
-          <a:xfrm>
-            <a:off x="571500" y="3390900"/>
-            <a:ext cx="3619500" cy="1714500"/>
-          </a:xfrm>
-          <a:prstGeom prst="rect">
-            <a:avLst/>
-          </a:prstGeom>
-          <a:noFill/>
-        </p:spPr>
-        <p:txBody>
-          <a:bodyPr wrap="square" lIns="0" rIns="0" tIns="0" bIns="0" anchor="t">
-            <a:spAutoFit/>
-          </a:bodyPr>
-          <a:lstStyle/>
-          <a:p>
-            <a:pPr algn="l">
-              <a:lnSpc>
-                <a:spcPct val="160000"/>
-              </a:lnSpc>
-            </a:pPr>
-            <a:r>
-              <a:rPr sz="1425" b="0">
-                <a:solidFill>
-                  <a:srgbClr val="4A5568"/>
-                </a:solidFill>
-                <a:latin typeface="Microsoft YaHei"/>
-              </a:rPr>
-              <a:t>从单元测试到真实浏览器点击，</a:t>
-            </a:r>
-          </a:p>
-          <a:p>
-            <a:pPr algn="l">
-              <a:lnSpc>
-                <a:spcPct val="160000"/>
-              </a:lnSpc>
-            </a:pPr>
-            <a:r>
-              <a:rPr sz="1425" b="0">
-                <a:solidFill>
-                  <a:srgbClr val="4A5568"/>
-                </a:solidFill>
-                <a:latin typeface="Microsoft YaHei"/>
-              </a:rPr>
-              <a:t>每一层都有可复现的执行命令与</a:t>
-            </a:r>
-          </a:p>
-          <a:p>
-            <a:pPr algn="l">
-              <a:lnSpc>
-                <a:spcPct val="160000"/>
-              </a:lnSpc>
-            </a:pPr>
-            <a:r>
-              <a:rPr sz="1425" b="0">
-                <a:solidFill>
-                  <a:srgbClr val="4A5568"/>
-                </a:solidFill>
-                <a:latin typeface="Microsoft YaHei"/>
-              </a:rPr>
-              <a:t>报告文件，答辩现场可逐条演示。</a:t>
-            </a:r>
-          </a:p>
-        </p:txBody>
-      </p:sp>
-      <p:sp>
-        <p:nvSpPr>
-          <p:cNvPr id="9" name="Rounded Rectangle 8"/>
-          <p:cNvSpPr/>
-          <p:nvPr/>
-        </p:nvSpPr>
-        <p:spPr>
-          <a:xfrm>
-            <a:off x="4610100" y="1028700"/>
-            <a:ext cx="7200900" cy="628650"/>
-          </a:xfrm>
-          <a:prstGeom prst="roundRect">
-            <a:avLst>
-              <a:gd name="adj" fmla="val 15151"/>
-            </a:avLst>
-          </a:prstGeom>
-          <a:solidFill>
-            <a:srgbClr val="F7F9FC"/>
-          </a:solidFill>
-          <a:ln w="12700">
-            <a:solidFill>
-              <a:srgbClr val="D6DCE5"/>
-            </a:solidFill>
-          </a:ln>
-          <a:effectLst/>
-        </p:spPr>
-        <p:style>
-          <a:lnRef idx="1">
-            <a:schemeClr val="accent1"/>
-          </a:lnRef>
-          <a:fillRef idx="3">
-            <a:schemeClr val="accent1"/>
-          </a:fillRef>
-          <a:effectRef idx="2">
-            <a:schemeClr val="accent1"/>
-          </a:effectRef>
-          <a:fontRef idx="minor">
-            <a:schemeClr val="lt1"/>
-          </a:fontRef>
-        </p:style>
-        <p:txBody>
-          <a:bodyPr rtlCol="0" anchor="ctr" wrap="square"/>
-          <a:lstStyle/>
-          <a:p>
-            <a:pPr algn="ctr"/>
-          </a:p>
-        </p:txBody>
-      </p:sp>
-      <p:sp>
-        <p:nvSpPr>
-          <p:cNvPr id="10" name="TextBox 9"/>
-          <p:cNvSpPr txBox="1"/>
-          <p:nvPr/>
-        </p:nvSpPr>
-        <p:spPr>
-          <a:xfrm>
-            <a:off x="4838700" y="1028700"/>
-            <a:ext cx="5334000" cy="628650"/>
-          </a:xfrm>
-          <a:prstGeom prst="rect">
-            <a:avLst/>
-          </a:prstGeom>
-          <a:noFill/>
-        </p:spPr>
-        <p:txBody>
-          <a:bodyPr wrap="square" lIns="0" rIns="0" tIns="0" bIns="0" anchor="ctr">
-            <a:spAutoFit/>
-          </a:bodyPr>
-          <a:lstStyle/>
-          <a:p>
-            <a:pPr algn="l">
-              <a:lnSpc>
-                <a:spcPct val="130000"/>
-              </a:lnSpc>
-            </a:pPr>
-            <a:r>
-              <a:rPr sz="1575" b="0">
-                <a:solidFill>
-                  <a:srgbClr val="1A2230"/>
-                </a:solidFill>
-                <a:latin typeface="Microsoft YaHei"/>
-              </a:rPr>
-              <a:t>Java 单元 · 架构守卫 · 行为驱动</a:t>
-            </a:r>
-          </a:p>
-        </p:txBody>
-      </p:sp>
-      <p:sp>
-        <p:nvSpPr>
-          <p:cNvPr id="11" name="TextBox 10"/>
-          <p:cNvSpPr txBox="1"/>
-          <p:nvPr/>
-        </p:nvSpPr>
-        <p:spPr>
-          <a:xfrm>
-            <a:off x="10287000" y="1028700"/>
-            <a:ext cx="1333500" cy="628650"/>
-          </a:xfrm>
-          <a:prstGeom prst="rect">
-            <a:avLst/>
-          </a:prstGeom>
-          <a:noFill/>
-        </p:spPr>
-        <p:txBody>
-          <a:bodyPr wrap="square" lIns="0" rIns="0" tIns="0" bIns="0" anchor="ctr">
-            <a:spAutoFit/>
-          </a:bodyPr>
-          <a:lstStyle/>
-          <a:p>
-            <a:pPr algn="r">
-              <a:lnSpc>
-                <a:spcPct val="130000"/>
-              </a:lnSpc>
-            </a:pPr>
-            <a:r>
-              <a:rPr sz="2250" b="1">
-                <a:solidFill>
-                  <a:srgbClr val="1E4FA8"/>
-                </a:solidFill>
-                <a:latin typeface="Microsoft YaHei"/>
-              </a:rPr>
-              <a:t>70</a:t>
-            </a:r>
-          </a:p>
-        </p:txBody>
-      </p:sp>
-      <p:sp>
-        <p:nvSpPr>
-          <p:cNvPr id="12" name="Rounded Rectangle 11"/>
-          <p:cNvSpPr/>
-          <p:nvPr/>
-        </p:nvSpPr>
-        <p:spPr>
-          <a:xfrm>
-            <a:off x="4610100" y="1752600"/>
-            <a:ext cx="7200900" cy="628650"/>
-          </a:xfrm>
-          <a:prstGeom prst="roundRect">
-            <a:avLst>
-              <a:gd name="adj" fmla="val 15151"/>
-            </a:avLst>
-          </a:prstGeom>
-          <a:solidFill>
-            <a:srgbClr val="F7F9FC"/>
-          </a:solidFill>
-          <a:ln w="12700">
-            <a:solidFill>
-              <a:srgbClr val="D6DCE5"/>
-            </a:solidFill>
-          </a:ln>
-          <a:effectLst/>
-        </p:spPr>
-        <p:style>
-          <a:lnRef idx="1">
-            <a:schemeClr val="accent1"/>
-          </a:lnRef>
-          <a:fillRef idx="3">
-            <a:schemeClr val="accent1"/>
-          </a:fillRef>
-          <a:effectRef idx="2">
-            <a:schemeClr val="accent1"/>
-          </a:effectRef>
-          <a:fontRef idx="minor">
-            <a:schemeClr val="lt1"/>
-          </a:fontRef>
-        </p:style>
-        <p:txBody>
-          <a:bodyPr rtlCol="0" anchor="ctr" wrap="square"/>
-          <a:lstStyle/>
-          <a:p>
-            <a:pPr algn="ctr"/>
-          </a:p>
-        </p:txBody>
-      </p:sp>
-      <p:sp>
-        <p:nvSpPr>
-          <p:cNvPr id="13" name="TextBox 12"/>
-          <p:cNvSpPr txBox="1"/>
-          <p:nvPr/>
-        </p:nvSpPr>
-        <p:spPr>
-          <a:xfrm>
-            <a:off x="4838700" y="1752600"/>
-            <a:ext cx="5334000" cy="628650"/>
-          </a:xfrm>
-          <a:prstGeom prst="rect">
-            <a:avLst/>
-          </a:prstGeom>
-          <a:noFill/>
-        </p:spPr>
-        <p:txBody>
-          <a:bodyPr wrap="square" lIns="0" rIns="0" tIns="0" bIns="0" anchor="ctr">
-            <a:spAutoFit/>
-          </a:bodyPr>
-          <a:lstStyle/>
-          <a:p>
-            <a:pPr algn="l">
-              <a:lnSpc>
-                <a:spcPct val="130000"/>
-              </a:lnSpc>
-            </a:pPr>
-            <a:r>
-              <a:rPr sz="1575" b="0">
-                <a:solidFill>
-                  <a:srgbClr val="1A2230"/>
-                </a:solidFill>
-                <a:latin typeface="Microsoft YaHei"/>
-              </a:rPr>
-              <a:t>集成测试（登录 / 权限 / 全流程）</a:t>
-            </a:r>
-          </a:p>
-        </p:txBody>
-      </p:sp>
-      <p:sp>
-        <p:nvSpPr>
-          <p:cNvPr id="14" name="TextBox 13"/>
-          <p:cNvSpPr txBox="1"/>
-          <p:nvPr/>
-        </p:nvSpPr>
-        <p:spPr>
-          <a:xfrm>
-            <a:off x="10287000" y="1752600"/>
-            <a:ext cx="1333500" cy="628650"/>
-          </a:xfrm>
-          <a:prstGeom prst="rect">
-            <a:avLst/>
-          </a:prstGeom>
-          <a:noFill/>
-        </p:spPr>
-        <p:txBody>
-          <a:bodyPr wrap="square" lIns="0" rIns="0" tIns="0" bIns="0" anchor="ctr">
-            <a:spAutoFit/>
-          </a:bodyPr>
-          <a:lstStyle/>
-          <a:p>
-            <a:pPr algn="r">
-              <a:lnSpc>
-                <a:spcPct val="130000"/>
-              </a:lnSpc>
-            </a:pPr>
-            <a:r>
-              <a:rPr sz="2250" b="1">
-                <a:solidFill>
-                  <a:srgbClr val="1E4FA8"/>
-                </a:solidFill>
-                <a:latin typeface="Microsoft YaHei"/>
-              </a:rPr>
-              <a:t>54</a:t>
-            </a:r>
-          </a:p>
-        </p:txBody>
-      </p:sp>
-      <p:sp>
-        <p:nvSpPr>
-          <p:cNvPr id="15" name="Rounded Rectangle 14"/>
-          <p:cNvSpPr/>
-          <p:nvPr/>
-        </p:nvSpPr>
-        <p:spPr>
-          <a:xfrm>
-            <a:off x="4610100" y="2476500"/>
-            <a:ext cx="7200900" cy="628650"/>
-          </a:xfrm>
-          <a:prstGeom prst="roundRect">
-            <a:avLst>
-              <a:gd name="adj" fmla="val 15151"/>
-            </a:avLst>
-          </a:prstGeom>
-          <a:solidFill>
-            <a:srgbClr val="F7F9FC"/>
-          </a:solidFill>
-          <a:ln w="12700">
-            <a:solidFill>
-              <a:srgbClr val="D6DCE5"/>
-            </a:solidFill>
-          </a:ln>
-          <a:effectLst/>
-        </p:spPr>
-        <p:style>
-          <a:lnRef idx="1">
-            <a:schemeClr val="accent1"/>
-          </a:lnRef>
-          <a:fillRef idx="3">
-            <a:schemeClr val="accent1"/>
-          </a:fillRef>
-          <a:effectRef idx="2">
-            <a:schemeClr val="accent1"/>
-          </a:effectRef>
-          <a:fontRef idx="minor">
-            <a:schemeClr val="lt1"/>
-          </a:fontRef>
-        </p:style>
-        <p:txBody>
-          <a:bodyPr rtlCol="0" anchor="ctr" wrap="square"/>
-          <a:lstStyle/>
-          <a:p>
-            <a:pPr algn="ctr"/>
-          </a:p>
-        </p:txBody>
-      </p:sp>
-      <p:sp>
-        <p:nvSpPr>
-          <p:cNvPr id="16" name="TextBox 15"/>
-          <p:cNvSpPr txBox="1"/>
-          <p:nvPr/>
-        </p:nvSpPr>
-        <p:spPr>
-          <a:xfrm>
-            <a:off x="4838700" y="2476500"/>
-            <a:ext cx="5334000" cy="628650"/>
-          </a:xfrm>
-          <a:prstGeom prst="rect">
-            <a:avLst/>
-          </a:prstGeom>
-          <a:noFill/>
-        </p:spPr>
-        <p:txBody>
-          <a:bodyPr wrap="square" lIns="0" rIns="0" tIns="0" bIns="0" anchor="ctr">
-            <a:spAutoFit/>
-          </a:bodyPr>
-          <a:lstStyle/>
-          <a:p>
-            <a:pPr algn="l">
-              <a:lnSpc>
-                <a:spcPct val="130000"/>
-              </a:lnSpc>
-            </a:pPr>
-            <a:r>
-              <a:rPr sz="1575" b="0">
-                <a:solidFill>
-                  <a:srgbClr val="1A2230"/>
-                </a:solidFill>
-                <a:latin typeface="Microsoft YaHei"/>
-              </a:rPr>
-              <a:t>前端静态检查（防按钮无响应）</a:t>
-            </a:r>
-          </a:p>
-        </p:txBody>
-      </p:sp>
-      <p:sp>
-        <p:nvSpPr>
-          <p:cNvPr id="17" name="TextBox 16"/>
-          <p:cNvSpPr txBox="1"/>
-          <p:nvPr/>
-        </p:nvSpPr>
-        <p:spPr>
-          <a:xfrm>
-            <a:off x="10287000" y="2476500"/>
-            <a:ext cx="1333500" cy="628650"/>
-          </a:xfrm>
-          <a:prstGeom prst="rect">
-            <a:avLst/>
-          </a:prstGeom>
-          <a:noFill/>
-        </p:spPr>
-        <p:txBody>
-          <a:bodyPr wrap="square" lIns="0" rIns="0" tIns="0" bIns="0" anchor="ctr">
-            <a:spAutoFit/>
-          </a:bodyPr>
-          <a:lstStyle/>
-          <a:p>
-            <a:pPr algn="r">
-              <a:lnSpc>
-                <a:spcPct val="130000"/>
-              </a:lnSpc>
-            </a:pPr>
-            <a:r>
-              <a:rPr sz="2250" b="1">
-                <a:solidFill>
-                  <a:srgbClr val="1E4FA8"/>
-                </a:solidFill>
-                <a:latin typeface="Microsoft YaHei"/>
-              </a:rPr>
-              <a:t>5</a:t>
-            </a:r>
-          </a:p>
-        </p:txBody>
-      </p:sp>
-      <p:sp>
-        <p:nvSpPr>
-          <p:cNvPr id="18" name="Rounded Rectangle 17"/>
-          <p:cNvSpPr/>
-          <p:nvPr/>
-        </p:nvSpPr>
-        <p:spPr>
-          <a:xfrm>
-            <a:off x="4610100" y="3200400"/>
-            <a:ext cx="7200900" cy="628650"/>
-          </a:xfrm>
-          <a:prstGeom prst="roundRect">
-            <a:avLst>
-              <a:gd name="adj" fmla="val 15151"/>
-            </a:avLst>
-          </a:prstGeom>
-          <a:solidFill>
-            <a:srgbClr val="F7F9FC"/>
-          </a:solidFill>
-          <a:ln w="12700">
-            <a:solidFill>
-              <a:srgbClr val="D6DCE5"/>
-            </a:solidFill>
-          </a:ln>
-          <a:effectLst/>
-        </p:spPr>
-        <p:style>
-          <a:lnRef idx="1">
-            <a:schemeClr val="accent1"/>
-          </a:lnRef>
-          <a:fillRef idx="3">
-            <a:schemeClr val="accent1"/>
-          </a:fillRef>
-          <a:effectRef idx="2">
-            <a:schemeClr val="accent1"/>
-          </a:effectRef>
-          <a:fontRef idx="minor">
-            <a:schemeClr val="lt1"/>
-          </a:fontRef>
-        </p:style>
-        <p:txBody>
-          <a:bodyPr rtlCol="0" anchor="ctr" wrap="square"/>
-          <a:lstStyle/>
-          <a:p>
-            <a:pPr algn="ctr"/>
-          </a:p>
-        </p:txBody>
-      </p:sp>
-      <p:sp>
-        <p:nvSpPr>
-          <p:cNvPr id="19" name="TextBox 18"/>
-          <p:cNvSpPr txBox="1"/>
-          <p:nvPr/>
-        </p:nvSpPr>
-        <p:spPr>
-          <a:xfrm>
-            <a:off x="4838700" y="3200400"/>
-            <a:ext cx="5334000" cy="628650"/>
-          </a:xfrm>
-          <a:prstGeom prst="rect">
-            <a:avLst/>
-          </a:prstGeom>
-          <a:noFill/>
-        </p:spPr>
-        <p:txBody>
-          <a:bodyPr wrap="square" lIns="0" rIns="0" tIns="0" bIns="0" anchor="ctr">
-            <a:spAutoFit/>
-          </a:bodyPr>
-          <a:lstStyle/>
-          <a:p>
-            <a:pPr algn="l">
-              <a:lnSpc>
-                <a:spcPct val="130000"/>
-              </a:lnSpc>
-            </a:pPr>
-            <a:r>
-              <a:rPr sz="1575" b="0">
-                <a:solidFill>
-                  <a:srgbClr val="1A2230"/>
-                </a:solidFill>
-                <a:latin typeface="Microsoft YaHei"/>
-              </a:rPr>
-              <a:t>真实浏览器测试（自动点击验证）</a:t>
-            </a:r>
-          </a:p>
-        </p:txBody>
-      </p:sp>
-      <p:sp>
-        <p:nvSpPr>
-          <p:cNvPr id="20" name="TextBox 19"/>
-          <p:cNvSpPr txBox="1"/>
-          <p:nvPr/>
-        </p:nvSpPr>
-        <p:spPr>
-          <a:xfrm>
-            <a:off x="10287000" y="3200400"/>
-            <a:ext cx="1333500" cy="628650"/>
-          </a:xfrm>
-          <a:prstGeom prst="rect">
-            <a:avLst/>
-          </a:prstGeom>
-          <a:noFill/>
-        </p:spPr>
-        <p:txBody>
-          <a:bodyPr wrap="square" lIns="0" rIns="0" tIns="0" bIns="0" anchor="ctr">
-            <a:spAutoFit/>
-          </a:bodyPr>
-          <a:lstStyle/>
-          <a:p>
-            <a:pPr algn="r">
-              <a:lnSpc>
-                <a:spcPct val="130000"/>
-              </a:lnSpc>
-            </a:pPr>
-            <a:r>
-              <a:rPr sz="2250" b="1">
-                <a:solidFill>
-                  <a:srgbClr val="1E4FA8"/>
-                </a:solidFill>
-                <a:latin typeface="Microsoft YaHei"/>
-              </a:rPr>
-              <a:t>35</a:t>
-            </a:r>
-          </a:p>
-        </p:txBody>
-      </p:sp>
-      <p:sp>
-        <p:nvSpPr>
-          <p:cNvPr id="21" name="Rounded Rectangle 20"/>
-          <p:cNvSpPr/>
-          <p:nvPr/>
-        </p:nvSpPr>
-        <p:spPr>
-          <a:xfrm>
-            <a:off x="4610100" y="3924300"/>
-            <a:ext cx="7200900" cy="628650"/>
-          </a:xfrm>
-          <a:prstGeom prst="roundRect">
-            <a:avLst>
-              <a:gd name="adj" fmla="val 15151"/>
-            </a:avLst>
-          </a:prstGeom>
-          <a:solidFill>
-            <a:srgbClr val="F7F9FC"/>
-          </a:solidFill>
-          <a:ln w="12700">
-            <a:solidFill>
-              <a:srgbClr val="D6DCE5"/>
-            </a:solidFill>
-          </a:ln>
-          <a:effectLst/>
-        </p:spPr>
-        <p:style>
-          <a:lnRef idx="1">
-            <a:schemeClr val="accent1"/>
-          </a:lnRef>
-          <a:fillRef idx="3">
-            <a:schemeClr val="accent1"/>
-          </a:fillRef>
-          <a:effectRef idx="2">
-            <a:schemeClr val="accent1"/>
-          </a:effectRef>
-          <a:fontRef idx="minor">
-            <a:schemeClr val="lt1"/>
-          </a:fontRef>
-        </p:style>
-        <p:txBody>
-          <a:bodyPr rtlCol="0" anchor="ctr" wrap="square"/>
-          <a:lstStyle/>
-          <a:p>
-            <a:pPr algn="ctr"/>
-          </a:p>
-        </p:txBody>
-      </p:sp>
-      <p:sp>
-        <p:nvSpPr>
-          <p:cNvPr id="22" name="TextBox 21"/>
-          <p:cNvSpPr txBox="1"/>
-          <p:nvPr/>
-        </p:nvSpPr>
-        <p:spPr>
-          <a:xfrm>
-            <a:off x="4838700" y="3924300"/>
-            <a:ext cx="5334000" cy="628650"/>
-          </a:xfrm>
-          <a:prstGeom prst="rect">
-            <a:avLst/>
-          </a:prstGeom>
-          <a:noFill/>
-        </p:spPr>
-        <p:txBody>
-          <a:bodyPr wrap="square" lIns="0" rIns="0" tIns="0" bIns="0" anchor="ctr">
-            <a:spAutoFit/>
-          </a:bodyPr>
-          <a:lstStyle/>
-          <a:p>
-            <a:pPr algn="l">
-              <a:lnSpc>
-                <a:spcPct val="130000"/>
-              </a:lnSpc>
-            </a:pPr>
-            <a:r>
-              <a:rPr sz="1575" b="0">
-                <a:solidFill>
-                  <a:srgbClr val="1A2230"/>
-                </a:solidFill>
-                <a:latin typeface="Microsoft YaHei"/>
-              </a:rPr>
-              <a:t>参考实现行为驱动（对照）</a:t>
-            </a:r>
-          </a:p>
-        </p:txBody>
-      </p:sp>
-      <p:sp>
-        <p:nvSpPr>
-          <p:cNvPr id="23" name="TextBox 22"/>
-          <p:cNvSpPr txBox="1"/>
-          <p:nvPr/>
-        </p:nvSpPr>
-        <p:spPr>
-          <a:xfrm>
-            <a:off x="10287000" y="3924300"/>
-            <a:ext cx="1333500" cy="628650"/>
-          </a:xfrm>
-          <a:prstGeom prst="rect">
-            <a:avLst/>
-          </a:prstGeom>
-          <a:noFill/>
-        </p:spPr>
-        <p:txBody>
-          <a:bodyPr wrap="square" lIns="0" rIns="0" tIns="0" bIns="0" anchor="ctr">
-            <a:spAutoFit/>
-          </a:bodyPr>
-          <a:lstStyle/>
-          <a:p>
-            <a:pPr algn="r">
-              <a:lnSpc>
-                <a:spcPct val="130000"/>
-              </a:lnSpc>
-            </a:pPr>
-            <a:r>
-              <a:rPr sz="2250" b="1">
-                <a:solidFill>
-                  <a:srgbClr val="1E4FA8"/>
-                </a:solidFill>
-                <a:latin typeface="Microsoft YaHei"/>
-              </a:rPr>
-              <a:t>18</a:t>
-            </a:r>
-          </a:p>
-        </p:txBody>
-      </p:sp>
-      <p:sp>
-        <p:nvSpPr>
-          <p:cNvPr id="24" name="Rounded Rectangle 23"/>
-          <p:cNvSpPr/>
-          <p:nvPr/>
-        </p:nvSpPr>
-        <p:spPr>
-          <a:xfrm>
-            <a:off x="4610100" y="4648200"/>
-            <a:ext cx="7200900" cy="628650"/>
-          </a:xfrm>
-          <a:prstGeom prst="roundRect">
-            <a:avLst>
-              <a:gd name="adj" fmla="val 15151"/>
-            </a:avLst>
-          </a:prstGeom>
-          <a:solidFill>
-            <a:srgbClr val="F7F9FC"/>
-          </a:solidFill>
-          <a:ln w="12700">
-            <a:solidFill>
-              <a:srgbClr val="D6DCE5"/>
-            </a:solidFill>
-          </a:ln>
-          <a:effectLst/>
-        </p:spPr>
-        <p:style>
-          <a:lnRef idx="1">
-            <a:schemeClr val="accent1"/>
-          </a:lnRef>
-          <a:fillRef idx="3">
-            <a:schemeClr val="accent1"/>
-          </a:fillRef>
-          <a:effectRef idx="2">
-            <a:schemeClr val="accent1"/>
-          </a:effectRef>
-          <a:fontRef idx="minor">
-            <a:schemeClr val="lt1"/>
-          </a:fontRef>
-        </p:style>
-        <p:txBody>
-          <a:bodyPr rtlCol="0" anchor="ctr" wrap="square"/>
-          <a:lstStyle/>
-          <a:p>
-            <a:pPr algn="ctr"/>
-          </a:p>
-        </p:txBody>
-      </p:sp>
-      <p:sp>
-        <p:nvSpPr>
-          <p:cNvPr id="25" name="TextBox 24"/>
-          <p:cNvSpPr txBox="1"/>
-          <p:nvPr/>
-        </p:nvSpPr>
-        <p:spPr>
-          <a:xfrm>
-            <a:off x="4838700" y="4648200"/>
-            <a:ext cx="5334000" cy="628650"/>
-          </a:xfrm>
-          <a:prstGeom prst="rect">
-            <a:avLst/>
-          </a:prstGeom>
-          <a:noFill/>
-        </p:spPr>
-        <p:txBody>
-          <a:bodyPr wrap="square" lIns="0" rIns="0" tIns="0" bIns="0" anchor="ctr">
-            <a:spAutoFit/>
-          </a:bodyPr>
-          <a:lstStyle/>
-          <a:p>
-            <a:pPr algn="l">
-              <a:lnSpc>
-                <a:spcPct val="130000"/>
-              </a:lnSpc>
-            </a:pPr>
-            <a:r>
-              <a:rPr sz="1575" b="0">
-                <a:solidFill>
-                  <a:srgbClr val="1A2230"/>
-                </a:solidFill>
-                <a:latin typeface="Microsoft YaHei"/>
-              </a:rPr>
-              <a:t>参考实现接口冒烟（对照）</a:t>
-            </a:r>
-          </a:p>
-        </p:txBody>
-      </p:sp>
-      <p:sp>
-        <p:nvSpPr>
-          <p:cNvPr id="26" name="TextBox 25"/>
-          <p:cNvSpPr txBox="1"/>
-          <p:nvPr/>
-        </p:nvSpPr>
-        <p:spPr>
-          <a:xfrm>
-            <a:off x="10287000" y="4648200"/>
-            <a:ext cx="1333500" cy="628650"/>
-          </a:xfrm>
-          <a:prstGeom prst="rect">
-            <a:avLst/>
-          </a:prstGeom>
-          <a:noFill/>
-        </p:spPr>
-        <p:txBody>
-          <a:bodyPr wrap="square" lIns="0" rIns="0" tIns="0" bIns="0" anchor="ctr">
-            <a:spAutoFit/>
-          </a:bodyPr>
-          <a:lstStyle/>
-          <a:p>
-            <a:pPr algn="r">
-              <a:lnSpc>
-                <a:spcPct val="130000"/>
-              </a:lnSpc>
-            </a:pPr>
-            <a:r>
-              <a:rPr sz="2250" b="1">
-                <a:solidFill>
-                  <a:srgbClr val="1E4FA8"/>
-                </a:solidFill>
-                <a:latin typeface="Microsoft YaHei"/>
-              </a:rPr>
-              <a:t>18</a:t>
-            </a:r>
-          </a:p>
-        </p:txBody>
-      </p:sp>
-      <p:sp>
-        <p:nvSpPr>
-          <p:cNvPr id="27" name="Rounded Rectangle 26"/>
-          <p:cNvSpPr/>
-          <p:nvPr/>
-        </p:nvSpPr>
-        <p:spPr>
-          <a:xfrm>
-            <a:off x="381000" y="5505450"/>
-            <a:ext cx="11430000" cy="590550"/>
-          </a:xfrm>
-          <a:prstGeom prst="roundRect">
-            <a:avLst>
-              <a:gd name="adj" fmla="val 12903"/>
-            </a:avLst>
-          </a:prstGeom>
-          <a:solidFill>
-            <a:srgbClr val="E8EFF8"/>
-          </a:solidFill>
-          <a:ln>
-            <a:noFill/>
-          </a:ln>
-          <a:effectLst/>
-        </p:spPr>
-        <p:style>
-          <a:lnRef idx="1">
-            <a:schemeClr val="accent1"/>
-          </a:lnRef>
-          <a:fillRef idx="3">
-            <a:schemeClr val="accent1"/>
-          </a:fillRef>
-          <a:effectRef idx="2">
-            <a:schemeClr val="accent1"/>
-          </a:effectRef>
-          <a:fontRef idx="minor">
-            <a:schemeClr val="lt1"/>
-          </a:fontRef>
-        </p:style>
-        <p:txBody>
-          <a:bodyPr rtlCol="0" anchor="ctr" wrap="square"/>
-          <a:lstStyle/>
-          <a:p>
-            <a:pPr algn="ctr"/>
-          </a:p>
-        </p:txBody>
-      </p:sp>
-      <p:sp>
-        <p:nvSpPr>
-          <p:cNvPr id="28" name="Rectangle 27"/>
-          <p:cNvSpPr/>
-          <p:nvPr/>
-        </p:nvSpPr>
-        <p:spPr>
-          <a:xfrm>
-            <a:off x="381000" y="5505450"/>
-            <a:ext cx="38100" cy="590550"/>
-          </a:xfrm>
-          <a:prstGeom prst="rect">
-            <a:avLst/>
-          </a:prstGeom>
-          <a:solidFill>
-            <a:srgbClr val="1E4FA8"/>
-          </a:solidFill>
-          <a:ln>
-            <a:noFill/>
-          </a:ln>
-          <a:effectLst/>
-        </p:spPr>
-        <p:style>
-          <a:lnRef idx="1">
-            <a:schemeClr val="accent1"/>
-          </a:lnRef>
-          <a:fillRef idx="3">
-            <a:schemeClr val="accent1"/>
-          </a:fillRef>
-          <a:effectRef idx="2">
-            <a:schemeClr val="accent1"/>
-          </a:effectRef>
-          <a:fontRef idx="minor">
-            <a:schemeClr val="lt1"/>
-          </a:fontRef>
-        </p:style>
-        <p:txBody>
-          <a:bodyPr rtlCol="0" anchor="ctr" wrap="square"/>
-          <a:lstStyle/>
-          <a:p>
-            <a:pPr algn="ctr"/>
-          </a:p>
-        </p:txBody>
-      </p:sp>
-      <p:sp>
-        <p:nvSpPr>
-          <p:cNvPr id="29" name="TextBox 28"/>
-          <p:cNvSpPr txBox="1"/>
-          <p:nvPr/>
-        </p:nvSpPr>
-        <p:spPr>
-          <a:xfrm>
-            <a:off x="533400" y="5505450"/>
-            <a:ext cx="914400" cy="590550"/>
-          </a:xfrm>
-          <a:prstGeom prst="rect">
-            <a:avLst/>
-          </a:prstGeom>
-          <a:noFill/>
-        </p:spPr>
-        <p:txBody>
-          <a:bodyPr wrap="square" lIns="0" rIns="0" tIns="0" bIns="0" anchor="ctr">
-            <a:spAutoFit/>
-          </a:bodyPr>
-          <a:lstStyle/>
-          <a:p>
-            <a:pPr algn="l">
-              <a:lnSpc>
-                <a:spcPct val="130000"/>
-              </a:lnSpc>
-            </a:pPr>
-            <a:r>
-              <a:rPr sz="1500" b="1">
-                <a:solidFill>
-                  <a:srgbClr val="1E4FA8"/>
-                </a:solidFill>
-                <a:latin typeface="Microsoft YaHei"/>
-              </a:rPr>
-              <a:t>判断</a:t>
-            </a:r>
-          </a:p>
-        </p:txBody>
-      </p:sp>
-      <p:sp>
-        <p:nvSpPr>
-          <p:cNvPr id="30" name="TextBox 29"/>
-          <p:cNvSpPr txBox="1"/>
-          <p:nvPr/>
-        </p:nvSpPr>
-        <p:spPr>
-          <a:xfrm>
-            <a:off x="1504950" y="5505450"/>
-            <a:ext cx="10134600" cy="590550"/>
-          </a:xfrm>
-          <a:prstGeom prst="rect">
-            <a:avLst/>
-          </a:prstGeom>
-          <a:noFill/>
-        </p:spPr>
-        <p:txBody>
-          <a:bodyPr wrap="square" lIns="0" rIns="0" tIns="0" bIns="0" anchor="ctr">
-            <a:spAutoFit/>
-          </a:bodyPr>
-          <a:lstStyle/>
-          <a:p>
-            <a:pPr algn="l">
-              <a:lnSpc>
-                <a:spcPct val="135000"/>
-              </a:lnSpc>
-            </a:pPr>
-            <a:r>
-              <a:rPr sz="1500" b="0">
-                <a:solidFill>
-                  <a:srgbClr val="1A2230"/>
-                </a:solidFill>
-                <a:latin typeface="Microsoft YaHei"/>
-              </a:rPr>
-              <a:t>测试要能挡住"点了没反应"这类问题，所以既做静态检查，也做真实浏览器点击</a:t>
-            </a:r>
-          </a:p>
-        </p:txBody>
-      </p:sp>
-      <p:sp>
-        <p:nvSpPr>
-          <p:cNvPr id="31" name="Rectangle 30"/>
-          <p:cNvSpPr/>
-          <p:nvPr/>
-        </p:nvSpPr>
-        <p:spPr>
-          <a:xfrm>
-            <a:off x="381000" y="6286500"/>
-            <a:ext cx="11430000" cy="9525"/>
-          </a:xfrm>
-          <a:prstGeom prst="rect">
-            <a:avLst/>
-          </a:prstGeom>
-          <a:solidFill>
-            <a:srgbClr val="E5E7EB"/>
-          </a:solidFill>
-          <a:ln>
-            <a:noFill/>
-          </a:ln>
-          <a:effectLst/>
-        </p:spPr>
-        <p:style>
-          <a:lnRef idx="1">
-            <a:schemeClr val="accent1"/>
-          </a:lnRef>
-          <a:fillRef idx="3">
-            <a:schemeClr val="accent1"/>
-          </a:fillRef>
-          <a:effectRef idx="2">
-            <a:schemeClr val="accent1"/>
-          </a:effectRef>
-          <a:fontRef idx="minor">
-            <a:schemeClr val="lt1"/>
-          </a:fontRef>
-        </p:style>
-        <p:txBody>
-          <a:bodyPr rtlCol="0" anchor="ctr" wrap="square"/>
-          <a:lstStyle/>
-          <a:p>
-            <a:pPr algn="ctr"/>
-          </a:p>
-        </p:txBody>
-      </p:sp>
-      <p:sp>
-        <p:nvSpPr>
-          <p:cNvPr id="32" name="TextBox 31"/>
-          <p:cNvSpPr txBox="1"/>
-          <p:nvPr/>
-        </p:nvSpPr>
-        <p:spPr>
-          <a:xfrm>
-            <a:off x="381000" y="6324600"/>
-            <a:ext cx="8763000" cy="285750"/>
-          </a:xfrm>
-          <a:prstGeom prst="rect">
-            <a:avLst/>
-          </a:prstGeom>
-          <a:noFill/>
-        </p:spPr>
-        <p:txBody>
-          <a:bodyPr wrap="square" lIns="0" rIns="0" tIns="0" bIns="0" anchor="ctr">
-            <a:spAutoFit/>
-          </a:bodyPr>
-          <a:lstStyle/>
-          <a:p>
-            <a:pPr algn="l">
-              <a:lnSpc>
-                <a:spcPct val="130000"/>
-              </a:lnSpc>
-            </a:pPr>
-            <a:r>
-              <a:rPr sz="1125" b="0">
-                <a:solidFill>
-                  <a:srgbClr val="8B97A8"/>
-                </a:solidFill>
-                <a:latin typeface="Microsoft YaHei"/>
-              </a:rPr>
-              <a:t>来源：五份测试报告文件（verify/ 与 app/ 目录）</a:t>
-            </a:r>
-          </a:p>
-        </p:txBody>
-      </p:sp>
-      <p:sp>
-        <p:nvSpPr>
-          <p:cNvPr id="33" name="TextBox 32"/>
-          <p:cNvSpPr txBox="1"/>
-          <p:nvPr/>
-        </p:nvSpPr>
-        <p:spPr>
-          <a:xfrm>
-            <a:off x="9525000" y="6324600"/>
-            <a:ext cx="2286000" cy="285750"/>
-          </a:xfrm>
-          <a:prstGeom prst="rect">
-            <a:avLst/>
-          </a:prstGeom>
-          <a:noFill/>
-        </p:spPr>
-        <p:txBody>
-          <a:bodyPr wrap="square" lIns="0" rIns="0" tIns="0" bIns="0" anchor="ctr">
-            <a:spAutoFit/>
-          </a:bodyPr>
-          <a:lstStyle/>
-          <a:p>
-            <a:pPr algn="r">
-              <a:lnSpc>
-                <a:spcPct val="130000"/>
-              </a:lnSpc>
-            </a:pPr>
-            <a:r>
-              <a:rPr sz="1200" b="1">
-                <a:solidFill>
-                  <a:srgbClr val="1E4FA8"/>
-                </a:solidFill>
-                <a:latin typeface="Microsoft YaHei"/>
-              </a:rPr>
-              <a:t>18 / 23</a:t>
+              <a:t>19 / 24</a:t>
             </a:r>
           </a:p>
         </p:txBody>
@@ -17787,7 +17839,7 @@
                 </a:solidFill>
                 <a:latin typeface="Microsoft YaHei"/>
               </a:rPr>
-              <a:t>15 个缺陷：把踩过的坑讲清楚</a:t>
+              <a:t>226 项检查，覆盖六个层次</a:t>
             </a:r>
           </a:p>
         </p:txBody>
@@ -17840,11 +17892,206 @@
         <p:spPr>
           <a:xfrm>
             <a:off x="381000" y="1028700"/>
-            <a:ext cx="2381250" cy="1104900"/>
+            <a:ext cx="4000500" cy="4305300"/>
           </a:xfrm>
           <a:prstGeom prst="roundRect">
             <a:avLst>
-              <a:gd name="adj" fmla="val 8620"/>
+              <a:gd name="adj" fmla="val 2857"/>
+            </a:avLst>
+          </a:prstGeom>
+          <a:solidFill>
+            <a:srgbClr val="E8EFF8"/>
+          </a:solidFill>
+          <a:ln>
+            <a:noFill/>
+          </a:ln>
+          <a:effectLst/>
+        </p:spPr>
+        <p:style>
+          <a:lnRef idx="1">
+            <a:schemeClr val="accent1"/>
+          </a:lnRef>
+          <a:fillRef idx="3">
+            <a:schemeClr val="accent1"/>
+          </a:fillRef>
+          <a:effectRef idx="2">
+            <a:schemeClr val="accent1"/>
+          </a:effectRef>
+          <a:fontRef idx="minor">
+            <a:schemeClr val="lt1"/>
+          </a:fontRef>
+        </p:style>
+        <p:txBody>
+          <a:bodyPr rtlCol="0" anchor="ctr" wrap="square"/>
+          <a:lstStyle/>
+          <a:p>
+            <a:pPr algn="ctr"/>
+          </a:p>
+        </p:txBody>
+      </p:sp>
+      <p:sp>
+        <p:nvSpPr>
+          <p:cNvPr id="6" name="TextBox 5"/>
+          <p:cNvSpPr txBox="1"/>
+          <p:nvPr/>
+        </p:nvSpPr>
+        <p:spPr>
+          <a:xfrm>
+            <a:off x="571500" y="1390650"/>
+            <a:ext cx="3619500" cy="1447800"/>
+          </a:xfrm>
+          <a:prstGeom prst="rect">
+            <a:avLst/>
+          </a:prstGeom>
+          <a:noFill/>
+        </p:spPr>
+        <p:txBody>
+          <a:bodyPr wrap="square" lIns="0" rIns="0" tIns="0" bIns="0" anchor="ctr">
+            <a:spAutoFit/>
+          </a:bodyPr>
+          <a:lstStyle/>
+          <a:p>
+            <a:pPr algn="l">
+              <a:lnSpc>
+                <a:spcPct val="100000"/>
+              </a:lnSpc>
+            </a:pPr>
+            <a:r>
+              <a:rPr sz="8700" b="1">
+                <a:solidFill>
+                  <a:srgbClr val="0E3F8C"/>
+                </a:solidFill>
+                <a:latin typeface="Microsoft YaHei"/>
+              </a:rPr>
+              <a:t>226</a:t>
+            </a:r>
+          </a:p>
+        </p:txBody>
+      </p:sp>
+      <p:sp>
+        <p:nvSpPr>
+          <p:cNvPr id="7" name="TextBox 6"/>
+          <p:cNvSpPr txBox="1"/>
+          <p:nvPr/>
+        </p:nvSpPr>
+        <p:spPr>
+          <a:xfrm>
+            <a:off x="571500" y="2914650"/>
+            <a:ext cx="3619500" cy="381000"/>
+          </a:xfrm>
+          <a:prstGeom prst="rect">
+            <a:avLst/>
+          </a:prstGeom>
+          <a:noFill/>
+        </p:spPr>
+        <p:txBody>
+          <a:bodyPr wrap="square" lIns="0" rIns="0" tIns="0" bIns="0" anchor="ctr">
+            <a:spAutoFit/>
+          </a:bodyPr>
+          <a:lstStyle/>
+          <a:p>
+            <a:pPr algn="l">
+              <a:lnSpc>
+                <a:spcPct val="130000"/>
+              </a:lnSpc>
+            </a:pPr>
+            <a:r>
+              <a:rPr sz="1650" b="0">
+                <a:solidFill>
+                  <a:srgbClr val="1A2230"/>
+                </a:solidFill>
+                <a:latin typeface="Microsoft YaHei"/>
+              </a:rPr>
+              <a:t>项自动化检查全部通过</a:t>
+            </a:r>
+          </a:p>
+        </p:txBody>
+      </p:sp>
+      <p:sp>
+        <p:nvSpPr>
+          <p:cNvPr id="8" name="TextBox 7"/>
+          <p:cNvSpPr txBox="1"/>
+          <p:nvPr/>
+        </p:nvSpPr>
+        <p:spPr>
+          <a:xfrm>
+            <a:off x="571500" y="3390900"/>
+            <a:ext cx="3619500" cy="1714500"/>
+          </a:xfrm>
+          <a:prstGeom prst="rect">
+            <a:avLst/>
+          </a:prstGeom>
+          <a:noFill/>
+        </p:spPr>
+        <p:txBody>
+          <a:bodyPr wrap="square" lIns="0" rIns="0" tIns="0" bIns="0" anchor="t">
+            <a:spAutoFit/>
+          </a:bodyPr>
+          <a:lstStyle/>
+          <a:p>
+            <a:pPr algn="l">
+              <a:lnSpc>
+                <a:spcPct val="160000"/>
+              </a:lnSpc>
+            </a:pPr>
+            <a:r>
+              <a:rPr sz="1425" b="0">
+                <a:solidFill>
+                  <a:srgbClr val="4A5568"/>
+                </a:solidFill>
+                <a:latin typeface="Microsoft YaHei"/>
+              </a:rPr>
+              <a:t>从单元测试到真实浏览器点击，</a:t>
+            </a:r>
+          </a:p>
+          <a:p>
+            <a:pPr algn="l">
+              <a:lnSpc>
+                <a:spcPct val="160000"/>
+              </a:lnSpc>
+            </a:pPr>
+            <a:r>
+              <a:rPr sz="1425" b="0">
+                <a:solidFill>
+                  <a:srgbClr val="4A5568"/>
+                </a:solidFill>
+                <a:latin typeface="Microsoft YaHei"/>
+              </a:rPr>
+              <a:t>每一层都有可复现的执行命令与</a:t>
+            </a:r>
+          </a:p>
+          <a:p>
+            <a:pPr algn="l">
+              <a:lnSpc>
+                <a:spcPct val="160000"/>
+              </a:lnSpc>
+            </a:pPr>
+            <a:r>
+              <a:rPr sz="1425" b="0">
+                <a:solidFill>
+                  <a:srgbClr val="4A5568"/>
+                </a:solidFill>
+                <a:latin typeface="Microsoft YaHei"/>
+              </a:rPr>
+              <a:t>报告文件，答辩现场可逐条演示。</a:t>
+            </a:r>
+          </a:p>
+        </p:txBody>
+      </p:sp>
+      <p:sp>
+        <p:nvSpPr>
+          <p:cNvPr id="9" name="Rounded Rectangle 8"/>
+          <p:cNvSpPr/>
+          <p:nvPr/>
+        </p:nvSpPr>
+        <p:spPr>
+          <a:xfrm>
+            <a:off x="4610100" y="1028700"/>
+            <a:ext cx="7200900" cy="628650"/>
+          </a:xfrm>
+          <a:prstGeom prst="roundRect">
+            <a:avLst>
+              <a:gd name="adj" fmla="val 15151"/>
             </a:avLst>
           </a:prstGeom>
           <a:solidFill>
@@ -17881,14 +18128,14 @@
       </p:sp>
       <p:sp>
         <p:nvSpPr>
-          <p:cNvPr id="6" name="TextBox 5"/>
-          <p:cNvSpPr txBox="1"/>
-          <p:nvPr/>
-        </p:nvSpPr>
-        <p:spPr>
-          <a:xfrm>
-            <a:off x="590550" y="1162050"/>
-            <a:ext cx="1905000" cy="571500"/>
+          <p:cNvPr id="10" name="TextBox 9"/>
+          <p:cNvSpPr txBox="1"/>
+          <p:nvPr/>
+        </p:nvSpPr>
+        <p:spPr>
+          <a:xfrm>
+            <a:off x="4838700" y="1028700"/>
+            <a:ext cx="5334000" cy="628650"/>
           </a:xfrm>
           <a:prstGeom prst="rect">
             <a:avLst/>
@@ -17907,27 +18154,27 @@
               </a:lnSpc>
             </a:pPr>
             <a:r>
-              <a:rPr sz="3600" b="1">
-                <a:solidFill>
-                  <a:srgbClr val="D9534F"/>
-                </a:solidFill>
-                <a:latin typeface="Microsoft YaHei"/>
-              </a:rPr>
-              <a:t>2</a:t>
-            </a:r>
-          </a:p>
-        </p:txBody>
-      </p:sp>
-      <p:sp>
-        <p:nvSpPr>
-          <p:cNvPr id="7" name="TextBox 6"/>
-          <p:cNvSpPr txBox="1"/>
-          <p:nvPr/>
-        </p:nvSpPr>
-        <p:spPr>
-          <a:xfrm>
-            <a:off x="590550" y="1733550"/>
-            <a:ext cx="1905000" cy="285750"/>
+              <a:rPr sz="1575" b="0">
+                <a:solidFill>
+                  <a:srgbClr val="1A2230"/>
+                </a:solidFill>
+                <a:latin typeface="Microsoft YaHei"/>
+              </a:rPr>
+              <a:t>Java 单元 · 架构守卫 · 行为驱动</a:t>
+            </a:r>
+          </a:p>
+        </p:txBody>
+      </p:sp>
+      <p:sp>
+        <p:nvSpPr>
+          <p:cNvPr id="11" name="TextBox 10"/>
+          <p:cNvSpPr txBox="1"/>
+          <p:nvPr/>
+        </p:nvSpPr>
+        <p:spPr>
+          <a:xfrm>
+            <a:off x="10287000" y="1028700"/>
+            <a:ext cx="1333500" cy="628650"/>
           </a:xfrm>
           <a:prstGeom prst="rect">
             <a:avLst/>
@@ -17940,37 +18187,37 @@
           </a:bodyPr>
           <a:lstStyle/>
           <a:p>
-            <a:pPr algn="l">
+            <a:pPr algn="r">
               <a:lnSpc>
                 <a:spcPct val="130000"/>
               </a:lnSpc>
             </a:pPr>
             <a:r>
-              <a:rPr sz="1500" b="0">
-                <a:solidFill>
-                  <a:srgbClr val="1A2230"/>
-                </a:solidFill>
-                <a:latin typeface="Microsoft YaHei"/>
-              </a:rPr>
-              <a:t>严重缺陷</a:t>
-            </a:r>
-          </a:p>
-        </p:txBody>
-      </p:sp>
-      <p:sp>
-        <p:nvSpPr>
-          <p:cNvPr id="8" name="Rounded Rectangle 7"/>
+              <a:rPr sz="2250" b="1">
+                <a:solidFill>
+                  <a:srgbClr val="1E4FA8"/>
+                </a:solidFill>
+                <a:latin typeface="Microsoft YaHei"/>
+              </a:rPr>
+              <a:t>73</a:t>
+            </a:r>
+          </a:p>
+        </p:txBody>
+      </p:sp>
+      <p:sp>
+        <p:nvSpPr>
+          <p:cNvPr id="12" name="Rounded Rectangle 11"/>
           <p:cNvSpPr/>
           <p:nvPr/>
         </p:nvSpPr>
         <p:spPr>
           <a:xfrm>
-            <a:off x="2914650" y="1028700"/>
-            <a:ext cx="2381250" cy="1104900"/>
+            <a:off x="4610100" y="1752600"/>
+            <a:ext cx="7200900" cy="628650"/>
           </a:xfrm>
           <a:prstGeom prst="roundRect">
             <a:avLst>
-              <a:gd name="adj" fmla="val 8620"/>
+              <a:gd name="adj" fmla="val 15151"/>
             </a:avLst>
           </a:prstGeom>
           <a:solidFill>
@@ -18007,14 +18254,14 @@
       </p:sp>
       <p:sp>
         <p:nvSpPr>
-          <p:cNvPr id="9" name="TextBox 8"/>
-          <p:cNvSpPr txBox="1"/>
-          <p:nvPr/>
-        </p:nvSpPr>
-        <p:spPr>
-          <a:xfrm>
-            <a:off x="3124200" y="1162050"/>
-            <a:ext cx="1905000" cy="571500"/>
+          <p:cNvPr id="13" name="TextBox 12"/>
+          <p:cNvSpPr txBox="1"/>
+          <p:nvPr/>
+        </p:nvSpPr>
+        <p:spPr>
+          <a:xfrm>
+            <a:off x="4838700" y="1752600"/>
+            <a:ext cx="5334000" cy="628650"/>
           </a:xfrm>
           <a:prstGeom prst="rect">
             <a:avLst/>
@@ -18033,70 +18280,70 @@
               </a:lnSpc>
             </a:pPr>
             <a:r>
-              <a:rPr sz="3600" b="1">
+              <a:rPr sz="1575" b="0">
+                <a:solidFill>
+                  <a:srgbClr val="1A2230"/>
+                </a:solidFill>
+                <a:latin typeface="Microsoft YaHei"/>
+              </a:rPr>
+              <a:t>集成测试（登录 / 权限 / 全流程）</a:t>
+            </a:r>
+          </a:p>
+        </p:txBody>
+      </p:sp>
+      <p:sp>
+        <p:nvSpPr>
+          <p:cNvPr id="14" name="TextBox 13"/>
+          <p:cNvSpPr txBox="1"/>
+          <p:nvPr/>
+        </p:nvSpPr>
+        <p:spPr>
+          <a:xfrm>
+            <a:off x="10287000" y="1752600"/>
+            <a:ext cx="1333500" cy="628650"/>
+          </a:xfrm>
+          <a:prstGeom prst="rect">
+            <a:avLst/>
+          </a:prstGeom>
+          <a:noFill/>
+        </p:spPr>
+        <p:txBody>
+          <a:bodyPr wrap="square" lIns="0" rIns="0" tIns="0" bIns="0" anchor="ctr">
+            <a:spAutoFit/>
+          </a:bodyPr>
+          <a:lstStyle/>
+          <a:p>
+            <a:pPr algn="r">
+              <a:lnSpc>
+                <a:spcPct val="130000"/>
+              </a:lnSpc>
+            </a:pPr>
+            <a:r>
+              <a:rPr sz="2250" b="1">
                 <a:solidFill>
                   <a:srgbClr val="1E4FA8"/>
                 </a:solidFill>
                 <a:latin typeface="Microsoft YaHei"/>
               </a:rPr>
-              <a:t>9</a:t>
-            </a:r>
-          </a:p>
-        </p:txBody>
-      </p:sp>
-      <p:sp>
-        <p:nvSpPr>
-          <p:cNvPr id="10" name="TextBox 9"/>
-          <p:cNvSpPr txBox="1"/>
-          <p:nvPr/>
-        </p:nvSpPr>
-        <p:spPr>
-          <a:xfrm>
-            <a:off x="3124200" y="1733550"/>
-            <a:ext cx="1905000" cy="285750"/>
-          </a:xfrm>
-          <a:prstGeom prst="rect">
-            <a:avLst/>
-          </a:prstGeom>
-          <a:noFill/>
-        </p:spPr>
-        <p:txBody>
-          <a:bodyPr wrap="square" lIns="0" rIns="0" tIns="0" bIns="0" anchor="ctr">
-            <a:spAutoFit/>
-          </a:bodyPr>
-          <a:lstStyle/>
-          <a:p>
-            <a:pPr algn="l">
-              <a:lnSpc>
-                <a:spcPct val="130000"/>
-              </a:lnSpc>
-            </a:pPr>
-            <a:r>
-              <a:rPr sz="1500" b="0">
-                <a:solidFill>
-                  <a:srgbClr val="1A2230"/>
-                </a:solidFill>
-                <a:latin typeface="Microsoft YaHei"/>
-              </a:rPr>
-              <a:t>中等缺陷</a:t>
-            </a:r>
-          </a:p>
-        </p:txBody>
-      </p:sp>
-      <p:sp>
-        <p:nvSpPr>
-          <p:cNvPr id="11" name="Rounded Rectangle 10"/>
+              <a:t>68</a:t>
+            </a:r>
+          </a:p>
+        </p:txBody>
+      </p:sp>
+      <p:sp>
+        <p:nvSpPr>
+          <p:cNvPr id="15" name="Rounded Rectangle 14"/>
           <p:cNvSpPr/>
           <p:nvPr/>
         </p:nvSpPr>
         <p:spPr>
           <a:xfrm>
-            <a:off x="5448300" y="1028700"/>
-            <a:ext cx="2381250" cy="1104900"/>
+            <a:off x="4610100" y="2476500"/>
+            <a:ext cx="7200900" cy="628650"/>
           </a:xfrm>
           <a:prstGeom prst="roundRect">
             <a:avLst>
-              <a:gd name="adj" fmla="val 8620"/>
+              <a:gd name="adj" fmla="val 15151"/>
             </a:avLst>
           </a:prstGeom>
           <a:solidFill>
@@ -18133,6 +18380,1200 @@
       </p:sp>
       <p:sp>
         <p:nvSpPr>
+          <p:cNvPr id="16" name="TextBox 15"/>
+          <p:cNvSpPr txBox="1"/>
+          <p:nvPr/>
+        </p:nvSpPr>
+        <p:spPr>
+          <a:xfrm>
+            <a:off x="4838700" y="2476500"/>
+            <a:ext cx="5334000" cy="628650"/>
+          </a:xfrm>
+          <a:prstGeom prst="rect">
+            <a:avLst/>
+          </a:prstGeom>
+          <a:noFill/>
+        </p:spPr>
+        <p:txBody>
+          <a:bodyPr wrap="square" lIns="0" rIns="0" tIns="0" bIns="0" anchor="ctr">
+            <a:spAutoFit/>
+          </a:bodyPr>
+          <a:lstStyle/>
+          <a:p>
+            <a:pPr algn="l">
+              <a:lnSpc>
+                <a:spcPct val="130000"/>
+              </a:lnSpc>
+            </a:pPr>
+            <a:r>
+              <a:rPr sz="1575" b="0">
+                <a:solidFill>
+                  <a:srgbClr val="1A2230"/>
+                </a:solidFill>
+                <a:latin typeface="Microsoft YaHei"/>
+              </a:rPr>
+              <a:t>前端静态检查（防按钮无响应）</a:t>
+            </a:r>
+          </a:p>
+        </p:txBody>
+      </p:sp>
+      <p:sp>
+        <p:nvSpPr>
+          <p:cNvPr id="17" name="TextBox 16"/>
+          <p:cNvSpPr txBox="1"/>
+          <p:nvPr/>
+        </p:nvSpPr>
+        <p:spPr>
+          <a:xfrm>
+            <a:off x="10287000" y="2476500"/>
+            <a:ext cx="1333500" cy="628650"/>
+          </a:xfrm>
+          <a:prstGeom prst="rect">
+            <a:avLst/>
+          </a:prstGeom>
+          <a:noFill/>
+        </p:spPr>
+        <p:txBody>
+          <a:bodyPr wrap="square" lIns="0" rIns="0" tIns="0" bIns="0" anchor="ctr">
+            <a:spAutoFit/>
+          </a:bodyPr>
+          <a:lstStyle/>
+          <a:p>
+            <a:pPr algn="r">
+              <a:lnSpc>
+                <a:spcPct val="130000"/>
+              </a:lnSpc>
+            </a:pPr>
+            <a:r>
+              <a:rPr sz="2250" b="1">
+                <a:solidFill>
+                  <a:srgbClr val="1E4FA8"/>
+                </a:solidFill>
+                <a:latin typeface="Microsoft YaHei"/>
+              </a:rPr>
+              <a:t>5</a:t>
+            </a:r>
+          </a:p>
+        </p:txBody>
+      </p:sp>
+      <p:sp>
+        <p:nvSpPr>
+          <p:cNvPr id="18" name="Rounded Rectangle 17"/>
+          <p:cNvSpPr/>
+          <p:nvPr/>
+        </p:nvSpPr>
+        <p:spPr>
+          <a:xfrm>
+            <a:off x="4610100" y="3200400"/>
+            <a:ext cx="7200900" cy="628650"/>
+          </a:xfrm>
+          <a:prstGeom prst="roundRect">
+            <a:avLst>
+              <a:gd name="adj" fmla="val 15151"/>
+            </a:avLst>
+          </a:prstGeom>
+          <a:solidFill>
+            <a:srgbClr val="F7F9FC"/>
+          </a:solidFill>
+          <a:ln w="12700">
+            <a:solidFill>
+              <a:srgbClr val="D6DCE5"/>
+            </a:solidFill>
+          </a:ln>
+          <a:effectLst/>
+        </p:spPr>
+        <p:style>
+          <a:lnRef idx="1">
+            <a:schemeClr val="accent1"/>
+          </a:lnRef>
+          <a:fillRef idx="3">
+            <a:schemeClr val="accent1"/>
+          </a:fillRef>
+          <a:effectRef idx="2">
+            <a:schemeClr val="accent1"/>
+          </a:effectRef>
+          <a:fontRef idx="minor">
+            <a:schemeClr val="lt1"/>
+          </a:fontRef>
+        </p:style>
+        <p:txBody>
+          <a:bodyPr rtlCol="0" anchor="ctr" wrap="square"/>
+          <a:lstStyle/>
+          <a:p>
+            <a:pPr algn="ctr"/>
+          </a:p>
+        </p:txBody>
+      </p:sp>
+      <p:sp>
+        <p:nvSpPr>
+          <p:cNvPr id="19" name="TextBox 18"/>
+          <p:cNvSpPr txBox="1"/>
+          <p:nvPr/>
+        </p:nvSpPr>
+        <p:spPr>
+          <a:xfrm>
+            <a:off x="4838700" y="3200400"/>
+            <a:ext cx="5334000" cy="628650"/>
+          </a:xfrm>
+          <a:prstGeom prst="rect">
+            <a:avLst/>
+          </a:prstGeom>
+          <a:noFill/>
+        </p:spPr>
+        <p:txBody>
+          <a:bodyPr wrap="square" lIns="0" rIns="0" tIns="0" bIns="0" anchor="ctr">
+            <a:spAutoFit/>
+          </a:bodyPr>
+          <a:lstStyle/>
+          <a:p>
+            <a:pPr algn="l">
+              <a:lnSpc>
+                <a:spcPct val="130000"/>
+              </a:lnSpc>
+            </a:pPr>
+            <a:r>
+              <a:rPr sz="1575" b="0">
+                <a:solidFill>
+                  <a:srgbClr val="1A2230"/>
+                </a:solidFill>
+                <a:latin typeface="Microsoft YaHei"/>
+              </a:rPr>
+              <a:t>真实浏览器测试（自动点击验证）</a:t>
+            </a:r>
+          </a:p>
+        </p:txBody>
+      </p:sp>
+      <p:sp>
+        <p:nvSpPr>
+          <p:cNvPr id="20" name="TextBox 19"/>
+          <p:cNvSpPr txBox="1"/>
+          <p:nvPr/>
+        </p:nvSpPr>
+        <p:spPr>
+          <a:xfrm>
+            <a:off x="10287000" y="3200400"/>
+            <a:ext cx="1333500" cy="628650"/>
+          </a:xfrm>
+          <a:prstGeom prst="rect">
+            <a:avLst/>
+          </a:prstGeom>
+          <a:noFill/>
+        </p:spPr>
+        <p:txBody>
+          <a:bodyPr wrap="square" lIns="0" rIns="0" tIns="0" bIns="0" anchor="ctr">
+            <a:spAutoFit/>
+          </a:bodyPr>
+          <a:lstStyle/>
+          <a:p>
+            <a:pPr algn="r">
+              <a:lnSpc>
+                <a:spcPct val="130000"/>
+              </a:lnSpc>
+            </a:pPr>
+            <a:r>
+              <a:rPr sz="2250" b="1">
+                <a:solidFill>
+                  <a:srgbClr val="1E4FA8"/>
+                </a:solidFill>
+                <a:latin typeface="Microsoft YaHei"/>
+              </a:rPr>
+              <a:t>44</a:t>
+            </a:r>
+          </a:p>
+        </p:txBody>
+      </p:sp>
+      <p:sp>
+        <p:nvSpPr>
+          <p:cNvPr id="21" name="Rounded Rectangle 20"/>
+          <p:cNvSpPr/>
+          <p:nvPr/>
+        </p:nvSpPr>
+        <p:spPr>
+          <a:xfrm>
+            <a:off x="4610100" y="3924300"/>
+            <a:ext cx="7200900" cy="628650"/>
+          </a:xfrm>
+          <a:prstGeom prst="roundRect">
+            <a:avLst>
+              <a:gd name="adj" fmla="val 15151"/>
+            </a:avLst>
+          </a:prstGeom>
+          <a:solidFill>
+            <a:srgbClr val="F7F9FC"/>
+          </a:solidFill>
+          <a:ln w="12700">
+            <a:solidFill>
+              <a:srgbClr val="D6DCE5"/>
+            </a:solidFill>
+          </a:ln>
+          <a:effectLst/>
+        </p:spPr>
+        <p:style>
+          <a:lnRef idx="1">
+            <a:schemeClr val="accent1"/>
+          </a:lnRef>
+          <a:fillRef idx="3">
+            <a:schemeClr val="accent1"/>
+          </a:fillRef>
+          <a:effectRef idx="2">
+            <a:schemeClr val="accent1"/>
+          </a:effectRef>
+          <a:fontRef idx="minor">
+            <a:schemeClr val="lt1"/>
+          </a:fontRef>
+        </p:style>
+        <p:txBody>
+          <a:bodyPr rtlCol="0" anchor="ctr" wrap="square"/>
+          <a:lstStyle/>
+          <a:p>
+            <a:pPr algn="ctr"/>
+          </a:p>
+        </p:txBody>
+      </p:sp>
+      <p:sp>
+        <p:nvSpPr>
+          <p:cNvPr id="22" name="TextBox 21"/>
+          <p:cNvSpPr txBox="1"/>
+          <p:nvPr/>
+        </p:nvSpPr>
+        <p:spPr>
+          <a:xfrm>
+            <a:off x="4838700" y="3924300"/>
+            <a:ext cx="5334000" cy="628650"/>
+          </a:xfrm>
+          <a:prstGeom prst="rect">
+            <a:avLst/>
+          </a:prstGeom>
+          <a:noFill/>
+        </p:spPr>
+        <p:txBody>
+          <a:bodyPr wrap="square" lIns="0" rIns="0" tIns="0" bIns="0" anchor="ctr">
+            <a:spAutoFit/>
+          </a:bodyPr>
+          <a:lstStyle/>
+          <a:p>
+            <a:pPr algn="l">
+              <a:lnSpc>
+                <a:spcPct val="130000"/>
+              </a:lnSpc>
+            </a:pPr>
+            <a:r>
+              <a:rPr sz="1575" b="0">
+                <a:solidFill>
+                  <a:srgbClr val="1A2230"/>
+                </a:solidFill>
+                <a:latin typeface="Microsoft YaHei"/>
+              </a:rPr>
+              <a:t>参考实现行为驱动（对照）</a:t>
+            </a:r>
+          </a:p>
+        </p:txBody>
+      </p:sp>
+      <p:sp>
+        <p:nvSpPr>
+          <p:cNvPr id="23" name="TextBox 22"/>
+          <p:cNvSpPr txBox="1"/>
+          <p:nvPr/>
+        </p:nvSpPr>
+        <p:spPr>
+          <a:xfrm>
+            <a:off x="10287000" y="3924300"/>
+            <a:ext cx="1333500" cy="628650"/>
+          </a:xfrm>
+          <a:prstGeom prst="rect">
+            <a:avLst/>
+          </a:prstGeom>
+          <a:noFill/>
+        </p:spPr>
+        <p:txBody>
+          <a:bodyPr wrap="square" lIns="0" rIns="0" tIns="0" bIns="0" anchor="ctr">
+            <a:spAutoFit/>
+          </a:bodyPr>
+          <a:lstStyle/>
+          <a:p>
+            <a:pPr algn="r">
+              <a:lnSpc>
+                <a:spcPct val="130000"/>
+              </a:lnSpc>
+            </a:pPr>
+            <a:r>
+              <a:rPr sz="2250" b="1">
+                <a:solidFill>
+                  <a:srgbClr val="1E4FA8"/>
+                </a:solidFill>
+                <a:latin typeface="Microsoft YaHei"/>
+              </a:rPr>
+              <a:t>18</a:t>
+            </a:r>
+          </a:p>
+        </p:txBody>
+      </p:sp>
+      <p:sp>
+        <p:nvSpPr>
+          <p:cNvPr id="24" name="Rounded Rectangle 23"/>
+          <p:cNvSpPr/>
+          <p:nvPr/>
+        </p:nvSpPr>
+        <p:spPr>
+          <a:xfrm>
+            <a:off x="4610100" y="4648200"/>
+            <a:ext cx="7200900" cy="628650"/>
+          </a:xfrm>
+          <a:prstGeom prst="roundRect">
+            <a:avLst>
+              <a:gd name="adj" fmla="val 15151"/>
+            </a:avLst>
+          </a:prstGeom>
+          <a:solidFill>
+            <a:srgbClr val="F7F9FC"/>
+          </a:solidFill>
+          <a:ln w="12700">
+            <a:solidFill>
+              <a:srgbClr val="D6DCE5"/>
+            </a:solidFill>
+          </a:ln>
+          <a:effectLst/>
+        </p:spPr>
+        <p:style>
+          <a:lnRef idx="1">
+            <a:schemeClr val="accent1"/>
+          </a:lnRef>
+          <a:fillRef idx="3">
+            <a:schemeClr val="accent1"/>
+          </a:fillRef>
+          <a:effectRef idx="2">
+            <a:schemeClr val="accent1"/>
+          </a:effectRef>
+          <a:fontRef idx="minor">
+            <a:schemeClr val="lt1"/>
+          </a:fontRef>
+        </p:style>
+        <p:txBody>
+          <a:bodyPr rtlCol="0" anchor="ctr" wrap="square"/>
+          <a:lstStyle/>
+          <a:p>
+            <a:pPr algn="ctr"/>
+          </a:p>
+        </p:txBody>
+      </p:sp>
+      <p:sp>
+        <p:nvSpPr>
+          <p:cNvPr id="25" name="TextBox 24"/>
+          <p:cNvSpPr txBox="1"/>
+          <p:nvPr/>
+        </p:nvSpPr>
+        <p:spPr>
+          <a:xfrm>
+            <a:off x="4838700" y="4648200"/>
+            <a:ext cx="5334000" cy="628650"/>
+          </a:xfrm>
+          <a:prstGeom prst="rect">
+            <a:avLst/>
+          </a:prstGeom>
+          <a:noFill/>
+        </p:spPr>
+        <p:txBody>
+          <a:bodyPr wrap="square" lIns="0" rIns="0" tIns="0" bIns="0" anchor="ctr">
+            <a:spAutoFit/>
+          </a:bodyPr>
+          <a:lstStyle/>
+          <a:p>
+            <a:pPr algn="l">
+              <a:lnSpc>
+                <a:spcPct val="130000"/>
+              </a:lnSpc>
+            </a:pPr>
+            <a:r>
+              <a:rPr sz="1575" b="0">
+                <a:solidFill>
+                  <a:srgbClr val="1A2230"/>
+                </a:solidFill>
+                <a:latin typeface="Microsoft YaHei"/>
+              </a:rPr>
+              <a:t>参考实现接口冒烟（对照）</a:t>
+            </a:r>
+          </a:p>
+        </p:txBody>
+      </p:sp>
+      <p:sp>
+        <p:nvSpPr>
+          <p:cNvPr id="26" name="TextBox 25"/>
+          <p:cNvSpPr txBox="1"/>
+          <p:nvPr/>
+        </p:nvSpPr>
+        <p:spPr>
+          <a:xfrm>
+            <a:off x="10287000" y="4648200"/>
+            <a:ext cx="1333500" cy="628650"/>
+          </a:xfrm>
+          <a:prstGeom prst="rect">
+            <a:avLst/>
+          </a:prstGeom>
+          <a:noFill/>
+        </p:spPr>
+        <p:txBody>
+          <a:bodyPr wrap="square" lIns="0" rIns="0" tIns="0" bIns="0" anchor="ctr">
+            <a:spAutoFit/>
+          </a:bodyPr>
+          <a:lstStyle/>
+          <a:p>
+            <a:pPr algn="r">
+              <a:lnSpc>
+                <a:spcPct val="130000"/>
+              </a:lnSpc>
+            </a:pPr>
+            <a:r>
+              <a:rPr sz="2250" b="1">
+                <a:solidFill>
+                  <a:srgbClr val="1E4FA8"/>
+                </a:solidFill>
+                <a:latin typeface="Microsoft YaHei"/>
+              </a:rPr>
+              <a:t>18</a:t>
+            </a:r>
+          </a:p>
+        </p:txBody>
+      </p:sp>
+      <p:sp>
+        <p:nvSpPr>
+          <p:cNvPr id="27" name="Rounded Rectangle 26"/>
+          <p:cNvSpPr/>
+          <p:nvPr/>
+        </p:nvSpPr>
+        <p:spPr>
+          <a:xfrm>
+            <a:off x="381000" y="5505450"/>
+            <a:ext cx="11430000" cy="590550"/>
+          </a:xfrm>
+          <a:prstGeom prst="roundRect">
+            <a:avLst>
+              <a:gd name="adj" fmla="val 12903"/>
+            </a:avLst>
+          </a:prstGeom>
+          <a:solidFill>
+            <a:srgbClr val="E8EFF8"/>
+          </a:solidFill>
+          <a:ln>
+            <a:noFill/>
+          </a:ln>
+          <a:effectLst/>
+        </p:spPr>
+        <p:style>
+          <a:lnRef idx="1">
+            <a:schemeClr val="accent1"/>
+          </a:lnRef>
+          <a:fillRef idx="3">
+            <a:schemeClr val="accent1"/>
+          </a:fillRef>
+          <a:effectRef idx="2">
+            <a:schemeClr val="accent1"/>
+          </a:effectRef>
+          <a:fontRef idx="minor">
+            <a:schemeClr val="lt1"/>
+          </a:fontRef>
+        </p:style>
+        <p:txBody>
+          <a:bodyPr rtlCol="0" anchor="ctr" wrap="square"/>
+          <a:lstStyle/>
+          <a:p>
+            <a:pPr algn="ctr"/>
+          </a:p>
+        </p:txBody>
+      </p:sp>
+      <p:sp>
+        <p:nvSpPr>
+          <p:cNvPr id="28" name="Rectangle 27"/>
+          <p:cNvSpPr/>
+          <p:nvPr/>
+        </p:nvSpPr>
+        <p:spPr>
+          <a:xfrm>
+            <a:off x="381000" y="5505450"/>
+            <a:ext cx="38100" cy="590550"/>
+          </a:xfrm>
+          <a:prstGeom prst="rect">
+            <a:avLst/>
+          </a:prstGeom>
+          <a:solidFill>
+            <a:srgbClr val="1E4FA8"/>
+          </a:solidFill>
+          <a:ln>
+            <a:noFill/>
+          </a:ln>
+          <a:effectLst/>
+        </p:spPr>
+        <p:style>
+          <a:lnRef idx="1">
+            <a:schemeClr val="accent1"/>
+          </a:lnRef>
+          <a:fillRef idx="3">
+            <a:schemeClr val="accent1"/>
+          </a:fillRef>
+          <a:effectRef idx="2">
+            <a:schemeClr val="accent1"/>
+          </a:effectRef>
+          <a:fontRef idx="minor">
+            <a:schemeClr val="lt1"/>
+          </a:fontRef>
+        </p:style>
+        <p:txBody>
+          <a:bodyPr rtlCol="0" anchor="ctr" wrap="square"/>
+          <a:lstStyle/>
+          <a:p>
+            <a:pPr algn="ctr"/>
+          </a:p>
+        </p:txBody>
+      </p:sp>
+      <p:sp>
+        <p:nvSpPr>
+          <p:cNvPr id="29" name="TextBox 28"/>
+          <p:cNvSpPr txBox="1"/>
+          <p:nvPr/>
+        </p:nvSpPr>
+        <p:spPr>
+          <a:xfrm>
+            <a:off x="533400" y="5505450"/>
+            <a:ext cx="914400" cy="590550"/>
+          </a:xfrm>
+          <a:prstGeom prst="rect">
+            <a:avLst/>
+          </a:prstGeom>
+          <a:noFill/>
+        </p:spPr>
+        <p:txBody>
+          <a:bodyPr wrap="square" lIns="0" rIns="0" tIns="0" bIns="0" anchor="ctr">
+            <a:spAutoFit/>
+          </a:bodyPr>
+          <a:lstStyle/>
+          <a:p>
+            <a:pPr algn="l">
+              <a:lnSpc>
+                <a:spcPct val="130000"/>
+              </a:lnSpc>
+            </a:pPr>
+            <a:r>
+              <a:rPr sz="1500" b="1">
+                <a:solidFill>
+                  <a:srgbClr val="1E4FA8"/>
+                </a:solidFill>
+                <a:latin typeface="Microsoft YaHei"/>
+              </a:rPr>
+              <a:t>判断</a:t>
+            </a:r>
+          </a:p>
+        </p:txBody>
+      </p:sp>
+      <p:sp>
+        <p:nvSpPr>
+          <p:cNvPr id="30" name="TextBox 29"/>
+          <p:cNvSpPr txBox="1"/>
+          <p:nvPr/>
+        </p:nvSpPr>
+        <p:spPr>
+          <a:xfrm>
+            <a:off x="1504950" y="5505450"/>
+            <a:ext cx="10134600" cy="590550"/>
+          </a:xfrm>
+          <a:prstGeom prst="rect">
+            <a:avLst/>
+          </a:prstGeom>
+          <a:noFill/>
+        </p:spPr>
+        <p:txBody>
+          <a:bodyPr wrap="square" lIns="0" rIns="0" tIns="0" bIns="0" anchor="ctr">
+            <a:spAutoFit/>
+          </a:bodyPr>
+          <a:lstStyle/>
+          <a:p>
+            <a:pPr algn="l">
+              <a:lnSpc>
+                <a:spcPct val="135000"/>
+              </a:lnSpc>
+            </a:pPr>
+            <a:r>
+              <a:rPr sz="1500" b="0">
+                <a:solidFill>
+                  <a:srgbClr val="1A2230"/>
+                </a:solidFill>
+                <a:latin typeface="Microsoft YaHei"/>
+              </a:rPr>
+              <a:t>测试要能挡住"点了没反应"这类问题，所以既做静态检查，也做真实浏览器点击</a:t>
+            </a:r>
+          </a:p>
+        </p:txBody>
+      </p:sp>
+      <p:sp>
+        <p:nvSpPr>
+          <p:cNvPr id="31" name="Rectangle 30"/>
+          <p:cNvSpPr/>
+          <p:nvPr/>
+        </p:nvSpPr>
+        <p:spPr>
+          <a:xfrm>
+            <a:off x="381000" y="6286500"/>
+            <a:ext cx="11430000" cy="9525"/>
+          </a:xfrm>
+          <a:prstGeom prst="rect">
+            <a:avLst/>
+          </a:prstGeom>
+          <a:solidFill>
+            <a:srgbClr val="E5E7EB"/>
+          </a:solidFill>
+          <a:ln>
+            <a:noFill/>
+          </a:ln>
+          <a:effectLst/>
+        </p:spPr>
+        <p:style>
+          <a:lnRef idx="1">
+            <a:schemeClr val="accent1"/>
+          </a:lnRef>
+          <a:fillRef idx="3">
+            <a:schemeClr val="accent1"/>
+          </a:fillRef>
+          <a:effectRef idx="2">
+            <a:schemeClr val="accent1"/>
+          </a:effectRef>
+          <a:fontRef idx="minor">
+            <a:schemeClr val="lt1"/>
+          </a:fontRef>
+        </p:style>
+        <p:txBody>
+          <a:bodyPr rtlCol="0" anchor="ctr" wrap="square"/>
+          <a:lstStyle/>
+          <a:p>
+            <a:pPr algn="ctr"/>
+          </a:p>
+        </p:txBody>
+      </p:sp>
+      <p:sp>
+        <p:nvSpPr>
+          <p:cNvPr id="32" name="TextBox 31"/>
+          <p:cNvSpPr txBox="1"/>
+          <p:nvPr/>
+        </p:nvSpPr>
+        <p:spPr>
+          <a:xfrm>
+            <a:off x="381000" y="6324600"/>
+            <a:ext cx="8763000" cy="285750"/>
+          </a:xfrm>
+          <a:prstGeom prst="rect">
+            <a:avLst/>
+          </a:prstGeom>
+          <a:noFill/>
+        </p:spPr>
+        <p:txBody>
+          <a:bodyPr wrap="square" lIns="0" rIns="0" tIns="0" bIns="0" anchor="ctr">
+            <a:spAutoFit/>
+          </a:bodyPr>
+          <a:lstStyle/>
+          <a:p>
+            <a:pPr algn="l">
+              <a:lnSpc>
+                <a:spcPct val="130000"/>
+              </a:lnSpc>
+            </a:pPr>
+            <a:r>
+              <a:rPr sz="1125" b="0">
+                <a:solidFill>
+                  <a:srgbClr val="8B97A8"/>
+                </a:solidFill>
+                <a:latin typeface="Microsoft YaHei"/>
+              </a:rPr>
+              <a:t>来源：五份测试报告文件（verify/ 与 app/ 目录）</a:t>
+            </a:r>
+          </a:p>
+        </p:txBody>
+      </p:sp>
+      <p:sp>
+        <p:nvSpPr>
+          <p:cNvPr id="33" name="TextBox 32"/>
+          <p:cNvSpPr txBox="1"/>
+          <p:nvPr/>
+        </p:nvSpPr>
+        <p:spPr>
+          <a:xfrm>
+            <a:off x="9525000" y="6324600"/>
+            <a:ext cx="2286000" cy="285750"/>
+          </a:xfrm>
+          <a:prstGeom prst="rect">
+            <a:avLst/>
+          </a:prstGeom>
+          <a:noFill/>
+        </p:spPr>
+        <p:txBody>
+          <a:bodyPr wrap="square" lIns="0" rIns="0" tIns="0" bIns="0" anchor="ctr">
+            <a:spAutoFit/>
+          </a:bodyPr>
+          <a:lstStyle/>
+          <a:p>
+            <a:pPr algn="r">
+              <a:lnSpc>
+                <a:spcPct val="130000"/>
+              </a:lnSpc>
+            </a:pPr>
+            <a:r>
+              <a:rPr sz="1200" b="1">
+                <a:solidFill>
+                  <a:srgbClr val="1E4FA8"/>
+                </a:solidFill>
+                <a:latin typeface="Microsoft YaHei"/>
+              </a:rPr>
+              <a:t>20 / 24</a:t>
+            </a:r>
+          </a:p>
+        </p:txBody>
+      </p:sp>
+    </p:spTree>
+  </p:cSld>
+  <p:clrMapOvr>
+    <a:masterClrMapping/>
+  </p:clrMapOvr>
+</p:sld>
+</file>
+
+<file path=ppt/slides/slide21.xml><?xml version="1.0" encoding="utf-8"?>
+<p:sld xmlns:a="http://schemas.openxmlformats.org/drawingml/2006/main" xmlns:p="http://schemas.openxmlformats.org/presentationml/2006/main" xmlns:r="http://schemas.openxmlformats.org/officeDocument/2006/relationships">
+  <p:cSld>
+    <p:bg>
+      <p:bgPr>
+        <a:solidFill>
+          <a:srgbClr val="FFFFFF"/>
+        </a:solidFill>
+        <a:effectLst/>
+      </p:bgPr>
+    </p:bg>
+    <p:spTree>
+      <p:nvGrpSpPr>
+        <p:cNvPr id="1" name=""/>
+        <p:cNvGrpSpPr/>
+        <p:nvPr/>
+      </p:nvGrpSpPr>
+      <p:grpSpPr/>
+      <p:sp>
+        <p:nvSpPr>
+          <p:cNvPr id="2" name="Rectangle 1"/>
+          <p:cNvSpPr/>
+          <p:nvPr/>
+        </p:nvSpPr>
+        <p:spPr>
+          <a:xfrm>
+            <a:off x="0" y="0"/>
+            <a:ext cx="12192000" cy="762000"/>
+          </a:xfrm>
+          <a:prstGeom prst="rect">
+            <a:avLst/>
+          </a:prstGeom>
+          <a:solidFill>
+            <a:srgbClr val="1E4FA8"/>
+          </a:solidFill>
+          <a:ln>
+            <a:noFill/>
+          </a:ln>
+          <a:effectLst/>
+        </p:spPr>
+        <p:style>
+          <a:lnRef idx="1">
+            <a:schemeClr val="accent1"/>
+          </a:lnRef>
+          <a:fillRef idx="3">
+            <a:schemeClr val="accent1"/>
+          </a:fillRef>
+          <a:effectRef idx="2">
+            <a:schemeClr val="accent1"/>
+          </a:effectRef>
+          <a:fontRef idx="minor">
+            <a:schemeClr val="lt1"/>
+          </a:fontRef>
+        </p:style>
+        <p:txBody>
+          <a:bodyPr rtlCol="0" anchor="ctr" wrap="square"/>
+          <a:lstStyle/>
+          <a:p>
+            <a:pPr algn="ctr"/>
+          </a:p>
+        </p:txBody>
+      </p:sp>
+      <p:sp>
+        <p:nvSpPr>
+          <p:cNvPr id="3" name="TextBox 2"/>
+          <p:cNvSpPr txBox="1"/>
+          <p:nvPr/>
+        </p:nvSpPr>
+        <p:spPr>
+          <a:xfrm>
+            <a:off x="381000" y="0"/>
+            <a:ext cx="7239000" cy="762000"/>
+          </a:xfrm>
+          <a:prstGeom prst="rect">
+            <a:avLst/>
+          </a:prstGeom>
+          <a:noFill/>
+        </p:spPr>
+        <p:txBody>
+          <a:bodyPr wrap="square" lIns="0" rIns="0" tIns="0" bIns="0" anchor="ctr">
+            <a:spAutoFit/>
+          </a:bodyPr>
+          <a:lstStyle/>
+          <a:p>
+            <a:pPr algn="l">
+              <a:lnSpc>
+                <a:spcPct val="130000"/>
+              </a:lnSpc>
+            </a:pPr>
+            <a:r>
+              <a:rPr sz="2400" b="1">
+                <a:solidFill>
+                  <a:srgbClr val="FFFFFF"/>
+                </a:solidFill>
+                <a:latin typeface="Microsoft YaHei"/>
+              </a:rPr>
+              <a:t>15 个缺陷：把踩过的坑讲清楚</a:t>
+            </a:r>
+          </a:p>
+        </p:txBody>
+      </p:sp>
+      <p:sp>
+        <p:nvSpPr>
+          <p:cNvPr id="4" name="TextBox 3"/>
+          <p:cNvSpPr txBox="1"/>
+          <p:nvPr/>
+        </p:nvSpPr>
+        <p:spPr>
+          <a:xfrm>
+            <a:off x="7620000" y="0"/>
+            <a:ext cx="4191000" cy="762000"/>
+          </a:xfrm>
+          <a:prstGeom prst="rect">
+            <a:avLst/>
+          </a:prstGeom>
+          <a:noFill/>
+        </p:spPr>
+        <p:txBody>
+          <a:bodyPr wrap="square" lIns="0" rIns="0" tIns="0" bIns="0" anchor="ctr">
+            <a:spAutoFit/>
+          </a:bodyPr>
+          <a:lstStyle/>
+          <a:p>
+            <a:pPr algn="r">
+              <a:lnSpc>
+                <a:spcPct val="130000"/>
+              </a:lnSpc>
+            </a:pPr>
+            <a:r>
+              <a:rPr sz="1050" b="0">
+                <a:solidFill>
+                  <a:srgbClr val="BFD3F0"/>
+                </a:solidFill>
+                <a:latin typeface="Microsoft YaHei"/>
+              </a:rPr>
+              <a:t>健身房运营管理系统 · 课程答辩</a:t>
+            </a:r>
+          </a:p>
+        </p:txBody>
+      </p:sp>
+      <p:sp>
+        <p:nvSpPr>
+          <p:cNvPr id="5" name="Rounded Rectangle 4"/>
+          <p:cNvSpPr/>
+          <p:nvPr/>
+        </p:nvSpPr>
+        <p:spPr>
+          <a:xfrm>
+            <a:off x="381000" y="1028700"/>
+            <a:ext cx="2381250" cy="1104900"/>
+          </a:xfrm>
+          <a:prstGeom prst="roundRect">
+            <a:avLst>
+              <a:gd name="adj" fmla="val 8620"/>
+            </a:avLst>
+          </a:prstGeom>
+          <a:solidFill>
+            <a:srgbClr val="F7F9FC"/>
+          </a:solidFill>
+          <a:ln w="12700">
+            <a:solidFill>
+              <a:srgbClr val="D6DCE5"/>
+            </a:solidFill>
+          </a:ln>
+          <a:effectLst/>
+        </p:spPr>
+        <p:style>
+          <a:lnRef idx="1">
+            <a:schemeClr val="accent1"/>
+          </a:lnRef>
+          <a:fillRef idx="3">
+            <a:schemeClr val="accent1"/>
+          </a:fillRef>
+          <a:effectRef idx="2">
+            <a:schemeClr val="accent1"/>
+          </a:effectRef>
+          <a:fontRef idx="minor">
+            <a:schemeClr val="lt1"/>
+          </a:fontRef>
+        </p:style>
+        <p:txBody>
+          <a:bodyPr rtlCol="0" anchor="ctr" wrap="square"/>
+          <a:lstStyle/>
+          <a:p>
+            <a:pPr algn="ctr"/>
+          </a:p>
+        </p:txBody>
+      </p:sp>
+      <p:sp>
+        <p:nvSpPr>
+          <p:cNvPr id="6" name="TextBox 5"/>
+          <p:cNvSpPr txBox="1"/>
+          <p:nvPr/>
+        </p:nvSpPr>
+        <p:spPr>
+          <a:xfrm>
+            <a:off x="590550" y="1162050"/>
+            <a:ext cx="1905000" cy="571500"/>
+          </a:xfrm>
+          <a:prstGeom prst="rect">
+            <a:avLst/>
+          </a:prstGeom>
+          <a:noFill/>
+        </p:spPr>
+        <p:txBody>
+          <a:bodyPr wrap="square" lIns="0" rIns="0" tIns="0" bIns="0" anchor="ctr">
+            <a:spAutoFit/>
+          </a:bodyPr>
+          <a:lstStyle/>
+          <a:p>
+            <a:pPr algn="l">
+              <a:lnSpc>
+                <a:spcPct val="130000"/>
+              </a:lnSpc>
+            </a:pPr>
+            <a:r>
+              <a:rPr sz="3600" b="1">
+                <a:solidFill>
+                  <a:srgbClr val="D9534F"/>
+                </a:solidFill>
+                <a:latin typeface="Microsoft YaHei"/>
+              </a:rPr>
+              <a:t>2</a:t>
+            </a:r>
+          </a:p>
+        </p:txBody>
+      </p:sp>
+      <p:sp>
+        <p:nvSpPr>
+          <p:cNvPr id="7" name="TextBox 6"/>
+          <p:cNvSpPr txBox="1"/>
+          <p:nvPr/>
+        </p:nvSpPr>
+        <p:spPr>
+          <a:xfrm>
+            <a:off x="590550" y="1733550"/>
+            <a:ext cx="1905000" cy="285750"/>
+          </a:xfrm>
+          <a:prstGeom prst="rect">
+            <a:avLst/>
+          </a:prstGeom>
+          <a:noFill/>
+        </p:spPr>
+        <p:txBody>
+          <a:bodyPr wrap="square" lIns="0" rIns="0" tIns="0" bIns="0" anchor="ctr">
+            <a:spAutoFit/>
+          </a:bodyPr>
+          <a:lstStyle/>
+          <a:p>
+            <a:pPr algn="l">
+              <a:lnSpc>
+                <a:spcPct val="130000"/>
+              </a:lnSpc>
+            </a:pPr>
+            <a:r>
+              <a:rPr sz="1500" b="0">
+                <a:solidFill>
+                  <a:srgbClr val="1A2230"/>
+                </a:solidFill>
+                <a:latin typeface="Microsoft YaHei"/>
+              </a:rPr>
+              <a:t>严重缺陷</a:t>
+            </a:r>
+          </a:p>
+        </p:txBody>
+      </p:sp>
+      <p:sp>
+        <p:nvSpPr>
+          <p:cNvPr id="8" name="Rounded Rectangle 7"/>
+          <p:cNvSpPr/>
+          <p:nvPr/>
+        </p:nvSpPr>
+        <p:spPr>
+          <a:xfrm>
+            <a:off x="2914650" y="1028700"/>
+            <a:ext cx="2381250" cy="1104900"/>
+          </a:xfrm>
+          <a:prstGeom prst="roundRect">
+            <a:avLst>
+              <a:gd name="adj" fmla="val 8620"/>
+            </a:avLst>
+          </a:prstGeom>
+          <a:solidFill>
+            <a:srgbClr val="F7F9FC"/>
+          </a:solidFill>
+          <a:ln w="12700">
+            <a:solidFill>
+              <a:srgbClr val="D6DCE5"/>
+            </a:solidFill>
+          </a:ln>
+          <a:effectLst/>
+        </p:spPr>
+        <p:style>
+          <a:lnRef idx="1">
+            <a:schemeClr val="accent1"/>
+          </a:lnRef>
+          <a:fillRef idx="3">
+            <a:schemeClr val="accent1"/>
+          </a:fillRef>
+          <a:effectRef idx="2">
+            <a:schemeClr val="accent1"/>
+          </a:effectRef>
+          <a:fontRef idx="minor">
+            <a:schemeClr val="lt1"/>
+          </a:fontRef>
+        </p:style>
+        <p:txBody>
+          <a:bodyPr rtlCol="0" anchor="ctr" wrap="square"/>
+          <a:lstStyle/>
+          <a:p>
+            <a:pPr algn="ctr"/>
+          </a:p>
+        </p:txBody>
+      </p:sp>
+      <p:sp>
+        <p:nvSpPr>
+          <p:cNvPr id="9" name="TextBox 8"/>
+          <p:cNvSpPr txBox="1"/>
+          <p:nvPr/>
+        </p:nvSpPr>
+        <p:spPr>
+          <a:xfrm>
+            <a:off x="3124200" y="1162050"/>
+            <a:ext cx="1905000" cy="571500"/>
+          </a:xfrm>
+          <a:prstGeom prst="rect">
+            <a:avLst/>
+          </a:prstGeom>
+          <a:noFill/>
+        </p:spPr>
+        <p:txBody>
+          <a:bodyPr wrap="square" lIns="0" rIns="0" tIns="0" bIns="0" anchor="ctr">
+            <a:spAutoFit/>
+          </a:bodyPr>
+          <a:lstStyle/>
+          <a:p>
+            <a:pPr algn="l">
+              <a:lnSpc>
+                <a:spcPct val="130000"/>
+              </a:lnSpc>
+            </a:pPr>
+            <a:r>
+              <a:rPr sz="3600" b="1">
+                <a:solidFill>
+                  <a:srgbClr val="1E4FA8"/>
+                </a:solidFill>
+                <a:latin typeface="Microsoft YaHei"/>
+              </a:rPr>
+              <a:t>9</a:t>
+            </a:r>
+          </a:p>
+        </p:txBody>
+      </p:sp>
+      <p:sp>
+        <p:nvSpPr>
+          <p:cNvPr id="10" name="TextBox 9"/>
+          <p:cNvSpPr txBox="1"/>
+          <p:nvPr/>
+        </p:nvSpPr>
+        <p:spPr>
+          <a:xfrm>
+            <a:off x="3124200" y="1733550"/>
+            <a:ext cx="1905000" cy="285750"/>
+          </a:xfrm>
+          <a:prstGeom prst="rect">
+            <a:avLst/>
+          </a:prstGeom>
+          <a:noFill/>
+        </p:spPr>
+        <p:txBody>
+          <a:bodyPr wrap="square" lIns="0" rIns="0" tIns="0" bIns="0" anchor="ctr">
+            <a:spAutoFit/>
+          </a:bodyPr>
+          <a:lstStyle/>
+          <a:p>
+            <a:pPr algn="l">
+              <a:lnSpc>
+                <a:spcPct val="130000"/>
+              </a:lnSpc>
+            </a:pPr>
+            <a:r>
+              <a:rPr sz="1500" b="0">
+                <a:solidFill>
+                  <a:srgbClr val="1A2230"/>
+                </a:solidFill>
+                <a:latin typeface="Microsoft YaHei"/>
+              </a:rPr>
+              <a:t>中等缺陷</a:t>
+            </a:r>
+          </a:p>
+        </p:txBody>
+      </p:sp>
+      <p:sp>
+        <p:nvSpPr>
+          <p:cNvPr id="11" name="Rounded Rectangle 10"/>
+          <p:cNvSpPr/>
+          <p:nvPr/>
+        </p:nvSpPr>
+        <p:spPr>
+          <a:xfrm>
+            <a:off x="5448300" y="1028700"/>
+            <a:ext cx="2381250" cy="1104900"/>
+          </a:xfrm>
+          <a:prstGeom prst="roundRect">
+            <a:avLst>
+              <a:gd name="adj" fmla="val 8620"/>
+            </a:avLst>
+          </a:prstGeom>
+          <a:solidFill>
+            <a:srgbClr val="F7F9FC"/>
+          </a:solidFill>
+          <a:ln w="12700">
+            <a:solidFill>
+              <a:srgbClr val="D6DCE5"/>
+            </a:solidFill>
+          </a:ln>
+          <a:effectLst/>
+        </p:spPr>
+        <p:style>
+          <a:lnRef idx="1">
+            <a:schemeClr val="accent1"/>
+          </a:lnRef>
+          <a:fillRef idx="3">
+            <a:schemeClr val="accent1"/>
+          </a:fillRef>
+          <a:effectRef idx="2">
+            <a:schemeClr val="accent1"/>
+          </a:effectRef>
+          <a:fontRef idx="minor">
+            <a:schemeClr val="lt1"/>
+          </a:fontRef>
+        </p:style>
+        <p:txBody>
+          <a:bodyPr rtlCol="0" anchor="ctr" wrap="square"/>
+          <a:lstStyle/>
+          <a:p>
+            <a:pPr algn="ctr"/>
+          </a:p>
+        </p:txBody>
+      </p:sp>
+      <p:sp>
+        <p:nvSpPr>
           <p:cNvPr id="12" name="TextBox 11"/>
           <p:cNvSpPr txBox="1"/>
           <p:nvPr/>
@@ -19182,7 +20623,7 @@
                 </a:solidFill>
                 <a:latin typeface="Microsoft YaHei"/>
               </a:rPr>
-              <a:t>19 / 23</a:t>
+              <a:t>21 / 24</a:t>
             </a:r>
           </a:p>
         </p:txBody>
@@ -19195,7 +20636,7 @@
 </p:sld>
 </file>
 
-<file path=ppt/slides/slide21.xml><?xml version="1.0" encoding="utf-8"?>
+<file path=ppt/slides/slide22.xml><?xml version="1.0" encoding="utf-8"?>
 <p:sld xmlns:a="http://schemas.openxmlformats.org/drawingml/2006/main" xmlns:p="http://schemas.openxmlformats.org/presentationml/2006/main" xmlns:r="http://schemas.openxmlformats.org/officeDocument/2006/relationships">
   <p:cSld>
     <p:bg>
@@ -19791,1217 +21232,7 @@
                 </a:solidFill>
                 <a:latin typeface="Microsoft YaHei"/>
               </a:rPr>
-              <a:t>20 / 23</a:t>
-            </a:r>
-          </a:p>
-        </p:txBody>
-      </p:sp>
-    </p:spTree>
-  </p:cSld>
-  <p:clrMapOvr>
-    <a:masterClrMapping/>
-  </p:clrMapOvr>
-</p:sld>
-</file>
-
-<file path=ppt/slides/slide22.xml><?xml version="1.0" encoding="utf-8"?>
-<p:sld xmlns:a="http://schemas.openxmlformats.org/drawingml/2006/main" xmlns:p="http://schemas.openxmlformats.org/presentationml/2006/main" xmlns:r="http://schemas.openxmlformats.org/officeDocument/2006/relationships">
-  <p:cSld>
-    <p:bg>
-      <p:bgPr>
-        <a:solidFill>
-          <a:srgbClr val="FFFFFF"/>
-        </a:solidFill>
-        <a:effectLst/>
-      </p:bgPr>
-    </p:bg>
-    <p:spTree>
-      <p:nvGrpSpPr>
-        <p:cNvPr id="1" name=""/>
-        <p:cNvGrpSpPr/>
-        <p:nvPr/>
-      </p:nvGrpSpPr>
-      <p:grpSpPr/>
-      <p:sp>
-        <p:nvSpPr>
-          <p:cNvPr id="2" name="Rectangle 1"/>
-          <p:cNvSpPr/>
-          <p:nvPr/>
-        </p:nvSpPr>
-        <p:spPr>
-          <a:xfrm>
-            <a:off x="0" y="0"/>
-            <a:ext cx="12192000" cy="762000"/>
-          </a:xfrm>
-          <a:prstGeom prst="rect">
-            <a:avLst/>
-          </a:prstGeom>
-          <a:solidFill>
-            <a:srgbClr val="1E4FA8"/>
-          </a:solidFill>
-          <a:ln>
-            <a:noFill/>
-          </a:ln>
-          <a:effectLst/>
-        </p:spPr>
-        <p:style>
-          <a:lnRef idx="1">
-            <a:schemeClr val="accent1"/>
-          </a:lnRef>
-          <a:fillRef idx="3">
-            <a:schemeClr val="accent1"/>
-          </a:fillRef>
-          <a:effectRef idx="2">
-            <a:schemeClr val="accent1"/>
-          </a:effectRef>
-          <a:fontRef idx="minor">
-            <a:schemeClr val="lt1"/>
-          </a:fontRef>
-        </p:style>
-        <p:txBody>
-          <a:bodyPr rtlCol="0" anchor="ctr" wrap="square"/>
-          <a:lstStyle/>
-          <a:p>
-            <a:pPr algn="ctr"/>
-          </a:p>
-        </p:txBody>
-      </p:sp>
-      <p:sp>
-        <p:nvSpPr>
-          <p:cNvPr id="3" name="TextBox 2"/>
-          <p:cNvSpPr txBox="1"/>
-          <p:nvPr/>
-        </p:nvSpPr>
-        <p:spPr>
-          <a:xfrm>
-            <a:off x="381000" y="0"/>
-            <a:ext cx="7239000" cy="762000"/>
-          </a:xfrm>
-          <a:prstGeom prst="rect">
-            <a:avLst/>
-          </a:prstGeom>
-          <a:noFill/>
-        </p:spPr>
-        <p:txBody>
-          <a:bodyPr wrap="square" lIns="0" rIns="0" tIns="0" bIns="0" anchor="ctr">
-            <a:spAutoFit/>
-          </a:bodyPr>
-          <a:lstStyle/>
-          <a:p>
-            <a:pPr algn="l">
-              <a:lnSpc>
-                <a:spcPct val="130000"/>
-              </a:lnSpc>
-            </a:pPr>
-            <a:r>
-              <a:rPr sz="2400" b="1">
-                <a:solidFill>
-                  <a:srgbClr val="FFFFFF"/>
-                </a:solidFill>
-                <a:latin typeface="Microsoft YaHei"/>
-              </a:rPr>
-              <a:t>没做完的部分，以及下一步</a:t>
-            </a:r>
-          </a:p>
-        </p:txBody>
-      </p:sp>
-      <p:sp>
-        <p:nvSpPr>
-          <p:cNvPr id="4" name="TextBox 3"/>
-          <p:cNvSpPr txBox="1"/>
-          <p:nvPr/>
-        </p:nvSpPr>
-        <p:spPr>
-          <a:xfrm>
-            <a:off x="7620000" y="0"/>
-            <a:ext cx="4191000" cy="762000"/>
-          </a:xfrm>
-          <a:prstGeom prst="rect">
-            <a:avLst/>
-          </a:prstGeom>
-          <a:noFill/>
-        </p:spPr>
-        <p:txBody>
-          <a:bodyPr wrap="square" lIns="0" rIns="0" tIns="0" bIns="0" anchor="ctr">
-            <a:spAutoFit/>
-          </a:bodyPr>
-          <a:lstStyle/>
-          <a:p>
-            <a:pPr algn="r">
-              <a:lnSpc>
-                <a:spcPct val="130000"/>
-              </a:lnSpc>
-            </a:pPr>
-            <a:r>
-              <a:rPr sz="1050" b="0">
-                <a:solidFill>
-                  <a:srgbClr val="BFD3F0"/>
-                </a:solidFill>
-                <a:latin typeface="Microsoft YaHei"/>
-              </a:rPr>
-              <a:t>健身房运营管理系统 · 课程答辩</a:t>
-            </a:r>
-          </a:p>
-        </p:txBody>
-      </p:sp>
-      <p:sp>
-        <p:nvSpPr>
-          <p:cNvPr id="5" name="Rounded Rectangle 4"/>
-          <p:cNvSpPr/>
-          <p:nvPr/>
-        </p:nvSpPr>
-        <p:spPr>
-          <a:xfrm>
-            <a:off x="381000" y="1028700"/>
-            <a:ext cx="6667500" cy="4305300"/>
-          </a:xfrm>
-          <a:prstGeom prst="roundRect">
-            <a:avLst>
-              <a:gd name="adj" fmla="val 2654"/>
-            </a:avLst>
-          </a:prstGeom>
-          <a:solidFill>
-            <a:srgbClr val="E8EFF8"/>
-          </a:solidFill>
-          <a:ln>
-            <a:noFill/>
-          </a:ln>
-          <a:effectLst/>
-        </p:spPr>
-        <p:style>
-          <a:lnRef idx="1">
-            <a:schemeClr val="accent1"/>
-          </a:lnRef>
-          <a:fillRef idx="3">
-            <a:schemeClr val="accent1"/>
-          </a:fillRef>
-          <a:effectRef idx="2">
-            <a:schemeClr val="accent1"/>
-          </a:effectRef>
-          <a:fontRef idx="minor">
-            <a:schemeClr val="lt1"/>
-          </a:fontRef>
-        </p:style>
-        <p:txBody>
-          <a:bodyPr rtlCol="0" anchor="ctr" wrap="square"/>
-          <a:lstStyle/>
-          <a:p>
-            <a:pPr algn="ctr"/>
-          </a:p>
-        </p:txBody>
-      </p:sp>
-      <p:sp>
-        <p:nvSpPr>
-          <p:cNvPr id="6" name="TextBox 5"/>
-          <p:cNvSpPr txBox="1"/>
-          <p:nvPr/>
-        </p:nvSpPr>
-        <p:spPr>
-          <a:xfrm>
-            <a:off x="590550" y="1219200"/>
-            <a:ext cx="6248400" cy="323850"/>
-          </a:xfrm>
-          <a:prstGeom prst="rect">
-            <a:avLst/>
-          </a:prstGeom>
-          <a:noFill/>
-        </p:spPr>
-        <p:txBody>
-          <a:bodyPr wrap="square" lIns="0" rIns="0" tIns="0" bIns="0" anchor="ctr">
-            <a:spAutoFit/>
-          </a:bodyPr>
-          <a:lstStyle/>
-          <a:p>
-            <a:pPr algn="l">
-              <a:lnSpc>
-                <a:spcPct val="130000"/>
-              </a:lnSpc>
-            </a:pPr>
-            <a:r>
-              <a:rPr sz="1800" b="1">
-                <a:solidFill>
-                  <a:srgbClr val="0E3F8C"/>
-                </a:solidFill>
-                <a:latin typeface="Microsoft YaHei"/>
-              </a:rPr>
-              <a:t>已完成并验证</a:t>
-            </a:r>
-          </a:p>
-        </p:txBody>
-      </p:sp>
-      <p:sp>
-        <p:nvSpPr>
-          <p:cNvPr id="7" name="Rounded Rectangle 6"/>
-          <p:cNvSpPr/>
-          <p:nvPr/>
-        </p:nvSpPr>
-        <p:spPr>
-          <a:xfrm>
-            <a:off x="590550" y="1676400"/>
-            <a:ext cx="6248400" cy="628650"/>
-          </a:xfrm>
-          <a:prstGeom prst="roundRect">
-            <a:avLst>
-              <a:gd name="adj" fmla="val 12121"/>
-            </a:avLst>
-          </a:prstGeom>
-          <a:solidFill>
-            <a:srgbClr val="FFFFFF"/>
-          </a:solidFill>
-          <a:ln w="12700">
-            <a:solidFill>
-              <a:srgbClr val="D6DCE5"/>
-            </a:solidFill>
-          </a:ln>
-          <a:effectLst/>
-        </p:spPr>
-        <p:style>
-          <a:lnRef idx="1">
-            <a:schemeClr val="accent1"/>
-          </a:lnRef>
-          <a:fillRef idx="3">
-            <a:schemeClr val="accent1"/>
-          </a:fillRef>
-          <a:effectRef idx="2">
-            <a:schemeClr val="accent1"/>
-          </a:effectRef>
-          <a:fontRef idx="minor">
-            <a:schemeClr val="lt1"/>
-          </a:fontRef>
-        </p:style>
-        <p:txBody>
-          <a:bodyPr rtlCol="0" anchor="ctr" wrap="square"/>
-          <a:lstStyle/>
-          <a:p>
-            <a:pPr algn="ctr"/>
-          </a:p>
-        </p:txBody>
-      </p:sp>
-      <p:sp>
-        <p:nvSpPr>
-          <p:cNvPr id="8" name="TextBox 7"/>
-          <p:cNvSpPr txBox="1"/>
-          <p:nvPr/>
-        </p:nvSpPr>
-        <p:spPr>
-          <a:xfrm>
-            <a:off x="781050" y="1676400"/>
-            <a:ext cx="5905500" cy="628650"/>
-          </a:xfrm>
-          <a:prstGeom prst="rect">
-            <a:avLst/>
-          </a:prstGeom>
-          <a:noFill/>
-        </p:spPr>
-        <p:txBody>
-          <a:bodyPr wrap="square" lIns="0" rIns="0" tIns="0" bIns="0" anchor="ctr">
-            <a:spAutoFit/>
-          </a:bodyPr>
-          <a:lstStyle/>
-          <a:p>
-            <a:pPr algn="l">
-              <a:lnSpc>
-                <a:spcPct val="130000"/>
-              </a:lnSpc>
-            </a:pPr>
-            <a:r>
-              <a:rPr sz="1425" b="0">
-                <a:solidFill>
-                  <a:srgbClr val="1A2230"/>
-                </a:solidFill>
-                <a:latin typeface="Microsoft YaHei"/>
-              </a:rPr>
-              <a:t>✓  S1 约课与签到主线（含取消与爽约惩罚）</a:t>
-            </a:r>
-          </a:p>
-        </p:txBody>
-      </p:sp>
-      <p:sp>
-        <p:nvSpPr>
-          <p:cNvPr id="9" name="Rounded Rectangle 8"/>
-          <p:cNvSpPr/>
-          <p:nvPr/>
-        </p:nvSpPr>
-        <p:spPr>
-          <a:xfrm>
-            <a:off x="590550" y="2381250"/>
-            <a:ext cx="6248400" cy="628650"/>
-          </a:xfrm>
-          <a:prstGeom prst="roundRect">
-            <a:avLst>
-              <a:gd name="adj" fmla="val 12121"/>
-            </a:avLst>
-          </a:prstGeom>
-          <a:solidFill>
-            <a:srgbClr val="FFFFFF"/>
-          </a:solidFill>
-          <a:ln w="12700">
-            <a:solidFill>
-              <a:srgbClr val="D6DCE5"/>
-            </a:solidFill>
-          </a:ln>
-          <a:effectLst/>
-        </p:spPr>
-        <p:style>
-          <a:lnRef idx="1">
-            <a:schemeClr val="accent1"/>
-          </a:lnRef>
-          <a:fillRef idx="3">
-            <a:schemeClr val="accent1"/>
-          </a:fillRef>
-          <a:effectRef idx="2">
-            <a:schemeClr val="accent1"/>
-          </a:effectRef>
-          <a:fontRef idx="minor">
-            <a:schemeClr val="lt1"/>
-          </a:fontRef>
-        </p:style>
-        <p:txBody>
-          <a:bodyPr rtlCol="0" anchor="ctr" wrap="square"/>
-          <a:lstStyle/>
-          <a:p>
-            <a:pPr algn="ctr"/>
-          </a:p>
-        </p:txBody>
-      </p:sp>
-      <p:sp>
-        <p:nvSpPr>
-          <p:cNvPr id="10" name="TextBox 9"/>
-          <p:cNvSpPr txBox="1"/>
-          <p:nvPr/>
-        </p:nvSpPr>
-        <p:spPr>
-          <a:xfrm>
-            <a:off x="781050" y="2381250"/>
-            <a:ext cx="5905500" cy="628650"/>
-          </a:xfrm>
-          <a:prstGeom prst="rect">
-            <a:avLst/>
-          </a:prstGeom>
-          <a:noFill/>
-        </p:spPr>
-        <p:txBody>
-          <a:bodyPr wrap="square" lIns="0" rIns="0" tIns="0" bIns="0" anchor="ctr">
-            <a:spAutoFit/>
-          </a:bodyPr>
-          <a:lstStyle/>
-          <a:p>
-            <a:pPr algn="l">
-              <a:lnSpc>
-                <a:spcPct val="130000"/>
-              </a:lnSpc>
-            </a:pPr>
-            <a:r>
-              <a:rPr sz="1425" b="0">
-                <a:solidFill>
-                  <a:srgbClr val="1A2230"/>
-                </a:solidFill>
-                <a:latin typeface="Microsoft YaHei"/>
-              </a:rPr>
-              <a:t>✓  S2 收费：下单、支付、回调幂等、异常订单、对账</a:t>
-            </a:r>
-          </a:p>
-        </p:txBody>
-      </p:sp>
-      <p:sp>
-        <p:nvSpPr>
-          <p:cNvPr id="11" name="Rounded Rectangle 10"/>
-          <p:cNvSpPr/>
-          <p:nvPr/>
-        </p:nvSpPr>
-        <p:spPr>
-          <a:xfrm>
-            <a:off x="590550" y="3086100"/>
-            <a:ext cx="6248400" cy="628650"/>
-          </a:xfrm>
-          <a:prstGeom prst="roundRect">
-            <a:avLst>
-              <a:gd name="adj" fmla="val 12121"/>
-            </a:avLst>
-          </a:prstGeom>
-          <a:solidFill>
-            <a:srgbClr val="FFFFFF"/>
-          </a:solidFill>
-          <a:ln w="12700">
-            <a:solidFill>
-              <a:srgbClr val="D6DCE5"/>
-            </a:solidFill>
-          </a:ln>
-          <a:effectLst/>
-        </p:spPr>
-        <p:style>
-          <a:lnRef idx="1">
-            <a:schemeClr val="accent1"/>
-          </a:lnRef>
-          <a:fillRef idx="3">
-            <a:schemeClr val="accent1"/>
-          </a:fillRef>
-          <a:effectRef idx="2">
-            <a:schemeClr val="accent1"/>
-          </a:effectRef>
-          <a:fontRef idx="minor">
-            <a:schemeClr val="lt1"/>
-          </a:fontRef>
-        </p:style>
-        <p:txBody>
-          <a:bodyPr rtlCol="0" anchor="ctr" wrap="square"/>
-          <a:lstStyle/>
-          <a:p>
-            <a:pPr algn="ctr"/>
-          </a:p>
-        </p:txBody>
-      </p:sp>
-      <p:sp>
-        <p:nvSpPr>
-          <p:cNvPr id="12" name="TextBox 11"/>
-          <p:cNvSpPr txBox="1"/>
-          <p:nvPr/>
-        </p:nvSpPr>
-        <p:spPr>
-          <a:xfrm>
-            <a:off x="781050" y="3086100"/>
-            <a:ext cx="5905500" cy="628650"/>
-          </a:xfrm>
-          <a:prstGeom prst="rect">
-            <a:avLst/>
-          </a:prstGeom>
-          <a:noFill/>
-        </p:spPr>
-        <p:txBody>
-          <a:bodyPr wrap="square" lIns="0" rIns="0" tIns="0" bIns="0" anchor="ctr">
-            <a:spAutoFit/>
-          </a:bodyPr>
-          <a:lstStyle/>
-          <a:p>
-            <a:pPr algn="l">
-              <a:lnSpc>
-                <a:spcPct val="130000"/>
-              </a:lnSpc>
-            </a:pPr>
-            <a:r>
-              <a:rPr sz="1425" b="0">
-                <a:solidFill>
-                  <a:srgbClr val="1A2230"/>
-                </a:solidFill>
-                <a:latin typeface="Microsoft YaHei"/>
-              </a:rPr>
-              <a:t>✓  S4 预警：流失风险、爽约预测、新会员跟进</a:t>
-            </a:r>
-          </a:p>
-        </p:txBody>
-      </p:sp>
-      <p:sp>
-        <p:nvSpPr>
-          <p:cNvPr id="13" name="Rounded Rectangle 12"/>
-          <p:cNvSpPr/>
-          <p:nvPr/>
-        </p:nvSpPr>
-        <p:spPr>
-          <a:xfrm>
-            <a:off x="590550" y="3790950"/>
-            <a:ext cx="6248400" cy="628650"/>
-          </a:xfrm>
-          <a:prstGeom prst="roundRect">
-            <a:avLst>
-              <a:gd name="adj" fmla="val 12121"/>
-            </a:avLst>
-          </a:prstGeom>
-          <a:solidFill>
-            <a:srgbClr val="FFFFFF"/>
-          </a:solidFill>
-          <a:ln w="12700">
-            <a:solidFill>
-              <a:srgbClr val="D6DCE5"/>
-            </a:solidFill>
-          </a:ln>
-          <a:effectLst/>
-        </p:spPr>
-        <p:style>
-          <a:lnRef idx="1">
-            <a:schemeClr val="accent1"/>
-          </a:lnRef>
-          <a:fillRef idx="3">
-            <a:schemeClr val="accent1"/>
-          </a:fillRef>
-          <a:effectRef idx="2">
-            <a:schemeClr val="accent1"/>
-          </a:effectRef>
-          <a:fontRef idx="minor">
-            <a:schemeClr val="lt1"/>
-          </a:fontRef>
-        </p:style>
-        <p:txBody>
-          <a:bodyPr rtlCol="0" anchor="ctr" wrap="square"/>
-          <a:lstStyle/>
-          <a:p>
-            <a:pPr algn="ctr"/>
-          </a:p>
-        </p:txBody>
-      </p:sp>
-      <p:sp>
-        <p:nvSpPr>
-          <p:cNvPr id="14" name="TextBox 13"/>
-          <p:cNvSpPr txBox="1"/>
-          <p:nvPr/>
-        </p:nvSpPr>
-        <p:spPr>
-          <a:xfrm>
-            <a:off x="781050" y="3790950"/>
-            <a:ext cx="5905500" cy="628650"/>
-          </a:xfrm>
-          <a:prstGeom prst="rect">
-            <a:avLst/>
-          </a:prstGeom>
-          <a:noFill/>
-        </p:spPr>
-        <p:txBody>
-          <a:bodyPr wrap="square" lIns="0" rIns="0" tIns="0" bIns="0" anchor="ctr">
-            <a:spAutoFit/>
-          </a:bodyPr>
-          <a:lstStyle/>
-          <a:p>
-            <a:pPr algn="l">
-              <a:lnSpc>
-                <a:spcPct val="130000"/>
-              </a:lnSpc>
-            </a:pPr>
-            <a:r>
-              <a:rPr sz="1425" b="0">
-                <a:solidFill>
-                  <a:srgbClr val="1A2230"/>
-                </a:solidFill>
-                <a:latin typeface="Microsoft YaHei"/>
-              </a:rPr>
-              <a:t>✓  登录与角色鉴权（服务端强制，越权拦截已测）</a:t>
-            </a:r>
-          </a:p>
-        </p:txBody>
-      </p:sp>
-      <p:sp>
-        <p:nvSpPr>
-          <p:cNvPr id="15" name="Rounded Rectangle 14"/>
-          <p:cNvSpPr/>
-          <p:nvPr/>
-        </p:nvSpPr>
-        <p:spPr>
-          <a:xfrm>
-            <a:off x="590550" y="4495800"/>
-            <a:ext cx="6248400" cy="628650"/>
-          </a:xfrm>
-          <a:prstGeom prst="roundRect">
-            <a:avLst>
-              <a:gd name="adj" fmla="val 12121"/>
-            </a:avLst>
-          </a:prstGeom>
-          <a:solidFill>
-            <a:srgbClr val="FFFFFF"/>
-          </a:solidFill>
-          <a:ln w="12700">
-            <a:solidFill>
-              <a:srgbClr val="D6DCE5"/>
-            </a:solidFill>
-          </a:ln>
-          <a:effectLst/>
-        </p:spPr>
-        <p:style>
-          <a:lnRef idx="1">
-            <a:schemeClr val="accent1"/>
-          </a:lnRef>
-          <a:fillRef idx="3">
-            <a:schemeClr val="accent1"/>
-          </a:fillRef>
-          <a:effectRef idx="2">
-            <a:schemeClr val="accent1"/>
-          </a:effectRef>
-          <a:fontRef idx="minor">
-            <a:schemeClr val="lt1"/>
-          </a:fontRef>
-        </p:style>
-        <p:txBody>
-          <a:bodyPr rtlCol="0" anchor="ctr" wrap="square"/>
-          <a:lstStyle/>
-          <a:p>
-            <a:pPr algn="ctr"/>
-          </a:p>
-        </p:txBody>
-      </p:sp>
-      <p:sp>
-        <p:nvSpPr>
-          <p:cNvPr id="16" name="TextBox 15"/>
-          <p:cNvSpPr txBox="1"/>
-          <p:nvPr/>
-        </p:nvSpPr>
-        <p:spPr>
-          <a:xfrm>
-            <a:off x="781050" y="4495800"/>
-            <a:ext cx="5905500" cy="628650"/>
-          </a:xfrm>
-          <a:prstGeom prst="rect">
-            <a:avLst/>
-          </a:prstGeom>
-          <a:noFill/>
-        </p:spPr>
-        <p:txBody>
-          <a:bodyPr wrap="square" lIns="0" rIns="0" tIns="0" bIns="0" anchor="ctr">
-            <a:spAutoFit/>
-          </a:bodyPr>
-          <a:lstStyle/>
-          <a:p>
-            <a:pPr algn="l">
-              <a:lnSpc>
-                <a:spcPct val="130000"/>
-              </a:lnSpc>
-            </a:pPr>
-            <a:r>
-              <a:rPr sz="1425" b="0">
-                <a:solidFill>
-                  <a:srgbClr val="1A2230"/>
-                </a:solidFill>
-                <a:latin typeface="Microsoft YaHei"/>
-              </a:rPr>
-              <a:t>✓  六层 200 项自动化检查 + 一键启动脚本</a:t>
-            </a:r>
-          </a:p>
-        </p:txBody>
-      </p:sp>
-      <p:sp>
-        <p:nvSpPr>
-          <p:cNvPr id="17" name="Rounded Rectangle 16"/>
-          <p:cNvSpPr/>
-          <p:nvPr/>
-        </p:nvSpPr>
-        <p:spPr>
-          <a:xfrm>
-            <a:off x="7277100" y="1028700"/>
-            <a:ext cx="4533900" cy="2057400"/>
-          </a:xfrm>
-          <a:prstGeom prst="roundRect">
-            <a:avLst>
-              <a:gd name="adj" fmla="val 5555"/>
-            </a:avLst>
-          </a:prstGeom>
-          <a:solidFill>
-            <a:srgbClr val="FFFFFF"/>
-          </a:solidFill>
-          <a:ln w="12700">
-            <a:solidFill>
-              <a:srgbClr val="D6DCE5"/>
-            </a:solidFill>
-          </a:ln>
-          <a:effectLst/>
-        </p:spPr>
-        <p:style>
-          <a:lnRef idx="1">
-            <a:schemeClr val="accent1"/>
-          </a:lnRef>
-          <a:fillRef idx="3">
-            <a:schemeClr val="accent1"/>
-          </a:fillRef>
-          <a:effectRef idx="2">
-            <a:schemeClr val="accent1"/>
-          </a:effectRef>
-          <a:fontRef idx="minor">
-            <a:schemeClr val="lt1"/>
-          </a:fontRef>
-        </p:style>
-        <p:txBody>
-          <a:bodyPr rtlCol="0" anchor="ctr" wrap="square"/>
-          <a:lstStyle/>
-          <a:p>
-            <a:pPr algn="ctr"/>
-          </a:p>
-        </p:txBody>
-      </p:sp>
-      <p:sp>
-        <p:nvSpPr>
-          <p:cNvPr id="18" name="TextBox 17"/>
-          <p:cNvSpPr txBox="1"/>
-          <p:nvPr/>
-        </p:nvSpPr>
-        <p:spPr>
-          <a:xfrm>
-            <a:off x="7486650" y="1219200"/>
-            <a:ext cx="4114800" cy="323850"/>
-          </a:xfrm>
-          <a:prstGeom prst="rect">
-            <a:avLst/>
-          </a:prstGeom>
-          <a:noFill/>
-        </p:spPr>
-        <p:txBody>
-          <a:bodyPr wrap="square" lIns="0" rIns="0" tIns="0" bIns="0" anchor="ctr">
-            <a:spAutoFit/>
-          </a:bodyPr>
-          <a:lstStyle/>
-          <a:p>
-            <a:pPr algn="l">
-              <a:lnSpc>
-                <a:spcPct val="130000"/>
-              </a:lnSpc>
-            </a:pPr>
-            <a:r>
-              <a:rPr sz="1725" b="1">
-                <a:solidFill>
-                  <a:srgbClr val="0E3F8C"/>
-                </a:solidFill>
-                <a:latin typeface="Microsoft YaHei"/>
-              </a:rPr>
-              <a:t>仅有表结构与骨架</a:t>
-            </a:r>
-          </a:p>
-        </p:txBody>
-      </p:sp>
-      <p:sp>
-        <p:nvSpPr>
-          <p:cNvPr id="19" name="TextBox 18"/>
-          <p:cNvSpPr txBox="1"/>
-          <p:nvPr/>
-        </p:nvSpPr>
-        <p:spPr>
-          <a:xfrm>
-            <a:off x="7486650" y="1619250"/>
-            <a:ext cx="4114800" cy="1276350"/>
-          </a:xfrm>
-          <a:prstGeom prst="rect">
-            <a:avLst/>
-          </a:prstGeom>
-          <a:noFill/>
-        </p:spPr>
-        <p:txBody>
-          <a:bodyPr wrap="square" lIns="0" rIns="0" tIns="0" bIns="0" anchor="t">
-            <a:spAutoFit/>
-          </a:bodyPr>
-          <a:lstStyle/>
-          <a:p>
-            <a:pPr algn="l">
-              <a:lnSpc>
-                <a:spcPct val="155000"/>
-              </a:lnSpc>
-            </a:pPr>
-            <a:r>
-              <a:rPr sz="1425" b="0">
-                <a:solidFill>
-                  <a:srgbClr val="1A2230"/>
-                </a:solidFill>
-                <a:latin typeface="Microsoft YaHei"/>
-              </a:rPr>
-              <a:t>S5 设备与工单：已完成数据库设计与迁移（V5），Java 侧仅保留模块骨架，尚未实现业务逻辑。</a:t>
-            </a:r>
-          </a:p>
-        </p:txBody>
-      </p:sp>
-      <p:sp>
-        <p:nvSpPr>
-          <p:cNvPr id="20" name="Rounded Rectangle 19"/>
-          <p:cNvSpPr/>
-          <p:nvPr/>
-        </p:nvSpPr>
-        <p:spPr>
-          <a:xfrm>
-            <a:off x="7277100" y="3276600"/>
-            <a:ext cx="4533900" cy="2057400"/>
-          </a:xfrm>
-          <a:prstGeom prst="roundRect">
-            <a:avLst>
-              <a:gd name="adj" fmla="val 5555"/>
-            </a:avLst>
-          </a:prstGeom>
-          <a:solidFill>
-            <a:srgbClr val="FFFFFF"/>
-          </a:solidFill>
-          <a:ln w="12700">
-            <a:solidFill>
-              <a:srgbClr val="D6DCE5"/>
-            </a:solidFill>
-          </a:ln>
-          <a:effectLst/>
-        </p:spPr>
-        <p:style>
-          <a:lnRef idx="1">
-            <a:schemeClr val="accent1"/>
-          </a:lnRef>
-          <a:fillRef idx="3">
-            <a:schemeClr val="accent1"/>
-          </a:fillRef>
-          <a:effectRef idx="2">
-            <a:schemeClr val="accent1"/>
-          </a:effectRef>
-          <a:fontRef idx="minor">
-            <a:schemeClr val="lt1"/>
-          </a:fontRef>
-        </p:style>
-        <p:txBody>
-          <a:bodyPr rtlCol="0" anchor="ctr" wrap="square"/>
-          <a:lstStyle/>
-          <a:p>
-            <a:pPr algn="ctr"/>
-          </a:p>
-        </p:txBody>
-      </p:sp>
-      <p:sp>
-        <p:nvSpPr>
-          <p:cNvPr id="21" name="TextBox 20"/>
-          <p:cNvSpPr txBox="1"/>
-          <p:nvPr/>
-        </p:nvSpPr>
-        <p:spPr>
-          <a:xfrm>
-            <a:off x="7486650" y="3467100"/>
-            <a:ext cx="4114800" cy="323850"/>
-          </a:xfrm>
-          <a:prstGeom prst="rect">
-            <a:avLst/>
-          </a:prstGeom>
-          <a:noFill/>
-        </p:spPr>
-        <p:txBody>
-          <a:bodyPr wrap="square" lIns="0" rIns="0" tIns="0" bIns="0" anchor="ctr">
-            <a:spAutoFit/>
-          </a:bodyPr>
-          <a:lstStyle/>
-          <a:p>
-            <a:pPr algn="l">
-              <a:lnSpc>
-                <a:spcPct val="130000"/>
-              </a:lnSpc>
-            </a:pPr>
-            <a:r>
-              <a:rPr sz="1725" b="1">
-                <a:solidFill>
-                  <a:srgbClr val="0E3F8C"/>
-                </a:solidFill>
-                <a:latin typeface="Microsoft YaHei"/>
-              </a:rPr>
-              <a:t>完全未开始</a:t>
-            </a:r>
-          </a:p>
-        </p:txBody>
-      </p:sp>
-      <p:sp>
-        <p:nvSpPr>
-          <p:cNvPr id="22" name="TextBox 21"/>
-          <p:cNvSpPr txBox="1"/>
-          <p:nvPr/>
-        </p:nvSpPr>
-        <p:spPr>
-          <a:xfrm>
-            <a:off x="7486650" y="3867150"/>
-            <a:ext cx="4114800" cy="1276350"/>
-          </a:xfrm>
-          <a:prstGeom prst="rect">
-            <a:avLst/>
-          </a:prstGeom>
-          <a:noFill/>
-        </p:spPr>
-        <p:txBody>
-          <a:bodyPr wrap="square" lIns="0" rIns="0" tIns="0" bIns="0" anchor="t">
-            <a:spAutoFit/>
-          </a:bodyPr>
-          <a:lstStyle/>
-          <a:p>
-            <a:pPr algn="l">
-              <a:lnSpc>
-                <a:spcPct val="155000"/>
-              </a:lnSpc>
-            </a:pPr>
-            <a:r>
-              <a:rPr sz="1425" b="0">
-                <a:solidFill>
-                  <a:srgbClr val="1A2230"/>
-                </a:solidFill>
-                <a:latin typeface="Microsoft YaHei"/>
-              </a:rPr>
-              <a:t>真实微信支付对接（当前为 Mock 回调）、JWT 无状态令牌（当前为内存会话）、CI 流水线。</a:t>
-            </a:r>
-          </a:p>
-        </p:txBody>
-      </p:sp>
-      <p:sp>
-        <p:nvSpPr>
-          <p:cNvPr id="23" name="Rounded Rectangle 22"/>
-          <p:cNvSpPr/>
-          <p:nvPr/>
-        </p:nvSpPr>
-        <p:spPr>
-          <a:xfrm>
-            <a:off x="381000" y="5505450"/>
-            <a:ext cx="11430000" cy="590550"/>
-          </a:xfrm>
-          <a:prstGeom prst="roundRect">
-            <a:avLst>
-              <a:gd name="adj" fmla="val 12903"/>
-            </a:avLst>
-          </a:prstGeom>
-          <a:solidFill>
-            <a:srgbClr val="E8EFF8"/>
-          </a:solidFill>
-          <a:ln>
-            <a:noFill/>
-          </a:ln>
-          <a:effectLst/>
-        </p:spPr>
-        <p:style>
-          <a:lnRef idx="1">
-            <a:schemeClr val="accent1"/>
-          </a:lnRef>
-          <a:fillRef idx="3">
-            <a:schemeClr val="accent1"/>
-          </a:fillRef>
-          <a:effectRef idx="2">
-            <a:schemeClr val="accent1"/>
-          </a:effectRef>
-          <a:fontRef idx="minor">
-            <a:schemeClr val="lt1"/>
-          </a:fontRef>
-        </p:style>
-        <p:txBody>
-          <a:bodyPr rtlCol="0" anchor="ctr" wrap="square"/>
-          <a:lstStyle/>
-          <a:p>
-            <a:pPr algn="ctr"/>
-          </a:p>
-        </p:txBody>
-      </p:sp>
-      <p:sp>
-        <p:nvSpPr>
-          <p:cNvPr id="24" name="Rectangle 23"/>
-          <p:cNvSpPr/>
-          <p:nvPr/>
-        </p:nvSpPr>
-        <p:spPr>
-          <a:xfrm>
-            <a:off x="381000" y="5505450"/>
-            <a:ext cx="38100" cy="590550"/>
-          </a:xfrm>
-          <a:prstGeom prst="rect">
-            <a:avLst/>
-          </a:prstGeom>
-          <a:solidFill>
-            <a:srgbClr val="1E4FA8"/>
-          </a:solidFill>
-          <a:ln>
-            <a:noFill/>
-          </a:ln>
-          <a:effectLst/>
-        </p:spPr>
-        <p:style>
-          <a:lnRef idx="1">
-            <a:schemeClr val="accent1"/>
-          </a:lnRef>
-          <a:fillRef idx="3">
-            <a:schemeClr val="accent1"/>
-          </a:fillRef>
-          <a:effectRef idx="2">
-            <a:schemeClr val="accent1"/>
-          </a:effectRef>
-          <a:fontRef idx="minor">
-            <a:schemeClr val="lt1"/>
-          </a:fontRef>
-        </p:style>
-        <p:txBody>
-          <a:bodyPr rtlCol="0" anchor="ctr" wrap="square"/>
-          <a:lstStyle/>
-          <a:p>
-            <a:pPr algn="ctr"/>
-          </a:p>
-        </p:txBody>
-      </p:sp>
-      <p:sp>
-        <p:nvSpPr>
-          <p:cNvPr id="25" name="TextBox 24"/>
-          <p:cNvSpPr txBox="1"/>
-          <p:nvPr/>
-        </p:nvSpPr>
-        <p:spPr>
-          <a:xfrm>
-            <a:off x="533400" y="5505450"/>
-            <a:ext cx="914400" cy="590550"/>
-          </a:xfrm>
-          <a:prstGeom prst="rect">
-            <a:avLst/>
-          </a:prstGeom>
-          <a:noFill/>
-        </p:spPr>
-        <p:txBody>
-          <a:bodyPr wrap="square" lIns="0" rIns="0" tIns="0" bIns="0" anchor="ctr">
-            <a:spAutoFit/>
-          </a:bodyPr>
-          <a:lstStyle/>
-          <a:p>
-            <a:pPr algn="l">
-              <a:lnSpc>
-                <a:spcPct val="130000"/>
-              </a:lnSpc>
-            </a:pPr>
-            <a:r>
-              <a:rPr sz="1500" b="1">
-                <a:solidFill>
-                  <a:srgbClr val="1E4FA8"/>
-                </a:solidFill>
-                <a:latin typeface="Microsoft YaHei"/>
-              </a:rPr>
-              <a:t>下一步</a:t>
-            </a:r>
-          </a:p>
-        </p:txBody>
-      </p:sp>
-      <p:sp>
-        <p:nvSpPr>
-          <p:cNvPr id="26" name="TextBox 25"/>
-          <p:cNvSpPr txBox="1"/>
-          <p:nvPr/>
-        </p:nvSpPr>
-        <p:spPr>
-          <a:xfrm>
-            <a:off x="1504950" y="5505450"/>
-            <a:ext cx="10134600" cy="590550"/>
-          </a:xfrm>
-          <a:prstGeom prst="rect">
-            <a:avLst/>
-          </a:prstGeom>
-          <a:noFill/>
-        </p:spPr>
-        <p:txBody>
-          <a:bodyPr wrap="square" lIns="0" rIns="0" tIns="0" bIns="0" anchor="ctr">
-            <a:spAutoFit/>
-          </a:bodyPr>
-          <a:lstStyle/>
-          <a:p>
-            <a:pPr algn="l">
-              <a:lnSpc>
-                <a:spcPct val="135000"/>
-              </a:lnSpc>
-            </a:pPr>
-            <a:r>
-              <a:rPr sz="1500" b="0">
-                <a:solidFill>
-                  <a:srgbClr val="1A2230"/>
-                </a:solidFill>
-                <a:latin typeface="Microsoft YaHei"/>
-              </a:rPr>
-              <a:t>先补 S5 业务逻辑，再把会话改为 JWT，最后接入支付沙箱与 CI</a:t>
-            </a:r>
-          </a:p>
-        </p:txBody>
-      </p:sp>
-      <p:sp>
-        <p:nvSpPr>
-          <p:cNvPr id="27" name="Rectangle 26"/>
-          <p:cNvSpPr/>
-          <p:nvPr/>
-        </p:nvSpPr>
-        <p:spPr>
-          <a:xfrm>
-            <a:off x="381000" y="6286500"/>
-            <a:ext cx="11430000" cy="9525"/>
-          </a:xfrm>
-          <a:prstGeom prst="rect">
-            <a:avLst/>
-          </a:prstGeom>
-          <a:solidFill>
-            <a:srgbClr val="E5E7EB"/>
-          </a:solidFill>
-          <a:ln>
-            <a:noFill/>
-          </a:ln>
-          <a:effectLst/>
-        </p:spPr>
-        <p:style>
-          <a:lnRef idx="1">
-            <a:schemeClr val="accent1"/>
-          </a:lnRef>
-          <a:fillRef idx="3">
-            <a:schemeClr val="accent1"/>
-          </a:fillRef>
-          <a:effectRef idx="2">
-            <a:schemeClr val="accent1"/>
-          </a:effectRef>
-          <a:fontRef idx="minor">
-            <a:schemeClr val="lt1"/>
-          </a:fontRef>
-        </p:style>
-        <p:txBody>
-          <a:bodyPr rtlCol="0" anchor="ctr" wrap="square"/>
-          <a:lstStyle/>
-          <a:p>
-            <a:pPr algn="ctr"/>
-          </a:p>
-        </p:txBody>
-      </p:sp>
-      <p:sp>
-        <p:nvSpPr>
-          <p:cNvPr id="28" name="TextBox 27"/>
-          <p:cNvSpPr txBox="1"/>
-          <p:nvPr/>
-        </p:nvSpPr>
-        <p:spPr>
-          <a:xfrm>
-            <a:off x="381000" y="6324600"/>
-            <a:ext cx="8763000" cy="285750"/>
-          </a:xfrm>
-          <a:prstGeom prst="rect">
-            <a:avLst/>
-          </a:prstGeom>
-          <a:noFill/>
-        </p:spPr>
-        <p:txBody>
-          <a:bodyPr wrap="square" lIns="0" rIns="0" tIns="0" bIns="0" anchor="ctr">
-            <a:spAutoFit/>
-          </a:bodyPr>
-          <a:lstStyle/>
-          <a:p>
-            <a:pPr algn="l">
-              <a:lnSpc>
-                <a:spcPct val="130000"/>
-              </a:lnSpc>
-            </a:pPr>
-            <a:r>
-              <a:rPr sz="1125" b="0">
-                <a:solidFill>
-                  <a:srgbClr val="8B97A8"/>
-                </a:solidFill>
-                <a:latin typeface="Microsoft YaHei"/>
-              </a:rPr>
-              <a:t>来源：代码实现与测试报告 · 开放问题台账</a:t>
-            </a:r>
-          </a:p>
-        </p:txBody>
-      </p:sp>
-      <p:sp>
-        <p:nvSpPr>
-          <p:cNvPr id="29" name="TextBox 28"/>
-          <p:cNvSpPr txBox="1"/>
-          <p:nvPr/>
-        </p:nvSpPr>
-        <p:spPr>
-          <a:xfrm>
-            <a:off x="9525000" y="6324600"/>
-            <a:ext cx="2286000" cy="285750"/>
-          </a:xfrm>
-          <a:prstGeom prst="rect">
-            <a:avLst/>
-          </a:prstGeom>
-          <a:noFill/>
-        </p:spPr>
-        <p:txBody>
-          <a:bodyPr wrap="square" lIns="0" rIns="0" tIns="0" bIns="0" anchor="ctr">
-            <a:spAutoFit/>
-          </a:bodyPr>
-          <a:lstStyle/>
-          <a:p>
-            <a:pPr algn="r">
-              <a:lnSpc>
-                <a:spcPct val="130000"/>
-              </a:lnSpc>
-            </a:pPr>
-            <a:r>
-              <a:rPr sz="1200" b="1">
-                <a:solidFill>
-                  <a:srgbClr val="1E4FA8"/>
-                </a:solidFill>
-                <a:latin typeface="Microsoft YaHei"/>
-              </a:rPr>
-              <a:t>21 / 23</a:t>
+              <a:t>22 / 24</a:t>
             </a:r>
           </a:p>
         </p:txBody>
@@ -21041,6 +21272,1216 @@
         <p:spPr>
           <a:xfrm>
             <a:off x="0" y="0"/>
+            <a:ext cx="12192000" cy="762000"/>
+          </a:xfrm>
+          <a:prstGeom prst="rect">
+            <a:avLst/>
+          </a:prstGeom>
+          <a:solidFill>
+            <a:srgbClr val="1E4FA8"/>
+          </a:solidFill>
+          <a:ln>
+            <a:noFill/>
+          </a:ln>
+          <a:effectLst/>
+        </p:spPr>
+        <p:style>
+          <a:lnRef idx="1">
+            <a:schemeClr val="accent1"/>
+          </a:lnRef>
+          <a:fillRef idx="3">
+            <a:schemeClr val="accent1"/>
+          </a:fillRef>
+          <a:effectRef idx="2">
+            <a:schemeClr val="accent1"/>
+          </a:effectRef>
+          <a:fontRef idx="minor">
+            <a:schemeClr val="lt1"/>
+          </a:fontRef>
+        </p:style>
+        <p:txBody>
+          <a:bodyPr rtlCol="0" anchor="ctr" wrap="square"/>
+          <a:lstStyle/>
+          <a:p>
+            <a:pPr algn="ctr"/>
+          </a:p>
+        </p:txBody>
+      </p:sp>
+      <p:sp>
+        <p:nvSpPr>
+          <p:cNvPr id="3" name="TextBox 2"/>
+          <p:cNvSpPr txBox="1"/>
+          <p:nvPr/>
+        </p:nvSpPr>
+        <p:spPr>
+          <a:xfrm>
+            <a:off x="381000" y="0"/>
+            <a:ext cx="7239000" cy="762000"/>
+          </a:xfrm>
+          <a:prstGeom prst="rect">
+            <a:avLst/>
+          </a:prstGeom>
+          <a:noFill/>
+        </p:spPr>
+        <p:txBody>
+          <a:bodyPr wrap="square" lIns="0" rIns="0" tIns="0" bIns="0" anchor="ctr">
+            <a:spAutoFit/>
+          </a:bodyPr>
+          <a:lstStyle/>
+          <a:p>
+            <a:pPr algn="l">
+              <a:lnSpc>
+                <a:spcPct val="130000"/>
+              </a:lnSpc>
+            </a:pPr>
+            <a:r>
+              <a:rPr sz="2400" b="1">
+                <a:solidFill>
+                  <a:srgbClr val="FFFFFF"/>
+                </a:solidFill>
+                <a:latin typeface="Microsoft YaHei"/>
+              </a:rPr>
+              <a:t>没做完的部分，以及下一步</a:t>
+            </a:r>
+          </a:p>
+        </p:txBody>
+      </p:sp>
+      <p:sp>
+        <p:nvSpPr>
+          <p:cNvPr id="4" name="TextBox 3"/>
+          <p:cNvSpPr txBox="1"/>
+          <p:nvPr/>
+        </p:nvSpPr>
+        <p:spPr>
+          <a:xfrm>
+            <a:off x="7620000" y="0"/>
+            <a:ext cx="4191000" cy="762000"/>
+          </a:xfrm>
+          <a:prstGeom prst="rect">
+            <a:avLst/>
+          </a:prstGeom>
+          <a:noFill/>
+        </p:spPr>
+        <p:txBody>
+          <a:bodyPr wrap="square" lIns="0" rIns="0" tIns="0" bIns="0" anchor="ctr">
+            <a:spAutoFit/>
+          </a:bodyPr>
+          <a:lstStyle/>
+          <a:p>
+            <a:pPr algn="r">
+              <a:lnSpc>
+                <a:spcPct val="130000"/>
+              </a:lnSpc>
+            </a:pPr>
+            <a:r>
+              <a:rPr sz="1050" b="0">
+                <a:solidFill>
+                  <a:srgbClr val="BFD3F0"/>
+                </a:solidFill>
+                <a:latin typeface="Microsoft YaHei"/>
+              </a:rPr>
+              <a:t>健身房运营管理系统 · 课程答辩</a:t>
+            </a:r>
+          </a:p>
+        </p:txBody>
+      </p:sp>
+      <p:sp>
+        <p:nvSpPr>
+          <p:cNvPr id="5" name="Rounded Rectangle 4"/>
+          <p:cNvSpPr/>
+          <p:nvPr/>
+        </p:nvSpPr>
+        <p:spPr>
+          <a:xfrm>
+            <a:off x="381000" y="1028700"/>
+            <a:ext cx="6667500" cy="4305300"/>
+          </a:xfrm>
+          <a:prstGeom prst="roundRect">
+            <a:avLst>
+              <a:gd name="adj" fmla="val 2654"/>
+            </a:avLst>
+          </a:prstGeom>
+          <a:solidFill>
+            <a:srgbClr val="E8EFF8"/>
+          </a:solidFill>
+          <a:ln>
+            <a:noFill/>
+          </a:ln>
+          <a:effectLst/>
+        </p:spPr>
+        <p:style>
+          <a:lnRef idx="1">
+            <a:schemeClr val="accent1"/>
+          </a:lnRef>
+          <a:fillRef idx="3">
+            <a:schemeClr val="accent1"/>
+          </a:fillRef>
+          <a:effectRef idx="2">
+            <a:schemeClr val="accent1"/>
+          </a:effectRef>
+          <a:fontRef idx="minor">
+            <a:schemeClr val="lt1"/>
+          </a:fontRef>
+        </p:style>
+        <p:txBody>
+          <a:bodyPr rtlCol="0" anchor="ctr" wrap="square"/>
+          <a:lstStyle/>
+          <a:p>
+            <a:pPr algn="ctr"/>
+          </a:p>
+        </p:txBody>
+      </p:sp>
+      <p:sp>
+        <p:nvSpPr>
+          <p:cNvPr id="6" name="TextBox 5"/>
+          <p:cNvSpPr txBox="1"/>
+          <p:nvPr/>
+        </p:nvSpPr>
+        <p:spPr>
+          <a:xfrm>
+            <a:off x="590550" y="1219200"/>
+            <a:ext cx="6248400" cy="323850"/>
+          </a:xfrm>
+          <a:prstGeom prst="rect">
+            <a:avLst/>
+          </a:prstGeom>
+          <a:noFill/>
+        </p:spPr>
+        <p:txBody>
+          <a:bodyPr wrap="square" lIns="0" rIns="0" tIns="0" bIns="0" anchor="ctr">
+            <a:spAutoFit/>
+          </a:bodyPr>
+          <a:lstStyle/>
+          <a:p>
+            <a:pPr algn="l">
+              <a:lnSpc>
+                <a:spcPct val="130000"/>
+              </a:lnSpc>
+            </a:pPr>
+            <a:r>
+              <a:rPr sz="1800" b="1">
+                <a:solidFill>
+                  <a:srgbClr val="0E3F8C"/>
+                </a:solidFill>
+                <a:latin typeface="Microsoft YaHei"/>
+              </a:rPr>
+              <a:t>已完成并验证</a:t>
+            </a:r>
+          </a:p>
+        </p:txBody>
+      </p:sp>
+      <p:sp>
+        <p:nvSpPr>
+          <p:cNvPr id="7" name="Rounded Rectangle 6"/>
+          <p:cNvSpPr/>
+          <p:nvPr/>
+        </p:nvSpPr>
+        <p:spPr>
+          <a:xfrm>
+            <a:off x="590550" y="1676400"/>
+            <a:ext cx="6248400" cy="628650"/>
+          </a:xfrm>
+          <a:prstGeom prst="roundRect">
+            <a:avLst>
+              <a:gd name="adj" fmla="val 12121"/>
+            </a:avLst>
+          </a:prstGeom>
+          <a:solidFill>
+            <a:srgbClr val="FFFFFF"/>
+          </a:solidFill>
+          <a:ln w="12700">
+            <a:solidFill>
+              <a:srgbClr val="D6DCE5"/>
+            </a:solidFill>
+          </a:ln>
+          <a:effectLst/>
+        </p:spPr>
+        <p:style>
+          <a:lnRef idx="1">
+            <a:schemeClr val="accent1"/>
+          </a:lnRef>
+          <a:fillRef idx="3">
+            <a:schemeClr val="accent1"/>
+          </a:fillRef>
+          <a:effectRef idx="2">
+            <a:schemeClr val="accent1"/>
+          </a:effectRef>
+          <a:fontRef idx="minor">
+            <a:schemeClr val="lt1"/>
+          </a:fontRef>
+        </p:style>
+        <p:txBody>
+          <a:bodyPr rtlCol="0" anchor="ctr" wrap="square"/>
+          <a:lstStyle/>
+          <a:p>
+            <a:pPr algn="ctr"/>
+          </a:p>
+        </p:txBody>
+      </p:sp>
+      <p:sp>
+        <p:nvSpPr>
+          <p:cNvPr id="8" name="TextBox 7"/>
+          <p:cNvSpPr txBox="1"/>
+          <p:nvPr/>
+        </p:nvSpPr>
+        <p:spPr>
+          <a:xfrm>
+            <a:off x="781050" y="1676400"/>
+            <a:ext cx="5905500" cy="628650"/>
+          </a:xfrm>
+          <a:prstGeom prst="rect">
+            <a:avLst/>
+          </a:prstGeom>
+          <a:noFill/>
+        </p:spPr>
+        <p:txBody>
+          <a:bodyPr wrap="square" lIns="0" rIns="0" tIns="0" bIns="0" anchor="ctr">
+            <a:spAutoFit/>
+          </a:bodyPr>
+          <a:lstStyle/>
+          <a:p>
+            <a:pPr algn="l">
+              <a:lnSpc>
+                <a:spcPct val="130000"/>
+              </a:lnSpc>
+            </a:pPr>
+            <a:r>
+              <a:rPr sz="1425" b="0">
+                <a:solidFill>
+                  <a:srgbClr val="1A2230"/>
+                </a:solidFill>
+                <a:latin typeface="Microsoft YaHei"/>
+              </a:rPr>
+              <a:t>✓  S1 约课与签到主线（含取消与爽约惩罚）</a:t>
+            </a:r>
+          </a:p>
+        </p:txBody>
+      </p:sp>
+      <p:sp>
+        <p:nvSpPr>
+          <p:cNvPr id="9" name="Rounded Rectangle 8"/>
+          <p:cNvSpPr/>
+          <p:nvPr/>
+        </p:nvSpPr>
+        <p:spPr>
+          <a:xfrm>
+            <a:off x="590550" y="2381250"/>
+            <a:ext cx="6248400" cy="628650"/>
+          </a:xfrm>
+          <a:prstGeom prst="roundRect">
+            <a:avLst>
+              <a:gd name="adj" fmla="val 12121"/>
+            </a:avLst>
+          </a:prstGeom>
+          <a:solidFill>
+            <a:srgbClr val="FFFFFF"/>
+          </a:solidFill>
+          <a:ln w="12700">
+            <a:solidFill>
+              <a:srgbClr val="D6DCE5"/>
+            </a:solidFill>
+          </a:ln>
+          <a:effectLst/>
+        </p:spPr>
+        <p:style>
+          <a:lnRef idx="1">
+            <a:schemeClr val="accent1"/>
+          </a:lnRef>
+          <a:fillRef idx="3">
+            <a:schemeClr val="accent1"/>
+          </a:fillRef>
+          <a:effectRef idx="2">
+            <a:schemeClr val="accent1"/>
+          </a:effectRef>
+          <a:fontRef idx="minor">
+            <a:schemeClr val="lt1"/>
+          </a:fontRef>
+        </p:style>
+        <p:txBody>
+          <a:bodyPr rtlCol="0" anchor="ctr" wrap="square"/>
+          <a:lstStyle/>
+          <a:p>
+            <a:pPr algn="ctr"/>
+          </a:p>
+        </p:txBody>
+      </p:sp>
+      <p:sp>
+        <p:nvSpPr>
+          <p:cNvPr id="10" name="TextBox 9"/>
+          <p:cNvSpPr txBox="1"/>
+          <p:nvPr/>
+        </p:nvSpPr>
+        <p:spPr>
+          <a:xfrm>
+            <a:off x="781050" y="2381250"/>
+            <a:ext cx="5905500" cy="628650"/>
+          </a:xfrm>
+          <a:prstGeom prst="rect">
+            <a:avLst/>
+          </a:prstGeom>
+          <a:noFill/>
+        </p:spPr>
+        <p:txBody>
+          <a:bodyPr wrap="square" lIns="0" rIns="0" tIns="0" bIns="0" anchor="ctr">
+            <a:spAutoFit/>
+          </a:bodyPr>
+          <a:lstStyle/>
+          <a:p>
+            <a:pPr algn="l">
+              <a:lnSpc>
+                <a:spcPct val="130000"/>
+              </a:lnSpc>
+            </a:pPr>
+            <a:r>
+              <a:rPr sz="1425" b="0">
+                <a:solidFill>
+                  <a:srgbClr val="1A2230"/>
+                </a:solidFill>
+                <a:latin typeface="Microsoft YaHei"/>
+              </a:rPr>
+              <a:t>✓  S2 收费：下单、支付、回调幂等、异常订单、对账</a:t>
+            </a:r>
+          </a:p>
+        </p:txBody>
+      </p:sp>
+      <p:sp>
+        <p:nvSpPr>
+          <p:cNvPr id="11" name="Rounded Rectangle 10"/>
+          <p:cNvSpPr/>
+          <p:nvPr/>
+        </p:nvSpPr>
+        <p:spPr>
+          <a:xfrm>
+            <a:off x="590550" y="3086100"/>
+            <a:ext cx="6248400" cy="628650"/>
+          </a:xfrm>
+          <a:prstGeom prst="roundRect">
+            <a:avLst>
+              <a:gd name="adj" fmla="val 12121"/>
+            </a:avLst>
+          </a:prstGeom>
+          <a:solidFill>
+            <a:srgbClr val="FFFFFF"/>
+          </a:solidFill>
+          <a:ln w="12700">
+            <a:solidFill>
+              <a:srgbClr val="D6DCE5"/>
+            </a:solidFill>
+          </a:ln>
+          <a:effectLst/>
+        </p:spPr>
+        <p:style>
+          <a:lnRef idx="1">
+            <a:schemeClr val="accent1"/>
+          </a:lnRef>
+          <a:fillRef idx="3">
+            <a:schemeClr val="accent1"/>
+          </a:fillRef>
+          <a:effectRef idx="2">
+            <a:schemeClr val="accent1"/>
+          </a:effectRef>
+          <a:fontRef idx="minor">
+            <a:schemeClr val="lt1"/>
+          </a:fontRef>
+        </p:style>
+        <p:txBody>
+          <a:bodyPr rtlCol="0" anchor="ctr" wrap="square"/>
+          <a:lstStyle/>
+          <a:p>
+            <a:pPr algn="ctr"/>
+          </a:p>
+        </p:txBody>
+      </p:sp>
+      <p:sp>
+        <p:nvSpPr>
+          <p:cNvPr id="12" name="TextBox 11"/>
+          <p:cNvSpPr txBox="1"/>
+          <p:nvPr/>
+        </p:nvSpPr>
+        <p:spPr>
+          <a:xfrm>
+            <a:off x="781050" y="3086100"/>
+            <a:ext cx="5905500" cy="628650"/>
+          </a:xfrm>
+          <a:prstGeom prst="rect">
+            <a:avLst/>
+          </a:prstGeom>
+          <a:noFill/>
+        </p:spPr>
+        <p:txBody>
+          <a:bodyPr wrap="square" lIns="0" rIns="0" tIns="0" bIns="0" anchor="ctr">
+            <a:spAutoFit/>
+          </a:bodyPr>
+          <a:lstStyle/>
+          <a:p>
+            <a:pPr algn="l">
+              <a:lnSpc>
+                <a:spcPct val="130000"/>
+              </a:lnSpc>
+            </a:pPr>
+            <a:r>
+              <a:rPr sz="1425" b="0">
+                <a:solidFill>
+                  <a:srgbClr val="1A2230"/>
+                </a:solidFill>
+                <a:latin typeface="Microsoft YaHei"/>
+              </a:rPr>
+              <a:t>✓  S4 预警：流失风险、爽约预测、新会员跟进</a:t>
+            </a:r>
+          </a:p>
+        </p:txBody>
+      </p:sp>
+      <p:sp>
+        <p:nvSpPr>
+          <p:cNvPr id="13" name="Rounded Rectangle 12"/>
+          <p:cNvSpPr/>
+          <p:nvPr/>
+        </p:nvSpPr>
+        <p:spPr>
+          <a:xfrm>
+            <a:off x="590550" y="3790950"/>
+            <a:ext cx="6248400" cy="628650"/>
+          </a:xfrm>
+          <a:prstGeom prst="roundRect">
+            <a:avLst>
+              <a:gd name="adj" fmla="val 12121"/>
+            </a:avLst>
+          </a:prstGeom>
+          <a:solidFill>
+            <a:srgbClr val="FFFFFF"/>
+          </a:solidFill>
+          <a:ln w="12700">
+            <a:solidFill>
+              <a:srgbClr val="D6DCE5"/>
+            </a:solidFill>
+          </a:ln>
+          <a:effectLst/>
+        </p:spPr>
+        <p:style>
+          <a:lnRef idx="1">
+            <a:schemeClr val="accent1"/>
+          </a:lnRef>
+          <a:fillRef idx="3">
+            <a:schemeClr val="accent1"/>
+          </a:fillRef>
+          <a:effectRef idx="2">
+            <a:schemeClr val="accent1"/>
+          </a:effectRef>
+          <a:fontRef idx="minor">
+            <a:schemeClr val="lt1"/>
+          </a:fontRef>
+        </p:style>
+        <p:txBody>
+          <a:bodyPr rtlCol="0" anchor="ctr" wrap="square"/>
+          <a:lstStyle/>
+          <a:p>
+            <a:pPr algn="ctr"/>
+          </a:p>
+        </p:txBody>
+      </p:sp>
+      <p:sp>
+        <p:nvSpPr>
+          <p:cNvPr id="14" name="TextBox 13"/>
+          <p:cNvSpPr txBox="1"/>
+          <p:nvPr/>
+        </p:nvSpPr>
+        <p:spPr>
+          <a:xfrm>
+            <a:off x="781050" y="3790950"/>
+            <a:ext cx="5905500" cy="628650"/>
+          </a:xfrm>
+          <a:prstGeom prst="rect">
+            <a:avLst/>
+          </a:prstGeom>
+          <a:noFill/>
+        </p:spPr>
+        <p:txBody>
+          <a:bodyPr wrap="square" lIns="0" rIns="0" tIns="0" bIns="0" anchor="ctr">
+            <a:spAutoFit/>
+          </a:bodyPr>
+          <a:lstStyle/>
+          <a:p>
+            <a:pPr algn="l">
+              <a:lnSpc>
+                <a:spcPct val="130000"/>
+              </a:lnSpc>
+            </a:pPr>
+            <a:r>
+              <a:rPr sz="1425" b="0">
+                <a:solidFill>
+                  <a:srgbClr val="1A2230"/>
+                </a:solidFill>
+                <a:latin typeface="Microsoft YaHei"/>
+              </a:rPr>
+              <a:t>✓  登录与角色鉴权（服务端强制，越权拦截已测）</a:t>
+            </a:r>
+          </a:p>
+        </p:txBody>
+      </p:sp>
+      <p:sp>
+        <p:nvSpPr>
+          <p:cNvPr id="15" name="Rounded Rectangle 14"/>
+          <p:cNvSpPr/>
+          <p:nvPr/>
+        </p:nvSpPr>
+        <p:spPr>
+          <a:xfrm>
+            <a:off x="590550" y="4495800"/>
+            <a:ext cx="6248400" cy="628650"/>
+          </a:xfrm>
+          <a:prstGeom prst="roundRect">
+            <a:avLst>
+              <a:gd name="adj" fmla="val 12121"/>
+            </a:avLst>
+          </a:prstGeom>
+          <a:solidFill>
+            <a:srgbClr val="FFFFFF"/>
+          </a:solidFill>
+          <a:ln w="12700">
+            <a:solidFill>
+              <a:srgbClr val="D6DCE5"/>
+            </a:solidFill>
+          </a:ln>
+          <a:effectLst/>
+        </p:spPr>
+        <p:style>
+          <a:lnRef idx="1">
+            <a:schemeClr val="accent1"/>
+          </a:lnRef>
+          <a:fillRef idx="3">
+            <a:schemeClr val="accent1"/>
+          </a:fillRef>
+          <a:effectRef idx="2">
+            <a:schemeClr val="accent1"/>
+          </a:effectRef>
+          <a:fontRef idx="minor">
+            <a:schemeClr val="lt1"/>
+          </a:fontRef>
+        </p:style>
+        <p:txBody>
+          <a:bodyPr rtlCol="0" anchor="ctr" wrap="square"/>
+          <a:lstStyle/>
+          <a:p>
+            <a:pPr algn="ctr"/>
+          </a:p>
+        </p:txBody>
+      </p:sp>
+      <p:sp>
+        <p:nvSpPr>
+          <p:cNvPr id="16" name="TextBox 15"/>
+          <p:cNvSpPr txBox="1"/>
+          <p:nvPr/>
+        </p:nvSpPr>
+        <p:spPr>
+          <a:xfrm>
+            <a:off x="781050" y="4495800"/>
+            <a:ext cx="5905500" cy="628650"/>
+          </a:xfrm>
+          <a:prstGeom prst="rect">
+            <a:avLst/>
+          </a:prstGeom>
+          <a:noFill/>
+        </p:spPr>
+        <p:txBody>
+          <a:bodyPr wrap="square" lIns="0" rIns="0" tIns="0" bIns="0" anchor="ctr">
+            <a:spAutoFit/>
+          </a:bodyPr>
+          <a:lstStyle/>
+          <a:p>
+            <a:pPr algn="l">
+              <a:lnSpc>
+                <a:spcPct val="130000"/>
+              </a:lnSpc>
+            </a:pPr>
+            <a:r>
+              <a:rPr sz="1425" b="0">
+                <a:solidFill>
+                  <a:srgbClr val="1A2230"/>
+                </a:solidFill>
+                <a:latin typeface="Microsoft YaHei"/>
+              </a:rPr>
+              <a:t>✓  六层 226 项自动化检查 + 一键启动脚本</a:t>
+            </a:r>
+          </a:p>
+        </p:txBody>
+      </p:sp>
+      <p:sp>
+        <p:nvSpPr>
+          <p:cNvPr id="17" name="Rounded Rectangle 16"/>
+          <p:cNvSpPr/>
+          <p:nvPr/>
+        </p:nvSpPr>
+        <p:spPr>
+          <a:xfrm>
+            <a:off x="7277100" y="1028700"/>
+            <a:ext cx="4533900" cy="2057400"/>
+          </a:xfrm>
+          <a:prstGeom prst="roundRect">
+            <a:avLst>
+              <a:gd name="adj" fmla="val 5555"/>
+            </a:avLst>
+          </a:prstGeom>
+          <a:solidFill>
+            <a:srgbClr val="FFFFFF"/>
+          </a:solidFill>
+          <a:ln w="12700">
+            <a:solidFill>
+              <a:srgbClr val="D6DCE5"/>
+            </a:solidFill>
+          </a:ln>
+          <a:effectLst/>
+        </p:spPr>
+        <p:style>
+          <a:lnRef idx="1">
+            <a:schemeClr val="accent1"/>
+          </a:lnRef>
+          <a:fillRef idx="3">
+            <a:schemeClr val="accent1"/>
+          </a:fillRef>
+          <a:effectRef idx="2">
+            <a:schemeClr val="accent1"/>
+          </a:effectRef>
+          <a:fontRef idx="minor">
+            <a:schemeClr val="lt1"/>
+          </a:fontRef>
+        </p:style>
+        <p:txBody>
+          <a:bodyPr rtlCol="0" anchor="ctr" wrap="square"/>
+          <a:lstStyle/>
+          <a:p>
+            <a:pPr algn="ctr"/>
+          </a:p>
+        </p:txBody>
+      </p:sp>
+      <p:sp>
+        <p:nvSpPr>
+          <p:cNvPr id="18" name="TextBox 17"/>
+          <p:cNvSpPr txBox="1"/>
+          <p:nvPr/>
+        </p:nvSpPr>
+        <p:spPr>
+          <a:xfrm>
+            <a:off x="7486650" y="1219200"/>
+            <a:ext cx="4114800" cy="323850"/>
+          </a:xfrm>
+          <a:prstGeom prst="rect">
+            <a:avLst/>
+          </a:prstGeom>
+          <a:noFill/>
+        </p:spPr>
+        <p:txBody>
+          <a:bodyPr wrap="square" lIns="0" rIns="0" tIns="0" bIns="0" anchor="ctr">
+            <a:spAutoFit/>
+          </a:bodyPr>
+          <a:lstStyle/>
+          <a:p>
+            <a:pPr algn="l">
+              <a:lnSpc>
+                <a:spcPct val="130000"/>
+              </a:lnSpc>
+            </a:pPr>
+            <a:r>
+              <a:rPr sz="1725" b="1">
+                <a:solidFill>
+                  <a:srgbClr val="0E3F8C"/>
+                </a:solidFill>
+                <a:latin typeface="Microsoft YaHei"/>
+              </a:rPr>
+              <a:t>仅有表结构与骨架</a:t>
+            </a:r>
+          </a:p>
+        </p:txBody>
+      </p:sp>
+      <p:sp>
+        <p:nvSpPr>
+          <p:cNvPr id="19" name="TextBox 18"/>
+          <p:cNvSpPr txBox="1"/>
+          <p:nvPr/>
+        </p:nvSpPr>
+        <p:spPr>
+          <a:xfrm>
+            <a:off x="7486650" y="1619250"/>
+            <a:ext cx="4114800" cy="1276350"/>
+          </a:xfrm>
+          <a:prstGeom prst="rect">
+            <a:avLst/>
+          </a:prstGeom>
+          <a:noFill/>
+        </p:spPr>
+        <p:txBody>
+          <a:bodyPr wrap="square" lIns="0" rIns="0" tIns="0" bIns="0" anchor="t">
+            <a:spAutoFit/>
+          </a:bodyPr>
+          <a:lstStyle/>
+          <a:p>
+            <a:pPr algn="l">
+              <a:lnSpc>
+                <a:spcPct val="155000"/>
+              </a:lnSpc>
+            </a:pPr>
+            <a:r>
+              <a:rPr sz="1425" b="0">
+                <a:solidFill>
+                  <a:srgbClr val="1A2230"/>
+                </a:solidFill>
+                <a:latin typeface="Microsoft YaHei"/>
+              </a:rPr>
+              <a:t>S5 设备与工单：已完成数据库设计与迁移（V5），Java 侧仅保留模块骨架，尚未实现业务逻辑。</a:t>
+            </a:r>
+          </a:p>
+        </p:txBody>
+      </p:sp>
+      <p:sp>
+        <p:nvSpPr>
+          <p:cNvPr id="20" name="Rounded Rectangle 19"/>
+          <p:cNvSpPr/>
+          <p:nvPr/>
+        </p:nvSpPr>
+        <p:spPr>
+          <a:xfrm>
+            <a:off x="7277100" y="3276600"/>
+            <a:ext cx="4533900" cy="2057400"/>
+          </a:xfrm>
+          <a:prstGeom prst="roundRect">
+            <a:avLst>
+              <a:gd name="adj" fmla="val 5555"/>
+            </a:avLst>
+          </a:prstGeom>
+          <a:solidFill>
+            <a:srgbClr val="FFFFFF"/>
+          </a:solidFill>
+          <a:ln w="12700">
+            <a:solidFill>
+              <a:srgbClr val="D6DCE5"/>
+            </a:solidFill>
+          </a:ln>
+          <a:effectLst/>
+        </p:spPr>
+        <p:style>
+          <a:lnRef idx="1">
+            <a:schemeClr val="accent1"/>
+          </a:lnRef>
+          <a:fillRef idx="3">
+            <a:schemeClr val="accent1"/>
+          </a:fillRef>
+          <a:effectRef idx="2">
+            <a:schemeClr val="accent1"/>
+          </a:effectRef>
+          <a:fontRef idx="minor">
+            <a:schemeClr val="lt1"/>
+          </a:fontRef>
+        </p:style>
+        <p:txBody>
+          <a:bodyPr rtlCol="0" anchor="ctr" wrap="square"/>
+          <a:lstStyle/>
+          <a:p>
+            <a:pPr algn="ctr"/>
+          </a:p>
+        </p:txBody>
+      </p:sp>
+      <p:sp>
+        <p:nvSpPr>
+          <p:cNvPr id="21" name="TextBox 20"/>
+          <p:cNvSpPr txBox="1"/>
+          <p:nvPr/>
+        </p:nvSpPr>
+        <p:spPr>
+          <a:xfrm>
+            <a:off x="7486650" y="3467100"/>
+            <a:ext cx="4114800" cy="323850"/>
+          </a:xfrm>
+          <a:prstGeom prst="rect">
+            <a:avLst/>
+          </a:prstGeom>
+          <a:noFill/>
+        </p:spPr>
+        <p:txBody>
+          <a:bodyPr wrap="square" lIns="0" rIns="0" tIns="0" bIns="0" anchor="ctr">
+            <a:spAutoFit/>
+          </a:bodyPr>
+          <a:lstStyle/>
+          <a:p>
+            <a:pPr algn="l">
+              <a:lnSpc>
+                <a:spcPct val="130000"/>
+              </a:lnSpc>
+            </a:pPr>
+            <a:r>
+              <a:rPr sz="1725" b="1">
+                <a:solidFill>
+                  <a:srgbClr val="0E3F8C"/>
+                </a:solidFill>
+                <a:latin typeface="Microsoft YaHei"/>
+              </a:rPr>
+              <a:t>完全未开始</a:t>
+            </a:r>
+          </a:p>
+        </p:txBody>
+      </p:sp>
+      <p:sp>
+        <p:nvSpPr>
+          <p:cNvPr id="22" name="TextBox 21"/>
+          <p:cNvSpPr txBox="1"/>
+          <p:nvPr/>
+        </p:nvSpPr>
+        <p:spPr>
+          <a:xfrm>
+            <a:off x="7486650" y="3867150"/>
+            <a:ext cx="4114800" cy="1276350"/>
+          </a:xfrm>
+          <a:prstGeom prst="rect">
+            <a:avLst/>
+          </a:prstGeom>
+          <a:noFill/>
+        </p:spPr>
+        <p:txBody>
+          <a:bodyPr wrap="square" lIns="0" rIns="0" tIns="0" bIns="0" anchor="t">
+            <a:spAutoFit/>
+          </a:bodyPr>
+          <a:lstStyle/>
+          <a:p>
+            <a:pPr algn="l">
+              <a:lnSpc>
+                <a:spcPct val="155000"/>
+              </a:lnSpc>
+            </a:pPr>
+            <a:r>
+              <a:rPr sz="1425" b="0">
+                <a:solidFill>
+                  <a:srgbClr val="1A2230"/>
+                </a:solidFill>
+                <a:latin typeface="Microsoft YaHei"/>
+              </a:rPr>
+              <a:t>真实微信支付对接（当前为 Mock 回调）、JWT 无状态令牌（当前为内存会话）、CI 流水线。</a:t>
+            </a:r>
+          </a:p>
+        </p:txBody>
+      </p:sp>
+      <p:sp>
+        <p:nvSpPr>
+          <p:cNvPr id="23" name="Rounded Rectangle 22"/>
+          <p:cNvSpPr/>
+          <p:nvPr/>
+        </p:nvSpPr>
+        <p:spPr>
+          <a:xfrm>
+            <a:off x="381000" y="5505450"/>
+            <a:ext cx="11430000" cy="590550"/>
+          </a:xfrm>
+          <a:prstGeom prst="roundRect">
+            <a:avLst>
+              <a:gd name="adj" fmla="val 12903"/>
+            </a:avLst>
+          </a:prstGeom>
+          <a:solidFill>
+            <a:srgbClr val="E8EFF8"/>
+          </a:solidFill>
+          <a:ln>
+            <a:noFill/>
+          </a:ln>
+          <a:effectLst/>
+        </p:spPr>
+        <p:style>
+          <a:lnRef idx="1">
+            <a:schemeClr val="accent1"/>
+          </a:lnRef>
+          <a:fillRef idx="3">
+            <a:schemeClr val="accent1"/>
+          </a:fillRef>
+          <a:effectRef idx="2">
+            <a:schemeClr val="accent1"/>
+          </a:effectRef>
+          <a:fontRef idx="minor">
+            <a:schemeClr val="lt1"/>
+          </a:fontRef>
+        </p:style>
+        <p:txBody>
+          <a:bodyPr rtlCol="0" anchor="ctr" wrap="square"/>
+          <a:lstStyle/>
+          <a:p>
+            <a:pPr algn="ctr"/>
+          </a:p>
+        </p:txBody>
+      </p:sp>
+      <p:sp>
+        <p:nvSpPr>
+          <p:cNvPr id="24" name="Rectangle 23"/>
+          <p:cNvSpPr/>
+          <p:nvPr/>
+        </p:nvSpPr>
+        <p:spPr>
+          <a:xfrm>
+            <a:off x="381000" y="5505450"/>
+            <a:ext cx="38100" cy="590550"/>
+          </a:xfrm>
+          <a:prstGeom prst="rect">
+            <a:avLst/>
+          </a:prstGeom>
+          <a:solidFill>
+            <a:srgbClr val="1E4FA8"/>
+          </a:solidFill>
+          <a:ln>
+            <a:noFill/>
+          </a:ln>
+          <a:effectLst/>
+        </p:spPr>
+        <p:style>
+          <a:lnRef idx="1">
+            <a:schemeClr val="accent1"/>
+          </a:lnRef>
+          <a:fillRef idx="3">
+            <a:schemeClr val="accent1"/>
+          </a:fillRef>
+          <a:effectRef idx="2">
+            <a:schemeClr val="accent1"/>
+          </a:effectRef>
+          <a:fontRef idx="minor">
+            <a:schemeClr val="lt1"/>
+          </a:fontRef>
+        </p:style>
+        <p:txBody>
+          <a:bodyPr rtlCol="0" anchor="ctr" wrap="square"/>
+          <a:lstStyle/>
+          <a:p>
+            <a:pPr algn="ctr"/>
+          </a:p>
+        </p:txBody>
+      </p:sp>
+      <p:sp>
+        <p:nvSpPr>
+          <p:cNvPr id="25" name="TextBox 24"/>
+          <p:cNvSpPr txBox="1"/>
+          <p:nvPr/>
+        </p:nvSpPr>
+        <p:spPr>
+          <a:xfrm>
+            <a:off x="533400" y="5505450"/>
+            <a:ext cx="914400" cy="590550"/>
+          </a:xfrm>
+          <a:prstGeom prst="rect">
+            <a:avLst/>
+          </a:prstGeom>
+          <a:noFill/>
+        </p:spPr>
+        <p:txBody>
+          <a:bodyPr wrap="square" lIns="0" rIns="0" tIns="0" bIns="0" anchor="ctr">
+            <a:spAutoFit/>
+          </a:bodyPr>
+          <a:lstStyle/>
+          <a:p>
+            <a:pPr algn="l">
+              <a:lnSpc>
+                <a:spcPct val="130000"/>
+              </a:lnSpc>
+            </a:pPr>
+            <a:r>
+              <a:rPr sz="1500" b="1">
+                <a:solidFill>
+                  <a:srgbClr val="1E4FA8"/>
+                </a:solidFill>
+                <a:latin typeface="Microsoft YaHei"/>
+              </a:rPr>
+              <a:t>下一步</a:t>
+            </a:r>
+          </a:p>
+        </p:txBody>
+      </p:sp>
+      <p:sp>
+        <p:nvSpPr>
+          <p:cNvPr id="26" name="TextBox 25"/>
+          <p:cNvSpPr txBox="1"/>
+          <p:nvPr/>
+        </p:nvSpPr>
+        <p:spPr>
+          <a:xfrm>
+            <a:off x="1504950" y="5505450"/>
+            <a:ext cx="10134600" cy="590550"/>
+          </a:xfrm>
+          <a:prstGeom prst="rect">
+            <a:avLst/>
+          </a:prstGeom>
+          <a:noFill/>
+        </p:spPr>
+        <p:txBody>
+          <a:bodyPr wrap="square" lIns="0" rIns="0" tIns="0" bIns="0" anchor="ctr">
+            <a:spAutoFit/>
+          </a:bodyPr>
+          <a:lstStyle/>
+          <a:p>
+            <a:pPr algn="l">
+              <a:lnSpc>
+                <a:spcPct val="135000"/>
+              </a:lnSpc>
+            </a:pPr>
+            <a:r>
+              <a:rPr sz="1500" b="0">
+                <a:solidFill>
+                  <a:srgbClr val="1A2230"/>
+                </a:solidFill>
+                <a:latin typeface="Microsoft YaHei"/>
+              </a:rPr>
+              <a:t>先补 S5 业务逻辑，再把会话改为 JWT，最后接入支付沙箱与 CI</a:t>
+            </a:r>
+          </a:p>
+        </p:txBody>
+      </p:sp>
+      <p:sp>
+        <p:nvSpPr>
+          <p:cNvPr id="27" name="Rectangle 26"/>
+          <p:cNvSpPr/>
+          <p:nvPr/>
+        </p:nvSpPr>
+        <p:spPr>
+          <a:xfrm>
+            <a:off x="381000" y="6286500"/>
+            <a:ext cx="11430000" cy="9525"/>
+          </a:xfrm>
+          <a:prstGeom prst="rect">
+            <a:avLst/>
+          </a:prstGeom>
+          <a:solidFill>
+            <a:srgbClr val="E5E7EB"/>
+          </a:solidFill>
+          <a:ln>
+            <a:noFill/>
+          </a:ln>
+          <a:effectLst/>
+        </p:spPr>
+        <p:style>
+          <a:lnRef idx="1">
+            <a:schemeClr val="accent1"/>
+          </a:lnRef>
+          <a:fillRef idx="3">
+            <a:schemeClr val="accent1"/>
+          </a:fillRef>
+          <a:effectRef idx="2">
+            <a:schemeClr val="accent1"/>
+          </a:effectRef>
+          <a:fontRef idx="minor">
+            <a:schemeClr val="lt1"/>
+          </a:fontRef>
+        </p:style>
+        <p:txBody>
+          <a:bodyPr rtlCol="0" anchor="ctr" wrap="square"/>
+          <a:lstStyle/>
+          <a:p>
+            <a:pPr algn="ctr"/>
+          </a:p>
+        </p:txBody>
+      </p:sp>
+      <p:sp>
+        <p:nvSpPr>
+          <p:cNvPr id="28" name="TextBox 27"/>
+          <p:cNvSpPr txBox="1"/>
+          <p:nvPr/>
+        </p:nvSpPr>
+        <p:spPr>
+          <a:xfrm>
+            <a:off x="381000" y="6324600"/>
+            <a:ext cx="8763000" cy="285750"/>
+          </a:xfrm>
+          <a:prstGeom prst="rect">
+            <a:avLst/>
+          </a:prstGeom>
+          <a:noFill/>
+        </p:spPr>
+        <p:txBody>
+          <a:bodyPr wrap="square" lIns="0" rIns="0" tIns="0" bIns="0" anchor="ctr">
+            <a:spAutoFit/>
+          </a:bodyPr>
+          <a:lstStyle/>
+          <a:p>
+            <a:pPr algn="l">
+              <a:lnSpc>
+                <a:spcPct val="130000"/>
+              </a:lnSpc>
+            </a:pPr>
+            <a:r>
+              <a:rPr sz="1125" b="0">
+                <a:solidFill>
+                  <a:srgbClr val="8B97A8"/>
+                </a:solidFill>
+                <a:latin typeface="Microsoft YaHei"/>
+              </a:rPr>
+              <a:t>来源：代码实现与测试报告 · 开放问题台账</a:t>
+            </a:r>
+          </a:p>
+        </p:txBody>
+      </p:sp>
+      <p:sp>
+        <p:nvSpPr>
+          <p:cNvPr id="29" name="TextBox 28"/>
+          <p:cNvSpPr txBox="1"/>
+          <p:nvPr/>
+        </p:nvSpPr>
+        <p:spPr>
+          <a:xfrm>
+            <a:off x="9525000" y="6324600"/>
+            <a:ext cx="2286000" cy="285750"/>
+          </a:xfrm>
+          <a:prstGeom prst="rect">
+            <a:avLst/>
+          </a:prstGeom>
+          <a:noFill/>
+        </p:spPr>
+        <p:txBody>
+          <a:bodyPr wrap="square" lIns="0" rIns="0" tIns="0" bIns="0" anchor="ctr">
+            <a:spAutoFit/>
+          </a:bodyPr>
+          <a:lstStyle/>
+          <a:p>
+            <a:pPr algn="r">
+              <a:lnSpc>
+                <a:spcPct val="130000"/>
+              </a:lnSpc>
+            </a:pPr>
+            <a:r>
+              <a:rPr sz="1200" b="1">
+                <a:solidFill>
+                  <a:srgbClr val="1E4FA8"/>
+                </a:solidFill>
+                <a:latin typeface="Microsoft YaHei"/>
+              </a:rPr>
+              <a:t>23 / 24</a:t>
+            </a:r>
+          </a:p>
+        </p:txBody>
+      </p:sp>
+    </p:spTree>
+  </p:cSld>
+  <p:clrMapOvr>
+    <a:masterClrMapping/>
+  </p:clrMapOvr>
+</p:sld>
+</file>
+
+<file path=ppt/slides/slide24.xml><?xml version="1.0" encoding="utf-8"?>
+<p:sld xmlns:a="http://schemas.openxmlformats.org/drawingml/2006/main" xmlns:p="http://schemas.openxmlformats.org/presentationml/2006/main" xmlns:r="http://schemas.openxmlformats.org/officeDocument/2006/relationships">
+  <p:cSld>
+    <p:bg>
+      <p:bgPr>
+        <a:solidFill>
+          <a:srgbClr val="FFFFFF"/>
+        </a:solidFill>
+        <a:effectLst/>
+      </p:bgPr>
+    </p:bg>
+    <p:spTree>
+      <p:nvGrpSpPr>
+        <p:cNvPr id="1" name=""/>
+        <p:cNvGrpSpPr/>
+        <p:nvPr/>
+      </p:nvGrpSpPr>
+      <p:grpSpPr/>
+      <p:sp>
+        <p:nvSpPr>
+          <p:cNvPr id="2" name="Rectangle 1"/>
+          <p:cNvSpPr/>
+          <p:nvPr/>
+        </p:nvSpPr>
+        <p:spPr>
+          <a:xfrm>
+            <a:off x="0" y="0"/>
             <a:ext cx="12192000" cy="133350"/>
           </a:xfrm>
           <a:prstGeom prst="rect">
@@ -22055,7 +23496,7 @@
                 </a:solidFill>
                 <a:latin typeface="Microsoft YaHei"/>
               </a:rPr>
-              <a:t>03 / 23</a:t>
+              <a:t>03 / 24</a:t>
             </a:r>
           </a:p>
         </p:txBody>
@@ -23314,7 +24755,7 @@
                 </a:solidFill>
                 <a:latin typeface="Microsoft YaHei"/>
               </a:rPr>
-              <a:t>04 / 23</a:t>
+              <a:t>04 / 24</a:t>
             </a:r>
           </a:p>
         </p:txBody>
@@ -24238,7 +25679,7 @@
                 </a:solidFill>
                 <a:latin typeface="Microsoft YaHei"/>
               </a:rPr>
-              <a:t>05 / 23</a:t>
+              <a:t>05 / 24</a:t>
             </a:r>
           </a:p>
         </p:txBody>
@@ -25474,7 +26915,7 @@
                 </a:solidFill>
                 <a:latin typeface="Microsoft YaHei"/>
               </a:rPr>
-              <a:t>06 / 23</a:t>
+              <a:t>06 / 24</a:t>
             </a:r>
           </a:p>
         </p:txBody>
@@ -26170,7 +27611,7 @@
                 </a:solidFill>
                 <a:latin typeface="Microsoft YaHei"/>
               </a:rPr>
-              <a:t>07 / 23</a:t>
+              <a:t>07 / 24</a:t>
             </a:r>
           </a:p>
         </p:txBody>
@@ -27813,7 +29254,7 @@
                 </a:solidFill>
                 <a:latin typeface="Microsoft YaHei"/>
               </a:rPr>
-              <a:t>08 / 23</a:t>
+              <a:t>08 / 24</a:t>
             </a:r>
           </a:p>
         </p:txBody>
@@ -28892,7 +30333,7 @@
                 </a:solidFill>
                 <a:latin typeface="Microsoft YaHei"/>
               </a:rPr>
-              <a:t>09 / 23</a:t>
+              <a:t>09 / 24</a:t>
             </a:r>
           </a:p>
         </p:txBody>

--- a/10-展示汇报/健身房运营管理系统答辩/健身房运营管理系统答辩.pptx
+++ b/10-展示汇报/健身房运营管理系统答辩/健身房运营管理系统答辩.pptx
@@ -29,6 +29,7 @@
     <p:sldId id="277" r:id="rId28"/>
     <p:sldId id="278" r:id="rId29"/>
     <p:sldId id="279" r:id="rId30"/>
+    <p:sldId id="280" r:id="rId31"/>
   </p:sldIdLst>
   <p:sldSz cx="12192000" cy="6858000" type="screen4x3"/>
   <p:notesSz cx="6858000" cy="9144000"/>
@@ -4746,7 +4747,7 @@
                 </a:solidFill>
                 <a:latin typeface="Microsoft YaHei"/>
               </a:rPr>
-              <a:t>10 / 24</a:t>
+              <a:t>10 / 25</a:t>
             </a:r>
           </a:p>
         </p:txBody>
@@ -5442,7 +5443,7 @@
                 </a:solidFill>
                 <a:latin typeface="Microsoft YaHei"/>
               </a:rPr>
-              <a:t>11 / 24</a:t>
+              <a:t>11 / 25</a:t>
             </a:r>
           </a:p>
         </p:txBody>
@@ -7118,7 +7119,7 @@
                 </a:solidFill>
                 <a:latin typeface="Microsoft YaHei"/>
               </a:rPr>
-              <a:t>12 / 24</a:t>
+              <a:t>12 / 25</a:t>
             </a:r>
           </a:p>
         </p:txBody>
@@ -8736,7 +8737,7 @@
                 </a:solidFill>
                 <a:latin typeface="Microsoft YaHei"/>
               </a:rPr>
-              <a:t>13 / 24</a:t>
+              <a:t>13 / 25</a:t>
             </a:r>
           </a:p>
         </p:txBody>
@@ -10461,7 +10462,7 @@
                 </a:solidFill>
                 <a:latin typeface="Microsoft YaHei"/>
               </a:rPr>
-              <a:t>14 / 24</a:t>
+              <a:t>14 / 25</a:t>
             </a:r>
           </a:p>
         </p:txBody>
@@ -11686,7 +11687,7 @@
                 </a:solidFill>
                 <a:latin typeface="Microsoft YaHei"/>
               </a:rPr>
-              <a:t>15 / 24</a:t>
+              <a:t>15 / 25</a:t>
             </a:r>
           </a:p>
         </p:txBody>
@@ -13123,7 +13124,7 @@
                 </a:solidFill>
                 <a:latin typeface="Microsoft YaHei"/>
               </a:rPr>
-              <a:t>16 / 24</a:t>
+              <a:t>16 / 25</a:t>
             </a:r>
           </a:p>
         </p:txBody>
@@ -14405,7 +14406,7 @@
                 </a:solidFill>
                 <a:latin typeface="Microsoft YaHei"/>
               </a:rPr>
-              <a:t>17 / 24</a:t>
+              <a:t>17 / 25</a:t>
             </a:r>
           </a:p>
         </p:txBody>
@@ -15845,7 +15846,7 @@
                 </a:solidFill>
                 <a:latin typeface="Microsoft YaHei"/>
               </a:rPr>
-              <a:t>18 / 24</a:t>
+              <a:t>18 / 25</a:t>
             </a:r>
           </a:p>
         </p:txBody>
@@ -15864,7 +15865,7 @@
     <p:bg>
       <p:bgPr>
         <a:solidFill>
-          <a:srgbClr val="F7F9FC"/>
+          <a:srgbClr val="FFFFFF"/>
         </a:solidFill>
         <a:effectLst/>
       </p:bgPr>
@@ -15884,131 +15885,92 @@
         </p:nvSpPr>
         <p:spPr>
           <a:xfrm>
-            <a:off x="0" y="1238250"/>
-            <a:ext cx="12192000" cy="3048000"/>
-          </a:xfrm>
-          <a:prstGeom prst="rect">
-            <a:avLst/>
-          </a:prstGeom>
-          <a:noFill/>
-        </p:spPr>
-        <p:txBody>
-          <a:bodyPr wrap="square" lIns="0" rIns="0" tIns="0" bIns="0" anchor="ctr">
-            <a:spAutoFit/>
-          </a:bodyPr>
-          <a:lstStyle/>
-          <a:p>
-            <a:pPr algn="ctr">
+            <a:off x="381000" y="228600"/>
+            <a:ext cx="8572500" cy="438150"/>
+          </a:xfrm>
+          <a:prstGeom prst="rect">
+            <a:avLst/>
+          </a:prstGeom>
+          <a:noFill/>
+        </p:spPr>
+        <p:txBody>
+          <a:bodyPr wrap="square" lIns="0" rIns="0" tIns="0" bIns="0" anchor="ctr">
+            <a:spAutoFit/>
+          </a:bodyPr>
+          <a:lstStyle/>
+          <a:p>
+            <a:pPr algn="l">
+              <a:lnSpc>
+                <a:spcPct val="100000"/>
+              </a:lnSpc>
+            </a:pPr>
+            <a:r>
+              <a:rPr sz="2400" b="1">
+                <a:solidFill>
+                  <a:srgbClr val="0E3F8C"/>
+                </a:solidFill>
+                <a:latin typeface="Microsoft YaHei"/>
+              </a:rPr>
+              <a:t>扫码签到与前端体验优化</a:t>
+            </a:r>
+          </a:p>
+        </p:txBody>
+      </p:sp>
+      <p:sp>
+        <p:nvSpPr>
+          <p:cNvPr id="3" name="TextBox 2"/>
+          <p:cNvSpPr txBox="1"/>
+          <p:nvPr/>
+        </p:nvSpPr>
+        <p:spPr>
+          <a:xfrm>
+            <a:off x="8953500" y="228600"/>
+            <a:ext cx="2857500" cy="438150"/>
+          </a:xfrm>
+          <a:prstGeom prst="rect">
+            <a:avLst/>
+          </a:prstGeom>
+          <a:noFill/>
+        </p:spPr>
+        <p:txBody>
+          <a:bodyPr wrap="square" lIns="0" rIns="0" tIns="0" bIns="0" anchor="ctr">
+            <a:spAutoFit/>
+          </a:bodyPr>
+          <a:lstStyle/>
+          <a:p>
+            <a:pPr algn="r">
               <a:lnSpc>
                 <a:spcPct val="130000"/>
               </a:lnSpc>
             </a:pPr>
             <a:r>
-              <a:rPr sz="18000" b="1">
-                <a:solidFill>
-                  <a:srgbClr val="E8EFF8"/>
-                </a:solidFill>
-                <a:latin typeface="Microsoft YaHei"/>
-              </a:rPr>
-              <a:t>04</a:t>
-            </a:r>
-          </a:p>
-        </p:txBody>
-      </p:sp>
-      <p:sp>
-        <p:nvSpPr>
-          <p:cNvPr id="3" name="TextBox 2"/>
-          <p:cNvSpPr txBox="1"/>
-          <p:nvPr/>
-        </p:nvSpPr>
-        <p:spPr>
-          <a:xfrm>
-            <a:off x="1333500" y="2286000"/>
-            <a:ext cx="9525000" cy="342900"/>
-          </a:xfrm>
-          <a:prstGeom prst="rect">
-            <a:avLst/>
-          </a:prstGeom>
-          <a:noFill/>
-        </p:spPr>
-        <p:txBody>
-          <a:bodyPr wrap="square" lIns="0" rIns="0" tIns="0" bIns="0" anchor="ctr">
-            <a:spAutoFit/>
-          </a:bodyPr>
-          <a:lstStyle/>
-          <a:p>
-            <a:pPr algn="ctr">
-              <a:lnSpc>
-                <a:spcPct val="130000"/>
-              </a:lnSpc>
-            </a:pPr>
-            <a:r>
-              <a:rPr sz="1650" b="0">
-                <a:solidFill>
-                  <a:srgbClr val="3D7BD9"/>
-                </a:solidFill>
-                <a:latin typeface="Microsoft YaHei"/>
-              </a:rPr>
-              <a:t>第四部分</a:t>
-            </a:r>
-          </a:p>
-        </p:txBody>
-      </p:sp>
-      <p:sp>
-        <p:nvSpPr>
-          <p:cNvPr id="4" name="TextBox 3"/>
-          <p:cNvSpPr txBox="1"/>
-          <p:nvPr/>
-        </p:nvSpPr>
-        <p:spPr>
-          <a:xfrm>
-            <a:off x="1333500" y="2686050"/>
-            <a:ext cx="9525000" cy="819150"/>
-          </a:xfrm>
-          <a:prstGeom prst="rect">
-            <a:avLst/>
-          </a:prstGeom>
-          <a:noFill/>
-        </p:spPr>
-        <p:txBody>
-          <a:bodyPr wrap="square" lIns="0" rIns="0" tIns="0" bIns="0" anchor="ctr">
-            <a:spAutoFit/>
-          </a:bodyPr>
-          <a:lstStyle/>
-          <a:p>
-            <a:pPr algn="ctr">
-              <a:lnSpc>
-                <a:spcPct val="130000"/>
-              </a:lnSpc>
-            </a:pPr>
-            <a:r>
-              <a:rPr sz="4050" b="1">
-                <a:solidFill>
-                  <a:srgbClr val="0E3F8C"/>
-                </a:solidFill>
-                <a:latin typeface="Microsoft YaHei"/>
-              </a:rPr>
-              <a:t>质量保障与测试</a:t>
-            </a:r>
-          </a:p>
-        </p:txBody>
-      </p:sp>
-      <p:sp>
-        <p:nvSpPr>
-          <p:cNvPr id="5" name="Rectangle 4"/>
+              <a:rPr sz="1125" b="0">
+                <a:solidFill>
+                  <a:srgbClr val="8B97A8"/>
+                </a:solidFill>
+                <a:latin typeface="Microsoft YaHei"/>
+              </a:rPr>
+              <a:t>03 关键实现与业务规则</a:t>
+            </a:r>
+          </a:p>
+        </p:txBody>
+      </p:sp>
+      <p:sp>
+        <p:nvSpPr>
+          <p:cNvPr id="4" name="Rectangle 3"/>
           <p:cNvSpPr/>
           <p:nvPr/>
         </p:nvSpPr>
         <p:spPr>
           <a:xfrm>
-            <a:off x="5524500" y="3600450"/>
-            <a:ext cx="1143000" cy="38100"/>
+            <a:off x="381000" y="704850"/>
+            <a:ext cx="11430000" cy="9525"/>
           </a:xfrm>
           <a:prstGeom prst="rect">
             <a:avLst/>
           </a:prstGeom>
           <a:solidFill>
-            <a:srgbClr val="1E4FA8"/>
+            <a:srgbClr val="E5E7EB"/>
           </a:solidFill>
           <a:ln>
             <a:noFill/>
@@ -16039,57 +16001,519 @@
       </p:sp>
       <p:sp>
         <p:nvSpPr>
-          <p:cNvPr id="6" name="TextBox 5"/>
-          <p:cNvSpPr txBox="1"/>
-          <p:nvPr/>
-        </p:nvSpPr>
-        <p:spPr>
-          <a:xfrm>
-            <a:off x="1905000" y="3810000"/>
-            <a:ext cx="8382000" cy="571500"/>
-          </a:xfrm>
-          <a:prstGeom prst="rect">
-            <a:avLst/>
-          </a:prstGeom>
-          <a:noFill/>
-        </p:spPr>
-        <p:txBody>
-          <a:bodyPr wrap="square" lIns="0" rIns="0" tIns="0" bIns="0" anchor="ctr">
-            <a:spAutoFit/>
-          </a:bodyPr>
-          <a:lstStyle/>
-          <a:p>
-            <a:pPr algn="ctr">
-              <a:lnSpc>
-                <a:spcPct val="150000"/>
-              </a:lnSpc>
-            </a:pPr>
-            <a:r>
-              <a:rPr sz="1575" b="0">
-                <a:solidFill>
-                  <a:srgbClr val="4A5568"/>
-                </a:solidFill>
-                <a:latin typeface="Microsoft YaHei"/>
-              </a:rPr>
-              <a:t>测试不只是"跑通了"：六层检查全部可复现，缺陷都能说出根因</a:t>
-            </a:r>
-          </a:p>
-        </p:txBody>
-      </p:sp>
-      <p:sp>
-        <p:nvSpPr>
-          <p:cNvPr id="7" name="Rounded Rectangle 6"/>
+          <p:cNvPr id="5" name="Rounded Rectangle 4"/>
           <p:cNvSpPr/>
           <p:nvPr/>
         </p:nvSpPr>
         <p:spPr>
           <a:xfrm>
-            <a:off x="4476750" y="4629150"/>
-            <a:ext cx="1028700" cy="381000"/>
+            <a:off x="381000" y="914400"/>
+            <a:ext cx="3619500" cy="4476750"/>
           </a:xfrm>
           <a:prstGeom prst="roundRect">
             <a:avLst>
-              <a:gd name="adj" fmla="val 50000"/>
+              <a:gd name="adj" fmla="val 3157"/>
+            </a:avLst>
+          </a:prstGeom>
+          <a:solidFill>
+            <a:srgbClr val="F0F5FC"/>
+          </a:solidFill>
+          <a:ln>
+            <a:noFill/>
+          </a:ln>
+          <a:effectLst/>
+        </p:spPr>
+        <p:style>
+          <a:lnRef idx="1">
+            <a:schemeClr val="accent1"/>
+          </a:lnRef>
+          <a:fillRef idx="3">
+            <a:schemeClr val="accent1"/>
+          </a:fillRef>
+          <a:effectRef idx="2">
+            <a:schemeClr val="accent1"/>
+          </a:effectRef>
+          <a:fontRef idx="minor">
+            <a:schemeClr val="lt1"/>
+          </a:fontRef>
+        </p:style>
+        <p:txBody>
+          <a:bodyPr rtlCol="0" anchor="ctr" wrap="square"/>
+          <a:lstStyle/>
+          <a:p>
+            <a:pPr algn="ctr"/>
+          </a:p>
+        </p:txBody>
+      </p:sp>
+      <p:pic>
+        <p:nvPicPr>
+          <p:cNvPr id="6" name="Picture 5" descr="checkin_qr.png"/>
+          <p:cNvPicPr>
+            <a:picLocks noChangeAspect="1"/>
+          </p:cNvPicPr>
+          <p:nvPr/>
+        </p:nvPicPr>
+        <p:blipFill>
+          <a:blip r:embed="rId2"/>
+          <a:stretch>
+            <a:fillRect/>
+          </a:stretch>
+        </p:blipFill>
+        <p:spPr>
+          <a:xfrm>
+            <a:off x="666750" y="1066800"/>
+            <a:ext cx="3048000" cy="3048000"/>
+          </a:xfrm>
+          <a:prstGeom prst="rect">
+            <a:avLst/>
+          </a:prstGeom>
+        </p:spPr>
+      </p:pic>
+      <p:sp>
+        <p:nvSpPr>
+          <p:cNvPr id="7" name="TextBox 6"/>
+          <p:cNvSpPr txBox="1"/>
+          <p:nvPr/>
+        </p:nvSpPr>
+        <p:spPr>
+          <a:xfrm>
+            <a:off x="571500" y="4210050"/>
+            <a:ext cx="3238500" cy="266700"/>
+          </a:xfrm>
+          <a:prstGeom prst="rect">
+            <a:avLst/>
+          </a:prstGeom>
+          <a:noFill/>
+        </p:spPr>
+        <p:txBody>
+          <a:bodyPr wrap="square" lIns="0" rIns="0" tIns="0" bIns="0" anchor="ctr">
+            <a:spAutoFit/>
+          </a:bodyPr>
+          <a:lstStyle/>
+          <a:p>
+            <a:pPr algn="ctr">
+              <a:lnSpc>
+                <a:spcPct val="130000"/>
+              </a:lnSpc>
+            </a:pPr>
+            <a:r>
+              <a:rPr sz="1125" b="0">
+                <a:solidFill>
+                  <a:srgbClr val="8B97A8"/>
+                </a:solidFill>
+                <a:latin typeface="Microsoft YaHei"/>
+              </a:rPr>
+              <a:t>图：真实二维码（现场可扫）</a:t>
+            </a:r>
+          </a:p>
+        </p:txBody>
+      </p:sp>
+      <p:sp>
+        <p:nvSpPr>
+          <p:cNvPr id="8" name="TextBox 7"/>
+          <p:cNvSpPr txBox="1"/>
+          <p:nvPr/>
+        </p:nvSpPr>
+        <p:spPr>
+          <a:xfrm>
+            <a:off x="571500" y="4514850"/>
+            <a:ext cx="3238500" cy="742950"/>
+          </a:xfrm>
+          <a:prstGeom prst="rect">
+            <a:avLst/>
+          </a:prstGeom>
+          <a:noFill/>
+        </p:spPr>
+        <p:txBody>
+          <a:bodyPr wrap="square" lIns="0" rIns="0" tIns="0" bIns="0" anchor="t">
+            <a:spAutoFit/>
+          </a:bodyPr>
+          <a:lstStyle/>
+          <a:p>
+            <a:pPr algn="ctr">
+              <a:lnSpc>
+                <a:spcPct val="145000"/>
+              </a:lnSpc>
+            </a:pPr>
+            <a:r>
+              <a:rPr sz="1200" b="0">
+                <a:solidFill>
+                  <a:srgbClr val="4A5568"/>
+                </a:solidFill>
+                <a:latin typeface="Microsoft YaHei"/>
+              </a:rPr>
+              <a:t>二维码内容</a:t>
+            </a:r>
+          </a:p>
+          <a:p>
+            <a:pPr algn="ctr">
+              <a:lnSpc>
+                <a:spcPct val="145000"/>
+              </a:lnSpc>
+            </a:pPr>
+            <a:r>
+              <a:rPr sz="1200" b="0">
+                <a:solidFill>
+                  <a:srgbClr val="4A5568"/>
+                </a:solidFill>
+                <a:latin typeface="Microsoft YaHei"/>
+              </a:rPr>
+              <a:t>GYM-CHECKIN:{预约号}:{会员号}</a:t>
+            </a:r>
+          </a:p>
+          <a:p>
+            <a:pPr algn="ctr">
+              <a:lnSpc>
+                <a:spcPct val="145000"/>
+              </a:lnSpc>
+            </a:pPr>
+            <a:r>
+              <a:rPr sz="1200" b="0">
+                <a:solidFill>
+                  <a:srgbClr val="4A5568"/>
+                </a:solidFill>
+                <a:latin typeface="Microsoft YaHei"/>
+              </a:rPr>
+              <a:t>会员出示，门店扫码核销</a:t>
+            </a:r>
+          </a:p>
+        </p:txBody>
+      </p:sp>
+      <p:sp>
+        <p:nvSpPr>
+          <p:cNvPr id="9" name="Rounded Rectangle 8"/>
+          <p:cNvSpPr/>
+          <p:nvPr/>
+        </p:nvSpPr>
+        <p:spPr>
+          <a:xfrm>
+            <a:off x="4191000" y="914400"/>
+            <a:ext cx="7620000" cy="2152650"/>
+          </a:xfrm>
+          <a:prstGeom prst="roundRect">
+            <a:avLst>
+              <a:gd name="adj" fmla="val 5309"/>
+            </a:avLst>
+          </a:prstGeom>
+          <a:solidFill>
+            <a:srgbClr val="F7F9FC"/>
+          </a:solidFill>
+          <a:ln w="12700">
+            <a:solidFill>
+              <a:srgbClr val="D6DCE5"/>
+            </a:solidFill>
+          </a:ln>
+          <a:effectLst/>
+        </p:spPr>
+        <p:style>
+          <a:lnRef idx="1">
+            <a:schemeClr val="accent1"/>
+          </a:lnRef>
+          <a:fillRef idx="3">
+            <a:schemeClr val="accent1"/>
+          </a:fillRef>
+          <a:effectRef idx="2">
+            <a:schemeClr val="accent1"/>
+          </a:effectRef>
+          <a:fontRef idx="minor">
+            <a:schemeClr val="lt1"/>
+          </a:fontRef>
+        </p:style>
+        <p:txBody>
+          <a:bodyPr rtlCol="0" anchor="ctr" wrap="square"/>
+          <a:lstStyle/>
+          <a:p>
+            <a:pPr algn="ctr"/>
+          </a:p>
+        </p:txBody>
+      </p:sp>
+      <p:sp>
+        <p:nvSpPr>
+          <p:cNvPr id="10" name="TextBox 9"/>
+          <p:cNvSpPr txBox="1"/>
+          <p:nvPr/>
+        </p:nvSpPr>
+        <p:spPr>
+          <a:xfrm>
+            <a:off x="4400550" y="1066800"/>
+            <a:ext cx="7239000" cy="285750"/>
+          </a:xfrm>
+          <a:prstGeom prst="rect">
+            <a:avLst/>
+          </a:prstGeom>
+          <a:noFill/>
+        </p:spPr>
+        <p:txBody>
+          <a:bodyPr wrap="square" lIns="0" rIns="0" tIns="0" bIns="0" anchor="ctr">
+            <a:spAutoFit/>
+          </a:bodyPr>
+          <a:lstStyle/>
+          <a:p>
+            <a:pPr algn="l">
+              <a:lnSpc>
+                <a:spcPct val="130000"/>
+              </a:lnSpc>
+            </a:pPr>
+            <a:r>
+              <a:rPr sz="1650" b="1">
+                <a:solidFill>
+                  <a:srgbClr val="0E3F8C"/>
+                </a:solidFill>
+                <a:latin typeface="Microsoft YaHei"/>
+              </a:rPr>
+              <a:t>扫码签到闭环（取代原先"点一下就完事"）</a:t>
+            </a:r>
+          </a:p>
+        </p:txBody>
+      </p:sp>
+      <p:sp>
+        <p:nvSpPr>
+          <p:cNvPr id="11" name="TextBox 10"/>
+          <p:cNvSpPr txBox="1"/>
+          <p:nvPr/>
+        </p:nvSpPr>
+        <p:spPr>
+          <a:xfrm>
+            <a:off x="4400550" y="1447800"/>
+            <a:ext cx="742950" cy="304800"/>
+          </a:xfrm>
+          <a:prstGeom prst="rect">
+            <a:avLst/>
+          </a:prstGeom>
+          <a:noFill/>
+        </p:spPr>
+        <p:txBody>
+          <a:bodyPr wrap="square" lIns="0" rIns="0" tIns="0" bIns="0" anchor="ctr">
+            <a:spAutoFit/>
+          </a:bodyPr>
+          <a:lstStyle/>
+          <a:p>
+            <a:pPr algn="l">
+              <a:lnSpc>
+                <a:spcPct val="130000"/>
+              </a:lnSpc>
+            </a:pPr>
+            <a:r>
+              <a:rPr sz="1425" b="1">
+                <a:solidFill>
+                  <a:srgbClr val="1E4FA8"/>
+                </a:solidFill>
+                <a:latin typeface="Microsoft YaHei"/>
+              </a:rPr>
+              <a:t>① 会员</a:t>
+            </a:r>
+          </a:p>
+        </p:txBody>
+      </p:sp>
+      <p:sp>
+        <p:nvSpPr>
+          <p:cNvPr id="12" name="TextBox 11"/>
+          <p:cNvSpPr txBox="1"/>
+          <p:nvPr/>
+        </p:nvSpPr>
+        <p:spPr>
+          <a:xfrm>
+            <a:off x="5200650" y="1447800"/>
+            <a:ext cx="6381750" cy="304800"/>
+          </a:xfrm>
+          <a:prstGeom prst="rect">
+            <a:avLst/>
+          </a:prstGeom>
+          <a:noFill/>
+        </p:spPr>
+        <p:txBody>
+          <a:bodyPr wrap="square" lIns="0" rIns="0" tIns="0" bIns="0" anchor="ctr">
+            <a:spAutoFit/>
+          </a:bodyPr>
+          <a:lstStyle/>
+          <a:p>
+            <a:pPr algn="l">
+              <a:lnSpc>
+                <a:spcPct val="130000"/>
+              </a:lnSpc>
+            </a:pPr>
+            <a:r>
+              <a:rPr sz="1275" b="0">
+                <a:solidFill>
+                  <a:srgbClr val="1A2230"/>
+                </a:solidFill>
+                <a:latin typeface="Microsoft YaHei"/>
+              </a:rPr>
+              <a:t>在「我的预约」点扫码签到 → 弹出二维码</a:t>
+            </a:r>
+          </a:p>
+        </p:txBody>
+      </p:sp>
+      <p:sp>
+        <p:nvSpPr>
+          <p:cNvPr id="13" name="TextBox 12"/>
+          <p:cNvSpPr txBox="1"/>
+          <p:nvPr/>
+        </p:nvSpPr>
+        <p:spPr>
+          <a:xfrm>
+            <a:off x="4400550" y="1885950"/>
+            <a:ext cx="742950" cy="304800"/>
+          </a:xfrm>
+          <a:prstGeom prst="rect">
+            <a:avLst/>
+          </a:prstGeom>
+          <a:noFill/>
+        </p:spPr>
+        <p:txBody>
+          <a:bodyPr wrap="square" lIns="0" rIns="0" tIns="0" bIns="0" anchor="ctr">
+            <a:spAutoFit/>
+          </a:bodyPr>
+          <a:lstStyle/>
+          <a:p>
+            <a:pPr algn="l">
+              <a:lnSpc>
+                <a:spcPct val="130000"/>
+              </a:lnSpc>
+            </a:pPr>
+            <a:r>
+              <a:rPr sz="1425" b="1">
+                <a:solidFill>
+                  <a:srgbClr val="1E4FA8"/>
+                </a:solidFill>
+                <a:latin typeface="Microsoft YaHei"/>
+              </a:rPr>
+              <a:t>② 门店</a:t>
+            </a:r>
+          </a:p>
+        </p:txBody>
+      </p:sp>
+      <p:sp>
+        <p:nvSpPr>
+          <p:cNvPr id="14" name="TextBox 13"/>
+          <p:cNvSpPr txBox="1"/>
+          <p:nvPr/>
+        </p:nvSpPr>
+        <p:spPr>
+          <a:xfrm>
+            <a:off x="5200650" y="1885950"/>
+            <a:ext cx="6381750" cy="304800"/>
+          </a:xfrm>
+          <a:prstGeom prst="rect">
+            <a:avLst/>
+          </a:prstGeom>
+          <a:noFill/>
+        </p:spPr>
+        <p:txBody>
+          <a:bodyPr wrap="square" lIns="0" rIns="0" tIns="0" bIns="0" anchor="ctr">
+            <a:spAutoFit/>
+          </a:bodyPr>
+          <a:lstStyle/>
+          <a:p>
+            <a:pPr algn="l">
+              <a:lnSpc>
+                <a:spcPct val="130000"/>
+              </a:lnSpc>
+            </a:pPr>
+            <a:r>
+              <a:rPr sz="1275" b="0">
+                <a:solidFill>
+                  <a:srgbClr val="1A2230"/>
+                </a:solidFill>
+                <a:latin typeface="Microsoft YaHei"/>
+              </a:rPr>
+              <a:t>在「约课管理 → 扫码核销签到」扫描或粘贴内容</a:t>
+            </a:r>
+          </a:p>
+        </p:txBody>
+      </p:sp>
+      <p:sp>
+        <p:nvSpPr>
+          <p:cNvPr id="15" name="TextBox 14"/>
+          <p:cNvSpPr txBox="1"/>
+          <p:nvPr/>
+        </p:nvSpPr>
+        <p:spPr>
+          <a:xfrm>
+            <a:off x="4400550" y="2324100"/>
+            <a:ext cx="742950" cy="304800"/>
+          </a:xfrm>
+          <a:prstGeom prst="rect">
+            <a:avLst/>
+          </a:prstGeom>
+          <a:noFill/>
+        </p:spPr>
+        <p:txBody>
+          <a:bodyPr wrap="square" lIns="0" rIns="0" tIns="0" bIns="0" anchor="ctr">
+            <a:spAutoFit/>
+          </a:bodyPr>
+          <a:lstStyle/>
+          <a:p>
+            <a:pPr algn="l">
+              <a:lnSpc>
+                <a:spcPct val="130000"/>
+              </a:lnSpc>
+            </a:pPr>
+            <a:r>
+              <a:rPr sz="1425" b="1">
+                <a:solidFill>
+                  <a:srgbClr val="1E4FA8"/>
+                </a:solidFill>
+                <a:latin typeface="Microsoft YaHei"/>
+              </a:rPr>
+              <a:t>③ 系统</a:t>
+            </a:r>
+          </a:p>
+        </p:txBody>
+      </p:sp>
+      <p:sp>
+        <p:nvSpPr>
+          <p:cNvPr id="16" name="TextBox 15"/>
+          <p:cNvSpPr txBox="1"/>
+          <p:nvPr/>
+        </p:nvSpPr>
+        <p:spPr>
+          <a:xfrm>
+            <a:off x="5200650" y="2324100"/>
+            <a:ext cx="6381750" cy="304800"/>
+          </a:xfrm>
+          <a:prstGeom prst="rect">
+            <a:avLst/>
+          </a:prstGeom>
+          <a:noFill/>
+        </p:spPr>
+        <p:txBody>
+          <a:bodyPr wrap="square" lIns="0" rIns="0" tIns="0" bIns="0" anchor="ctr">
+            <a:spAutoFit/>
+          </a:bodyPr>
+          <a:lstStyle/>
+          <a:p>
+            <a:pPr algn="l">
+              <a:lnSpc>
+                <a:spcPct val="130000"/>
+              </a:lnSpc>
+            </a:pPr>
+            <a:r>
+              <a:rPr sz="1275" b="0">
+                <a:solidFill>
+                  <a:srgbClr val="1A2230"/>
+                </a:solidFill>
+                <a:latin typeface="Microsoft YaHei"/>
+              </a:rPr>
+              <a:t>核销成功并记录渠道为扫码；重复核销返回状态冲突</a:t>
+            </a:r>
+          </a:p>
+        </p:txBody>
+      </p:sp>
+      <p:sp>
+        <p:nvSpPr>
+          <p:cNvPr id="17" name="Rounded Rectangle 16"/>
+          <p:cNvSpPr/>
+          <p:nvPr/>
+        </p:nvSpPr>
+        <p:spPr>
+          <a:xfrm>
+            <a:off x="4191000" y="3181350"/>
+            <a:ext cx="7620000" cy="2209800"/>
+          </a:xfrm>
+          <a:prstGeom prst="roundRect">
+            <a:avLst>
+              <a:gd name="adj" fmla="val 5172"/>
             </a:avLst>
           </a:prstGeom>
           <a:solidFill>
@@ -16126,66 +16550,220 @@
       </p:sp>
       <p:sp>
         <p:nvSpPr>
-          <p:cNvPr id="8" name="TextBox 7"/>
-          <p:cNvSpPr txBox="1"/>
-          <p:nvPr/>
-        </p:nvSpPr>
-        <p:spPr>
-          <a:xfrm>
-            <a:off x="4476750" y="4629150"/>
-            <a:ext cx="1028700" cy="381000"/>
-          </a:xfrm>
-          <a:prstGeom prst="rect">
-            <a:avLst/>
-          </a:prstGeom>
-          <a:noFill/>
-        </p:spPr>
-        <p:txBody>
-          <a:bodyPr wrap="square" lIns="0" rIns="0" tIns="0" bIns="0" anchor="ctr">
-            <a:spAutoFit/>
-          </a:bodyPr>
-          <a:lstStyle/>
-          <a:p>
-            <a:pPr algn="ctr">
+          <p:cNvPr id="18" name="TextBox 17"/>
+          <p:cNvSpPr txBox="1"/>
+          <p:nvPr/>
+        </p:nvSpPr>
+        <p:spPr>
+          <a:xfrm>
+            <a:off x="4400550" y="3333750"/>
+            <a:ext cx="7239000" cy="285750"/>
+          </a:xfrm>
+          <a:prstGeom prst="rect">
+            <a:avLst/>
+          </a:prstGeom>
+          <a:noFill/>
+        </p:spPr>
+        <p:txBody>
+          <a:bodyPr wrap="square" lIns="0" rIns="0" tIns="0" bIns="0" anchor="ctr">
+            <a:spAutoFit/>
+          </a:bodyPr>
+          <a:lstStyle/>
+          <a:p>
+            <a:pPr algn="l">
               <a:lnSpc>
                 <a:spcPct val="130000"/>
               </a:lnSpc>
             </a:pPr>
             <a:r>
-              <a:rPr sz="1425" b="0">
-                <a:solidFill>
-                  <a:srgbClr val="1A2230"/>
-                </a:solidFill>
-                <a:latin typeface="Microsoft YaHei"/>
-              </a:rPr>
-              <a:t>六层检查</a:t>
-            </a:r>
-          </a:p>
-        </p:txBody>
-      </p:sp>
-      <p:sp>
-        <p:nvSpPr>
-          <p:cNvPr id="9" name="Rounded Rectangle 8"/>
+              <a:rPr sz="1650" b="1">
+                <a:solidFill>
+                  <a:srgbClr val="0E3F8C"/>
+                </a:solidFill>
+                <a:latin typeface="Microsoft YaHei"/>
+              </a:rPr>
+              <a:t>前端体验优化（4 项）</a:t>
+            </a:r>
+          </a:p>
+        </p:txBody>
+      </p:sp>
+      <p:sp>
+        <p:nvSpPr>
+          <p:cNvPr id="19" name="TextBox 18"/>
+          <p:cNvSpPr txBox="1"/>
+          <p:nvPr/>
+        </p:nvSpPr>
+        <p:spPr>
+          <a:xfrm>
+            <a:off x="4400550" y="3695700"/>
+            <a:ext cx="7239000" cy="342900"/>
+          </a:xfrm>
+          <a:prstGeom prst="rect">
+            <a:avLst/>
+          </a:prstGeom>
+          <a:noFill/>
+        </p:spPr>
+        <p:txBody>
+          <a:bodyPr wrap="square" lIns="0" rIns="0" tIns="0" bIns="0" anchor="ctr">
+            <a:spAutoFit/>
+          </a:bodyPr>
+          <a:lstStyle/>
+          <a:p>
+            <a:pPr algn="l">
+              <a:lnSpc>
+                <a:spcPct val="130000"/>
+              </a:lnSpc>
+            </a:pPr>
+            <a:r>
+              <a:rPr sz="1275" b="0">
+                <a:solidFill>
+                  <a:srgbClr val="4A5568"/>
+                </a:solidFill>
+                <a:latin typeface="Microsoft YaHei"/>
+              </a:rPr>
+              <a:t>· 左侧导航 + 独立页面：会员 3 页 / 门店 8 页，按角色渲染菜单</a:t>
+            </a:r>
+          </a:p>
+        </p:txBody>
+      </p:sp>
+      <p:sp>
+        <p:nvSpPr>
+          <p:cNvPr id="20" name="TextBox 19"/>
+          <p:cNvSpPr txBox="1"/>
+          <p:nvPr/>
+        </p:nvSpPr>
+        <p:spPr>
+          <a:xfrm>
+            <a:off x="4400550" y="4076700"/>
+            <a:ext cx="7239000" cy="342900"/>
+          </a:xfrm>
+          <a:prstGeom prst="rect">
+            <a:avLst/>
+          </a:prstGeom>
+          <a:noFill/>
+        </p:spPr>
+        <p:txBody>
+          <a:bodyPr wrap="square" lIns="0" rIns="0" tIns="0" bIns="0" anchor="ctr">
+            <a:spAutoFit/>
+          </a:bodyPr>
+          <a:lstStyle/>
+          <a:p>
+            <a:pPr algn="l">
+              <a:lnSpc>
+                <a:spcPct val="130000"/>
+              </a:lnSpc>
+            </a:pPr>
+            <a:r>
+              <a:rPr sz="1275" b="0">
+                <a:solidFill>
+                  <a:srgbClr val="4A5568"/>
+                </a:solidFill>
+                <a:latin typeface="Microsoft YaHei"/>
+              </a:rPr>
+              <a:t>· 身份选择登录：先选会员 / 店长 / 管理员，再输入账号密码</a:t>
+            </a:r>
+          </a:p>
+        </p:txBody>
+      </p:sp>
+      <p:sp>
+        <p:nvSpPr>
+          <p:cNvPr id="21" name="TextBox 20"/>
+          <p:cNvSpPr txBox="1"/>
+          <p:nvPr/>
+        </p:nvSpPr>
+        <p:spPr>
+          <a:xfrm>
+            <a:off x="4400550" y="4457700"/>
+            <a:ext cx="7239000" cy="342900"/>
+          </a:xfrm>
+          <a:prstGeom prst="rect">
+            <a:avLst/>
+          </a:prstGeom>
+          <a:noFill/>
+        </p:spPr>
+        <p:txBody>
+          <a:bodyPr wrap="square" lIns="0" rIns="0" tIns="0" bIns="0" anchor="ctr">
+            <a:spAutoFit/>
+          </a:bodyPr>
+          <a:lstStyle/>
+          <a:p>
+            <a:pPr algn="l">
+              <a:lnSpc>
+                <a:spcPct val="130000"/>
+              </a:lnSpc>
+            </a:pPr>
+            <a:r>
+              <a:rPr sz="1275" b="0">
+                <a:solidFill>
+                  <a:srgbClr val="4A5568"/>
+                </a:solidFill>
+                <a:latin typeface="Microsoft YaHei"/>
+              </a:rPr>
+              <a:t>· 选课搜索：按课程名称 / 编号 / 教练 / 场地实时过滤</a:t>
+            </a:r>
+          </a:p>
+        </p:txBody>
+      </p:sp>
+      <p:sp>
+        <p:nvSpPr>
+          <p:cNvPr id="22" name="TextBox 21"/>
+          <p:cNvSpPr txBox="1"/>
+          <p:nvPr/>
+        </p:nvSpPr>
+        <p:spPr>
+          <a:xfrm>
+            <a:off x="4400550" y="4838700"/>
+            <a:ext cx="7239000" cy="342900"/>
+          </a:xfrm>
+          <a:prstGeom prst="rect">
+            <a:avLst/>
+          </a:prstGeom>
+          <a:noFill/>
+        </p:spPr>
+        <p:txBody>
+          <a:bodyPr wrap="square" lIns="0" rIns="0" tIns="0" bIns="0" anchor="ctr">
+            <a:spAutoFit/>
+          </a:bodyPr>
+          <a:lstStyle/>
+          <a:p>
+            <a:pPr algn="l">
+              <a:lnSpc>
+                <a:spcPct val="130000"/>
+              </a:lnSpc>
+            </a:pPr>
+            <a:r>
+              <a:rPr sz="1275" b="0">
+                <a:solidFill>
+                  <a:srgbClr val="4A5568"/>
+                </a:solidFill>
+                <a:latin typeface="Microsoft YaHei"/>
+              </a:rPr>
+              <a:t>· 二维码由前端内嵌生成器产出，不依赖外部库，也不依赖网络</a:t>
+            </a:r>
+          </a:p>
+        </p:txBody>
+      </p:sp>
+      <p:sp>
+        <p:nvSpPr>
+          <p:cNvPr id="23" name="Rounded Rectangle 22"/>
           <p:cNvSpPr/>
           <p:nvPr/>
         </p:nvSpPr>
         <p:spPr>
           <a:xfrm>
-            <a:off x="5638800" y="4629150"/>
-            <a:ext cx="1028700" cy="381000"/>
+            <a:off x="381000" y="5505450"/>
+            <a:ext cx="11430000" cy="609600"/>
           </a:xfrm>
           <a:prstGeom prst="roundRect">
             <a:avLst>
-              <a:gd name="adj" fmla="val 50000"/>
+              <a:gd name="adj" fmla="val 12500"/>
             </a:avLst>
           </a:prstGeom>
           <a:solidFill>
-            <a:srgbClr val="FFFFFF"/>
+            <a:srgbClr val="E8EFF8"/>
           </a:solidFill>
-          <a:ln w="12700">
-            <a:solidFill>
-              <a:srgbClr val="D6DCE5"/>
-            </a:solidFill>
+          <a:ln>
+            <a:noFill/>
           </a:ln>
           <a:effectLst/>
         </p:spPr>
@@ -16213,66 +16791,23 @@
       </p:sp>
       <p:sp>
         <p:nvSpPr>
-          <p:cNvPr id="10" name="TextBox 9"/>
-          <p:cNvSpPr txBox="1"/>
-          <p:nvPr/>
-        </p:nvSpPr>
-        <p:spPr>
-          <a:xfrm>
-            <a:off x="5638800" y="4629150"/>
-            <a:ext cx="1028700" cy="381000"/>
-          </a:xfrm>
-          <a:prstGeom prst="rect">
-            <a:avLst/>
-          </a:prstGeom>
-          <a:noFill/>
-        </p:spPr>
-        <p:txBody>
-          <a:bodyPr wrap="square" lIns="0" rIns="0" tIns="0" bIns="0" anchor="ctr">
-            <a:spAutoFit/>
-          </a:bodyPr>
-          <a:lstStyle/>
-          <a:p>
-            <a:pPr algn="ctr">
-              <a:lnSpc>
-                <a:spcPct val="130000"/>
-              </a:lnSpc>
-            </a:pPr>
-            <a:r>
-              <a:rPr sz="1425" b="0">
-                <a:solidFill>
-                  <a:srgbClr val="1A2230"/>
-                </a:solidFill>
-                <a:latin typeface="Microsoft YaHei"/>
-              </a:rPr>
-              <a:t>缺陷根因</a:t>
-            </a:r>
-          </a:p>
-        </p:txBody>
-      </p:sp>
-      <p:sp>
-        <p:nvSpPr>
-          <p:cNvPr id="11" name="Rounded Rectangle 10"/>
+          <p:cNvPr id="24" name="Rectangle 23"/>
           <p:cNvSpPr/>
           <p:nvPr/>
         </p:nvSpPr>
         <p:spPr>
           <a:xfrm>
-            <a:off x="6800850" y="4629150"/>
-            <a:ext cx="1028700" cy="381000"/>
-          </a:xfrm>
-          <a:prstGeom prst="roundRect">
-            <a:avLst>
-              <a:gd name="adj" fmla="val 50000"/>
-            </a:avLst>
+            <a:off x="381000" y="5505450"/>
+            <a:ext cx="38100" cy="609600"/>
+          </a:xfrm>
+          <a:prstGeom prst="rect">
+            <a:avLst/>
           </a:prstGeom>
           <a:solidFill>
-            <a:srgbClr val="FFFFFF"/>
+            <a:srgbClr val="1E4FA8"/>
           </a:solidFill>
-          <a:ln w="12700">
-            <a:solidFill>
-              <a:srgbClr val="D6DCE5"/>
-            </a:solidFill>
+          <a:ln>
+            <a:noFill/>
           </a:ln>
           <a:effectLst/>
         </p:spPr>
@@ -16300,46 +16835,85 @@
       </p:sp>
       <p:sp>
         <p:nvSpPr>
-          <p:cNvPr id="12" name="TextBox 11"/>
-          <p:cNvSpPr txBox="1"/>
-          <p:nvPr/>
-        </p:nvSpPr>
-        <p:spPr>
-          <a:xfrm>
-            <a:off x="6800850" y="4629150"/>
-            <a:ext cx="1028700" cy="381000"/>
-          </a:xfrm>
-          <a:prstGeom prst="rect">
-            <a:avLst/>
-          </a:prstGeom>
-          <a:noFill/>
-        </p:spPr>
-        <p:txBody>
-          <a:bodyPr wrap="square" lIns="0" rIns="0" tIns="0" bIns="0" anchor="ctr">
-            <a:spAutoFit/>
-          </a:bodyPr>
-          <a:lstStyle/>
-          <a:p>
-            <a:pPr algn="ctr">
+          <p:cNvPr id="25" name="TextBox 24"/>
+          <p:cNvSpPr txBox="1"/>
+          <p:nvPr/>
+        </p:nvSpPr>
+        <p:spPr>
+          <a:xfrm>
+            <a:off x="533400" y="5505450"/>
+            <a:ext cx="914400" cy="609600"/>
+          </a:xfrm>
+          <a:prstGeom prst="rect">
+            <a:avLst/>
+          </a:prstGeom>
+          <a:noFill/>
+        </p:spPr>
+        <p:txBody>
+          <a:bodyPr wrap="square" lIns="0" rIns="0" tIns="0" bIns="0" anchor="ctr">
+            <a:spAutoFit/>
+          </a:bodyPr>
+          <a:lstStyle/>
+          <a:p>
+            <a:pPr algn="l">
               <a:lnSpc>
                 <a:spcPct val="130000"/>
               </a:lnSpc>
             </a:pPr>
             <a:r>
-              <a:rPr sz="1425" b="0">
+              <a:rPr sz="1500" b="1">
+                <a:solidFill>
+                  <a:srgbClr val="1E4FA8"/>
+                </a:solidFill>
+                <a:latin typeface="Microsoft YaHei"/>
+              </a:rPr>
+              <a:t>判断</a:t>
+            </a:r>
+          </a:p>
+        </p:txBody>
+      </p:sp>
+      <p:sp>
+        <p:nvSpPr>
+          <p:cNvPr id="26" name="TextBox 25"/>
+          <p:cNvSpPr txBox="1"/>
+          <p:nvPr/>
+        </p:nvSpPr>
+        <p:spPr>
+          <a:xfrm>
+            <a:off x="1504950" y="5505450"/>
+            <a:ext cx="10134600" cy="609600"/>
+          </a:xfrm>
+          <a:prstGeom prst="rect">
+            <a:avLst/>
+          </a:prstGeom>
+          <a:noFill/>
+        </p:spPr>
+        <p:txBody>
+          <a:bodyPr wrap="square" lIns="0" rIns="0" tIns="0" bIns="0" anchor="ctr">
+            <a:spAutoFit/>
+          </a:bodyPr>
+          <a:lstStyle/>
+          <a:p>
+            <a:pPr algn="l">
+              <a:lnSpc>
+                <a:spcPct val="135000"/>
+              </a:lnSpc>
+            </a:pPr>
+            <a:r>
+              <a:rPr sz="1500" b="0">
                 <a:solidFill>
                   <a:srgbClr val="1A2230"/>
                 </a:solidFill>
                 <a:latin typeface="Microsoft YaHei"/>
               </a:rPr>
-              <a:t>防回归</a:t>
-            </a:r>
-          </a:p>
-        </p:txBody>
-      </p:sp>
-      <p:sp>
-        <p:nvSpPr>
-          <p:cNvPr id="13" name="Rectangle 12"/>
+              <a:t>签到从"点一下"升级为完整闭环；前端从单页堆叠改为分角色导航，演示路径更清晰</a:t>
+            </a:r>
+          </a:p>
+        </p:txBody>
+      </p:sp>
+      <p:sp>
+        <p:nvSpPr>
+          <p:cNvPr id="27" name="Rectangle 26"/>
           <p:cNvSpPr/>
           <p:nvPr/>
         </p:nvSpPr>
@@ -16383,7 +16957,7 @@
       </p:sp>
       <p:sp>
         <p:nvSpPr>
-          <p:cNvPr id="14" name="TextBox 13"/>
+          <p:cNvPr id="28" name="TextBox 27"/>
           <p:cNvSpPr txBox="1"/>
           <p:nvPr/>
         </p:nvSpPr>
@@ -16415,14 +16989,14 @@
                 </a:solidFill>
                 <a:latin typeface="Microsoft YaHei"/>
               </a:rPr>
-              <a:t>健身房运营管理系统 · 课程答辩</a:t>
-            </a:r>
-          </a:p>
-        </p:txBody>
-      </p:sp>
-      <p:sp>
-        <p:nvSpPr>
-          <p:cNvPr id="15" name="TextBox 14"/>
+              <a:t>来源：系统测试文档 · J 扫码签到、H 身份与导航、I 搜索</a:t>
+            </a:r>
+          </a:p>
+        </p:txBody>
+      </p:sp>
+      <p:sp>
+        <p:nvSpPr>
+          <p:cNvPr id="29" name="TextBox 28"/>
           <p:cNvSpPr txBox="1"/>
           <p:nvPr/>
         </p:nvSpPr>
@@ -16454,7 +17028,7 @@
                 </a:solidFill>
                 <a:latin typeface="Microsoft YaHei"/>
               </a:rPr>
-              <a:t>19 / 24</a:t>
+              <a:t>19 / 25</a:t>
             </a:r>
           </a:p>
         </p:txBody>
@@ -17749,7 +18323,7 @@
     <p:bg>
       <p:bgPr>
         <a:solidFill>
-          <a:srgbClr val="FFFFFF"/>
+          <a:srgbClr val="F7F9FC"/>
         </a:solidFill>
         <a:effectLst/>
       </p:bgPr>
@@ -17763,14 +18337,131 @@
       <p:grpSpPr/>
       <p:sp>
         <p:nvSpPr>
-          <p:cNvPr id="2" name="Rectangle 1"/>
+          <p:cNvPr id="2" name="TextBox 1"/>
+          <p:cNvSpPr txBox="1"/>
+          <p:nvPr/>
+        </p:nvSpPr>
+        <p:spPr>
+          <a:xfrm>
+            <a:off x="0" y="1238250"/>
+            <a:ext cx="12192000" cy="3048000"/>
+          </a:xfrm>
+          <a:prstGeom prst="rect">
+            <a:avLst/>
+          </a:prstGeom>
+          <a:noFill/>
+        </p:spPr>
+        <p:txBody>
+          <a:bodyPr wrap="square" lIns="0" rIns="0" tIns="0" bIns="0" anchor="ctr">
+            <a:spAutoFit/>
+          </a:bodyPr>
+          <a:lstStyle/>
+          <a:p>
+            <a:pPr algn="ctr">
+              <a:lnSpc>
+                <a:spcPct val="130000"/>
+              </a:lnSpc>
+            </a:pPr>
+            <a:r>
+              <a:rPr sz="18000" b="1">
+                <a:solidFill>
+                  <a:srgbClr val="E8EFF8"/>
+                </a:solidFill>
+                <a:latin typeface="Microsoft YaHei"/>
+              </a:rPr>
+              <a:t>04</a:t>
+            </a:r>
+          </a:p>
+        </p:txBody>
+      </p:sp>
+      <p:sp>
+        <p:nvSpPr>
+          <p:cNvPr id="3" name="TextBox 2"/>
+          <p:cNvSpPr txBox="1"/>
+          <p:nvPr/>
+        </p:nvSpPr>
+        <p:spPr>
+          <a:xfrm>
+            <a:off x="1333500" y="2286000"/>
+            <a:ext cx="9525000" cy="342900"/>
+          </a:xfrm>
+          <a:prstGeom prst="rect">
+            <a:avLst/>
+          </a:prstGeom>
+          <a:noFill/>
+        </p:spPr>
+        <p:txBody>
+          <a:bodyPr wrap="square" lIns="0" rIns="0" tIns="0" bIns="0" anchor="ctr">
+            <a:spAutoFit/>
+          </a:bodyPr>
+          <a:lstStyle/>
+          <a:p>
+            <a:pPr algn="ctr">
+              <a:lnSpc>
+                <a:spcPct val="130000"/>
+              </a:lnSpc>
+            </a:pPr>
+            <a:r>
+              <a:rPr sz="1650" b="0">
+                <a:solidFill>
+                  <a:srgbClr val="3D7BD9"/>
+                </a:solidFill>
+                <a:latin typeface="Microsoft YaHei"/>
+              </a:rPr>
+              <a:t>第四部分</a:t>
+            </a:r>
+          </a:p>
+        </p:txBody>
+      </p:sp>
+      <p:sp>
+        <p:nvSpPr>
+          <p:cNvPr id="4" name="TextBox 3"/>
+          <p:cNvSpPr txBox="1"/>
+          <p:nvPr/>
+        </p:nvSpPr>
+        <p:spPr>
+          <a:xfrm>
+            <a:off x="1333500" y="2686050"/>
+            <a:ext cx="9525000" cy="819150"/>
+          </a:xfrm>
+          <a:prstGeom prst="rect">
+            <a:avLst/>
+          </a:prstGeom>
+          <a:noFill/>
+        </p:spPr>
+        <p:txBody>
+          <a:bodyPr wrap="square" lIns="0" rIns="0" tIns="0" bIns="0" anchor="ctr">
+            <a:spAutoFit/>
+          </a:bodyPr>
+          <a:lstStyle/>
+          <a:p>
+            <a:pPr algn="ctr">
+              <a:lnSpc>
+                <a:spcPct val="130000"/>
+              </a:lnSpc>
+            </a:pPr>
+            <a:r>
+              <a:rPr sz="4050" b="1">
+                <a:solidFill>
+                  <a:srgbClr val="0E3F8C"/>
+                </a:solidFill>
+                <a:latin typeface="Microsoft YaHei"/>
+              </a:rPr>
+              <a:t>质量保障与测试</a:t>
+            </a:r>
+          </a:p>
+        </p:txBody>
+      </p:sp>
+      <p:sp>
+        <p:nvSpPr>
+          <p:cNvPr id="5" name="Rectangle 4"/>
           <p:cNvSpPr/>
           <p:nvPr/>
         </p:nvSpPr>
         <p:spPr>
           <a:xfrm>
-            <a:off x="0" y="0"/>
-            <a:ext cx="12192000" cy="762000"/>
+            <a:off x="5524500" y="3600450"/>
+            <a:ext cx="1143000" cy="38100"/>
           </a:xfrm>
           <a:prstGeom prst="rect">
             <a:avLst/>
@@ -17807,295 +18498,61 @@
       </p:sp>
       <p:sp>
         <p:nvSpPr>
-          <p:cNvPr id="3" name="TextBox 2"/>
-          <p:cNvSpPr txBox="1"/>
-          <p:nvPr/>
-        </p:nvSpPr>
-        <p:spPr>
-          <a:xfrm>
-            <a:off x="381000" y="0"/>
-            <a:ext cx="7239000" cy="762000"/>
-          </a:xfrm>
-          <a:prstGeom prst="rect">
-            <a:avLst/>
-          </a:prstGeom>
-          <a:noFill/>
-        </p:spPr>
-        <p:txBody>
-          <a:bodyPr wrap="square" lIns="0" rIns="0" tIns="0" bIns="0" anchor="ctr">
-            <a:spAutoFit/>
-          </a:bodyPr>
-          <a:lstStyle/>
-          <a:p>
-            <a:pPr algn="l">
-              <a:lnSpc>
-                <a:spcPct val="130000"/>
-              </a:lnSpc>
-            </a:pPr>
-            <a:r>
-              <a:rPr sz="2400" b="1">
-                <a:solidFill>
-                  <a:srgbClr val="FFFFFF"/>
-                </a:solidFill>
-                <a:latin typeface="Microsoft YaHei"/>
-              </a:rPr>
-              <a:t>226 项检查，覆盖六个层次</a:t>
-            </a:r>
-          </a:p>
-        </p:txBody>
-      </p:sp>
-      <p:sp>
-        <p:nvSpPr>
-          <p:cNvPr id="4" name="TextBox 3"/>
-          <p:cNvSpPr txBox="1"/>
-          <p:nvPr/>
-        </p:nvSpPr>
-        <p:spPr>
-          <a:xfrm>
-            <a:off x="7620000" y="0"/>
-            <a:ext cx="4191000" cy="762000"/>
-          </a:xfrm>
-          <a:prstGeom prst="rect">
-            <a:avLst/>
-          </a:prstGeom>
-          <a:noFill/>
-        </p:spPr>
-        <p:txBody>
-          <a:bodyPr wrap="square" lIns="0" rIns="0" tIns="0" bIns="0" anchor="ctr">
-            <a:spAutoFit/>
-          </a:bodyPr>
-          <a:lstStyle/>
-          <a:p>
-            <a:pPr algn="r">
-              <a:lnSpc>
-                <a:spcPct val="130000"/>
-              </a:lnSpc>
-            </a:pPr>
-            <a:r>
-              <a:rPr sz="1050" b="0">
-                <a:solidFill>
-                  <a:srgbClr val="BFD3F0"/>
-                </a:solidFill>
-                <a:latin typeface="Microsoft YaHei"/>
-              </a:rPr>
-              <a:t>健身房运营管理系统 · 课程答辩</a:t>
-            </a:r>
-          </a:p>
-        </p:txBody>
-      </p:sp>
-      <p:sp>
-        <p:nvSpPr>
-          <p:cNvPr id="5" name="Rounded Rectangle 4"/>
+          <p:cNvPr id="6" name="TextBox 5"/>
+          <p:cNvSpPr txBox="1"/>
+          <p:nvPr/>
+        </p:nvSpPr>
+        <p:spPr>
+          <a:xfrm>
+            <a:off x="1905000" y="3810000"/>
+            <a:ext cx="8382000" cy="571500"/>
+          </a:xfrm>
+          <a:prstGeom prst="rect">
+            <a:avLst/>
+          </a:prstGeom>
+          <a:noFill/>
+        </p:spPr>
+        <p:txBody>
+          <a:bodyPr wrap="square" lIns="0" rIns="0" tIns="0" bIns="0" anchor="ctr">
+            <a:spAutoFit/>
+          </a:bodyPr>
+          <a:lstStyle/>
+          <a:p>
+            <a:pPr algn="ctr">
+              <a:lnSpc>
+                <a:spcPct val="150000"/>
+              </a:lnSpc>
+            </a:pPr>
+            <a:r>
+              <a:rPr sz="1575" b="0">
+                <a:solidFill>
+                  <a:srgbClr val="4A5568"/>
+                </a:solidFill>
+                <a:latin typeface="Microsoft YaHei"/>
+              </a:rPr>
+              <a:t>测试不只是"跑通了"：六层检查全部可复现，缺陷都能说出根因</a:t>
+            </a:r>
+          </a:p>
+        </p:txBody>
+      </p:sp>
+      <p:sp>
+        <p:nvSpPr>
+          <p:cNvPr id="7" name="Rounded Rectangle 6"/>
           <p:cNvSpPr/>
           <p:nvPr/>
         </p:nvSpPr>
         <p:spPr>
           <a:xfrm>
-            <a:off x="381000" y="1028700"/>
-            <a:ext cx="4000500" cy="4305300"/>
+            <a:off x="4476750" y="4629150"/>
+            <a:ext cx="1028700" cy="381000"/>
           </a:xfrm>
           <a:prstGeom prst="roundRect">
             <a:avLst>
-              <a:gd name="adj" fmla="val 2857"/>
+              <a:gd name="adj" fmla="val 50000"/>
             </a:avLst>
           </a:prstGeom>
           <a:solidFill>
-            <a:srgbClr val="E8EFF8"/>
-          </a:solidFill>
-          <a:ln>
-            <a:noFill/>
-          </a:ln>
-          <a:effectLst/>
-        </p:spPr>
-        <p:style>
-          <a:lnRef idx="1">
-            <a:schemeClr val="accent1"/>
-          </a:lnRef>
-          <a:fillRef idx="3">
-            <a:schemeClr val="accent1"/>
-          </a:fillRef>
-          <a:effectRef idx="2">
-            <a:schemeClr val="accent1"/>
-          </a:effectRef>
-          <a:fontRef idx="minor">
-            <a:schemeClr val="lt1"/>
-          </a:fontRef>
-        </p:style>
-        <p:txBody>
-          <a:bodyPr rtlCol="0" anchor="ctr" wrap="square"/>
-          <a:lstStyle/>
-          <a:p>
-            <a:pPr algn="ctr"/>
-          </a:p>
-        </p:txBody>
-      </p:sp>
-      <p:sp>
-        <p:nvSpPr>
-          <p:cNvPr id="6" name="TextBox 5"/>
-          <p:cNvSpPr txBox="1"/>
-          <p:nvPr/>
-        </p:nvSpPr>
-        <p:spPr>
-          <a:xfrm>
-            <a:off x="571500" y="1390650"/>
-            <a:ext cx="3619500" cy="1447800"/>
-          </a:xfrm>
-          <a:prstGeom prst="rect">
-            <a:avLst/>
-          </a:prstGeom>
-          <a:noFill/>
-        </p:spPr>
-        <p:txBody>
-          <a:bodyPr wrap="square" lIns="0" rIns="0" tIns="0" bIns="0" anchor="ctr">
-            <a:spAutoFit/>
-          </a:bodyPr>
-          <a:lstStyle/>
-          <a:p>
-            <a:pPr algn="l">
-              <a:lnSpc>
-                <a:spcPct val="100000"/>
-              </a:lnSpc>
-            </a:pPr>
-            <a:r>
-              <a:rPr sz="8700" b="1">
-                <a:solidFill>
-                  <a:srgbClr val="0E3F8C"/>
-                </a:solidFill>
-                <a:latin typeface="Microsoft YaHei"/>
-              </a:rPr>
-              <a:t>226</a:t>
-            </a:r>
-          </a:p>
-        </p:txBody>
-      </p:sp>
-      <p:sp>
-        <p:nvSpPr>
-          <p:cNvPr id="7" name="TextBox 6"/>
-          <p:cNvSpPr txBox="1"/>
-          <p:nvPr/>
-        </p:nvSpPr>
-        <p:spPr>
-          <a:xfrm>
-            <a:off x="571500" y="2914650"/>
-            <a:ext cx="3619500" cy="381000"/>
-          </a:xfrm>
-          <a:prstGeom prst="rect">
-            <a:avLst/>
-          </a:prstGeom>
-          <a:noFill/>
-        </p:spPr>
-        <p:txBody>
-          <a:bodyPr wrap="square" lIns="0" rIns="0" tIns="0" bIns="0" anchor="ctr">
-            <a:spAutoFit/>
-          </a:bodyPr>
-          <a:lstStyle/>
-          <a:p>
-            <a:pPr algn="l">
-              <a:lnSpc>
-                <a:spcPct val="130000"/>
-              </a:lnSpc>
-            </a:pPr>
-            <a:r>
-              <a:rPr sz="1650" b="0">
-                <a:solidFill>
-                  <a:srgbClr val="1A2230"/>
-                </a:solidFill>
-                <a:latin typeface="Microsoft YaHei"/>
-              </a:rPr>
-              <a:t>项自动化检查全部通过</a:t>
-            </a:r>
-          </a:p>
-        </p:txBody>
-      </p:sp>
-      <p:sp>
-        <p:nvSpPr>
-          <p:cNvPr id="8" name="TextBox 7"/>
-          <p:cNvSpPr txBox="1"/>
-          <p:nvPr/>
-        </p:nvSpPr>
-        <p:spPr>
-          <a:xfrm>
-            <a:off x="571500" y="3390900"/>
-            <a:ext cx="3619500" cy="1714500"/>
-          </a:xfrm>
-          <a:prstGeom prst="rect">
-            <a:avLst/>
-          </a:prstGeom>
-          <a:noFill/>
-        </p:spPr>
-        <p:txBody>
-          <a:bodyPr wrap="square" lIns="0" rIns="0" tIns="0" bIns="0" anchor="t">
-            <a:spAutoFit/>
-          </a:bodyPr>
-          <a:lstStyle/>
-          <a:p>
-            <a:pPr algn="l">
-              <a:lnSpc>
-                <a:spcPct val="160000"/>
-              </a:lnSpc>
-            </a:pPr>
-            <a:r>
-              <a:rPr sz="1425" b="0">
-                <a:solidFill>
-                  <a:srgbClr val="4A5568"/>
-                </a:solidFill>
-                <a:latin typeface="Microsoft YaHei"/>
-              </a:rPr>
-              <a:t>从单元测试到真实浏览器点击，</a:t>
-            </a:r>
-          </a:p>
-          <a:p>
-            <a:pPr algn="l">
-              <a:lnSpc>
-                <a:spcPct val="160000"/>
-              </a:lnSpc>
-            </a:pPr>
-            <a:r>
-              <a:rPr sz="1425" b="0">
-                <a:solidFill>
-                  <a:srgbClr val="4A5568"/>
-                </a:solidFill>
-                <a:latin typeface="Microsoft YaHei"/>
-              </a:rPr>
-              <a:t>每一层都有可复现的执行命令与</a:t>
-            </a:r>
-          </a:p>
-          <a:p>
-            <a:pPr algn="l">
-              <a:lnSpc>
-                <a:spcPct val="160000"/>
-              </a:lnSpc>
-            </a:pPr>
-            <a:r>
-              <a:rPr sz="1425" b="0">
-                <a:solidFill>
-                  <a:srgbClr val="4A5568"/>
-                </a:solidFill>
-                <a:latin typeface="Microsoft YaHei"/>
-              </a:rPr>
-              <a:t>报告文件，答辩现场可逐条演示。</a:t>
-            </a:r>
-          </a:p>
-        </p:txBody>
-      </p:sp>
-      <p:sp>
-        <p:nvSpPr>
-          <p:cNvPr id="9" name="Rounded Rectangle 8"/>
-          <p:cNvSpPr/>
-          <p:nvPr/>
-        </p:nvSpPr>
-        <p:spPr>
-          <a:xfrm>
-            <a:off x="4610100" y="1028700"/>
-            <a:ext cx="7200900" cy="628650"/>
-          </a:xfrm>
-          <a:prstGeom prst="roundRect">
-            <a:avLst>
-              <a:gd name="adj" fmla="val 15151"/>
-            </a:avLst>
-          </a:prstGeom>
-          <a:solidFill>
-            <a:srgbClr val="F7F9FC"/>
+            <a:srgbClr val="FFFFFF"/>
           </a:solidFill>
           <a:ln w="12700">
             <a:solidFill>
@@ -18128,100 +18585,61 @@
       </p:sp>
       <p:sp>
         <p:nvSpPr>
-          <p:cNvPr id="10" name="TextBox 9"/>
-          <p:cNvSpPr txBox="1"/>
-          <p:nvPr/>
-        </p:nvSpPr>
-        <p:spPr>
-          <a:xfrm>
-            <a:off x="4838700" y="1028700"/>
-            <a:ext cx="5334000" cy="628650"/>
-          </a:xfrm>
-          <a:prstGeom prst="rect">
-            <a:avLst/>
-          </a:prstGeom>
-          <a:noFill/>
-        </p:spPr>
-        <p:txBody>
-          <a:bodyPr wrap="square" lIns="0" rIns="0" tIns="0" bIns="0" anchor="ctr">
-            <a:spAutoFit/>
-          </a:bodyPr>
-          <a:lstStyle/>
-          <a:p>
-            <a:pPr algn="l">
+          <p:cNvPr id="8" name="TextBox 7"/>
+          <p:cNvSpPr txBox="1"/>
+          <p:nvPr/>
+        </p:nvSpPr>
+        <p:spPr>
+          <a:xfrm>
+            <a:off x="4476750" y="4629150"/>
+            <a:ext cx="1028700" cy="381000"/>
+          </a:xfrm>
+          <a:prstGeom prst="rect">
+            <a:avLst/>
+          </a:prstGeom>
+          <a:noFill/>
+        </p:spPr>
+        <p:txBody>
+          <a:bodyPr wrap="square" lIns="0" rIns="0" tIns="0" bIns="0" anchor="ctr">
+            <a:spAutoFit/>
+          </a:bodyPr>
+          <a:lstStyle/>
+          <a:p>
+            <a:pPr algn="ctr">
               <a:lnSpc>
                 <a:spcPct val="130000"/>
               </a:lnSpc>
             </a:pPr>
             <a:r>
-              <a:rPr sz="1575" b="0">
+              <a:rPr sz="1425" b="0">
                 <a:solidFill>
                   <a:srgbClr val="1A2230"/>
                 </a:solidFill>
                 <a:latin typeface="Microsoft YaHei"/>
               </a:rPr>
-              <a:t>Java 单元 · 架构守卫 · 行为驱动</a:t>
-            </a:r>
-          </a:p>
-        </p:txBody>
-      </p:sp>
-      <p:sp>
-        <p:nvSpPr>
-          <p:cNvPr id="11" name="TextBox 10"/>
-          <p:cNvSpPr txBox="1"/>
-          <p:nvPr/>
-        </p:nvSpPr>
-        <p:spPr>
-          <a:xfrm>
-            <a:off x="10287000" y="1028700"/>
-            <a:ext cx="1333500" cy="628650"/>
-          </a:xfrm>
-          <a:prstGeom prst="rect">
-            <a:avLst/>
-          </a:prstGeom>
-          <a:noFill/>
-        </p:spPr>
-        <p:txBody>
-          <a:bodyPr wrap="square" lIns="0" rIns="0" tIns="0" bIns="0" anchor="ctr">
-            <a:spAutoFit/>
-          </a:bodyPr>
-          <a:lstStyle/>
-          <a:p>
-            <a:pPr algn="r">
-              <a:lnSpc>
-                <a:spcPct val="130000"/>
-              </a:lnSpc>
-            </a:pPr>
-            <a:r>
-              <a:rPr sz="2250" b="1">
-                <a:solidFill>
-                  <a:srgbClr val="1E4FA8"/>
-                </a:solidFill>
-                <a:latin typeface="Microsoft YaHei"/>
-              </a:rPr>
-              <a:t>73</a:t>
-            </a:r>
-          </a:p>
-        </p:txBody>
-      </p:sp>
-      <p:sp>
-        <p:nvSpPr>
-          <p:cNvPr id="12" name="Rounded Rectangle 11"/>
+              <a:t>六层检查</a:t>
+            </a:r>
+          </a:p>
+        </p:txBody>
+      </p:sp>
+      <p:sp>
+        <p:nvSpPr>
+          <p:cNvPr id="9" name="Rounded Rectangle 8"/>
           <p:cNvSpPr/>
           <p:nvPr/>
         </p:nvSpPr>
         <p:spPr>
           <a:xfrm>
-            <a:off x="4610100" y="1752600"/>
-            <a:ext cx="7200900" cy="628650"/>
+            <a:off x="5638800" y="4629150"/>
+            <a:ext cx="1028700" cy="381000"/>
           </a:xfrm>
           <a:prstGeom prst="roundRect">
             <a:avLst>
-              <a:gd name="adj" fmla="val 15151"/>
+              <a:gd name="adj" fmla="val 50000"/>
             </a:avLst>
           </a:prstGeom>
           <a:solidFill>
-            <a:srgbClr val="F7F9FC"/>
+            <a:srgbClr val="FFFFFF"/>
           </a:solidFill>
           <a:ln w="12700">
             <a:solidFill>
@@ -18254,100 +18672,61 @@
       </p:sp>
       <p:sp>
         <p:nvSpPr>
-          <p:cNvPr id="13" name="TextBox 12"/>
-          <p:cNvSpPr txBox="1"/>
-          <p:nvPr/>
-        </p:nvSpPr>
-        <p:spPr>
-          <a:xfrm>
-            <a:off x="4838700" y="1752600"/>
-            <a:ext cx="5334000" cy="628650"/>
-          </a:xfrm>
-          <a:prstGeom prst="rect">
-            <a:avLst/>
-          </a:prstGeom>
-          <a:noFill/>
-        </p:spPr>
-        <p:txBody>
-          <a:bodyPr wrap="square" lIns="0" rIns="0" tIns="0" bIns="0" anchor="ctr">
-            <a:spAutoFit/>
-          </a:bodyPr>
-          <a:lstStyle/>
-          <a:p>
-            <a:pPr algn="l">
+          <p:cNvPr id="10" name="TextBox 9"/>
+          <p:cNvSpPr txBox="1"/>
+          <p:nvPr/>
+        </p:nvSpPr>
+        <p:spPr>
+          <a:xfrm>
+            <a:off x="5638800" y="4629150"/>
+            <a:ext cx="1028700" cy="381000"/>
+          </a:xfrm>
+          <a:prstGeom prst="rect">
+            <a:avLst/>
+          </a:prstGeom>
+          <a:noFill/>
+        </p:spPr>
+        <p:txBody>
+          <a:bodyPr wrap="square" lIns="0" rIns="0" tIns="0" bIns="0" anchor="ctr">
+            <a:spAutoFit/>
+          </a:bodyPr>
+          <a:lstStyle/>
+          <a:p>
+            <a:pPr algn="ctr">
               <a:lnSpc>
                 <a:spcPct val="130000"/>
               </a:lnSpc>
             </a:pPr>
             <a:r>
-              <a:rPr sz="1575" b="0">
+              <a:rPr sz="1425" b="0">
                 <a:solidFill>
                   <a:srgbClr val="1A2230"/>
                 </a:solidFill>
                 <a:latin typeface="Microsoft YaHei"/>
               </a:rPr>
-              <a:t>集成测试（登录 / 权限 / 全流程）</a:t>
-            </a:r>
-          </a:p>
-        </p:txBody>
-      </p:sp>
-      <p:sp>
-        <p:nvSpPr>
-          <p:cNvPr id="14" name="TextBox 13"/>
-          <p:cNvSpPr txBox="1"/>
-          <p:nvPr/>
-        </p:nvSpPr>
-        <p:spPr>
-          <a:xfrm>
-            <a:off x="10287000" y="1752600"/>
-            <a:ext cx="1333500" cy="628650"/>
-          </a:xfrm>
-          <a:prstGeom prst="rect">
-            <a:avLst/>
-          </a:prstGeom>
-          <a:noFill/>
-        </p:spPr>
-        <p:txBody>
-          <a:bodyPr wrap="square" lIns="0" rIns="0" tIns="0" bIns="0" anchor="ctr">
-            <a:spAutoFit/>
-          </a:bodyPr>
-          <a:lstStyle/>
-          <a:p>
-            <a:pPr algn="r">
-              <a:lnSpc>
-                <a:spcPct val="130000"/>
-              </a:lnSpc>
-            </a:pPr>
-            <a:r>
-              <a:rPr sz="2250" b="1">
-                <a:solidFill>
-                  <a:srgbClr val="1E4FA8"/>
-                </a:solidFill>
-                <a:latin typeface="Microsoft YaHei"/>
-              </a:rPr>
-              <a:t>68</a:t>
-            </a:r>
-          </a:p>
-        </p:txBody>
-      </p:sp>
-      <p:sp>
-        <p:nvSpPr>
-          <p:cNvPr id="15" name="Rounded Rectangle 14"/>
+              <a:t>缺陷根因</a:t>
+            </a:r>
+          </a:p>
+        </p:txBody>
+      </p:sp>
+      <p:sp>
+        <p:nvSpPr>
+          <p:cNvPr id="11" name="Rounded Rectangle 10"/>
           <p:cNvSpPr/>
           <p:nvPr/>
         </p:nvSpPr>
         <p:spPr>
           <a:xfrm>
-            <a:off x="4610100" y="2476500"/>
-            <a:ext cx="7200900" cy="628650"/>
+            <a:off x="6800850" y="4629150"/>
+            <a:ext cx="1028700" cy="381000"/>
           </a:xfrm>
           <a:prstGeom prst="roundRect">
             <a:avLst>
-              <a:gd name="adj" fmla="val 15151"/>
+              <a:gd name="adj" fmla="val 50000"/>
             </a:avLst>
           </a:prstGeom>
           <a:solidFill>
-            <a:srgbClr val="F7F9FC"/>
+            <a:srgbClr val="FFFFFF"/>
           </a:solidFill>
           <a:ln w="12700">
             <a:solidFill>
@@ -18380,631 +18759,46 @@
       </p:sp>
       <p:sp>
         <p:nvSpPr>
-          <p:cNvPr id="16" name="TextBox 15"/>
-          <p:cNvSpPr txBox="1"/>
-          <p:nvPr/>
-        </p:nvSpPr>
-        <p:spPr>
-          <a:xfrm>
-            <a:off x="4838700" y="2476500"/>
-            <a:ext cx="5334000" cy="628650"/>
-          </a:xfrm>
-          <a:prstGeom prst="rect">
-            <a:avLst/>
-          </a:prstGeom>
-          <a:noFill/>
-        </p:spPr>
-        <p:txBody>
-          <a:bodyPr wrap="square" lIns="0" rIns="0" tIns="0" bIns="0" anchor="ctr">
-            <a:spAutoFit/>
-          </a:bodyPr>
-          <a:lstStyle/>
-          <a:p>
-            <a:pPr algn="l">
+          <p:cNvPr id="12" name="TextBox 11"/>
+          <p:cNvSpPr txBox="1"/>
+          <p:nvPr/>
+        </p:nvSpPr>
+        <p:spPr>
+          <a:xfrm>
+            <a:off x="6800850" y="4629150"/>
+            <a:ext cx="1028700" cy="381000"/>
+          </a:xfrm>
+          <a:prstGeom prst="rect">
+            <a:avLst/>
+          </a:prstGeom>
+          <a:noFill/>
+        </p:spPr>
+        <p:txBody>
+          <a:bodyPr wrap="square" lIns="0" rIns="0" tIns="0" bIns="0" anchor="ctr">
+            <a:spAutoFit/>
+          </a:bodyPr>
+          <a:lstStyle/>
+          <a:p>
+            <a:pPr algn="ctr">
               <a:lnSpc>
                 <a:spcPct val="130000"/>
               </a:lnSpc>
             </a:pPr>
             <a:r>
-              <a:rPr sz="1575" b="0">
+              <a:rPr sz="1425" b="0">
                 <a:solidFill>
                   <a:srgbClr val="1A2230"/>
                 </a:solidFill>
                 <a:latin typeface="Microsoft YaHei"/>
               </a:rPr>
-              <a:t>前端静态检查（防按钮无响应）</a:t>
-            </a:r>
-          </a:p>
-        </p:txBody>
-      </p:sp>
-      <p:sp>
-        <p:nvSpPr>
-          <p:cNvPr id="17" name="TextBox 16"/>
-          <p:cNvSpPr txBox="1"/>
-          <p:nvPr/>
-        </p:nvSpPr>
-        <p:spPr>
-          <a:xfrm>
-            <a:off x="10287000" y="2476500"/>
-            <a:ext cx="1333500" cy="628650"/>
-          </a:xfrm>
-          <a:prstGeom prst="rect">
-            <a:avLst/>
-          </a:prstGeom>
-          <a:noFill/>
-        </p:spPr>
-        <p:txBody>
-          <a:bodyPr wrap="square" lIns="0" rIns="0" tIns="0" bIns="0" anchor="ctr">
-            <a:spAutoFit/>
-          </a:bodyPr>
-          <a:lstStyle/>
-          <a:p>
-            <a:pPr algn="r">
-              <a:lnSpc>
-                <a:spcPct val="130000"/>
-              </a:lnSpc>
-            </a:pPr>
-            <a:r>
-              <a:rPr sz="2250" b="1">
-                <a:solidFill>
-                  <a:srgbClr val="1E4FA8"/>
-                </a:solidFill>
-                <a:latin typeface="Microsoft YaHei"/>
-              </a:rPr>
-              <a:t>5</a:t>
-            </a:r>
-          </a:p>
-        </p:txBody>
-      </p:sp>
-      <p:sp>
-        <p:nvSpPr>
-          <p:cNvPr id="18" name="Rounded Rectangle 17"/>
-          <p:cNvSpPr/>
-          <p:nvPr/>
-        </p:nvSpPr>
-        <p:spPr>
-          <a:xfrm>
-            <a:off x="4610100" y="3200400"/>
-            <a:ext cx="7200900" cy="628650"/>
-          </a:xfrm>
-          <a:prstGeom prst="roundRect">
-            <a:avLst>
-              <a:gd name="adj" fmla="val 15151"/>
-            </a:avLst>
-          </a:prstGeom>
-          <a:solidFill>
-            <a:srgbClr val="F7F9FC"/>
-          </a:solidFill>
-          <a:ln w="12700">
-            <a:solidFill>
-              <a:srgbClr val="D6DCE5"/>
-            </a:solidFill>
-          </a:ln>
-          <a:effectLst/>
-        </p:spPr>
-        <p:style>
-          <a:lnRef idx="1">
-            <a:schemeClr val="accent1"/>
-          </a:lnRef>
-          <a:fillRef idx="3">
-            <a:schemeClr val="accent1"/>
-          </a:fillRef>
-          <a:effectRef idx="2">
-            <a:schemeClr val="accent1"/>
-          </a:effectRef>
-          <a:fontRef idx="minor">
-            <a:schemeClr val="lt1"/>
-          </a:fontRef>
-        </p:style>
-        <p:txBody>
-          <a:bodyPr rtlCol="0" anchor="ctr" wrap="square"/>
-          <a:lstStyle/>
-          <a:p>
-            <a:pPr algn="ctr"/>
-          </a:p>
-        </p:txBody>
-      </p:sp>
-      <p:sp>
-        <p:nvSpPr>
-          <p:cNvPr id="19" name="TextBox 18"/>
-          <p:cNvSpPr txBox="1"/>
-          <p:nvPr/>
-        </p:nvSpPr>
-        <p:spPr>
-          <a:xfrm>
-            <a:off x="4838700" y="3200400"/>
-            <a:ext cx="5334000" cy="628650"/>
-          </a:xfrm>
-          <a:prstGeom prst="rect">
-            <a:avLst/>
-          </a:prstGeom>
-          <a:noFill/>
-        </p:spPr>
-        <p:txBody>
-          <a:bodyPr wrap="square" lIns="0" rIns="0" tIns="0" bIns="0" anchor="ctr">
-            <a:spAutoFit/>
-          </a:bodyPr>
-          <a:lstStyle/>
-          <a:p>
-            <a:pPr algn="l">
-              <a:lnSpc>
-                <a:spcPct val="130000"/>
-              </a:lnSpc>
-            </a:pPr>
-            <a:r>
-              <a:rPr sz="1575" b="0">
-                <a:solidFill>
-                  <a:srgbClr val="1A2230"/>
-                </a:solidFill>
-                <a:latin typeface="Microsoft YaHei"/>
-              </a:rPr>
-              <a:t>真实浏览器测试（自动点击验证）</a:t>
-            </a:r>
-          </a:p>
-        </p:txBody>
-      </p:sp>
-      <p:sp>
-        <p:nvSpPr>
-          <p:cNvPr id="20" name="TextBox 19"/>
-          <p:cNvSpPr txBox="1"/>
-          <p:nvPr/>
-        </p:nvSpPr>
-        <p:spPr>
-          <a:xfrm>
-            <a:off x="10287000" y="3200400"/>
-            <a:ext cx="1333500" cy="628650"/>
-          </a:xfrm>
-          <a:prstGeom prst="rect">
-            <a:avLst/>
-          </a:prstGeom>
-          <a:noFill/>
-        </p:spPr>
-        <p:txBody>
-          <a:bodyPr wrap="square" lIns="0" rIns="0" tIns="0" bIns="0" anchor="ctr">
-            <a:spAutoFit/>
-          </a:bodyPr>
-          <a:lstStyle/>
-          <a:p>
-            <a:pPr algn="r">
-              <a:lnSpc>
-                <a:spcPct val="130000"/>
-              </a:lnSpc>
-            </a:pPr>
-            <a:r>
-              <a:rPr sz="2250" b="1">
-                <a:solidFill>
-                  <a:srgbClr val="1E4FA8"/>
-                </a:solidFill>
-                <a:latin typeface="Microsoft YaHei"/>
-              </a:rPr>
-              <a:t>44</a:t>
-            </a:r>
-          </a:p>
-        </p:txBody>
-      </p:sp>
-      <p:sp>
-        <p:nvSpPr>
-          <p:cNvPr id="21" name="Rounded Rectangle 20"/>
-          <p:cNvSpPr/>
-          <p:nvPr/>
-        </p:nvSpPr>
-        <p:spPr>
-          <a:xfrm>
-            <a:off x="4610100" y="3924300"/>
-            <a:ext cx="7200900" cy="628650"/>
-          </a:xfrm>
-          <a:prstGeom prst="roundRect">
-            <a:avLst>
-              <a:gd name="adj" fmla="val 15151"/>
-            </a:avLst>
-          </a:prstGeom>
-          <a:solidFill>
-            <a:srgbClr val="F7F9FC"/>
-          </a:solidFill>
-          <a:ln w="12700">
-            <a:solidFill>
-              <a:srgbClr val="D6DCE5"/>
-            </a:solidFill>
-          </a:ln>
-          <a:effectLst/>
-        </p:spPr>
-        <p:style>
-          <a:lnRef idx="1">
-            <a:schemeClr val="accent1"/>
-          </a:lnRef>
-          <a:fillRef idx="3">
-            <a:schemeClr val="accent1"/>
-          </a:fillRef>
-          <a:effectRef idx="2">
-            <a:schemeClr val="accent1"/>
-          </a:effectRef>
-          <a:fontRef idx="minor">
-            <a:schemeClr val="lt1"/>
-          </a:fontRef>
-        </p:style>
-        <p:txBody>
-          <a:bodyPr rtlCol="0" anchor="ctr" wrap="square"/>
-          <a:lstStyle/>
-          <a:p>
-            <a:pPr algn="ctr"/>
-          </a:p>
-        </p:txBody>
-      </p:sp>
-      <p:sp>
-        <p:nvSpPr>
-          <p:cNvPr id="22" name="TextBox 21"/>
-          <p:cNvSpPr txBox="1"/>
-          <p:nvPr/>
-        </p:nvSpPr>
-        <p:spPr>
-          <a:xfrm>
-            <a:off x="4838700" y="3924300"/>
-            <a:ext cx="5334000" cy="628650"/>
-          </a:xfrm>
-          <a:prstGeom prst="rect">
-            <a:avLst/>
-          </a:prstGeom>
-          <a:noFill/>
-        </p:spPr>
-        <p:txBody>
-          <a:bodyPr wrap="square" lIns="0" rIns="0" tIns="0" bIns="0" anchor="ctr">
-            <a:spAutoFit/>
-          </a:bodyPr>
-          <a:lstStyle/>
-          <a:p>
-            <a:pPr algn="l">
-              <a:lnSpc>
-                <a:spcPct val="130000"/>
-              </a:lnSpc>
-            </a:pPr>
-            <a:r>
-              <a:rPr sz="1575" b="0">
-                <a:solidFill>
-                  <a:srgbClr val="1A2230"/>
-                </a:solidFill>
-                <a:latin typeface="Microsoft YaHei"/>
-              </a:rPr>
-              <a:t>参考实现行为驱动（对照）</a:t>
-            </a:r>
-          </a:p>
-        </p:txBody>
-      </p:sp>
-      <p:sp>
-        <p:nvSpPr>
-          <p:cNvPr id="23" name="TextBox 22"/>
-          <p:cNvSpPr txBox="1"/>
-          <p:nvPr/>
-        </p:nvSpPr>
-        <p:spPr>
-          <a:xfrm>
-            <a:off x="10287000" y="3924300"/>
-            <a:ext cx="1333500" cy="628650"/>
-          </a:xfrm>
-          <a:prstGeom prst="rect">
-            <a:avLst/>
-          </a:prstGeom>
-          <a:noFill/>
-        </p:spPr>
-        <p:txBody>
-          <a:bodyPr wrap="square" lIns="0" rIns="0" tIns="0" bIns="0" anchor="ctr">
-            <a:spAutoFit/>
-          </a:bodyPr>
-          <a:lstStyle/>
-          <a:p>
-            <a:pPr algn="r">
-              <a:lnSpc>
-                <a:spcPct val="130000"/>
-              </a:lnSpc>
-            </a:pPr>
-            <a:r>
-              <a:rPr sz="2250" b="1">
-                <a:solidFill>
-                  <a:srgbClr val="1E4FA8"/>
-                </a:solidFill>
-                <a:latin typeface="Microsoft YaHei"/>
-              </a:rPr>
-              <a:t>18</a:t>
-            </a:r>
-          </a:p>
-        </p:txBody>
-      </p:sp>
-      <p:sp>
-        <p:nvSpPr>
-          <p:cNvPr id="24" name="Rounded Rectangle 23"/>
-          <p:cNvSpPr/>
-          <p:nvPr/>
-        </p:nvSpPr>
-        <p:spPr>
-          <a:xfrm>
-            <a:off x="4610100" y="4648200"/>
-            <a:ext cx="7200900" cy="628650"/>
-          </a:xfrm>
-          <a:prstGeom prst="roundRect">
-            <a:avLst>
-              <a:gd name="adj" fmla="val 15151"/>
-            </a:avLst>
-          </a:prstGeom>
-          <a:solidFill>
-            <a:srgbClr val="F7F9FC"/>
-          </a:solidFill>
-          <a:ln w="12700">
-            <a:solidFill>
-              <a:srgbClr val="D6DCE5"/>
-            </a:solidFill>
-          </a:ln>
-          <a:effectLst/>
-        </p:spPr>
-        <p:style>
-          <a:lnRef idx="1">
-            <a:schemeClr val="accent1"/>
-          </a:lnRef>
-          <a:fillRef idx="3">
-            <a:schemeClr val="accent1"/>
-          </a:fillRef>
-          <a:effectRef idx="2">
-            <a:schemeClr val="accent1"/>
-          </a:effectRef>
-          <a:fontRef idx="minor">
-            <a:schemeClr val="lt1"/>
-          </a:fontRef>
-        </p:style>
-        <p:txBody>
-          <a:bodyPr rtlCol="0" anchor="ctr" wrap="square"/>
-          <a:lstStyle/>
-          <a:p>
-            <a:pPr algn="ctr"/>
-          </a:p>
-        </p:txBody>
-      </p:sp>
-      <p:sp>
-        <p:nvSpPr>
-          <p:cNvPr id="25" name="TextBox 24"/>
-          <p:cNvSpPr txBox="1"/>
-          <p:nvPr/>
-        </p:nvSpPr>
-        <p:spPr>
-          <a:xfrm>
-            <a:off x="4838700" y="4648200"/>
-            <a:ext cx="5334000" cy="628650"/>
-          </a:xfrm>
-          <a:prstGeom prst="rect">
-            <a:avLst/>
-          </a:prstGeom>
-          <a:noFill/>
-        </p:spPr>
-        <p:txBody>
-          <a:bodyPr wrap="square" lIns="0" rIns="0" tIns="0" bIns="0" anchor="ctr">
-            <a:spAutoFit/>
-          </a:bodyPr>
-          <a:lstStyle/>
-          <a:p>
-            <a:pPr algn="l">
-              <a:lnSpc>
-                <a:spcPct val="130000"/>
-              </a:lnSpc>
-            </a:pPr>
-            <a:r>
-              <a:rPr sz="1575" b="0">
-                <a:solidFill>
-                  <a:srgbClr val="1A2230"/>
-                </a:solidFill>
-                <a:latin typeface="Microsoft YaHei"/>
-              </a:rPr>
-              <a:t>参考实现接口冒烟（对照）</a:t>
-            </a:r>
-          </a:p>
-        </p:txBody>
-      </p:sp>
-      <p:sp>
-        <p:nvSpPr>
-          <p:cNvPr id="26" name="TextBox 25"/>
-          <p:cNvSpPr txBox="1"/>
-          <p:nvPr/>
-        </p:nvSpPr>
-        <p:spPr>
-          <a:xfrm>
-            <a:off x="10287000" y="4648200"/>
-            <a:ext cx="1333500" cy="628650"/>
-          </a:xfrm>
-          <a:prstGeom prst="rect">
-            <a:avLst/>
-          </a:prstGeom>
-          <a:noFill/>
-        </p:spPr>
-        <p:txBody>
-          <a:bodyPr wrap="square" lIns="0" rIns="0" tIns="0" bIns="0" anchor="ctr">
-            <a:spAutoFit/>
-          </a:bodyPr>
-          <a:lstStyle/>
-          <a:p>
-            <a:pPr algn="r">
-              <a:lnSpc>
-                <a:spcPct val="130000"/>
-              </a:lnSpc>
-            </a:pPr>
-            <a:r>
-              <a:rPr sz="2250" b="1">
-                <a:solidFill>
-                  <a:srgbClr val="1E4FA8"/>
-                </a:solidFill>
-                <a:latin typeface="Microsoft YaHei"/>
-              </a:rPr>
-              <a:t>18</a:t>
-            </a:r>
-          </a:p>
-        </p:txBody>
-      </p:sp>
-      <p:sp>
-        <p:nvSpPr>
-          <p:cNvPr id="27" name="Rounded Rectangle 26"/>
-          <p:cNvSpPr/>
-          <p:nvPr/>
-        </p:nvSpPr>
-        <p:spPr>
-          <a:xfrm>
-            <a:off x="381000" y="5505450"/>
-            <a:ext cx="11430000" cy="590550"/>
-          </a:xfrm>
-          <a:prstGeom prst="roundRect">
-            <a:avLst>
-              <a:gd name="adj" fmla="val 12903"/>
-            </a:avLst>
-          </a:prstGeom>
-          <a:solidFill>
-            <a:srgbClr val="E8EFF8"/>
-          </a:solidFill>
-          <a:ln>
-            <a:noFill/>
-          </a:ln>
-          <a:effectLst/>
-        </p:spPr>
-        <p:style>
-          <a:lnRef idx="1">
-            <a:schemeClr val="accent1"/>
-          </a:lnRef>
-          <a:fillRef idx="3">
-            <a:schemeClr val="accent1"/>
-          </a:fillRef>
-          <a:effectRef idx="2">
-            <a:schemeClr val="accent1"/>
-          </a:effectRef>
-          <a:fontRef idx="minor">
-            <a:schemeClr val="lt1"/>
-          </a:fontRef>
-        </p:style>
-        <p:txBody>
-          <a:bodyPr rtlCol="0" anchor="ctr" wrap="square"/>
-          <a:lstStyle/>
-          <a:p>
-            <a:pPr algn="ctr"/>
-          </a:p>
-        </p:txBody>
-      </p:sp>
-      <p:sp>
-        <p:nvSpPr>
-          <p:cNvPr id="28" name="Rectangle 27"/>
-          <p:cNvSpPr/>
-          <p:nvPr/>
-        </p:nvSpPr>
-        <p:spPr>
-          <a:xfrm>
-            <a:off x="381000" y="5505450"/>
-            <a:ext cx="38100" cy="590550"/>
-          </a:xfrm>
-          <a:prstGeom prst="rect">
-            <a:avLst/>
-          </a:prstGeom>
-          <a:solidFill>
-            <a:srgbClr val="1E4FA8"/>
-          </a:solidFill>
-          <a:ln>
-            <a:noFill/>
-          </a:ln>
-          <a:effectLst/>
-        </p:spPr>
-        <p:style>
-          <a:lnRef idx="1">
-            <a:schemeClr val="accent1"/>
-          </a:lnRef>
-          <a:fillRef idx="3">
-            <a:schemeClr val="accent1"/>
-          </a:fillRef>
-          <a:effectRef idx="2">
-            <a:schemeClr val="accent1"/>
-          </a:effectRef>
-          <a:fontRef idx="minor">
-            <a:schemeClr val="lt1"/>
-          </a:fontRef>
-        </p:style>
-        <p:txBody>
-          <a:bodyPr rtlCol="0" anchor="ctr" wrap="square"/>
-          <a:lstStyle/>
-          <a:p>
-            <a:pPr algn="ctr"/>
-          </a:p>
-        </p:txBody>
-      </p:sp>
-      <p:sp>
-        <p:nvSpPr>
-          <p:cNvPr id="29" name="TextBox 28"/>
-          <p:cNvSpPr txBox="1"/>
-          <p:nvPr/>
-        </p:nvSpPr>
-        <p:spPr>
-          <a:xfrm>
-            <a:off x="533400" y="5505450"/>
-            <a:ext cx="914400" cy="590550"/>
-          </a:xfrm>
-          <a:prstGeom prst="rect">
-            <a:avLst/>
-          </a:prstGeom>
-          <a:noFill/>
-        </p:spPr>
-        <p:txBody>
-          <a:bodyPr wrap="square" lIns="0" rIns="0" tIns="0" bIns="0" anchor="ctr">
-            <a:spAutoFit/>
-          </a:bodyPr>
-          <a:lstStyle/>
-          <a:p>
-            <a:pPr algn="l">
-              <a:lnSpc>
-                <a:spcPct val="130000"/>
-              </a:lnSpc>
-            </a:pPr>
-            <a:r>
-              <a:rPr sz="1500" b="1">
-                <a:solidFill>
-                  <a:srgbClr val="1E4FA8"/>
-                </a:solidFill>
-                <a:latin typeface="Microsoft YaHei"/>
-              </a:rPr>
-              <a:t>判断</a:t>
-            </a:r>
-          </a:p>
-        </p:txBody>
-      </p:sp>
-      <p:sp>
-        <p:nvSpPr>
-          <p:cNvPr id="30" name="TextBox 29"/>
-          <p:cNvSpPr txBox="1"/>
-          <p:nvPr/>
-        </p:nvSpPr>
-        <p:spPr>
-          <a:xfrm>
-            <a:off x="1504950" y="5505450"/>
-            <a:ext cx="10134600" cy="590550"/>
-          </a:xfrm>
-          <a:prstGeom prst="rect">
-            <a:avLst/>
-          </a:prstGeom>
-          <a:noFill/>
-        </p:spPr>
-        <p:txBody>
-          <a:bodyPr wrap="square" lIns="0" rIns="0" tIns="0" bIns="0" anchor="ctr">
-            <a:spAutoFit/>
-          </a:bodyPr>
-          <a:lstStyle/>
-          <a:p>
-            <a:pPr algn="l">
-              <a:lnSpc>
-                <a:spcPct val="135000"/>
-              </a:lnSpc>
-            </a:pPr>
-            <a:r>
-              <a:rPr sz="1500" b="0">
-                <a:solidFill>
-                  <a:srgbClr val="1A2230"/>
-                </a:solidFill>
-                <a:latin typeface="Microsoft YaHei"/>
-              </a:rPr>
-              <a:t>测试要能挡住"点了没反应"这类问题，所以既做静态检查，也做真实浏览器点击</a:t>
-            </a:r>
-          </a:p>
-        </p:txBody>
-      </p:sp>
-      <p:sp>
-        <p:nvSpPr>
-          <p:cNvPr id="31" name="Rectangle 30"/>
+              <a:t>防回归</a:t>
+            </a:r>
+          </a:p>
+        </p:txBody>
+      </p:sp>
+      <p:sp>
+        <p:nvSpPr>
+          <p:cNvPr id="13" name="Rectangle 12"/>
           <p:cNvSpPr/>
           <p:nvPr/>
         </p:nvSpPr>
@@ -19048,7 +18842,7 @@
       </p:sp>
       <p:sp>
         <p:nvSpPr>
-          <p:cNvPr id="32" name="TextBox 31"/>
+          <p:cNvPr id="14" name="TextBox 13"/>
           <p:cNvSpPr txBox="1"/>
           <p:nvPr/>
         </p:nvSpPr>
@@ -19080,14 +18874,14 @@
                 </a:solidFill>
                 <a:latin typeface="Microsoft YaHei"/>
               </a:rPr>
-              <a:t>来源：五份测试报告文件（verify/ 与 app/ 目录）</a:t>
-            </a:r>
-          </a:p>
-        </p:txBody>
-      </p:sp>
-      <p:sp>
-        <p:nvSpPr>
-          <p:cNvPr id="33" name="TextBox 32"/>
+              <a:t>健身房运营管理系统 · 课程答辩</a:t>
+            </a:r>
+          </a:p>
+        </p:txBody>
+      </p:sp>
+      <p:sp>
+        <p:nvSpPr>
+          <p:cNvPr id="15" name="TextBox 14"/>
           <p:cNvSpPr txBox="1"/>
           <p:nvPr/>
         </p:nvSpPr>
@@ -19119,7 +18913,7 @@
                 </a:solidFill>
                 <a:latin typeface="Microsoft YaHei"/>
               </a:rPr>
-              <a:t>20 / 24</a:t>
+              <a:t>20 / 25</a:t>
             </a:r>
           </a:p>
         </p:txBody>
@@ -19228,7 +19022,7 @@
                 </a:solidFill>
                 <a:latin typeface="Microsoft YaHei"/>
               </a:rPr>
-              <a:t>15 个缺陷：把踩过的坑讲清楚</a:t>
+              <a:t>243 项检查，覆盖七个层次</a:t>
             </a:r>
           </a:p>
         </p:txBody>
@@ -19281,11 +19075,206 @@
         <p:spPr>
           <a:xfrm>
             <a:off x="381000" y="1028700"/>
-            <a:ext cx="2381250" cy="1104900"/>
+            <a:ext cx="4000500" cy="4305300"/>
           </a:xfrm>
           <a:prstGeom prst="roundRect">
             <a:avLst>
-              <a:gd name="adj" fmla="val 8620"/>
+              <a:gd name="adj" fmla="val 2857"/>
+            </a:avLst>
+          </a:prstGeom>
+          <a:solidFill>
+            <a:srgbClr val="E8EFF8"/>
+          </a:solidFill>
+          <a:ln>
+            <a:noFill/>
+          </a:ln>
+          <a:effectLst/>
+        </p:spPr>
+        <p:style>
+          <a:lnRef idx="1">
+            <a:schemeClr val="accent1"/>
+          </a:lnRef>
+          <a:fillRef idx="3">
+            <a:schemeClr val="accent1"/>
+          </a:fillRef>
+          <a:effectRef idx="2">
+            <a:schemeClr val="accent1"/>
+          </a:effectRef>
+          <a:fontRef idx="minor">
+            <a:schemeClr val="lt1"/>
+          </a:fontRef>
+        </p:style>
+        <p:txBody>
+          <a:bodyPr rtlCol="0" anchor="ctr" wrap="square"/>
+          <a:lstStyle/>
+          <a:p>
+            <a:pPr algn="ctr"/>
+          </a:p>
+        </p:txBody>
+      </p:sp>
+      <p:sp>
+        <p:nvSpPr>
+          <p:cNvPr id="6" name="TextBox 5"/>
+          <p:cNvSpPr txBox="1"/>
+          <p:nvPr/>
+        </p:nvSpPr>
+        <p:spPr>
+          <a:xfrm>
+            <a:off x="571500" y="1390650"/>
+            <a:ext cx="3619500" cy="1447800"/>
+          </a:xfrm>
+          <a:prstGeom prst="rect">
+            <a:avLst/>
+          </a:prstGeom>
+          <a:noFill/>
+        </p:spPr>
+        <p:txBody>
+          <a:bodyPr wrap="square" lIns="0" rIns="0" tIns="0" bIns="0" anchor="ctr">
+            <a:spAutoFit/>
+          </a:bodyPr>
+          <a:lstStyle/>
+          <a:p>
+            <a:pPr algn="l">
+              <a:lnSpc>
+                <a:spcPct val="100000"/>
+              </a:lnSpc>
+            </a:pPr>
+            <a:r>
+              <a:rPr sz="8700" b="1">
+                <a:solidFill>
+                  <a:srgbClr val="0E3F8C"/>
+                </a:solidFill>
+                <a:latin typeface="Microsoft YaHei"/>
+              </a:rPr>
+              <a:t>243</a:t>
+            </a:r>
+          </a:p>
+        </p:txBody>
+      </p:sp>
+      <p:sp>
+        <p:nvSpPr>
+          <p:cNvPr id="7" name="TextBox 6"/>
+          <p:cNvSpPr txBox="1"/>
+          <p:nvPr/>
+        </p:nvSpPr>
+        <p:spPr>
+          <a:xfrm>
+            <a:off x="571500" y="2914650"/>
+            <a:ext cx="3619500" cy="381000"/>
+          </a:xfrm>
+          <a:prstGeom prst="rect">
+            <a:avLst/>
+          </a:prstGeom>
+          <a:noFill/>
+        </p:spPr>
+        <p:txBody>
+          <a:bodyPr wrap="square" lIns="0" rIns="0" tIns="0" bIns="0" anchor="ctr">
+            <a:spAutoFit/>
+          </a:bodyPr>
+          <a:lstStyle/>
+          <a:p>
+            <a:pPr algn="l">
+              <a:lnSpc>
+                <a:spcPct val="130000"/>
+              </a:lnSpc>
+            </a:pPr>
+            <a:r>
+              <a:rPr sz="1650" b="0">
+                <a:solidFill>
+                  <a:srgbClr val="1A2230"/>
+                </a:solidFill>
+                <a:latin typeface="Microsoft YaHei"/>
+              </a:rPr>
+              <a:t>项自动化检查全部通过</a:t>
+            </a:r>
+          </a:p>
+        </p:txBody>
+      </p:sp>
+      <p:sp>
+        <p:nvSpPr>
+          <p:cNvPr id="8" name="TextBox 7"/>
+          <p:cNvSpPr txBox="1"/>
+          <p:nvPr/>
+        </p:nvSpPr>
+        <p:spPr>
+          <a:xfrm>
+            <a:off x="571500" y="3390900"/>
+            <a:ext cx="3619500" cy="1714500"/>
+          </a:xfrm>
+          <a:prstGeom prst="rect">
+            <a:avLst/>
+          </a:prstGeom>
+          <a:noFill/>
+        </p:spPr>
+        <p:txBody>
+          <a:bodyPr wrap="square" lIns="0" rIns="0" tIns="0" bIns="0" anchor="t">
+            <a:spAutoFit/>
+          </a:bodyPr>
+          <a:lstStyle/>
+          <a:p>
+            <a:pPr algn="l">
+              <a:lnSpc>
+                <a:spcPct val="160000"/>
+              </a:lnSpc>
+            </a:pPr>
+            <a:r>
+              <a:rPr sz="1425" b="0">
+                <a:solidFill>
+                  <a:srgbClr val="4A5568"/>
+                </a:solidFill>
+                <a:latin typeface="Microsoft YaHei"/>
+              </a:rPr>
+              <a:t>从单元测试到真实浏览器点击、再到二维码反解，</a:t>
+            </a:r>
+          </a:p>
+          <a:p>
+            <a:pPr algn="l">
+              <a:lnSpc>
+                <a:spcPct val="160000"/>
+              </a:lnSpc>
+            </a:pPr>
+            <a:r>
+              <a:rPr sz="1425" b="0">
+                <a:solidFill>
+                  <a:srgbClr val="4A5568"/>
+                </a:solidFill>
+                <a:latin typeface="Microsoft YaHei"/>
+              </a:rPr>
+              <a:t>每一层都有可复现的执行命令与</a:t>
+            </a:r>
+          </a:p>
+          <a:p>
+            <a:pPr algn="l">
+              <a:lnSpc>
+                <a:spcPct val="160000"/>
+              </a:lnSpc>
+            </a:pPr>
+            <a:r>
+              <a:rPr sz="1425" b="0">
+                <a:solidFill>
+                  <a:srgbClr val="4A5568"/>
+                </a:solidFill>
+                <a:latin typeface="Microsoft YaHei"/>
+              </a:rPr>
+              <a:t>报告文件，答辩现场可逐条演示。</a:t>
+            </a:r>
+          </a:p>
+        </p:txBody>
+      </p:sp>
+      <p:sp>
+        <p:nvSpPr>
+          <p:cNvPr id="9" name="Rounded Rectangle 8"/>
+          <p:cNvSpPr/>
+          <p:nvPr/>
+        </p:nvSpPr>
+        <p:spPr>
+          <a:xfrm>
+            <a:off x="4610100" y="1028700"/>
+            <a:ext cx="7200900" cy="628650"/>
+          </a:xfrm>
+          <a:prstGeom prst="roundRect">
+            <a:avLst>
+              <a:gd name="adj" fmla="val 15151"/>
             </a:avLst>
           </a:prstGeom>
           <a:solidFill>
@@ -19322,14 +19311,14 @@
       </p:sp>
       <p:sp>
         <p:nvSpPr>
-          <p:cNvPr id="6" name="TextBox 5"/>
-          <p:cNvSpPr txBox="1"/>
-          <p:nvPr/>
-        </p:nvSpPr>
-        <p:spPr>
-          <a:xfrm>
-            <a:off x="590550" y="1162050"/>
-            <a:ext cx="1905000" cy="571500"/>
+          <p:cNvPr id="10" name="TextBox 9"/>
+          <p:cNvSpPr txBox="1"/>
+          <p:nvPr/>
+        </p:nvSpPr>
+        <p:spPr>
+          <a:xfrm>
+            <a:off x="4838700" y="1028700"/>
+            <a:ext cx="5334000" cy="628650"/>
           </a:xfrm>
           <a:prstGeom prst="rect">
             <a:avLst/>
@@ -19348,70 +19337,70 @@
               </a:lnSpc>
             </a:pPr>
             <a:r>
-              <a:rPr sz="3600" b="1">
-                <a:solidFill>
-                  <a:srgbClr val="D9534F"/>
-                </a:solidFill>
-                <a:latin typeface="Microsoft YaHei"/>
-              </a:rPr>
-              <a:t>2</a:t>
-            </a:r>
-          </a:p>
-        </p:txBody>
-      </p:sp>
-      <p:sp>
-        <p:nvSpPr>
-          <p:cNvPr id="7" name="TextBox 6"/>
-          <p:cNvSpPr txBox="1"/>
-          <p:nvPr/>
-        </p:nvSpPr>
-        <p:spPr>
-          <a:xfrm>
-            <a:off x="590550" y="1733550"/>
-            <a:ext cx="1905000" cy="285750"/>
-          </a:xfrm>
-          <a:prstGeom prst="rect">
-            <a:avLst/>
-          </a:prstGeom>
-          <a:noFill/>
-        </p:spPr>
-        <p:txBody>
-          <a:bodyPr wrap="square" lIns="0" rIns="0" tIns="0" bIns="0" anchor="ctr">
-            <a:spAutoFit/>
-          </a:bodyPr>
-          <a:lstStyle/>
-          <a:p>
-            <a:pPr algn="l">
+              <a:rPr sz="1575" b="0">
+                <a:solidFill>
+                  <a:srgbClr val="1A2230"/>
+                </a:solidFill>
+                <a:latin typeface="Microsoft YaHei"/>
+              </a:rPr>
+              <a:t>Java 单元 · 架构守卫 · 行为驱动</a:t>
+            </a:r>
+          </a:p>
+        </p:txBody>
+      </p:sp>
+      <p:sp>
+        <p:nvSpPr>
+          <p:cNvPr id="11" name="TextBox 10"/>
+          <p:cNvSpPr txBox="1"/>
+          <p:nvPr/>
+        </p:nvSpPr>
+        <p:spPr>
+          <a:xfrm>
+            <a:off x="10287000" y="1028700"/>
+            <a:ext cx="1333500" cy="628650"/>
+          </a:xfrm>
+          <a:prstGeom prst="rect">
+            <a:avLst/>
+          </a:prstGeom>
+          <a:noFill/>
+        </p:spPr>
+        <p:txBody>
+          <a:bodyPr wrap="square" lIns="0" rIns="0" tIns="0" bIns="0" anchor="ctr">
+            <a:spAutoFit/>
+          </a:bodyPr>
+          <a:lstStyle/>
+          <a:p>
+            <a:pPr algn="r">
               <a:lnSpc>
                 <a:spcPct val="130000"/>
               </a:lnSpc>
             </a:pPr>
             <a:r>
-              <a:rPr sz="1500" b="0">
-                <a:solidFill>
-                  <a:srgbClr val="1A2230"/>
-                </a:solidFill>
-                <a:latin typeface="Microsoft YaHei"/>
-              </a:rPr>
-              <a:t>严重缺陷</a:t>
-            </a:r>
-          </a:p>
-        </p:txBody>
-      </p:sp>
-      <p:sp>
-        <p:nvSpPr>
-          <p:cNvPr id="8" name="Rounded Rectangle 7"/>
+              <a:rPr sz="2250" b="1">
+                <a:solidFill>
+                  <a:srgbClr val="1E4FA8"/>
+                </a:solidFill>
+                <a:latin typeface="Microsoft YaHei"/>
+              </a:rPr>
+              <a:t>73</a:t>
+            </a:r>
+          </a:p>
+        </p:txBody>
+      </p:sp>
+      <p:sp>
+        <p:nvSpPr>
+          <p:cNvPr id="12" name="Rounded Rectangle 11"/>
           <p:cNvSpPr/>
           <p:nvPr/>
         </p:nvSpPr>
         <p:spPr>
           <a:xfrm>
-            <a:off x="2914650" y="1028700"/>
-            <a:ext cx="2381250" cy="1104900"/>
+            <a:off x="4610100" y="1752600"/>
+            <a:ext cx="7200900" cy="628650"/>
           </a:xfrm>
           <a:prstGeom prst="roundRect">
             <a:avLst>
-              <a:gd name="adj" fmla="val 8620"/>
+              <a:gd name="adj" fmla="val 15151"/>
             </a:avLst>
           </a:prstGeom>
           <a:solidFill>
@@ -19448,14 +19437,14 @@
       </p:sp>
       <p:sp>
         <p:nvSpPr>
-          <p:cNvPr id="9" name="TextBox 8"/>
-          <p:cNvSpPr txBox="1"/>
-          <p:nvPr/>
-        </p:nvSpPr>
-        <p:spPr>
-          <a:xfrm>
-            <a:off x="3124200" y="1162050"/>
-            <a:ext cx="1905000" cy="571500"/>
+          <p:cNvPr id="13" name="TextBox 12"/>
+          <p:cNvSpPr txBox="1"/>
+          <p:nvPr/>
+        </p:nvSpPr>
+        <p:spPr>
+          <a:xfrm>
+            <a:off x="4838700" y="1752600"/>
+            <a:ext cx="5334000" cy="628650"/>
           </a:xfrm>
           <a:prstGeom prst="rect">
             <a:avLst/>
@@ -19474,70 +19463,70 @@
               </a:lnSpc>
             </a:pPr>
             <a:r>
-              <a:rPr sz="3600" b="1">
+              <a:rPr sz="1575" b="0">
+                <a:solidFill>
+                  <a:srgbClr val="1A2230"/>
+                </a:solidFill>
+                <a:latin typeface="Microsoft YaHei"/>
+              </a:rPr>
+              <a:t>集成测试（登录 / 权限 / 全流程）</a:t>
+            </a:r>
+          </a:p>
+        </p:txBody>
+      </p:sp>
+      <p:sp>
+        <p:nvSpPr>
+          <p:cNvPr id="14" name="TextBox 13"/>
+          <p:cNvSpPr txBox="1"/>
+          <p:nvPr/>
+        </p:nvSpPr>
+        <p:spPr>
+          <a:xfrm>
+            <a:off x="10287000" y="1752600"/>
+            <a:ext cx="1333500" cy="628650"/>
+          </a:xfrm>
+          <a:prstGeom prst="rect">
+            <a:avLst/>
+          </a:prstGeom>
+          <a:noFill/>
+        </p:spPr>
+        <p:txBody>
+          <a:bodyPr wrap="square" lIns="0" rIns="0" tIns="0" bIns="0" anchor="ctr">
+            <a:spAutoFit/>
+          </a:bodyPr>
+          <a:lstStyle/>
+          <a:p>
+            <a:pPr algn="r">
+              <a:lnSpc>
+                <a:spcPct val="130000"/>
+              </a:lnSpc>
+            </a:pPr>
+            <a:r>
+              <a:rPr sz="2250" b="1">
                 <a:solidFill>
                   <a:srgbClr val="1E4FA8"/>
                 </a:solidFill>
                 <a:latin typeface="Microsoft YaHei"/>
               </a:rPr>
-              <a:t>9</a:t>
-            </a:r>
-          </a:p>
-        </p:txBody>
-      </p:sp>
-      <p:sp>
-        <p:nvSpPr>
-          <p:cNvPr id="10" name="TextBox 9"/>
-          <p:cNvSpPr txBox="1"/>
-          <p:nvPr/>
-        </p:nvSpPr>
-        <p:spPr>
-          <a:xfrm>
-            <a:off x="3124200" y="1733550"/>
-            <a:ext cx="1905000" cy="285750"/>
-          </a:xfrm>
-          <a:prstGeom prst="rect">
-            <a:avLst/>
-          </a:prstGeom>
-          <a:noFill/>
-        </p:spPr>
-        <p:txBody>
-          <a:bodyPr wrap="square" lIns="0" rIns="0" tIns="0" bIns="0" anchor="ctr">
-            <a:spAutoFit/>
-          </a:bodyPr>
-          <a:lstStyle/>
-          <a:p>
-            <a:pPr algn="l">
-              <a:lnSpc>
-                <a:spcPct val="130000"/>
-              </a:lnSpc>
-            </a:pPr>
-            <a:r>
-              <a:rPr sz="1500" b="0">
-                <a:solidFill>
-                  <a:srgbClr val="1A2230"/>
-                </a:solidFill>
-                <a:latin typeface="Microsoft YaHei"/>
-              </a:rPr>
-              <a:t>中等缺陷</a:t>
-            </a:r>
-          </a:p>
-        </p:txBody>
-      </p:sp>
-      <p:sp>
-        <p:nvSpPr>
-          <p:cNvPr id="11" name="Rounded Rectangle 10"/>
+              <a:t>68</a:t>
+            </a:r>
+          </a:p>
+        </p:txBody>
+      </p:sp>
+      <p:sp>
+        <p:nvSpPr>
+          <p:cNvPr id="15" name="Rounded Rectangle 14"/>
           <p:cNvSpPr/>
           <p:nvPr/>
         </p:nvSpPr>
         <p:spPr>
           <a:xfrm>
-            <a:off x="5448300" y="1028700"/>
-            <a:ext cx="2381250" cy="1104900"/>
+            <a:off x="4610100" y="2476500"/>
+            <a:ext cx="7200900" cy="628650"/>
           </a:xfrm>
           <a:prstGeom prst="roundRect">
             <a:avLst>
-              <a:gd name="adj" fmla="val 8620"/>
+              <a:gd name="adj" fmla="val 15151"/>
             </a:avLst>
           </a:prstGeom>
           <a:solidFill>
@@ -19574,6 +19563,1200 @@
       </p:sp>
       <p:sp>
         <p:nvSpPr>
+          <p:cNvPr id="16" name="TextBox 15"/>
+          <p:cNvSpPr txBox="1"/>
+          <p:nvPr/>
+        </p:nvSpPr>
+        <p:spPr>
+          <a:xfrm>
+            <a:off x="4838700" y="2476500"/>
+            <a:ext cx="5334000" cy="628650"/>
+          </a:xfrm>
+          <a:prstGeom prst="rect">
+            <a:avLst/>
+          </a:prstGeom>
+          <a:noFill/>
+        </p:spPr>
+        <p:txBody>
+          <a:bodyPr wrap="square" lIns="0" rIns="0" tIns="0" bIns="0" anchor="ctr">
+            <a:spAutoFit/>
+          </a:bodyPr>
+          <a:lstStyle/>
+          <a:p>
+            <a:pPr algn="l">
+              <a:lnSpc>
+                <a:spcPct val="130000"/>
+              </a:lnSpc>
+            </a:pPr>
+            <a:r>
+              <a:rPr sz="1575" b="0">
+                <a:solidFill>
+                  <a:srgbClr val="1A2230"/>
+                </a:solidFill>
+                <a:latin typeface="Microsoft YaHei"/>
+              </a:rPr>
+              <a:t>前端静态检查（防按钮无响应）</a:t>
+            </a:r>
+          </a:p>
+        </p:txBody>
+      </p:sp>
+      <p:sp>
+        <p:nvSpPr>
+          <p:cNvPr id="17" name="TextBox 16"/>
+          <p:cNvSpPr txBox="1"/>
+          <p:nvPr/>
+        </p:nvSpPr>
+        <p:spPr>
+          <a:xfrm>
+            <a:off x="10287000" y="2476500"/>
+            <a:ext cx="1333500" cy="628650"/>
+          </a:xfrm>
+          <a:prstGeom prst="rect">
+            <a:avLst/>
+          </a:prstGeom>
+          <a:noFill/>
+        </p:spPr>
+        <p:txBody>
+          <a:bodyPr wrap="square" lIns="0" rIns="0" tIns="0" bIns="0" anchor="ctr">
+            <a:spAutoFit/>
+          </a:bodyPr>
+          <a:lstStyle/>
+          <a:p>
+            <a:pPr algn="r">
+              <a:lnSpc>
+                <a:spcPct val="130000"/>
+              </a:lnSpc>
+            </a:pPr>
+            <a:r>
+              <a:rPr sz="2250" b="1">
+                <a:solidFill>
+                  <a:srgbClr val="1E4FA8"/>
+                </a:solidFill>
+                <a:latin typeface="Microsoft YaHei"/>
+              </a:rPr>
+              <a:t>5</a:t>
+            </a:r>
+          </a:p>
+        </p:txBody>
+      </p:sp>
+      <p:sp>
+        <p:nvSpPr>
+          <p:cNvPr id="18" name="Rounded Rectangle 17"/>
+          <p:cNvSpPr/>
+          <p:nvPr/>
+        </p:nvSpPr>
+        <p:spPr>
+          <a:xfrm>
+            <a:off x="4610100" y="3200400"/>
+            <a:ext cx="7200900" cy="628650"/>
+          </a:xfrm>
+          <a:prstGeom prst="roundRect">
+            <a:avLst>
+              <a:gd name="adj" fmla="val 15151"/>
+            </a:avLst>
+          </a:prstGeom>
+          <a:solidFill>
+            <a:srgbClr val="F7F9FC"/>
+          </a:solidFill>
+          <a:ln w="12700">
+            <a:solidFill>
+              <a:srgbClr val="D6DCE5"/>
+            </a:solidFill>
+          </a:ln>
+          <a:effectLst/>
+        </p:spPr>
+        <p:style>
+          <a:lnRef idx="1">
+            <a:schemeClr val="accent1"/>
+          </a:lnRef>
+          <a:fillRef idx="3">
+            <a:schemeClr val="accent1"/>
+          </a:fillRef>
+          <a:effectRef idx="2">
+            <a:schemeClr val="accent1"/>
+          </a:effectRef>
+          <a:fontRef idx="minor">
+            <a:schemeClr val="lt1"/>
+          </a:fontRef>
+        </p:style>
+        <p:txBody>
+          <a:bodyPr rtlCol="0" anchor="ctr" wrap="square"/>
+          <a:lstStyle/>
+          <a:p>
+            <a:pPr algn="ctr"/>
+          </a:p>
+        </p:txBody>
+      </p:sp>
+      <p:sp>
+        <p:nvSpPr>
+          <p:cNvPr id="19" name="TextBox 18"/>
+          <p:cNvSpPr txBox="1"/>
+          <p:nvPr/>
+        </p:nvSpPr>
+        <p:spPr>
+          <a:xfrm>
+            <a:off x="4838700" y="3200400"/>
+            <a:ext cx="5334000" cy="628650"/>
+          </a:xfrm>
+          <a:prstGeom prst="rect">
+            <a:avLst/>
+          </a:prstGeom>
+          <a:noFill/>
+        </p:spPr>
+        <p:txBody>
+          <a:bodyPr wrap="square" lIns="0" rIns="0" tIns="0" bIns="0" anchor="ctr">
+            <a:spAutoFit/>
+          </a:bodyPr>
+          <a:lstStyle/>
+          <a:p>
+            <a:pPr algn="l">
+              <a:lnSpc>
+                <a:spcPct val="130000"/>
+              </a:lnSpc>
+            </a:pPr>
+            <a:r>
+              <a:rPr sz="1575" b="0">
+                <a:solidFill>
+                  <a:srgbClr val="1A2230"/>
+                </a:solidFill>
+                <a:latin typeface="Microsoft YaHei"/>
+              </a:rPr>
+              <a:t>真实浏览器测试（含身份与二维码）</a:t>
+            </a:r>
+          </a:p>
+        </p:txBody>
+      </p:sp>
+      <p:sp>
+        <p:nvSpPr>
+          <p:cNvPr id="20" name="TextBox 19"/>
+          <p:cNvSpPr txBox="1"/>
+          <p:nvPr/>
+        </p:nvSpPr>
+        <p:spPr>
+          <a:xfrm>
+            <a:off x="10287000" y="3200400"/>
+            <a:ext cx="1333500" cy="628650"/>
+          </a:xfrm>
+          <a:prstGeom prst="rect">
+            <a:avLst/>
+          </a:prstGeom>
+          <a:noFill/>
+        </p:spPr>
+        <p:txBody>
+          <a:bodyPr wrap="square" lIns="0" rIns="0" tIns="0" bIns="0" anchor="ctr">
+            <a:spAutoFit/>
+          </a:bodyPr>
+          <a:lstStyle/>
+          <a:p>
+            <a:pPr algn="r">
+              <a:lnSpc>
+                <a:spcPct val="130000"/>
+              </a:lnSpc>
+            </a:pPr>
+            <a:r>
+              <a:rPr sz="2250" b="1">
+                <a:solidFill>
+                  <a:srgbClr val="1E4FA8"/>
+                </a:solidFill>
+                <a:latin typeface="Microsoft YaHei"/>
+              </a:rPr>
+              <a:t>56</a:t>
+            </a:r>
+          </a:p>
+        </p:txBody>
+      </p:sp>
+      <p:sp>
+        <p:nvSpPr>
+          <p:cNvPr id="21" name="Rounded Rectangle 20"/>
+          <p:cNvSpPr/>
+          <p:nvPr/>
+        </p:nvSpPr>
+        <p:spPr>
+          <a:xfrm>
+            <a:off x="4610100" y="3924300"/>
+            <a:ext cx="7200900" cy="628650"/>
+          </a:xfrm>
+          <a:prstGeom prst="roundRect">
+            <a:avLst>
+              <a:gd name="adj" fmla="val 15151"/>
+            </a:avLst>
+          </a:prstGeom>
+          <a:solidFill>
+            <a:srgbClr val="F7F9FC"/>
+          </a:solidFill>
+          <a:ln w="12700">
+            <a:solidFill>
+              <a:srgbClr val="D6DCE5"/>
+            </a:solidFill>
+          </a:ln>
+          <a:effectLst/>
+        </p:spPr>
+        <p:style>
+          <a:lnRef idx="1">
+            <a:schemeClr val="accent1"/>
+          </a:lnRef>
+          <a:fillRef idx="3">
+            <a:schemeClr val="accent1"/>
+          </a:fillRef>
+          <a:effectRef idx="2">
+            <a:schemeClr val="accent1"/>
+          </a:effectRef>
+          <a:fontRef idx="minor">
+            <a:schemeClr val="lt1"/>
+          </a:fontRef>
+        </p:style>
+        <p:txBody>
+          <a:bodyPr rtlCol="0" anchor="ctr" wrap="square"/>
+          <a:lstStyle/>
+          <a:p>
+            <a:pPr algn="ctr"/>
+          </a:p>
+        </p:txBody>
+      </p:sp>
+      <p:sp>
+        <p:nvSpPr>
+          <p:cNvPr id="22" name="TextBox 21"/>
+          <p:cNvSpPr txBox="1"/>
+          <p:nvPr/>
+        </p:nvSpPr>
+        <p:spPr>
+          <a:xfrm>
+            <a:off x="4838700" y="3924300"/>
+            <a:ext cx="5334000" cy="628650"/>
+          </a:xfrm>
+          <a:prstGeom prst="rect">
+            <a:avLst/>
+          </a:prstGeom>
+          <a:noFill/>
+        </p:spPr>
+        <p:txBody>
+          <a:bodyPr wrap="square" lIns="0" rIns="0" tIns="0" bIns="0" anchor="ctr">
+            <a:spAutoFit/>
+          </a:bodyPr>
+          <a:lstStyle/>
+          <a:p>
+            <a:pPr algn="l">
+              <a:lnSpc>
+                <a:spcPct val="130000"/>
+              </a:lnSpc>
+            </a:pPr>
+            <a:r>
+              <a:rPr sz="1575" b="0">
+                <a:solidFill>
+                  <a:srgbClr val="1A2230"/>
+                </a:solidFill>
+                <a:latin typeface="Microsoft YaHei"/>
+              </a:rPr>
+              <a:t>二维码结构校验（反解还原）</a:t>
+            </a:r>
+          </a:p>
+        </p:txBody>
+      </p:sp>
+      <p:sp>
+        <p:nvSpPr>
+          <p:cNvPr id="23" name="TextBox 22"/>
+          <p:cNvSpPr txBox="1"/>
+          <p:nvPr/>
+        </p:nvSpPr>
+        <p:spPr>
+          <a:xfrm>
+            <a:off x="10287000" y="3924300"/>
+            <a:ext cx="1333500" cy="628650"/>
+          </a:xfrm>
+          <a:prstGeom prst="rect">
+            <a:avLst/>
+          </a:prstGeom>
+          <a:noFill/>
+        </p:spPr>
+        <p:txBody>
+          <a:bodyPr wrap="square" lIns="0" rIns="0" tIns="0" bIns="0" anchor="ctr">
+            <a:spAutoFit/>
+          </a:bodyPr>
+          <a:lstStyle/>
+          <a:p>
+            <a:pPr algn="r">
+              <a:lnSpc>
+                <a:spcPct val="130000"/>
+              </a:lnSpc>
+            </a:pPr>
+            <a:r>
+              <a:rPr sz="2250" b="1">
+                <a:solidFill>
+                  <a:srgbClr val="1E4FA8"/>
+                </a:solidFill>
+                <a:latin typeface="Microsoft YaHei"/>
+              </a:rPr>
+              <a:t>5</a:t>
+            </a:r>
+          </a:p>
+        </p:txBody>
+      </p:sp>
+      <p:sp>
+        <p:nvSpPr>
+          <p:cNvPr id="24" name="Rounded Rectangle 23"/>
+          <p:cNvSpPr/>
+          <p:nvPr/>
+        </p:nvSpPr>
+        <p:spPr>
+          <a:xfrm>
+            <a:off x="4610100" y="4648200"/>
+            <a:ext cx="7200900" cy="628650"/>
+          </a:xfrm>
+          <a:prstGeom prst="roundRect">
+            <a:avLst>
+              <a:gd name="adj" fmla="val 15151"/>
+            </a:avLst>
+          </a:prstGeom>
+          <a:solidFill>
+            <a:srgbClr val="F7F9FC"/>
+          </a:solidFill>
+          <a:ln w="12700">
+            <a:solidFill>
+              <a:srgbClr val="D6DCE5"/>
+            </a:solidFill>
+          </a:ln>
+          <a:effectLst/>
+        </p:spPr>
+        <p:style>
+          <a:lnRef idx="1">
+            <a:schemeClr val="accent1"/>
+          </a:lnRef>
+          <a:fillRef idx="3">
+            <a:schemeClr val="accent1"/>
+          </a:fillRef>
+          <a:effectRef idx="2">
+            <a:schemeClr val="accent1"/>
+          </a:effectRef>
+          <a:fontRef idx="minor">
+            <a:schemeClr val="lt1"/>
+          </a:fontRef>
+        </p:style>
+        <p:txBody>
+          <a:bodyPr rtlCol="0" anchor="ctr" wrap="square"/>
+          <a:lstStyle/>
+          <a:p>
+            <a:pPr algn="ctr"/>
+          </a:p>
+        </p:txBody>
+      </p:sp>
+      <p:sp>
+        <p:nvSpPr>
+          <p:cNvPr id="25" name="TextBox 24"/>
+          <p:cNvSpPr txBox="1"/>
+          <p:nvPr/>
+        </p:nvSpPr>
+        <p:spPr>
+          <a:xfrm>
+            <a:off x="4838700" y="4648200"/>
+            <a:ext cx="5334000" cy="628650"/>
+          </a:xfrm>
+          <a:prstGeom prst="rect">
+            <a:avLst/>
+          </a:prstGeom>
+          <a:noFill/>
+        </p:spPr>
+        <p:txBody>
+          <a:bodyPr wrap="square" lIns="0" rIns="0" tIns="0" bIns="0" anchor="ctr">
+            <a:spAutoFit/>
+          </a:bodyPr>
+          <a:lstStyle/>
+          <a:p>
+            <a:pPr algn="l">
+              <a:lnSpc>
+                <a:spcPct val="130000"/>
+              </a:lnSpc>
+            </a:pPr>
+            <a:r>
+              <a:rPr sz="1575" b="0">
+                <a:solidFill>
+                  <a:srgbClr val="1A2230"/>
+                </a:solidFill>
+                <a:latin typeface="Microsoft YaHei"/>
+              </a:rPr>
+              <a:t>参考实现 BDD + 接口冒烟（对照）</a:t>
+            </a:r>
+          </a:p>
+        </p:txBody>
+      </p:sp>
+      <p:sp>
+        <p:nvSpPr>
+          <p:cNvPr id="26" name="TextBox 25"/>
+          <p:cNvSpPr txBox="1"/>
+          <p:nvPr/>
+        </p:nvSpPr>
+        <p:spPr>
+          <a:xfrm>
+            <a:off x="10287000" y="4648200"/>
+            <a:ext cx="1333500" cy="628650"/>
+          </a:xfrm>
+          <a:prstGeom prst="rect">
+            <a:avLst/>
+          </a:prstGeom>
+          <a:noFill/>
+        </p:spPr>
+        <p:txBody>
+          <a:bodyPr wrap="square" lIns="0" rIns="0" tIns="0" bIns="0" anchor="ctr">
+            <a:spAutoFit/>
+          </a:bodyPr>
+          <a:lstStyle/>
+          <a:p>
+            <a:pPr algn="r">
+              <a:lnSpc>
+                <a:spcPct val="130000"/>
+              </a:lnSpc>
+            </a:pPr>
+            <a:r>
+              <a:rPr sz="2250" b="1">
+                <a:solidFill>
+                  <a:srgbClr val="1E4FA8"/>
+                </a:solidFill>
+                <a:latin typeface="Microsoft YaHei"/>
+              </a:rPr>
+              <a:t>18 ／ 18</a:t>
+            </a:r>
+          </a:p>
+        </p:txBody>
+      </p:sp>
+      <p:sp>
+        <p:nvSpPr>
+          <p:cNvPr id="27" name="Rounded Rectangle 26"/>
+          <p:cNvSpPr/>
+          <p:nvPr/>
+        </p:nvSpPr>
+        <p:spPr>
+          <a:xfrm>
+            <a:off x="381000" y="5505450"/>
+            <a:ext cx="11430000" cy="590550"/>
+          </a:xfrm>
+          <a:prstGeom prst="roundRect">
+            <a:avLst>
+              <a:gd name="adj" fmla="val 12903"/>
+            </a:avLst>
+          </a:prstGeom>
+          <a:solidFill>
+            <a:srgbClr val="E8EFF8"/>
+          </a:solidFill>
+          <a:ln>
+            <a:noFill/>
+          </a:ln>
+          <a:effectLst/>
+        </p:spPr>
+        <p:style>
+          <a:lnRef idx="1">
+            <a:schemeClr val="accent1"/>
+          </a:lnRef>
+          <a:fillRef idx="3">
+            <a:schemeClr val="accent1"/>
+          </a:fillRef>
+          <a:effectRef idx="2">
+            <a:schemeClr val="accent1"/>
+          </a:effectRef>
+          <a:fontRef idx="minor">
+            <a:schemeClr val="lt1"/>
+          </a:fontRef>
+        </p:style>
+        <p:txBody>
+          <a:bodyPr rtlCol="0" anchor="ctr" wrap="square"/>
+          <a:lstStyle/>
+          <a:p>
+            <a:pPr algn="ctr"/>
+          </a:p>
+        </p:txBody>
+      </p:sp>
+      <p:sp>
+        <p:nvSpPr>
+          <p:cNvPr id="28" name="Rectangle 27"/>
+          <p:cNvSpPr/>
+          <p:nvPr/>
+        </p:nvSpPr>
+        <p:spPr>
+          <a:xfrm>
+            <a:off x="381000" y="5505450"/>
+            <a:ext cx="38100" cy="590550"/>
+          </a:xfrm>
+          <a:prstGeom prst="rect">
+            <a:avLst/>
+          </a:prstGeom>
+          <a:solidFill>
+            <a:srgbClr val="1E4FA8"/>
+          </a:solidFill>
+          <a:ln>
+            <a:noFill/>
+          </a:ln>
+          <a:effectLst/>
+        </p:spPr>
+        <p:style>
+          <a:lnRef idx="1">
+            <a:schemeClr val="accent1"/>
+          </a:lnRef>
+          <a:fillRef idx="3">
+            <a:schemeClr val="accent1"/>
+          </a:fillRef>
+          <a:effectRef idx="2">
+            <a:schemeClr val="accent1"/>
+          </a:effectRef>
+          <a:fontRef idx="minor">
+            <a:schemeClr val="lt1"/>
+          </a:fontRef>
+        </p:style>
+        <p:txBody>
+          <a:bodyPr rtlCol="0" anchor="ctr" wrap="square"/>
+          <a:lstStyle/>
+          <a:p>
+            <a:pPr algn="ctr"/>
+          </a:p>
+        </p:txBody>
+      </p:sp>
+      <p:sp>
+        <p:nvSpPr>
+          <p:cNvPr id="29" name="TextBox 28"/>
+          <p:cNvSpPr txBox="1"/>
+          <p:nvPr/>
+        </p:nvSpPr>
+        <p:spPr>
+          <a:xfrm>
+            <a:off x="533400" y="5505450"/>
+            <a:ext cx="914400" cy="590550"/>
+          </a:xfrm>
+          <a:prstGeom prst="rect">
+            <a:avLst/>
+          </a:prstGeom>
+          <a:noFill/>
+        </p:spPr>
+        <p:txBody>
+          <a:bodyPr wrap="square" lIns="0" rIns="0" tIns="0" bIns="0" anchor="ctr">
+            <a:spAutoFit/>
+          </a:bodyPr>
+          <a:lstStyle/>
+          <a:p>
+            <a:pPr algn="l">
+              <a:lnSpc>
+                <a:spcPct val="130000"/>
+              </a:lnSpc>
+            </a:pPr>
+            <a:r>
+              <a:rPr sz="1500" b="1">
+                <a:solidFill>
+                  <a:srgbClr val="1E4FA8"/>
+                </a:solidFill>
+                <a:latin typeface="Microsoft YaHei"/>
+              </a:rPr>
+              <a:t>判断</a:t>
+            </a:r>
+          </a:p>
+        </p:txBody>
+      </p:sp>
+      <p:sp>
+        <p:nvSpPr>
+          <p:cNvPr id="30" name="TextBox 29"/>
+          <p:cNvSpPr txBox="1"/>
+          <p:nvPr/>
+        </p:nvSpPr>
+        <p:spPr>
+          <a:xfrm>
+            <a:off x="1504950" y="5505450"/>
+            <a:ext cx="10134600" cy="590550"/>
+          </a:xfrm>
+          <a:prstGeom prst="rect">
+            <a:avLst/>
+          </a:prstGeom>
+          <a:noFill/>
+        </p:spPr>
+        <p:txBody>
+          <a:bodyPr wrap="square" lIns="0" rIns="0" tIns="0" bIns="0" anchor="ctr">
+            <a:spAutoFit/>
+          </a:bodyPr>
+          <a:lstStyle/>
+          <a:p>
+            <a:pPr algn="l">
+              <a:lnSpc>
+                <a:spcPct val="135000"/>
+              </a:lnSpc>
+            </a:pPr>
+            <a:r>
+              <a:rPr sz="1500" b="0">
+                <a:solidFill>
+                  <a:srgbClr val="1A2230"/>
+                </a:solidFill>
+                <a:latin typeface="Microsoft YaHei"/>
+              </a:rPr>
+              <a:t>测试要能挡住"点了没反应"这类问题，所以既做静态检查，也做真实浏览器点击</a:t>
+            </a:r>
+          </a:p>
+        </p:txBody>
+      </p:sp>
+      <p:sp>
+        <p:nvSpPr>
+          <p:cNvPr id="31" name="Rectangle 30"/>
+          <p:cNvSpPr/>
+          <p:nvPr/>
+        </p:nvSpPr>
+        <p:spPr>
+          <a:xfrm>
+            <a:off x="381000" y="6286500"/>
+            <a:ext cx="11430000" cy="9525"/>
+          </a:xfrm>
+          <a:prstGeom prst="rect">
+            <a:avLst/>
+          </a:prstGeom>
+          <a:solidFill>
+            <a:srgbClr val="E5E7EB"/>
+          </a:solidFill>
+          <a:ln>
+            <a:noFill/>
+          </a:ln>
+          <a:effectLst/>
+        </p:spPr>
+        <p:style>
+          <a:lnRef idx="1">
+            <a:schemeClr val="accent1"/>
+          </a:lnRef>
+          <a:fillRef idx="3">
+            <a:schemeClr val="accent1"/>
+          </a:fillRef>
+          <a:effectRef idx="2">
+            <a:schemeClr val="accent1"/>
+          </a:effectRef>
+          <a:fontRef idx="minor">
+            <a:schemeClr val="lt1"/>
+          </a:fontRef>
+        </p:style>
+        <p:txBody>
+          <a:bodyPr rtlCol="0" anchor="ctr" wrap="square"/>
+          <a:lstStyle/>
+          <a:p>
+            <a:pPr algn="ctr"/>
+          </a:p>
+        </p:txBody>
+      </p:sp>
+      <p:sp>
+        <p:nvSpPr>
+          <p:cNvPr id="32" name="TextBox 31"/>
+          <p:cNvSpPr txBox="1"/>
+          <p:nvPr/>
+        </p:nvSpPr>
+        <p:spPr>
+          <a:xfrm>
+            <a:off x="381000" y="6324600"/>
+            <a:ext cx="8763000" cy="285750"/>
+          </a:xfrm>
+          <a:prstGeom prst="rect">
+            <a:avLst/>
+          </a:prstGeom>
+          <a:noFill/>
+        </p:spPr>
+        <p:txBody>
+          <a:bodyPr wrap="square" lIns="0" rIns="0" tIns="0" bIns="0" anchor="ctr">
+            <a:spAutoFit/>
+          </a:bodyPr>
+          <a:lstStyle/>
+          <a:p>
+            <a:pPr algn="l">
+              <a:lnSpc>
+                <a:spcPct val="130000"/>
+              </a:lnSpc>
+            </a:pPr>
+            <a:r>
+              <a:rPr sz="1125" b="0">
+                <a:solidFill>
+                  <a:srgbClr val="8B97A8"/>
+                </a:solidFill>
+                <a:latin typeface="Microsoft YaHei"/>
+              </a:rPr>
+              <a:t>来源：五份测试报告文件（verify/ 与 app/ 目录）</a:t>
+            </a:r>
+          </a:p>
+        </p:txBody>
+      </p:sp>
+      <p:sp>
+        <p:nvSpPr>
+          <p:cNvPr id="33" name="TextBox 32"/>
+          <p:cNvSpPr txBox="1"/>
+          <p:nvPr/>
+        </p:nvSpPr>
+        <p:spPr>
+          <a:xfrm>
+            <a:off x="9525000" y="6324600"/>
+            <a:ext cx="2286000" cy="285750"/>
+          </a:xfrm>
+          <a:prstGeom prst="rect">
+            <a:avLst/>
+          </a:prstGeom>
+          <a:noFill/>
+        </p:spPr>
+        <p:txBody>
+          <a:bodyPr wrap="square" lIns="0" rIns="0" tIns="0" bIns="0" anchor="ctr">
+            <a:spAutoFit/>
+          </a:bodyPr>
+          <a:lstStyle/>
+          <a:p>
+            <a:pPr algn="r">
+              <a:lnSpc>
+                <a:spcPct val="130000"/>
+              </a:lnSpc>
+            </a:pPr>
+            <a:r>
+              <a:rPr sz="1200" b="1">
+                <a:solidFill>
+                  <a:srgbClr val="1E4FA8"/>
+                </a:solidFill>
+                <a:latin typeface="Microsoft YaHei"/>
+              </a:rPr>
+              <a:t>21 / 25</a:t>
+            </a:r>
+          </a:p>
+        </p:txBody>
+      </p:sp>
+    </p:spTree>
+  </p:cSld>
+  <p:clrMapOvr>
+    <a:masterClrMapping/>
+  </p:clrMapOvr>
+</p:sld>
+</file>
+
+<file path=ppt/slides/slide22.xml><?xml version="1.0" encoding="utf-8"?>
+<p:sld xmlns:a="http://schemas.openxmlformats.org/drawingml/2006/main" xmlns:p="http://schemas.openxmlformats.org/presentationml/2006/main" xmlns:r="http://schemas.openxmlformats.org/officeDocument/2006/relationships">
+  <p:cSld>
+    <p:bg>
+      <p:bgPr>
+        <a:solidFill>
+          <a:srgbClr val="FFFFFF"/>
+        </a:solidFill>
+        <a:effectLst/>
+      </p:bgPr>
+    </p:bg>
+    <p:spTree>
+      <p:nvGrpSpPr>
+        <p:cNvPr id="1" name=""/>
+        <p:cNvGrpSpPr/>
+        <p:nvPr/>
+      </p:nvGrpSpPr>
+      <p:grpSpPr/>
+      <p:sp>
+        <p:nvSpPr>
+          <p:cNvPr id="2" name="Rectangle 1"/>
+          <p:cNvSpPr/>
+          <p:nvPr/>
+        </p:nvSpPr>
+        <p:spPr>
+          <a:xfrm>
+            <a:off x="0" y="0"/>
+            <a:ext cx="12192000" cy="762000"/>
+          </a:xfrm>
+          <a:prstGeom prst="rect">
+            <a:avLst/>
+          </a:prstGeom>
+          <a:solidFill>
+            <a:srgbClr val="1E4FA8"/>
+          </a:solidFill>
+          <a:ln>
+            <a:noFill/>
+          </a:ln>
+          <a:effectLst/>
+        </p:spPr>
+        <p:style>
+          <a:lnRef idx="1">
+            <a:schemeClr val="accent1"/>
+          </a:lnRef>
+          <a:fillRef idx="3">
+            <a:schemeClr val="accent1"/>
+          </a:fillRef>
+          <a:effectRef idx="2">
+            <a:schemeClr val="accent1"/>
+          </a:effectRef>
+          <a:fontRef idx="minor">
+            <a:schemeClr val="lt1"/>
+          </a:fontRef>
+        </p:style>
+        <p:txBody>
+          <a:bodyPr rtlCol="0" anchor="ctr" wrap="square"/>
+          <a:lstStyle/>
+          <a:p>
+            <a:pPr algn="ctr"/>
+          </a:p>
+        </p:txBody>
+      </p:sp>
+      <p:sp>
+        <p:nvSpPr>
+          <p:cNvPr id="3" name="TextBox 2"/>
+          <p:cNvSpPr txBox="1"/>
+          <p:nvPr/>
+        </p:nvSpPr>
+        <p:spPr>
+          <a:xfrm>
+            <a:off x="381000" y="0"/>
+            <a:ext cx="7239000" cy="762000"/>
+          </a:xfrm>
+          <a:prstGeom prst="rect">
+            <a:avLst/>
+          </a:prstGeom>
+          <a:noFill/>
+        </p:spPr>
+        <p:txBody>
+          <a:bodyPr wrap="square" lIns="0" rIns="0" tIns="0" bIns="0" anchor="ctr">
+            <a:spAutoFit/>
+          </a:bodyPr>
+          <a:lstStyle/>
+          <a:p>
+            <a:pPr algn="l">
+              <a:lnSpc>
+                <a:spcPct val="130000"/>
+              </a:lnSpc>
+            </a:pPr>
+            <a:r>
+              <a:rPr sz="2400" b="1">
+                <a:solidFill>
+                  <a:srgbClr val="FFFFFF"/>
+                </a:solidFill>
+                <a:latin typeface="Microsoft YaHei"/>
+              </a:rPr>
+              <a:t>15 个缺陷：把踩过的坑讲清楚</a:t>
+            </a:r>
+          </a:p>
+        </p:txBody>
+      </p:sp>
+      <p:sp>
+        <p:nvSpPr>
+          <p:cNvPr id="4" name="TextBox 3"/>
+          <p:cNvSpPr txBox="1"/>
+          <p:nvPr/>
+        </p:nvSpPr>
+        <p:spPr>
+          <a:xfrm>
+            <a:off x="7620000" y="0"/>
+            <a:ext cx="4191000" cy="762000"/>
+          </a:xfrm>
+          <a:prstGeom prst="rect">
+            <a:avLst/>
+          </a:prstGeom>
+          <a:noFill/>
+        </p:spPr>
+        <p:txBody>
+          <a:bodyPr wrap="square" lIns="0" rIns="0" tIns="0" bIns="0" anchor="ctr">
+            <a:spAutoFit/>
+          </a:bodyPr>
+          <a:lstStyle/>
+          <a:p>
+            <a:pPr algn="r">
+              <a:lnSpc>
+                <a:spcPct val="130000"/>
+              </a:lnSpc>
+            </a:pPr>
+            <a:r>
+              <a:rPr sz="1050" b="0">
+                <a:solidFill>
+                  <a:srgbClr val="BFD3F0"/>
+                </a:solidFill>
+                <a:latin typeface="Microsoft YaHei"/>
+              </a:rPr>
+              <a:t>健身房运营管理系统 · 课程答辩</a:t>
+            </a:r>
+          </a:p>
+        </p:txBody>
+      </p:sp>
+      <p:sp>
+        <p:nvSpPr>
+          <p:cNvPr id="5" name="Rounded Rectangle 4"/>
+          <p:cNvSpPr/>
+          <p:nvPr/>
+        </p:nvSpPr>
+        <p:spPr>
+          <a:xfrm>
+            <a:off x="381000" y="1028700"/>
+            <a:ext cx="2381250" cy="1104900"/>
+          </a:xfrm>
+          <a:prstGeom prst="roundRect">
+            <a:avLst>
+              <a:gd name="adj" fmla="val 8620"/>
+            </a:avLst>
+          </a:prstGeom>
+          <a:solidFill>
+            <a:srgbClr val="F7F9FC"/>
+          </a:solidFill>
+          <a:ln w="12700">
+            <a:solidFill>
+              <a:srgbClr val="D6DCE5"/>
+            </a:solidFill>
+          </a:ln>
+          <a:effectLst/>
+        </p:spPr>
+        <p:style>
+          <a:lnRef idx="1">
+            <a:schemeClr val="accent1"/>
+          </a:lnRef>
+          <a:fillRef idx="3">
+            <a:schemeClr val="accent1"/>
+          </a:fillRef>
+          <a:effectRef idx="2">
+            <a:schemeClr val="accent1"/>
+          </a:effectRef>
+          <a:fontRef idx="minor">
+            <a:schemeClr val="lt1"/>
+          </a:fontRef>
+        </p:style>
+        <p:txBody>
+          <a:bodyPr rtlCol="0" anchor="ctr" wrap="square"/>
+          <a:lstStyle/>
+          <a:p>
+            <a:pPr algn="ctr"/>
+          </a:p>
+        </p:txBody>
+      </p:sp>
+      <p:sp>
+        <p:nvSpPr>
+          <p:cNvPr id="6" name="TextBox 5"/>
+          <p:cNvSpPr txBox="1"/>
+          <p:nvPr/>
+        </p:nvSpPr>
+        <p:spPr>
+          <a:xfrm>
+            <a:off x="590550" y="1162050"/>
+            <a:ext cx="1905000" cy="571500"/>
+          </a:xfrm>
+          <a:prstGeom prst="rect">
+            <a:avLst/>
+          </a:prstGeom>
+          <a:noFill/>
+        </p:spPr>
+        <p:txBody>
+          <a:bodyPr wrap="square" lIns="0" rIns="0" tIns="0" bIns="0" anchor="ctr">
+            <a:spAutoFit/>
+          </a:bodyPr>
+          <a:lstStyle/>
+          <a:p>
+            <a:pPr algn="l">
+              <a:lnSpc>
+                <a:spcPct val="130000"/>
+              </a:lnSpc>
+            </a:pPr>
+            <a:r>
+              <a:rPr sz="3600" b="1">
+                <a:solidFill>
+                  <a:srgbClr val="D9534F"/>
+                </a:solidFill>
+                <a:latin typeface="Microsoft YaHei"/>
+              </a:rPr>
+              <a:t>2</a:t>
+            </a:r>
+          </a:p>
+        </p:txBody>
+      </p:sp>
+      <p:sp>
+        <p:nvSpPr>
+          <p:cNvPr id="7" name="TextBox 6"/>
+          <p:cNvSpPr txBox="1"/>
+          <p:nvPr/>
+        </p:nvSpPr>
+        <p:spPr>
+          <a:xfrm>
+            <a:off x="590550" y="1733550"/>
+            <a:ext cx="1905000" cy="285750"/>
+          </a:xfrm>
+          <a:prstGeom prst="rect">
+            <a:avLst/>
+          </a:prstGeom>
+          <a:noFill/>
+        </p:spPr>
+        <p:txBody>
+          <a:bodyPr wrap="square" lIns="0" rIns="0" tIns="0" bIns="0" anchor="ctr">
+            <a:spAutoFit/>
+          </a:bodyPr>
+          <a:lstStyle/>
+          <a:p>
+            <a:pPr algn="l">
+              <a:lnSpc>
+                <a:spcPct val="130000"/>
+              </a:lnSpc>
+            </a:pPr>
+            <a:r>
+              <a:rPr sz="1500" b="0">
+                <a:solidFill>
+                  <a:srgbClr val="1A2230"/>
+                </a:solidFill>
+                <a:latin typeface="Microsoft YaHei"/>
+              </a:rPr>
+              <a:t>严重缺陷</a:t>
+            </a:r>
+          </a:p>
+        </p:txBody>
+      </p:sp>
+      <p:sp>
+        <p:nvSpPr>
+          <p:cNvPr id="8" name="Rounded Rectangle 7"/>
+          <p:cNvSpPr/>
+          <p:nvPr/>
+        </p:nvSpPr>
+        <p:spPr>
+          <a:xfrm>
+            <a:off x="2914650" y="1028700"/>
+            <a:ext cx="2381250" cy="1104900"/>
+          </a:xfrm>
+          <a:prstGeom prst="roundRect">
+            <a:avLst>
+              <a:gd name="adj" fmla="val 8620"/>
+            </a:avLst>
+          </a:prstGeom>
+          <a:solidFill>
+            <a:srgbClr val="F7F9FC"/>
+          </a:solidFill>
+          <a:ln w="12700">
+            <a:solidFill>
+              <a:srgbClr val="D6DCE5"/>
+            </a:solidFill>
+          </a:ln>
+          <a:effectLst/>
+        </p:spPr>
+        <p:style>
+          <a:lnRef idx="1">
+            <a:schemeClr val="accent1"/>
+          </a:lnRef>
+          <a:fillRef idx="3">
+            <a:schemeClr val="accent1"/>
+          </a:fillRef>
+          <a:effectRef idx="2">
+            <a:schemeClr val="accent1"/>
+          </a:effectRef>
+          <a:fontRef idx="minor">
+            <a:schemeClr val="lt1"/>
+          </a:fontRef>
+        </p:style>
+        <p:txBody>
+          <a:bodyPr rtlCol="0" anchor="ctr" wrap="square"/>
+          <a:lstStyle/>
+          <a:p>
+            <a:pPr algn="ctr"/>
+          </a:p>
+        </p:txBody>
+      </p:sp>
+      <p:sp>
+        <p:nvSpPr>
+          <p:cNvPr id="9" name="TextBox 8"/>
+          <p:cNvSpPr txBox="1"/>
+          <p:nvPr/>
+        </p:nvSpPr>
+        <p:spPr>
+          <a:xfrm>
+            <a:off x="3124200" y="1162050"/>
+            <a:ext cx="1905000" cy="571500"/>
+          </a:xfrm>
+          <a:prstGeom prst="rect">
+            <a:avLst/>
+          </a:prstGeom>
+          <a:noFill/>
+        </p:spPr>
+        <p:txBody>
+          <a:bodyPr wrap="square" lIns="0" rIns="0" tIns="0" bIns="0" anchor="ctr">
+            <a:spAutoFit/>
+          </a:bodyPr>
+          <a:lstStyle/>
+          <a:p>
+            <a:pPr algn="l">
+              <a:lnSpc>
+                <a:spcPct val="130000"/>
+              </a:lnSpc>
+            </a:pPr>
+            <a:r>
+              <a:rPr sz="3600" b="1">
+                <a:solidFill>
+                  <a:srgbClr val="1E4FA8"/>
+                </a:solidFill>
+                <a:latin typeface="Microsoft YaHei"/>
+              </a:rPr>
+              <a:t>9</a:t>
+            </a:r>
+          </a:p>
+        </p:txBody>
+      </p:sp>
+      <p:sp>
+        <p:nvSpPr>
+          <p:cNvPr id="10" name="TextBox 9"/>
+          <p:cNvSpPr txBox="1"/>
+          <p:nvPr/>
+        </p:nvSpPr>
+        <p:spPr>
+          <a:xfrm>
+            <a:off x="3124200" y="1733550"/>
+            <a:ext cx="1905000" cy="285750"/>
+          </a:xfrm>
+          <a:prstGeom prst="rect">
+            <a:avLst/>
+          </a:prstGeom>
+          <a:noFill/>
+        </p:spPr>
+        <p:txBody>
+          <a:bodyPr wrap="square" lIns="0" rIns="0" tIns="0" bIns="0" anchor="ctr">
+            <a:spAutoFit/>
+          </a:bodyPr>
+          <a:lstStyle/>
+          <a:p>
+            <a:pPr algn="l">
+              <a:lnSpc>
+                <a:spcPct val="130000"/>
+              </a:lnSpc>
+            </a:pPr>
+            <a:r>
+              <a:rPr sz="1500" b="0">
+                <a:solidFill>
+                  <a:srgbClr val="1A2230"/>
+                </a:solidFill>
+                <a:latin typeface="Microsoft YaHei"/>
+              </a:rPr>
+              <a:t>中等缺陷</a:t>
+            </a:r>
+          </a:p>
+        </p:txBody>
+      </p:sp>
+      <p:sp>
+        <p:nvSpPr>
+          <p:cNvPr id="11" name="Rounded Rectangle 10"/>
+          <p:cNvSpPr/>
+          <p:nvPr/>
+        </p:nvSpPr>
+        <p:spPr>
+          <a:xfrm>
+            <a:off x="5448300" y="1028700"/>
+            <a:ext cx="2381250" cy="1104900"/>
+          </a:xfrm>
+          <a:prstGeom prst="roundRect">
+            <a:avLst>
+              <a:gd name="adj" fmla="val 8620"/>
+            </a:avLst>
+          </a:prstGeom>
+          <a:solidFill>
+            <a:srgbClr val="F7F9FC"/>
+          </a:solidFill>
+          <a:ln w="12700">
+            <a:solidFill>
+              <a:srgbClr val="D6DCE5"/>
+            </a:solidFill>
+          </a:ln>
+          <a:effectLst/>
+        </p:spPr>
+        <p:style>
+          <a:lnRef idx="1">
+            <a:schemeClr val="accent1"/>
+          </a:lnRef>
+          <a:fillRef idx="3">
+            <a:schemeClr val="accent1"/>
+          </a:fillRef>
+          <a:effectRef idx="2">
+            <a:schemeClr val="accent1"/>
+          </a:effectRef>
+          <a:fontRef idx="minor">
+            <a:schemeClr val="lt1"/>
+          </a:fontRef>
+        </p:style>
+        <p:txBody>
+          <a:bodyPr rtlCol="0" anchor="ctr" wrap="square"/>
+          <a:lstStyle/>
+          <a:p>
+            <a:pPr algn="ctr"/>
+          </a:p>
+        </p:txBody>
+      </p:sp>
+      <p:sp>
+        <p:nvSpPr>
           <p:cNvPr id="12" name="TextBox 11"/>
           <p:cNvSpPr txBox="1"/>
           <p:nvPr/>
@@ -20623,7 +21806,7 @@
                 </a:solidFill>
                 <a:latin typeface="Microsoft YaHei"/>
               </a:rPr>
-              <a:t>21 / 24</a:t>
+              <a:t>22 / 25</a:t>
             </a:r>
           </a:p>
         </p:txBody>
@@ -20636,7 +21819,7 @@
 </p:sld>
 </file>
 
-<file path=ppt/slides/slide22.xml><?xml version="1.0" encoding="utf-8"?>
+<file path=ppt/slides/slide23.xml><?xml version="1.0" encoding="utf-8"?>
 <p:sld xmlns:a="http://schemas.openxmlformats.org/drawingml/2006/main" xmlns:p="http://schemas.openxmlformats.org/presentationml/2006/main" xmlns:r="http://schemas.openxmlformats.org/officeDocument/2006/relationships">
   <p:cSld>
     <p:bg>
@@ -21232,1217 +22415,7 @@
                 </a:solidFill>
                 <a:latin typeface="Microsoft YaHei"/>
               </a:rPr>
-              <a:t>22 / 24</a:t>
-            </a:r>
-          </a:p>
-        </p:txBody>
-      </p:sp>
-    </p:spTree>
-  </p:cSld>
-  <p:clrMapOvr>
-    <a:masterClrMapping/>
-  </p:clrMapOvr>
-</p:sld>
-</file>
-
-<file path=ppt/slides/slide23.xml><?xml version="1.0" encoding="utf-8"?>
-<p:sld xmlns:a="http://schemas.openxmlformats.org/drawingml/2006/main" xmlns:p="http://schemas.openxmlformats.org/presentationml/2006/main" xmlns:r="http://schemas.openxmlformats.org/officeDocument/2006/relationships">
-  <p:cSld>
-    <p:bg>
-      <p:bgPr>
-        <a:solidFill>
-          <a:srgbClr val="FFFFFF"/>
-        </a:solidFill>
-        <a:effectLst/>
-      </p:bgPr>
-    </p:bg>
-    <p:spTree>
-      <p:nvGrpSpPr>
-        <p:cNvPr id="1" name=""/>
-        <p:cNvGrpSpPr/>
-        <p:nvPr/>
-      </p:nvGrpSpPr>
-      <p:grpSpPr/>
-      <p:sp>
-        <p:nvSpPr>
-          <p:cNvPr id="2" name="Rectangle 1"/>
-          <p:cNvSpPr/>
-          <p:nvPr/>
-        </p:nvSpPr>
-        <p:spPr>
-          <a:xfrm>
-            <a:off x="0" y="0"/>
-            <a:ext cx="12192000" cy="762000"/>
-          </a:xfrm>
-          <a:prstGeom prst="rect">
-            <a:avLst/>
-          </a:prstGeom>
-          <a:solidFill>
-            <a:srgbClr val="1E4FA8"/>
-          </a:solidFill>
-          <a:ln>
-            <a:noFill/>
-          </a:ln>
-          <a:effectLst/>
-        </p:spPr>
-        <p:style>
-          <a:lnRef idx="1">
-            <a:schemeClr val="accent1"/>
-          </a:lnRef>
-          <a:fillRef idx="3">
-            <a:schemeClr val="accent1"/>
-          </a:fillRef>
-          <a:effectRef idx="2">
-            <a:schemeClr val="accent1"/>
-          </a:effectRef>
-          <a:fontRef idx="minor">
-            <a:schemeClr val="lt1"/>
-          </a:fontRef>
-        </p:style>
-        <p:txBody>
-          <a:bodyPr rtlCol="0" anchor="ctr" wrap="square"/>
-          <a:lstStyle/>
-          <a:p>
-            <a:pPr algn="ctr"/>
-          </a:p>
-        </p:txBody>
-      </p:sp>
-      <p:sp>
-        <p:nvSpPr>
-          <p:cNvPr id="3" name="TextBox 2"/>
-          <p:cNvSpPr txBox="1"/>
-          <p:nvPr/>
-        </p:nvSpPr>
-        <p:spPr>
-          <a:xfrm>
-            <a:off x="381000" y="0"/>
-            <a:ext cx="7239000" cy="762000"/>
-          </a:xfrm>
-          <a:prstGeom prst="rect">
-            <a:avLst/>
-          </a:prstGeom>
-          <a:noFill/>
-        </p:spPr>
-        <p:txBody>
-          <a:bodyPr wrap="square" lIns="0" rIns="0" tIns="0" bIns="0" anchor="ctr">
-            <a:spAutoFit/>
-          </a:bodyPr>
-          <a:lstStyle/>
-          <a:p>
-            <a:pPr algn="l">
-              <a:lnSpc>
-                <a:spcPct val="130000"/>
-              </a:lnSpc>
-            </a:pPr>
-            <a:r>
-              <a:rPr sz="2400" b="1">
-                <a:solidFill>
-                  <a:srgbClr val="FFFFFF"/>
-                </a:solidFill>
-                <a:latin typeface="Microsoft YaHei"/>
-              </a:rPr>
-              <a:t>没做完的部分，以及下一步</a:t>
-            </a:r>
-          </a:p>
-        </p:txBody>
-      </p:sp>
-      <p:sp>
-        <p:nvSpPr>
-          <p:cNvPr id="4" name="TextBox 3"/>
-          <p:cNvSpPr txBox="1"/>
-          <p:nvPr/>
-        </p:nvSpPr>
-        <p:spPr>
-          <a:xfrm>
-            <a:off x="7620000" y="0"/>
-            <a:ext cx="4191000" cy="762000"/>
-          </a:xfrm>
-          <a:prstGeom prst="rect">
-            <a:avLst/>
-          </a:prstGeom>
-          <a:noFill/>
-        </p:spPr>
-        <p:txBody>
-          <a:bodyPr wrap="square" lIns="0" rIns="0" tIns="0" bIns="0" anchor="ctr">
-            <a:spAutoFit/>
-          </a:bodyPr>
-          <a:lstStyle/>
-          <a:p>
-            <a:pPr algn="r">
-              <a:lnSpc>
-                <a:spcPct val="130000"/>
-              </a:lnSpc>
-            </a:pPr>
-            <a:r>
-              <a:rPr sz="1050" b="0">
-                <a:solidFill>
-                  <a:srgbClr val="BFD3F0"/>
-                </a:solidFill>
-                <a:latin typeface="Microsoft YaHei"/>
-              </a:rPr>
-              <a:t>健身房运营管理系统 · 课程答辩</a:t>
-            </a:r>
-          </a:p>
-        </p:txBody>
-      </p:sp>
-      <p:sp>
-        <p:nvSpPr>
-          <p:cNvPr id="5" name="Rounded Rectangle 4"/>
-          <p:cNvSpPr/>
-          <p:nvPr/>
-        </p:nvSpPr>
-        <p:spPr>
-          <a:xfrm>
-            <a:off x="381000" y="1028700"/>
-            <a:ext cx="6667500" cy="4305300"/>
-          </a:xfrm>
-          <a:prstGeom prst="roundRect">
-            <a:avLst>
-              <a:gd name="adj" fmla="val 2654"/>
-            </a:avLst>
-          </a:prstGeom>
-          <a:solidFill>
-            <a:srgbClr val="E8EFF8"/>
-          </a:solidFill>
-          <a:ln>
-            <a:noFill/>
-          </a:ln>
-          <a:effectLst/>
-        </p:spPr>
-        <p:style>
-          <a:lnRef idx="1">
-            <a:schemeClr val="accent1"/>
-          </a:lnRef>
-          <a:fillRef idx="3">
-            <a:schemeClr val="accent1"/>
-          </a:fillRef>
-          <a:effectRef idx="2">
-            <a:schemeClr val="accent1"/>
-          </a:effectRef>
-          <a:fontRef idx="minor">
-            <a:schemeClr val="lt1"/>
-          </a:fontRef>
-        </p:style>
-        <p:txBody>
-          <a:bodyPr rtlCol="0" anchor="ctr" wrap="square"/>
-          <a:lstStyle/>
-          <a:p>
-            <a:pPr algn="ctr"/>
-          </a:p>
-        </p:txBody>
-      </p:sp>
-      <p:sp>
-        <p:nvSpPr>
-          <p:cNvPr id="6" name="TextBox 5"/>
-          <p:cNvSpPr txBox="1"/>
-          <p:nvPr/>
-        </p:nvSpPr>
-        <p:spPr>
-          <a:xfrm>
-            <a:off x="590550" y="1219200"/>
-            <a:ext cx="6248400" cy="323850"/>
-          </a:xfrm>
-          <a:prstGeom prst="rect">
-            <a:avLst/>
-          </a:prstGeom>
-          <a:noFill/>
-        </p:spPr>
-        <p:txBody>
-          <a:bodyPr wrap="square" lIns="0" rIns="0" tIns="0" bIns="0" anchor="ctr">
-            <a:spAutoFit/>
-          </a:bodyPr>
-          <a:lstStyle/>
-          <a:p>
-            <a:pPr algn="l">
-              <a:lnSpc>
-                <a:spcPct val="130000"/>
-              </a:lnSpc>
-            </a:pPr>
-            <a:r>
-              <a:rPr sz="1800" b="1">
-                <a:solidFill>
-                  <a:srgbClr val="0E3F8C"/>
-                </a:solidFill>
-                <a:latin typeface="Microsoft YaHei"/>
-              </a:rPr>
-              <a:t>已完成并验证</a:t>
-            </a:r>
-          </a:p>
-        </p:txBody>
-      </p:sp>
-      <p:sp>
-        <p:nvSpPr>
-          <p:cNvPr id="7" name="Rounded Rectangle 6"/>
-          <p:cNvSpPr/>
-          <p:nvPr/>
-        </p:nvSpPr>
-        <p:spPr>
-          <a:xfrm>
-            <a:off x="590550" y="1676400"/>
-            <a:ext cx="6248400" cy="628650"/>
-          </a:xfrm>
-          <a:prstGeom prst="roundRect">
-            <a:avLst>
-              <a:gd name="adj" fmla="val 12121"/>
-            </a:avLst>
-          </a:prstGeom>
-          <a:solidFill>
-            <a:srgbClr val="FFFFFF"/>
-          </a:solidFill>
-          <a:ln w="12700">
-            <a:solidFill>
-              <a:srgbClr val="D6DCE5"/>
-            </a:solidFill>
-          </a:ln>
-          <a:effectLst/>
-        </p:spPr>
-        <p:style>
-          <a:lnRef idx="1">
-            <a:schemeClr val="accent1"/>
-          </a:lnRef>
-          <a:fillRef idx="3">
-            <a:schemeClr val="accent1"/>
-          </a:fillRef>
-          <a:effectRef idx="2">
-            <a:schemeClr val="accent1"/>
-          </a:effectRef>
-          <a:fontRef idx="minor">
-            <a:schemeClr val="lt1"/>
-          </a:fontRef>
-        </p:style>
-        <p:txBody>
-          <a:bodyPr rtlCol="0" anchor="ctr" wrap="square"/>
-          <a:lstStyle/>
-          <a:p>
-            <a:pPr algn="ctr"/>
-          </a:p>
-        </p:txBody>
-      </p:sp>
-      <p:sp>
-        <p:nvSpPr>
-          <p:cNvPr id="8" name="TextBox 7"/>
-          <p:cNvSpPr txBox="1"/>
-          <p:nvPr/>
-        </p:nvSpPr>
-        <p:spPr>
-          <a:xfrm>
-            <a:off x="781050" y="1676400"/>
-            <a:ext cx="5905500" cy="628650"/>
-          </a:xfrm>
-          <a:prstGeom prst="rect">
-            <a:avLst/>
-          </a:prstGeom>
-          <a:noFill/>
-        </p:spPr>
-        <p:txBody>
-          <a:bodyPr wrap="square" lIns="0" rIns="0" tIns="0" bIns="0" anchor="ctr">
-            <a:spAutoFit/>
-          </a:bodyPr>
-          <a:lstStyle/>
-          <a:p>
-            <a:pPr algn="l">
-              <a:lnSpc>
-                <a:spcPct val="130000"/>
-              </a:lnSpc>
-            </a:pPr>
-            <a:r>
-              <a:rPr sz="1425" b="0">
-                <a:solidFill>
-                  <a:srgbClr val="1A2230"/>
-                </a:solidFill>
-                <a:latin typeface="Microsoft YaHei"/>
-              </a:rPr>
-              <a:t>✓  S1 约课与签到主线（含取消与爽约惩罚）</a:t>
-            </a:r>
-          </a:p>
-        </p:txBody>
-      </p:sp>
-      <p:sp>
-        <p:nvSpPr>
-          <p:cNvPr id="9" name="Rounded Rectangle 8"/>
-          <p:cNvSpPr/>
-          <p:nvPr/>
-        </p:nvSpPr>
-        <p:spPr>
-          <a:xfrm>
-            <a:off x="590550" y="2381250"/>
-            <a:ext cx="6248400" cy="628650"/>
-          </a:xfrm>
-          <a:prstGeom prst="roundRect">
-            <a:avLst>
-              <a:gd name="adj" fmla="val 12121"/>
-            </a:avLst>
-          </a:prstGeom>
-          <a:solidFill>
-            <a:srgbClr val="FFFFFF"/>
-          </a:solidFill>
-          <a:ln w="12700">
-            <a:solidFill>
-              <a:srgbClr val="D6DCE5"/>
-            </a:solidFill>
-          </a:ln>
-          <a:effectLst/>
-        </p:spPr>
-        <p:style>
-          <a:lnRef idx="1">
-            <a:schemeClr val="accent1"/>
-          </a:lnRef>
-          <a:fillRef idx="3">
-            <a:schemeClr val="accent1"/>
-          </a:fillRef>
-          <a:effectRef idx="2">
-            <a:schemeClr val="accent1"/>
-          </a:effectRef>
-          <a:fontRef idx="minor">
-            <a:schemeClr val="lt1"/>
-          </a:fontRef>
-        </p:style>
-        <p:txBody>
-          <a:bodyPr rtlCol="0" anchor="ctr" wrap="square"/>
-          <a:lstStyle/>
-          <a:p>
-            <a:pPr algn="ctr"/>
-          </a:p>
-        </p:txBody>
-      </p:sp>
-      <p:sp>
-        <p:nvSpPr>
-          <p:cNvPr id="10" name="TextBox 9"/>
-          <p:cNvSpPr txBox="1"/>
-          <p:nvPr/>
-        </p:nvSpPr>
-        <p:spPr>
-          <a:xfrm>
-            <a:off x="781050" y="2381250"/>
-            <a:ext cx="5905500" cy="628650"/>
-          </a:xfrm>
-          <a:prstGeom prst="rect">
-            <a:avLst/>
-          </a:prstGeom>
-          <a:noFill/>
-        </p:spPr>
-        <p:txBody>
-          <a:bodyPr wrap="square" lIns="0" rIns="0" tIns="0" bIns="0" anchor="ctr">
-            <a:spAutoFit/>
-          </a:bodyPr>
-          <a:lstStyle/>
-          <a:p>
-            <a:pPr algn="l">
-              <a:lnSpc>
-                <a:spcPct val="130000"/>
-              </a:lnSpc>
-            </a:pPr>
-            <a:r>
-              <a:rPr sz="1425" b="0">
-                <a:solidFill>
-                  <a:srgbClr val="1A2230"/>
-                </a:solidFill>
-                <a:latin typeface="Microsoft YaHei"/>
-              </a:rPr>
-              <a:t>✓  S2 收费：下单、支付、回调幂等、异常订单、对账</a:t>
-            </a:r>
-          </a:p>
-        </p:txBody>
-      </p:sp>
-      <p:sp>
-        <p:nvSpPr>
-          <p:cNvPr id="11" name="Rounded Rectangle 10"/>
-          <p:cNvSpPr/>
-          <p:nvPr/>
-        </p:nvSpPr>
-        <p:spPr>
-          <a:xfrm>
-            <a:off x="590550" y="3086100"/>
-            <a:ext cx="6248400" cy="628650"/>
-          </a:xfrm>
-          <a:prstGeom prst="roundRect">
-            <a:avLst>
-              <a:gd name="adj" fmla="val 12121"/>
-            </a:avLst>
-          </a:prstGeom>
-          <a:solidFill>
-            <a:srgbClr val="FFFFFF"/>
-          </a:solidFill>
-          <a:ln w="12700">
-            <a:solidFill>
-              <a:srgbClr val="D6DCE5"/>
-            </a:solidFill>
-          </a:ln>
-          <a:effectLst/>
-        </p:spPr>
-        <p:style>
-          <a:lnRef idx="1">
-            <a:schemeClr val="accent1"/>
-          </a:lnRef>
-          <a:fillRef idx="3">
-            <a:schemeClr val="accent1"/>
-          </a:fillRef>
-          <a:effectRef idx="2">
-            <a:schemeClr val="accent1"/>
-          </a:effectRef>
-          <a:fontRef idx="minor">
-            <a:schemeClr val="lt1"/>
-          </a:fontRef>
-        </p:style>
-        <p:txBody>
-          <a:bodyPr rtlCol="0" anchor="ctr" wrap="square"/>
-          <a:lstStyle/>
-          <a:p>
-            <a:pPr algn="ctr"/>
-          </a:p>
-        </p:txBody>
-      </p:sp>
-      <p:sp>
-        <p:nvSpPr>
-          <p:cNvPr id="12" name="TextBox 11"/>
-          <p:cNvSpPr txBox="1"/>
-          <p:nvPr/>
-        </p:nvSpPr>
-        <p:spPr>
-          <a:xfrm>
-            <a:off x="781050" y="3086100"/>
-            <a:ext cx="5905500" cy="628650"/>
-          </a:xfrm>
-          <a:prstGeom prst="rect">
-            <a:avLst/>
-          </a:prstGeom>
-          <a:noFill/>
-        </p:spPr>
-        <p:txBody>
-          <a:bodyPr wrap="square" lIns="0" rIns="0" tIns="0" bIns="0" anchor="ctr">
-            <a:spAutoFit/>
-          </a:bodyPr>
-          <a:lstStyle/>
-          <a:p>
-            <a:pPr algn="l">
-              <a:lnSpc>
-                <a:spcPct val="130000"/>
-              </a:lnSpc>
-            </a:pPr>
-            <a:r>
-              <a:rPr sz="1425" b="0">
-                <a:solidFill>
-                  <a:srgbClr val="1A2230"/>
-                </a:solidFill>
-                <a:latin typeface="Microsoft YaHei"/>
-              </a:rPr>
-              <a:t>✓  S4 预警：流失风险、爽约预测、新会员跟进</a:t>
-            </a:r>
-          </a:p>
-        </p:txBody>
-      </p:sp>
-      <p:sp>
-        <p:nvSpPr>
-          <p:cNvPr id="13" name="Rounded Rectangle 12"/>
-          <p:cNvSpPr/>
-          <p:nvPr/>
-        </p:nvSpPr>
-        <p:spPr>
-          <a:xfrm>
-            <a:off x="590550" y="3790950"/>
-            <a:ext cx="6248400" cy="628650"/>
-          </a:xfrm>
-          <a:prstGeom prst="roundRect">
-            <a:avLst>
-              <a:gd name="adj" fmla="val 12121"/>
-            </a:avLst>
-          </a:prstGeom>
-          <a:solidFill>
-            <a:srgbClr val="FFFFFF"/>
-          </a:solidFill>
-          <a:ln w="12700">
-            <a:solidFill>
-              <a:srgbClr val="D6DCE5"/>
-            </a:solidFill>
-          </a:ln>
-          <a:effectLst/>
-        </p:spPr>
-        <p:style>
-          <a:lnRef idx="1">
-            <a:schemeClr val="accent1"/>
-          </a:lnRef>
-          <a:fillRef idx="3">
-            <a:schemeClr val="accent1"/>
-          </a:fillRef>
-          <a:effectRef idx="2">
-            <a:schemeClr val="accent1"/>
-          </a:effectRef>
-          <a:fontRef idx="minor">
-            <a:schemeClr val="lt1"/>
-          </a:fontRef>
-        </p:style>
-        <p:txBody>
-          <a:bodyPr rtlCol="0" anchor="ctr" wrap="square"/>
-          <a:lstStyle/>
-          <a:p>
-            <a:pPr algn="ctr"/>
-          </a:p>
-        </p:txBody>
-      </p:sp>
-      <p:sp>
-        <p:nvSpPr>
-          <p:cNvPr id="14" name="TextBox 13"/>
-          <p:cNvSpPr txBox="1"/>
-          <p:nvPr/>
-        </p:nvSpPr>
-        <p:spPr>
-          <a:xfrm>
-            <a:off x="781050" y="3790950"/>
-            <a:ext cx="5905500" cy="628650"/>
-          </a:xfrm>
-          <a:prstGeom prst="rect">
-            <a:avLst/>
-          </a:prstGeom>
-          <a:noFill/>
-        </p:spPr>
-        <p:txBody>
-          <a:bodyPr wrap="square" lIns="0" rIns="0" tIns="0" bIns="0" anchor="ctr">
-            <a:spAutoFit/>
-          </a:bodyPr>
-          <a:lstStyle/>
-          <a:p>
-            <a:pPr algn="l">
-              <a:lnSpc>
-                <a:spcPct val="130000"/>
-              </a:lnSpc>
-            </a:pPr>
-            <a:r>
-              <a:rPr sz="1425" b="0">
-                <a:solidFill>
-                  <a:srgbClr val="1A2230"/>
-                </a:solidFill>
-                <a:latin typeface="Microsoft YaHei"/>
-              </a:rPr>
-              <a:t>✓  登录与角色鉴权（服务端强制，越权拦截已测）</a:t>
-            </a:r>
-          </a:p>
-        </p:txBody>
-      </p:sp>
-      <p:sp>
-        <p:nvSpPr>
-          <p:cNvPr id="15" name="Rounded Rectangle 14"/>
-          <p:cNvSpPr/>
-          <p:nvPr/>
-        </p:nvSpPr>
-        <p:spPr>
-          <a:xfrm>
-            <a:off x="590550" y="4495800"/>
-            <a:ext cx="6248400" cy="628650"/>
-          </a:xfrm>
-          <a:prstGeom prst="roundRect">
-            <a:avLst>
-              <a:gd name="adj" fmla="val 12121"/>
-            </a:avLst>
-          </a:prstGeom>
-          <a:solidFill>
-            <a:srgbClr val="FFFFFF"/>
-          </a:solidFill>
-          <a:ln w="12700">
-            <a:solidFill>
-              <a:srgbClr val="D6DCE5"/>
-            </a:solidFill>
-          </a:ln>
-          <a:effectLst/>
-        </p:spPr>
-        <p:style>
-          <a:lnRef idx="1">
-            <a:schemeClr val="accent1"/>
-          </a:lnRef>
-          <a:fillRef idx="3">
-            <a:schemeClr val="accent1"/>
-          </a:fillRef>
-          <a:effectRef idx="2">
-            <a:schemeClr val="accent1"/>
-          </a:effectRef>
-          <a:fontRef idx="minor">
-            <a:schemeClr val="lt1"/>
-          </a:fontRef>
-        </p:style>
-        <p:txBody>
-          <a:bodyPr rtlCol="0" anchor="ctr" wrap="square"/>
-          <a:lstStyle/>
-          <a:p>
-            <a:pPr algn="ctr"/>
-          </a:p>
-        </p:txBody>
-      </p:sp>
-      <p:sp>
-        <p:nvSpPr>
-          <p:cNvPr id="16" name="TextBox 15"/>
-          <p:cNvSpPr txBox="1"/>
-          <p:nvPr/>
-        </p:nvSpPr>
-        <p:spPr>
-          <a:xfrm>
-            <a:off x="781050" y="4495800"/>
-            <a:ext cx="5905500" cy="628650"/>
-          </a:xfrm>
-          <a:prstGeom prst="rect">
-            <a:avLst/>
-          </a:prstGeom>
-          <a:noFill/>
-        </p:spPr>
-        <p:txBody>
-          <a:bodyPr wrap="square" lIns="0" rIns="0" tIns="0" bIns="0" anchor="ctr">
-            <a:spAutoFit/>
-          </a:bodyPr>
-          <a:lstStyle/>
-          <a:p>
-            <a:pPr algn="l">
-              <a:lnSpc>
-                <a:spcPct val="130000"/>
-              </a:lnSpc>
-            </a:pPr>
-            <a:r>
-              <a:rPr sz="1425" b="0">
-                <a:solidFill>
-                  <a:srgbClr val="1A2230"/>
-                </a:solidFill>
-                <a:latin typeface="Microsoft YaHei"/>
-              </a:rPr>
-              <a:t>✓  六层 226 项自动化检查 + 一键启动脚本</a:t>
-            </a:r>
-          </a:p>
-        </p:txBody>
-      </p:sp>
-      <p:sp>
-        <p:nvSpPr>
-          <p:cNvPr id="17" name="Rounded Rectangle 16"/>
-          <p:cNvSpPr/>
-          <p:nvPr/>
-        </p:nvSpPr>
-        <p:spPr>
-          <a:xfrm>
-            <a:off x="7277100" y="1028700"/>
-            <a:ext cx="4533900" cy="2057400"/>
-          </a:xfrm>
-          <a:prstGeom prst="roundRect">
-            <a:avLst>
-              <a:gd name="adj" fmla="val 5555"/>
-            </a:avLst>
-          </a:prstGeom>
-          <a:solidFill>
-            <a:srgbClr val="FFFFFF"/>
-          </a:solidFill>
-          <a:ln w="12700">
-            <a:solidFill>
-              <a:srgbClr val="D6DCE5"/>
-            </a:solidFill>
-          </a:ln>
-          <a:effectLst/>
-        </p:spPr>
-        <p:style>
-          <a:lnRef idx="1">
-            <a:schemeClr val="accent1"/>
-          </a:lnRef>
-          <a:fillRef idx="3">
-            <a:schemeClr val="accent1"/>
-          </a:fillRef>
-          <a:effectRef idx="2">
-            <a:schemeClr val="accent1"/>
-          </a:effectRef>
-          <a:fontRef idx="minor">
-            <a:schemeClr val="lt1"/>
-          </a:fontRef>
-        </p:style>
-        <p:txBody>
-          <a:bodyPr rtlCol="0" anchor="ctr" wrap="square"/>
-          <a:lstStyle/>
-          <a:p>
-            <a:pPr algn="ctr"/>
-          </a:p>
-        </p:txBody>
-      </p:sp>
-      <p:sp>
-        <p:nvSpPr>
-          <p:cNvPr id="18" name="TextBox 17"/>
-          <p:cNvSpPr txBox="1"/>
-          <p:nvPr/>
-        </p:nvSpPr>
-        <p:spPr>
-          <a:xfrm>
-            <a:off x="7486650" y="1219200"/>
-            <a:ext cx="4114800" cy="323850"/>
-          </a:xfrm>
-          <a:prstGeom prst="rect">
-            <a:avLst/>
-          </a:prstGeom>
-          <a:noFill/>
-        </p:spPr>
-        <p:txBody>
-          <a:bodyPr wrap="square" lIns="0" rIns="0" tIns="0" bIns="0" anchor="ctr">
-            <a:spAutoFit/>
-          </a:bodyPr>
-          <a:lstStyle/>
-          <a:p>
-            <a:pPr algn="l">
-              <a:lnSpc>
-                <a:spcPct val="130000"/>
-              </a:lnSpc>
-            </a:pPr>
-            <a:r>
-              <a:rPr sz="1725" b="1">
-                <a:solidFill>
-                  <a:srgbClr val="0E3F8C"/>
-                </a:solidFill>
-                <a:latin typeface="Microsoft YaHei"/>
-              </a:rPr>
-              <a:t>仅有表结构与骨架</a:t>
-            </a:r>
-          </a:p>
-        </p:txBody>
-      </p:sp>
-      <p:sp>
-        <p:nvSpPr>
-          <p:cNvPr id="19" name="TextBox 18"/>
-          <p:cNvSpPr txBox="1"/>
-          <p:nvPr/>
-        </p:nvSpPr>
-        <p:spPr>
-          <a:xfrm>
-            <a:off x="7486650" y="1619250"/>
-            <a:ext cx="4114800" cy="1276350"/>
-          </a:xfrm>
-          <a:prstGeom prst="rect">
-            <a:avLst/>
-          </a:prstGeom>
-          <a:noFill/>
-        </p:spPr>
-        <p:txBody>
-          <a:bodyPr wrap="square" lIns="0" rIns="0" tIns="0" bIns="0" anchor="t">
-            <a:spAutoFit/>
-          </a:bodyPr>
-          <a:lstStyle/>
-          <a:p>
-            <a:pPr algn="l">
-              <a:lnSpc>
-                <a:spcPct val="155000"/>
-              </a:lnSpc>
-            </a:pPr>
-            <a:r>
-              <a:rPr sz="1425" b="0">
-                <a:solidFill>
-                  <a:srgbClr val="1A2230"/>
-                </a:solidFill>
-                <a:latin typeface="Microsoft YaHei"/>
-              </a:rPr>
-              <a:t>S5 设备与工单：已完成数据库设计与迁移（V5），Java 侧仅保留模块骨架，尚未实现业务逻辑。</a:t>
-            </a:r>
-          </a:p>
-        </p:txBody>
-      </p:sp>
-      <p:sp>
-        <p:nvSpPr>
-          <p:cNvPr id="20" name="Rounded Rectangle 19"/>
-          <p:cNvSpPr/>
-          <p:nvPr/>
-        </p:nvSpPr>
-        <p:spPr>
-          <a:xfrm>
-            <a:off x="7277100" y="3276600"/>
-            <a:ext cx="4533900" cy="2057400"/>
-          </a:xfrm>
-          <a:prstGeom prst="roundRect">
-            <a:avLst>
-              <a:gd name="adj" fmla="val 5555"/>
-            </a:avLst>
-          </a:prstGeom>
-          <a:solidFill>
-            <a:srgbClr val="FFFFFF"/>
-          </a:solidFill>
-          <a:ln w="12700">
-            <a:solidFill>
-              <a:srgbClr val="D6DCE5"/>
-            </a:solidFill>
-          </a:ln>
-          <a:effectLst/>
-        </p:spPr>
-        <p:style>
-          <a:lnRef idx="1">
-            <a:schemeClr val="accent1"/>
-          </a:lnRef>
-          <a:fillRef idx="3">
-            <a:schemeClr val="accent1"/>
-          </a:fillRef>
-          <a:effectRef idx="2">
-            <a:schemeClr val="accent1"/>
-          </a:effectRef>
-          <a:fontRef idx="minor">
-            <a:schemeClr val="lt1"/>
-          </a:fontRef>
-        </p:style>
-        <p:txBody>
-          <a:bodyPr rtlCol="0" anchor="ctr" wrap="square"/>
-          <a:lstStyle/>
-          <a:p>
-            <a:pPr algn="ctr"/>
-          </a:p>
-        </p:txBody>
-      </p:sp>
-      <p:sp>
-        <p:nvSpPr>
-          <p:cNvPr id="21" name="TextBox 20"/>
-          <p:cNvSpPr txBox="1"/>
-          <p:nvPr/>
-        </p:nvSpPr>
-        <p:spPr>
-          <a:xfrm>
-            <a:off x="7486650" y="3467100"/>
-            <a:ext cx="4114800" cy="323850"/>
-          </a:xfrm>
-          <a:prstGeom prst="rect">
-            <a:avLst/>
-          </a:prstGeom>
-          <a:noFill/>
-        </p:spPr>
-        <p:txBody>
-          <a:bodyPr wrap="square" lIns="0" rIns="0" tIns="0" bIns="0" anchor="ctr">
-            <a:spAutoFit/>
-          </a:bodyPr>
-          <a:lstStyle/>
-          <a:p>
-            <a:pPr algn="l">
-              <a:lnSpc>
-                <a:spcPct val="130000"/>
-              </a:lnSpc>
-            </a:pPr>
-            <a:r>
-              <a:rPr sz="1725" b="1">
-                <a:solidFill>
-                  <a:srgbClr val="0E3F8C"/>
-                </a:solidFill>
-                <a:latin typeface="Microsoft YaHei"/>
-              </a:rPr>
-              <a:t>完全未开始</a:t>
-            </a:r>
-          </a:p>
-        </p:txBody>
-      </p:sp>
-      <p:sp>
-        <p:nvSpPr>
-          <p:cNvPr id="22" name="TextBox 21"/>
-          <p:cNvSpPr txBox="1"/>
-          <p:nvPr/>
-        </p:nvSpPr>
-        <p:spPr>
-          <a:xfrm>
-            <a:off x="7486650" y="3867150"/>
-            <a:ext cx="4114800" cy="1276350"/>
-          </a:xfrm>
-          <a:prstGeom prst="rect">
-            <a:avLst/>
-          </a:prstGeom>
-          <a:noFill/>
-        </p:spPr>
-        <p:txBody>
-          <a:bodyPr wrap="square" lIns="0" rIns="0" tIns="0" bIns="0" anchor="t">
-            <a:spAutoFit/>
-          </a:bodyPr>
-          <a:lstStyle/>
-          <a:p>
-            <a:pPr algn="l">
-              <a:lnSpc>
-                <a:spcPct val="155000"/>
-              </a:lnSpc>
-            </a:pPr>
-            <a:r>
-              <a:rPr sz="1425" b="0">
-                <a:solidFill>
-                  <a:srgbClr val="1A2230"/>
-                </a:solidFill>
-                <a:latin typeface="Microsoft YaHei"/>
-              </a:rPr>
-              <a:t>真实微信支付对接（当前为 Mock 回调）、JWT 无状态令牌（当前为内存会话）、CI 流水线。</a:t>
-            </a:r>
-          </a:p>
-        </p:txBody>
-      </p:sp>
-      <p:sp>
-        <p:nvSpPr>
-          <p:cNvPr id="23" name="Rounded Rectangle 22"/>
-          <p:cNvSpPr/>
-          <p:nvPr/>
-        </p:nvSpPr>
-        <p:spPr>
-          <a:xfrm>
-            <a:off x="381000" y="5505450"/>
-            <a:ext cx="11430000" cy="590550"/>
-          </a:xfrm>
-          <a:prstGeom prst="roundRect">
-            <a:avLst>
-              <a:gd name="adj" fmla="val 12903"/>
-            </a:avLst>
-          </a:prstGeom>
-          <a:solidFill>
-            <a:srgbClr val="E8EFF8"/>
-          </a:solidFill>
-          <a:ln>
-            <a:noFill/>
-          </a:ln>
-          <a:effectLst/>
-        </p:spPr>
-        <p:style>
-          <a:lnRef idx="1">
-            <a:schemeClr val="accent1"/>
-          </a:lnRef>
-          <a:fillRef idx="3">
-            <a:schemeClr val="accent1"/>
-          </a:fillRef>
-          <a:effectRef idx="2">
-            <a:schemeClr val="accent1"/>
-          </a:effectRef>
-          <a:fontRef idx="minor">
-            <a:schemeClr val="lt1"/>
-          </a:fontRef>
-        </p:style>
-        <p:txBody>
-          <a:bodyPr rtlCol="0" anchor="ctr" wrap="square"/>
-          <a:lstStyle/>
-          <a:p>
-            <a:pPr algn="ctr"/>
-          </a:p>
-        </p:txBody>
-      </p:sp>
-      <p:sp>
-        <p:nvSpPr>
-          <p:cNvPr id="24" name="Rectangle 23"/>
-          <p:cNvSpPr/>
-          <p:nvPr/>
-        </p:nvSpPr>
-        <p:spPr>
-          <a:xfrm>
-            <a:off x="381000" y="5505450"/>
-            <a:ext cx="38100" cy="590550"/>
-          </a:xfrm>
-          <a:prstGeom prst="rect">
-            <a:avLst/>
-          </a:prstGeom>
-          <a:solidFill>
-            <a:srgbClr val="1E4FA8"/>
-          </a:solidFill>
-          <a:ln>
-            <a:noFill/>
-          </a:ln>
-          <a:effectLst/>
-        </p:spPr>
-        <p:style>
-          <a:lnRef idx="1">
-            <a:schemeClr val="accent1"/>
-          </a:lnRef>
-          <a:fillRef idx="3">
-            <a:schemeClr val="accent1"/>
-          </a:fillRef>
-          <a:effectRef idx="2">
-            <a:schemeClr val="accent1"/>
-          </a:effectRef>
-          <a:fontRef idx="minor">
-            <a:schemeClr val="lt1"/>
-          </a:fontRef>
-        </p:style>
-        <p:txBody>
-          <a:bodyPr rtlCol="0" anchor="ctr" wrap="square"/>
-          <a:lstStyle/>
-          <a:p>
-            <a:pPr algn="ctr"/>
-          </a:p>
-        </p:txBody>
-      </p:sp>
-      <p:sp>
-        <p:nvSpPr>
-          <p:cNvPr id="25" name="TextBox 24"/>
-          <p:cNvSpPr txBox="1"/>
-          <p:nvPr/>
-        </p:nvSpPr>
-        <p:spPr>
-          <a:xfrm>
-            <a:off x="533400" y="5505450"/>
-            <a:ext cx="914400" cy="590550"/>
-          </a:xfrm>
-          <a:prstGeom prst="rect">
-            <a:avLst/>
-          </a:prstGeom>
-          <a:noFill/>
-        </p:spPr>
-        <p:txBody>
-          <a:bodyPr wrap="square" lIns="0" rIns="0" tIns="0" bIns="0" anchor="ctr">
-            <a:spAutoFit/>
-          </a:bodyPr>
-          <a:lstStyle/>
-          <a:p>
-            <a:pPr algn="l">
-              <a:lnSpc>
-                <a:spcPct val="130000"/>
-              </a:lnSpc>
-            </a:pPr>
-            <a:r>
-              <a:rPr sz="1500" b="1">
-                <a:solidFill>
-                  <a:srgbClr val="1E4FA8"/>
-                </a:solidFill>
-                <a:latin typeface="Microsoft YaHei"/>
-              </a:rPr>
-              <a:t>下一步</a:t>
-            </a:r>
-          </a:p>
-        </p:txBody>
-      </p:sp>
-      <p:sp>
-        <p:nvSpPr>
-          <p:cNvPr id="26" name="TextBox 25"/>
-          <p:cNvSpPr txBox="1"/>
-          <p:nvPr/>
-        </p:nvSpPr>
-        <p:spPr>
-          <a:xfrm>
-            <a:off x="1504950" y="5505450"/>
-            <a:ext cx="10134600" cy="590550"/>
-          </a:xfrm>
-          <a:prstGeom prst="rect">
-            <a:avLst/>
-          </a:prstGeom>
-          <a:noFill/>
-        </p:spPr>
-        <p:txBody>
-          <a:bodyPr wrap="square" lIns="0" rIns="0" tIns="0" bIns="0" anchor="ctr">
-            <a:spAutoFit/>
-          </a:bodyPr>
-          <a:lstStyle/>
-          <a:p>
-            <a:pPr algn="l">
-              <a:lnSpc>
-                <a:spcPct val="135000"/>
-              </a:lnSpc>
-            </a:pPr>
-            <a:r>
-              <a:rPr sz="1500" b="0">
-                <a:solidFill>
-                  <a:srgbClr val="1A2230"/>
-                </a:solidFill>
-                <a:latin typeface="Microsoft YaHei"/>
-              </a:rPr>
-              <a:t>先补 S5 业务逻辑，再把会话改为 JWT，最后接入支付沙箱与 CI</a:t>
-            </a:r>
-          </a:p>
-        </p:txBody>
-      </p:sp>
-      <p:sp>
-        <p:nvSpPr>
-          <p:cNvPr id="27" name="Rectangle 26"/>
-          <p:cNvSpPr/>
-          <p:nvPr/>
-        </p:nvSpPr>
-        <p:spPr>
-          <a:xfrm>
-            <a:off x="381000" y="6286500"/>
-            <a:ext cx="11430000" cy="9525"/>
-          </a:xfrm>
-          <a:prstGeom prst="rect">
-            <a:avLst/>
-          </a:prstGeom>
-          <a:solidFill>
-            <a:srgbClr val="E5E7EB"/>
-          </a:solidFill>
-          <a:ln>
-            <a:noFill/>
-          </a:ln>
-          <a:effectLst/>
-        </p:spPr>
-        <p:style>
-          <a:lnRef idx="1">
-            <a:schemeClr val="accent1"/>
-          </a:lnRef>
-          <a:fillRef idx="3">
-            <a:schemeClr val="accent1"/>
-          </a:fillRef>
-          <a:effectRef idx="2">
-            <a:schemeClr val="accent1"/>
-          </a:effectRef>
-          <a:fontRef idx="minor">
-            <a:schemeClr val="lt1"/>
-          </a:fontRef>
-        </p:style>
-        <p:txBody>
-          <a:bodyPr rtlCol="0" anchor="ctr" wrap="square"/>
-          <a:lstStyle/>
-          <a:p>
-            <a:pPr algn="ctr"/>
-          </a:p>
-        </p:txBody>
-      </p:sp>
-      <p:sp>
-        <p:nvSpPr>
-          <p:cNvPr id="28" name="TextBox 27"/>
-          <p:cNvSpPr txBox="1"/>
-          <p:nvPr/>
-        </p:nvSpPr>
-        <p:spPr>
-          <a:xfrm>
-            <a:off x="381000" y="6324600"/>
-            <a:ext cx="8763000" cy="285750"/>
-          </a:xfrm>
-          <a:prstGeom prst="rect">
-            <a:avLst/>
-          </a:prstGeom>
-          <a:noFill/>
-        </p:spPr>
-        <p:txBody>
-          <a:bodyPr wrap="square" lIns="0" rIns="0" tIns="0" bIns="0" anchor="ctr">
-            <a:spAutoFit/>
-          </a:bodyPr>
-          <a:lstStyle/>
-          <a:p>
-            <a:pPr algn="l">
-              <a:lnSpc>
-                <a:spcPct val="130000"/>
-              </a:lnSpc>
-            </a:pPr>
-            <a:r>
-              <a:rPr sz="1125" b="0">
-                <a:solidFill>
-                  <a:srgbClr val="8B97A8"/>
-                </a:solidFill>
-                <a:latin typeface="Microsoft YaHei"/>
-              </a:rPr>
-              <a:t>来源：代码实现与测试报告 · 开放问题台账</a:t>
-            </a:r>
-          </a:p>
-        </p:txBody>
-      </p:sp>
-      <p:sp>
-        <p:nvSpPr>
-          <p:cNvPr id="29" name="TextBox 28"/>
-          <p:cNvSpPr txBox="1"/>
-          <p:nvPr/>
-        </p:nvSpPr>
-        <p:spPr>
-          <a:xfrm>
-            <a:off x="9525000" y="6324600"/>
-            <a:ext cx="2286000" cy="285750"/>
-          </a:xfrm>
-          <a:prstGeom prst="rect">
-            <a:avLst/>
-          </a:prstGeom>
-          <a:noFill/>
-        </p:spPr>
-        <p:txBody>
-          <a:bodyPr wrap="square" lIns="0" rIns="0" tIns="0" bIns="0" anchor="ctr">
-            <a:spAutoFit/>
-          </a:bodyPr>
-          <a:lstStyle/>
-          <a:p>
-            <a:pPr algn="r">
-              <a:lnSpc>
-                <a:spcPct val="130000"/>
-              </a:lnSpc>
-            </a:pPr>
-            <a:r>
-              <a:rPr sz="1200" b="1">
-                <a:solidFill>
-                  <a:srgbClr val="1E4FA8"/>
-                </a:solidFill>
-                <a:latin typeface="Microsoft YaHei"/>
-              </a:rPr>
-              <a:t>23 / 24</a:t>
+              <a:t>23 / 25</a:t>
             </a:r>
           </a:p>
         </p:txBody>
@@ -22482,6 +22455,1216 @@
         <p:spPr>
           <a:xfrm>
             <a:off x="0" y="0"/>
+            <a:ext cx="12192000" cy="762000"/>
+          </a:xfrm>
+          <a:prstGeom prst="rect">
+            <a:avLst/>
+          </a:prstGeom>
+          <a:solidFill>
+            <a:srgbClr val="1E4FA8"/>
+          </a:solidFill>
+          <a:ln>
+            <a:noFill/>
+          </a:ln>
+          <a:effectLst/>
+        </p:spPr>
+        <p:style>
+          <a:lnRef idx="1">
+            <a:schemeClr val="accent1"/>
+          </a:lnRef>
+          <a:fillRef idx="3">
+            <a:schemeClr val="accent1"/>
+          </a:fillRef>
+          <a:effectRef idx="2">
+            <a:schemeClr val="accent1"/>
+          </a:effectRef>
+          <a:fontRef idx="minor">
+            <a:schemeClr val="lt1"/>
+          </a:fontRef>
+        </p:style>
+        <p:txBody>
+          <a:bodyPr rtlCol="0" anchor="ctr" wrap="square"/>
+          <a:lstStyle/>
+          <a:p>
+            <a:pPr algn="ctr"/>
+          </a:p>
+        </p:txBody>
+      </p:sp>
+      <p:sp>
+        <p:nvSpPr>
+          <p:cNvPr id="3" name="TextBox 2"/>
+          <p:cNvSpPr txBox="1"/>
+          <p:nvPr/>
+        </p:nvSpPr>
+        <p:spPr>
+          <a:xfrm>
+            <a:off x="381000" y="0"/>
+            <a:ext cx="7239000" cy="762000"/>
+          </a:xfrm>
+          <a:prstGeom prst="rect">
+            <a:avLst/>
+          </a:prstGeom>
+          <a:noFill/>
+        </p:spPr>
+        <p:txBody>
+          <a:bodyPr wrap="square" lIns="0" rIns="0" tIns="0" bIns="0" anchor="ctr">
+            <a:spAutoFit/>
+          </a:bodyPr>
+          <a:lstStyle/>
+          <a:p>
+            <a:pPr algn="l">
+              <a:lnSpc>
+                <a:spcPct val="130000"/>
+              </a:lnSpc>
+            </a:pPr>
+            <a:r>
+              <a:rPr sz="2400" b="1">
+                <a:solidFill>
+                  <a:srgbClr val="FFFFFF"/>
+                </a:solidFill>
+                <a:latin typeface="Microsoft YaHei"/>
+              </a:rPr>
+              <a:t>没做完的部分，以及下一步</a:t>
+            </a:r>
+          </a:p>
+        </p:txBody>
+      </p:sp>
+      <p:sp>
+        <p:nvSpPr>
+          <p:cNvPr id="4" name="TextBox 3"/>
+          <p:cNvSpPr txBox="1"/>
+          <p:nvPr/>
+        </p:nvSpPr>
+        <p:spPr>
+          <a:xfrm>
+            <a:off x="7620000" y="0"/>
+            <a:ext cx="4191000" cy="762000"/>
+          </a:xfrm>
+          <a:prstGeom prst="rect">
+            <a:avLst/>
+          </a:prstGeom>
+          <a:noFill/>
+        </p:spPr>
+        <p:txBody>
+          <a:bodyPr wrap="square" lIns="0" rIns="0" tIns="0" bIns="0" anchor="ctr">
+            <a:spAutoFit/>
+          </a:bodyPr>
+          <a:lstStyle/>
+          <a:p>
+            <a:pPr algn="r">
+              <a:lnSpc>
+                <a:spcPct val="130000"/>
+              </a:lnSpc>
+            </a:pPr>
+            <a:r>
+              <a:rPr sz="1050" b="0">
+                <a:solidFill>
+                  <a:srgbClr val="BFD3F0"/>
+                </a:solidFill>
+                <a:latin typeface="Microsoft YaHei"/>
+              </a:rPr>
+              <a:t>健身房运营管理系统 · 课程答辩</a:t>
+            </a:r>
+          </a:p>
+        </p:txBody>
+      </p:sp>
+      <p:sp>
+        <p:nvSpPr>
+          <p:cNvPr id="5" name="Rounded Rectangle 4"/>
+          <p:cNvSpPr/>
+          <p:nvPr/>
+        </p:nvSpPr>
+        <p:spPr>
+          <a:xfrm>
+            <a:off x="381000" y="1028700"/>
+            <a:ext cx="6667500" cy="4305300"/>
+          </a:xfrm>
+          <a:prstGeom prst="roundRect">
+            <a:avLst>
+              <a:gd name="adj" fmla="val 2654"/>
+            </a:avLst>
+          </a:prstGeom>
+          <a:solidFill>
+            <a:srgbClr val="E8EFF8"/>
+          </a:solidFill>
+          <a:ln>
+            <a:noFill/>
+          </a:ln>
+          <a:effectLst/>
+        </p:spPr>
+        <p:style>
+          <a:lnRef idx="1">
+            <a:schemeClr val="accent1"/>
+          </a:lnRef>
+          <a:fillRef idx="3">
+            <a:schemeClr val="accent1"/>
+          </a:fillRef>
+          <a:effectRef idx="2">
+            <a:schemeClr val="accent1"/>
+          </a:effectRef>
+          <a:fontRef idx="minor">
+            <a:schemeClr val="lt1"/>
+          </a:fontRef>
+        </p:style>
+        <p:txBody>
+          <a:bodyPr rtlCol="0" anchor="ctr" wrap="square"/>
+          <a:lstStyle/>
+          <a:p>
+            <a:pPr algn="ctr"/>
+          </a:p>
+        </p:txBody>
+      </p:sp>
+      <p:sp>
+        <p:nvSpPr>
+          <p:cNvPr id="6" name="TextBox 5"/>
+          <p:cNvSpPr txBox="1"/>
+          <p:nvPr/>
+        </p:nvSpPr>
+        <p:spPr>
+          <a:xfrm>
+            <a:off x="590550" y="1219200"/>
+            <a:ext cx="6248400" cy="323850"/>
+          </a:xfrm>
+          <a:prstGeom prst="rect">
+            <a:avLst/>
+          </a:prstGeom>
+          <a:noFill/>
+        </p:spPr>
+        <p:txBody>
+          <a:bodyPr wrap="square" lIns="0" rIns="0" tIns="0" bIns="0" anchor="ctr">
+            <a:spAutoFit/>
+          </a:bodyPr>
+          <a:lstStyle/>
+          <a:p>
+            <a:pPr algn="l">
+              <a:lnSpc>
+                <a:spcPct val="130000"/>
+              </a:lnSpc>
+            </a:pPr>
+            <a:r>
+              <a:rPr sz="1800" b="1">
+                <a:solidFill>
+                  <a:srgbClr val="0E3F8C"/>
+                </a:solidFill>
+                <a:latin typeface="Microsoft YaHei"/>
+              </a:rPr>
+              <a:t>已完成并验证</a:t>
+            </a:r>
+          </a:p>
+        </p:txBody>
+      </p:sp>
+      <p:sp>
+        <p:nvSpPr>
+          <p:cNvPr id="7" name="Rounded Rectangle 6"/>
+          <p:cNvSpPr/>
+          <p:nvPr/>
+        </p:nvSpPr>
+        <p:spPr>
+          <a:xfrm>
+            <a:off x="590550" y="1676400"/>
+            <a:ext cx="6248400" cy="628650"/>
+          </a:xfrm>
+          <a:prstGeom prst="roundRect">
+            <a:avLst>
+              <a:gd name="adj" fmla="val 12121"/>
+            </a:avLst>
+          </a:prstGeom>
+          <a:solidFill>
+            <a:srgbClr val="FFFFFF"/>
+          </a:solidFill>
+          <a:ln w="12700">
+            <a:solidFill>
+              <a:srgbClr val="D6DCE5"/>
+            </a:solidFill>
+          </a:ln>
+          <a:effectLst/>
+        </p:spPr>
+        <p:style>
+          <a:lnRef idx="1">
+            <a:schemeClr val="accent1"/>
+          </a:lnRef>
+          <a:fillRef idx="3">
+            <a:schemeClr val="accent1"/>
+          </a:fillRef>
+          <a:effectRef idx="2">
+            <a:schemeClr val="accent1"/>
+          </a:effectRef>
+          <a:fontRef idx="minor">
+            <a:schemeClr val="lt1"/>
+          </a:fontRef>
+        </p:style>
+        <p:txBody>
+          <a:bodyPr rtlCol="0" anchor="ctr" wrap="square"/>
+          <a:lstStyle/>
+          <a:p>
+            <a:pPr algn="ctr"/>
+          </a:p>
+        </p:txBody>
+      </p:sp>
+      <p:sp>
+        <p:nvSpPr>
+          <p:cNvPr id="8" name="TextBox 7"/>
+          <p:cNvSpPr txBox="1"/>
+          <p:nvPr/>
+        </p:nvSpPr>
+        <p:spPr>
+          <a:xfrm>
+            <a:off x="781050" y="1676400"/>
+            <a:ext cx="5905500" cy="628650"/>
+          </a:xfrm>
+          <a:prstGeom prst="rect">
+            <a:avLst/>
+          </a:prstGeom>
+          <a:noFill/>
+        </p:spPr>
+        <p:txBody>
+          <a:bodyPr wrap="square" lIns="0" rIns="0" tIns="0" bIns="0" anchor="ctr">
+            <a:spAutoFit/>
+          </a:bodyPr>
+          <a:lstStyle/>
+          <a:p>
+            <a:pPr algn="l">
+              <a:lnSpc>
+                <a:spcPct val="130000"/>
+              </a:lnSpc>
+            </a:pPr>
+            <a:r>
+              <a:rPr sz="1425" b="0">
+                <a:solidFill>
+                  <a:srgbClr val="1A2230"/>
+                </a:solidFill>
+                <a:latin typeface="Microsoft YaHei"/>
+              </a:rPr>
+              <a:t>✓  S1 约课与签到主线（含取消与爽约惩罚）</a:t>
+            </a:r>
+          </a:p>
+        </p:txBody>
+      </p:sp>
+      <p:sp>
+        <p:nvSpPr>
+          <p:cNvPr id="9" name="Rounded Rectangle 8"/>
+          <p:cNvSpPr/>
+          <p:nvPr/>
+        </p:nvSpPr>
+        <p:spPr>
+          <a:xfrm>
+            <a:off x="590550" y="2381250"/>
+            <a:ext cx="6248400" cy="628650"/>
+          </a:xfrm>
+          <a:prstGeom prst="roundRect">
+            <a:avLst>
+              <a:gd name="adj" fmla="val 12121"/>
+            </a:avLst>
+          </a:prstGeom>
+          <a:solidFill>
+            <a:srgbClr val="FFFFFF"/>
+          </a:solidFill>
+          <a:ln w="12700">
+            <a:solidFill>
+              <a:srgbClr val="D6DCE5"/>
+            </a:solidFill>
+          </a:ln>
+          <a:effectLst/>
+        </p:spPr>
+        <p:style>
+          <a:lnRef idx="1">
+            <a:schemeClr val="accent1"/>
+          </a:lnRef>
+          <a:fillRef idx="3">
+            <a:schemeClr val="accent1"/>
+          </a:fillRef>
+          <a:effectRef idx="2">
+            <a:schemeClr val="accent1"/>
+          </a:effectRef>
+          <a:fontRef idx="minor">
+            <a:schemeClr val="lt1"/>
+          </a:fontRef>
+        </p:style>
+        <p:txBody>
+          <a:bodyPr rtlCol="0" anchor="ctr" wrap="square"/>
+          <a:lstStyle/>
+          <a:p>
+            <a:pPr algn="ctr"/>
+          </a:p>
+        </p:txBody>
+      </p:sp>
+      <p:sp>
+        <p:nvSpPr>
+          <p:cNvPr id="10" name="TextBox 9"/>
+          <p:cNvSpPr txBox="1"/>
+          <p:nvPr/>
+        </p:nvSpPr>
+        <p:spPr>
+          <a:xfrm>
+            <a:off x="781050" y="2381250"/>
+            <a:ext cx="5905500" cy="628650"/>
+          </a:xfrm>
+          <a:prstGeom prst="rect">
+            <a:avLst/>
+          </a:prstGeom>
+          <a:noFill/>
+        </p:spPr>
+        <p:txBody>
+          <a:bodyPr wrap="square" lIns="0" rIns="0" tIns="0" bIns="0" anchor="ctr">
+            <a:spAutoFit/>
+          </a:bodyPr>
+          <a:lstStyle/>
+          <a:p>
+            <a:pPr algn="l">
+              <a:lnSpc>
+                <a:spcPct val="130000"/>
+              </a:lnSpc>
+            </a:pPr>
+            <a:r>
+              <a:rPr sz="1425" b="0">
+                <a:solidFill>
+                  <a:srgbClr val="1A2230"/>
+                </a:solidFill>
+                <a:latin typeface="Microsoft YaHei"/>
+              </a:rPr>
+              <a:t>✓  S2 收费：下单、支付、回调幂等、异常订单、对账</a:t>
+            </a:r>
+          </a:p>
+        </p:txBody>
+      </p:sp>
+      <p:sp>
+        <p:nvSpPr>
+          <p:cNvPr id="11" name="Rounded Rectangle 10"/>
+          <p:cNvSpPr/>
+          <p:nvPr/>
+        </p:nvSpPr>
+        <p:spPr>
+          <a:xfrm>
+            <a:off x="590550" y="3086100"/>
+            <a:ext cx="6248400" cy="628650"/>
+          </a:xfrm>
+          <a:prstGeom prst="roundRect">
+            <a:avLst>
+              <a:gd name="adj" fmla="val 12121"/>
+            </a:avLst>
+          </a:prstGeom>
+          <a:solidFill>
+            <a:srgbClr val="FFFFFF"/>
+          </a:solidFill>
+          <a:ln w="12700">
+            <a:solidFill>
+              <a:srgbClr val="D6DCE5"/>
+            </a:solidFill>
+          </a:ln>
+          <a:effectLst/>
+        </p:spPr>
+        <p:style>
+          <a:lnRef idx="1">
+            <a:schemeClr val="accent1"/>
+          </a:lnRef>
+          <a:fillRef idx="3">
+            <a:schemeClr val="accent1"/>
+          </a:fillRef>
+          <a:effectRef idx="2">
+            <a:schemeClr val="accent1"/>
+          </a:effectRef>
+          <a:fontRef idx="minor">
+            <a:schemeClr val="lt1"/>
+          </a:fontRef>
+        </p:style>
+        <p:txBody>
+          <a:bodyPr rtlCol="0" anchor="ctr" wrap="square"/>
+          <a:lstStyle/>
+          <a:p>
+            <a:pPr algn="ctr"/>
+          </a:p>
+        </p:txBody>
+      </p:sp>
+      <p:sp>
+        <p:nvSpPr>
+          <p:cNvPr id="12" name="TextBox 11"/>
+          <p:cNvSpPr txBox="1"/>
+          <p:nvPr/>
+        </p:nvSpPr>
+        <p:spPr>
+          <a:xfrm>
+            <a:off x="781050" y="3086100"/>
+            <a:ext cx="5905500" cy="628650"/>
+          </a:xfrm>
+          <a:prstGeom prst="rect">
+            <a:avLst/>
+          </a:prstGeom>
+          <a:noFill/>
+        </p:spPr>
+        <p:txBody>
+          <a:bodyPr wrap="square" lIns="0" rIns="0" tIns="0" bIns="0" anchor="ctr">
+            <a:spAutoFit/>
+          </a:bodyPr>
+          <a:lstStyle/>
+          <a:p>
+            <a:pPr algn="l">
+              <a:lnSpc>
+                <a:spcPct val="130000"/>
+              </a:lnSpc>
+            </a:pPr>
+            <a:r>
+              <a:rPr sz="1425" b="0">
+                <a:solidFill>
+                  <a:srgbClr val="1A2230"/>
+                </a:solidFill>
+                <a:latin typeface="Microsoft YaHei"/>
+              </a:rPr>
+              <a:t>✓  S4 预警：流失风险、爽约预测、新会员跟进</a:t>
+            </a:r>
+          </a:p>
+        </p:txBody>
+      </p:sp>
+      <p:sp>
+        <p:nvSpPr>
+          <p:cNvPr id="13" name="Rounded Rectangle 12"/>
+          <p:cNvSpPr/>
+          <p:nvPr/>
+        </p:nvSpPr>
+        <p:spPr>
+          <a:xfrm>
+            <a:off x="590550" y="3790950"/>
+            <a:ext cx="6248400" cy="628650"/>
+          </a:xfrm>
+          <a:prstGeom prst="roundRect">
+            <a:avLst>
+              <a:gd name="adj" fmla="val 12121"/>
+            </a:avLst>
+          </a:prstGeom>
+          <a:solidFill>
+            <a:srgbClr val="FFFFFF"/>
+          </a:solidFill>
+          <a:ln w="12700">
+            <a:solidFill>
+              <a:srgbClr val="D6DCE5"/>
+            </a:solidFill>
+          </a:ln>
+          <a:effectLst/>
+        </p:spPr>
+        <p:style>
+          <a:lnRef idx="1">
+            <a:schemeClr val="accent1"/>
+          </a:lnRef>
+          <a:fillRef idx="3">
+            <a:schemeClr val="accent1"/>
+          </a:fillRef>
+          <a:effectRef idx="2">
+            <a:schemeClr val="accent1"/>
+          </a:effectRef>
+          <a:fontRef idx="minor">
+            <a:schemeClr val="lt1"/>
+          </a:fontRef>
+        </p:style>
+        <p:txBody>
+          <a:bodyPr rtlCol="0" anchor="ctr" wrap="square"/>
+          <a:lstStyle/>
+          <a:p>
+            <a:pPr algn="ctr"/>
+          </a:p>
+        </p:txBody>
+      </p:sp>
+      <p:sp>
+        <p:nvSpPr>
+          <p:cNvPr id="14" name="TextBox 13"/>
+          <p:cNvSpPr txBox="1"/>
+          <p:nvPr/>
+        </p:nvSpPr>
+        <p:spPr>
+          <a:xfrm>
+            <a:off x="781050" y="3790950"/>
+            <a:ext cx="5905500" cy="628650"/>
+          </a:xfrm>
+          <a:prstGeom prst="rect">
+            <a:avLst/>
+          </a:prstGeom>
+          <a:noFill/>
+        </p:spPr>
+        <p:txBody>
+          <a:bodyPr wrap="square" lIns="0" rIns="0" tIns="0" bIns="0" anchor="ctr">
+            <a:spAutoFit/>
+          </a:bodyPr>
+          <a:lstStyle/>
+          <a:p>
+            <a:pPr algn="l">
+              <a:lnSpc>
+                <a:spcPct val="130000"/>
+              </a:lnSpc>
+            </a:pPr>
+            <a:r>
+              <a:rPr sz="1425" b="0">
+                <a:solidFill>
+                  <a:srgbClr val="1A2230"/>
+                </a:solidFill>
+                <a:latin typeface="Microsoft YaHei"/>
+              </a:rPr>
+              <a:t>✓  登录与角色鉴权（服务端强制，越权拦截已测）</a:t>
+            </a:r>
+          </a:p>
+        </p:txBody>
+      </p:sp>
+      <p:sp>
+        <p:nvSpPr>
+          <p:cNvPr id="15" name="Rounded Rectangle 14"/>
+          <p:cNvSpPr/>
+          <p:nvPr/>
+        </p:nvSpPr>
+        <p:spPr>
+          <a:xfrm>
+            <a:off x="590550" y="4495800"/>
+            <a:ext cx="6248400" cy="628650"/>
+          </a:xfrm>
+          <a:prstGeom prst="roundRect">
+            <a:avLst>
+              <a:gd name="adj" fmla="val 12121"/>
+            </a:avLst>
+          </a:prstGeom>
+          <a:solidFill>
+            <a:srgbClr val="FFFFFF"/>
+          </a:solidFill>
+          <a:ln w="12700">
+            <a:solidFill>
+              <a:srgbClr val="D6DCE5"/>
+            </a:solidFill>
+          </a:ln>
+          <a:effectLst/>
+        </p:spPr>
+        <p:style>
+          <a:lnRef idx="1">
+            <a:schemeClr val="accent1"/>
+          </a:lnRef>
+          <a:fillRef idx="3">
+            <a:schemeClr val="accent1"/>
+          </a:fillRef>
+          <a:effectRef idx="2">
+            <a:schemeClr val="accent1"/>
+          </a:effectRef>
+          <a:fontRef idx="minor">
+            <a:schemeClr val="lt1"/>
+          </a:fontRef>
+        </p:style>
+        <p:txBody>
+          <a:bodyPr rtlCol="0" anchor="ctr" wrap="square"/>
+          <a:lstStyle/>
+          <a:p>
+            <a:pPr algn="ctr"/>
+          </a:p>
+        </p:txBody>
+      </p:sp>
+      <p:sp>
+        <p:nvSpPr>
+          <p:cNvPr id="16" name="TextBox 15"/>
+          <p:cNvSpPr txBox="1"/>
+          <p:nvPr/>
+        </p:nvSpPr>
+        <p:spPr>
+          <a:xfrm>
+            <a:off x="781050" y="4495800"/>
+            <a:ext cx="5905500" cy="628650"/>
+          </a:xfrm>
+          <a:prstGeom prst="rect">
+            <a:avLst/>
+          </a:prstGeom>
+          <a:noFill/>
+        </p:spPr>
+        <p:txBody>
+          <a:bodyPr wrap="square" lIns="0" rIns="0" tIns="0" bIns="0" anchor="ctr">
+            <a:spAutoFit/>
+          </a:bodyPr>
+          <a:lstStyle/>
+          <a:p>
+            <a:pPr algn="l">
+              <a:lnSpc>
+                <a:spcPct val="130000"/>
+              </a:lnSpc>
+            </a:pPr>
+            <a:r>
+              <a:rPr sz="1425" b="0">
+                <a:solidFill>
+                  <a:srgbClr val="1A2230"/>
+                </a:solidFill>
+                <a:latin typeface="Microsoft YaHei"/>
+              </a:rPr>
+              <a:t>✓  七层 243 项自动化检查 + 一键启动脚本</a:t>
+            </a:r>
+          </a:p>
+        </p:txBody>
+      </p:sp>
+      <p:sp>
+        <p:nvSpPr>
+          <p:cNvPr id="17" name="Rounded Rectangle 16"/>
+          <p:cNvSpPr/>
+          <p:nvPr/>
+        </p:nvSpPr>
+        <p:spPr>
+          <a:xfrm>
+            <a:off x="7277100" y="1028700"/>
+            <a:ext cx="4533900" cy="2057400"/>
+          </a:xfrm>
+          <a:prstGeom prst="roundRect">
+            <a:avLst>
+              <a:gd name="adj" fmla="val 5555"/>
+            </a:avLst>
+          </a:prstGeom>
+          <a:solidFill>
+            <a:srgbClr val="FFFFFF"/>
+          </a:solidFill>
+          <a:ln w="12700">
+            <a:solidFill>
+              <a:srgbClr val="D6DCE5"/>
+            </a:solidFill>
+          </a:ln>
+          <a:effectLst/>
+        </p:spPr>
+        <p:style>
+          <a:lnRef idx="1">
+            <a:schemeClr val="accent1"/>
+          </a:lnRef>
+          <a:fillRef idx="3">
+            <a:schemeClr val="accent1"/>
+          </a:fillRef>
+          <a:effectRef idx="2">
+            <a:schemeClr val="accent1"/>
+          </a:effectRef>
+          <a:fontRef idx="minor">
+            <a:schemeClr val="lt1"/>
+          </a:fontRef>
+        </p:style>
+        <p:txBody>
+          <a:bodyPr rtlCol="0" anchor="ctr" wrap="square"/>
+          <a:lstStyle/>
+          <a:p>
+            <a:pPr algn="ctr"/>
+          </a:p>
+        </p:txBody>
+      </p:sp>
+      <p:sp>
+        <p:nvSpPr>
+          <p:cNvPr id="18" name="TextBox 17"/>
+          <p:cNvSpPr txBox="1"/>
+          <p:nvPr/>
+        </p:nvSpPr>
+        <p:spPr>
+          <a:xfrm>
+            <a:off x="7486650" y="1219200"/>
+            <a:ext cx="4114800" cy="323850"/>
+          </a:xfrm>
+          <a:prstGeom prst="rect">
+            <a:avLst/>
+          </a:prstGeom>
+          <a:noFill/>
+        </p:spPr>
+        <p:txBody>
+          <a:bodyPr wrap="square" lIns="0" rIns="0" tIns="0" bIns="0" anchor="ctr">
+            <a:spAutoFit/>
+          </a:bodyPr>
+          <a:lstStyle/>
+          <a:p>
+            <a:pPr algn="l">
+              <a:lnSpc>
+                <a:spcPct val="130000"/>
+              </a:lnSpc>
+            </a:pPr>
+            <a:r>
+              <a:rPr sz="1725" b="1">
+                <a:solidFill>
+                  <a:srgbClr val="0E3F8C"/>
+                </a:solidFill>
+                <a:latin typeface="Microsoft YaHei"/>
+              </a:rPr>
+              <a:t>仅有表结构与骨架</a:t>
+            </a:r>
+          </a:p>
+        </p:txBody>
+      </p:sp>
+      <p:sp>
+        <p:nvSpPr>
+          <p:cNvPr id="19" name="TextBox 18"/>
+          <p:cNvSpPr txBox="1"/>
+          <p:nvPr/>
+        </p:nvSpPr>
+        <p:spPr>
+          <a:xfrm>
+            <a:off x="7486650" y="1619250"/>
+            <a:ext cx="4114800" cy="1276350"/>
+          </a:xfrm>
+          <a:prstGeom prst="rect">
+            <a:avLst/>
+          </a:prstGeom>
+          <a:noFill/>
+        </p:spPr>
+        <p:txBody>
+          <a:bodyPr wrap="square" lIns="0" rIns="0" tIns="0" bIns="0" anchor="t">
+            <a:spAutoFit/>
+          </a:bodyPr>
+          <a:lstStyle/>
+          <a:p>
+            <a:pPr algn="l">
+              <a:lnSpc>
+                <a:spcPct val="155000"/>
+              </a:lnSpc>
+            </a:pPr>
+            <a:r>
+              <a:rPr sz="1425" b="0">
+                <a:solidFill>
+                  <a:srgbClr val="1A2230"/>
+                </a:solidFill>
+                <a:latin typeface="Microsoft YaHei"/>
+              </a:rPr>
+              <a:t>S5 设备与工单：已完成数据库设计与迁移（V5），Java 侧仅保留模块骨架，尚未实现业务逻辑。</a:t>
+            </a:r>
+          </a:p>
+        </p:txBody>
+      </p:sp>
+      <p:sp>
+        <p:nvSpPr>
+          <p:cNvPr id="20" name="Rounded Rectangle 19"/>
+          <p:cNvSpPr/>
+          <p:nvPr/>
+        </p:nvSpPr>
+        <p:spPr>
+          <a:xfrm>
+            <a:off x="7277100" y="3276600"/>
+            <a:ext cx="4533900" cy="2057400"/>
+          </a:xfrm>
+          <a:prstGeom prst="roundRect">
+            <a:avLst>
+              <a:gd name="adj" fmla="val 5555"/>
+            </a:avLst>
+          </a:prstGeom>
+          <a:solidFill>
+            <a:srgbClr val="FFFFFF"/>
+          </a:solidFill>
+          <a:ln w="12700">
+            <a:solidFill>
+              <a:srgbClr val="D6DCE5"/>
+            </a:solidFill>
+          </a:ln>
+          <a:effectLst/>
+        </p:spPr>
+        <p:style>
+          <a:lnRef idx="1">
+            <a:schemeClr val="accent1"/>
+          </a:lnRef>
+          <a:fillRef idx="3">
+            <a:schemeClr val="accent1"/>
+          </a:fillRef>
+          <a:effectRef idx="2">
+            <a:schemeClr val="accent1"/>
+          </a:effectRef>
+          <a:fontRef idx="minor">
+            <a:schemeClr val="lt1"/>
+          </a:fontRef>
+        </p:style>
+        <p:txBody>
+          <a:bodyPr rtlCol="0" anchor="ctr" wrap="square"/>
+          <a:lstStyle/>
+          <a:p>
+            <a:pPr algn="ctr"/>
+          </a:p>
+        </p:txBody>
+      </p:sp>
+      <p:sp>
+        <p:nvSpPr>
+          <p:cNvPr id="21" name="TextBox 20"/>
+          <p:cNvSpPr txBox="1"/>
+          <p:nvPr/>
+        </p:nvSpPr>
+        <p:spPr>
+          <a:xfrm>
+            <a:off x="7486650" y="3467100"/>
+            <a:ext cx="4114800" cy="323850"/>
+          </a:xfrm>
+          <a:prstGeom prst="rect">
+            <a:avLst/>
+          </a:prstGeom>
+          <a:noFill/>
+        </p:spPr>
+        <p:txBody>
+          <a:bodyPr wrap="square" lIns="0" rIns="0" tIns="0" bIns="0" anchor="ctr">
+            <a:spAutoFit/>
+          </a:bodyPr>
+          <a:lstStyle/>
+          <a:p>
+            <a:pPr algn="l">
+              <a:lnSpc>
+                <a:spcPct val="130000"/>
+              </a:lnSpc>
+            </a:pPr>
+            <a:r>
+              <a:rPr sz="1725" b="1">
+                <a:solidFill>
+                  <a:srgbClr val="0E3F8C"/>
+                </a:solidFill>
+                <a:latin typeface="Microsoft YaHei"/>
+              </a:rPr>
+              <a:t>完全未开始</a:t>
+            </a:r>
+          </a:p>
+        </p:txBody>
+      </p:sp>
+      <p:sp>
+        <p:nvSpPr>
+          <p:cNvPr id="22" name="TextBox 21"/>
+          <p:cNvSpPr txBox="1"/>
+          <p:nvPr/>
+        </p:nvSpPr>
+        <p:spPr>
+          <a:xfrm>
+            <a:off x="7486650" y="3867150"/>
+            <a:ext cx="4114800" cy="1276350"/>
+          </a:xfrm>
+          <a:prstGeom prst="rect">
+            <a:avLst/>
+          </a:prstGeom>
+          <a:noFill/>
+        </p:spPr>
+        <p:txBody>
+          <a:bodyPr wrap="square" lIns="0" rIns="0" tIns="0" bIns="0" anchor="t">
+            <a:spAutoFit/>
+          </a:bodyPr>
+          <a:lstStyle/>
+          <a:p>
+            <a:pPr algn="l">
+              <a:lnSpc>
+                <a:spcPct val="155000"/>
+              </a:lnSpc>
+            </a:pPr>
+            <a:r>
+              <a:rPr sz="1425" b="0">
+                <a:solidFill>
+                  <a:srgbClr val="1A2230"/>
+                </a:solidFill>
+                <a:latin typeface="Microsoft YaHei"/>
+              </a:rPr>
+              <a:t>真实微信支付对接（当前为 Mock 回调）、JWT 无状态令牌（当前为内存会话）、CI 流水线。</a:t>
+            </a:r>
+          </a:p>
+        </p:txBody>
+      </p:sp>
+      <p:sp>
+        <p:nvSpPr>
+          <p:cNvPr id="23" name="Rounded Rectangle 22"/>
+          <p:cNvSpPr/>
+          <p:nvPr/>
+        </p:nvSpPr>
+        <p:spPr>
+          <a:xfrm>
+            <a:off x="381000" y="5505450"/>
+            <a:ext cx="11430000" cy="590550"/>
+          </a:xfrm>
+          <a:prstGeom prst="roundRect">
+            <a:avLst>
+              <a:gd name="adj" fmla="val 12903"/>
+            </a:avLst>
+          </a:prstGeom>
+          <a:solidFill>
+            <a:srgbClr val="E8EFF8"/>
+          </a:solidFill>
+          <a:ln>
+            <a:noFill/>
+          </a:ln>
+          <a:effectLst/>
+        </p:spPr>
+        <p:style>
+          <a:lnRef idx="1">
+            <a:schemeClr val="accent1"/>
+          </a:lnRef>
+          <a:fillRef idx="3">
+            <a:schemeClr val="accent1"/>
+          </a:fillRef>
+          <a:effectRef idx="2">
+            <a:schemeClr val="accent1"/>
+          </a:effectRef>
+          <a:fontRef idx="minor">
+            <a:schemeClr val="lt1"/>
+          </a:fontRef>
+        </p:style>
+        <p:txBody>
+          <a:bodyPr rtlCol="0" anchor="ctr" wrap="square"/>
+          <a:lstStyle/>
+          <a:p>
+            <a:pPr algn="ctr"/>
+          </a:p>
+        </p:txBody>
+      </p:sp>
+      <p:sp>
+        <p:nvSpPr>
+          <p:cNvPr id="24" name="Rectangle 23"/>
+          <p:cNvSpPr/>
+          <p:nvPr/>
+        </p:nvSpPr>
+        <p:spPr>
+          <a:xfrm>
+            <a:off x="381000" y="5505450"/>
+            <a:ext cx="38100" cy="590550"/>
+          </a:xfrm>
+          <a:prstGeom prst="rect">
+            <a:avLst/>
+          </a:prstGeom>
+          <a:solidFill>
+            <a:srgbClr val="1E4FA8"/>
+          </a:solidFill>
+          <a:ln>
+            <a:noFill/>
+          </a:ln>
+          <a:effectLst/>
+        </p:spPr>
+        <p:style>
+          <a:lnRef idx="1">
+            <a:schemeClr val="accent1"/>
+          </a:lnRef>
+          <a:fillRef idx="3">
+            <a:schemeClr val="accent1"/>
+          </a:fillRef>
+          <a:effectRef idx="2">
+            <a:schemeClr val="accent1"/>
+          </a:effectRef>
+          <a:fontRef idx="minor">
+            <a:schemeClr val="lt1"/>
+          </a:fontRef>
+        </p:style>
+        <p:txBody>
+          <a:bodyPr rtlCol="0" anchor="ctr" wrap="square"/>
+          <a:lstStyle/>
+          <a:p>
+            <a:pPr algn="ctr"/>
+          </a:p>
+        </p:txBody>
+      </p:sp>
+      <p:sp>
+        <p:nvSpPr>
+          <p:cNvPr id="25" name="TextBox 24"/>
+          <p:cNvSpPr txBox="1"/>
+          <p:nvPr/>
+        </p:nvSpPr>
+        <p:spPr>
+          <a:xfrm>
+            <a:off x="533400" y="5505450"/>
+            <a:ext cx="914400" cy="590550"/>
+          </a:xfrm>
+          <a:prstGeom prst="rect">
+            <a:avLst/>
+          </a:prstGeom>
+          <a:noFill/>
+        </p:spPr>
+        <p:txBody>
+          <a:bodyPr wrap="square" lIns="0" rIns="0" tIns="0" bIns="0" anchor="ctr">
+            <a:spAutoFit/>
+          </a:bodyPr>
+          <a:lstStyle/>
+          <a:p>
+            <a:pPr algn="l">
+              <a:lnSpc>
+                <a:spcPct val="130000"/>
+              </a:lnSpc>
+            </a:pPr>
+            <a:r>
+              <a:rPr sz="1500" b="1">
+                <a:solidFill>
+                  <a:srgbClr val="1E4FA8"/>
+                </a:solidFill>
+                <a:latin typeface="Microsoft YaHei"/>
+              </a:rPr>
+              <a:t>下一步</a:t>
+            </a:r>
+          </a:p>
+        </p:txBody>
+      </p:sp>
+      <p:sp>
+        <p:nvSpPr>
+          <p:cNvPr id="26" name="TextBox 25"/>
+          <p:cNvSpPr txBox="1"/>
+          <p:nvPr/>
+        </p:nvSpPr>
+        <p:spPr>
+          <a:xfrm>
+            <a:off x="1504950" y="5505450"/>
+            <a:ext cx="10134600" cy="590550"/>
+          </a:xfrm>
+          <a:prstGeom prst="rect">
+            <a:avLst/>
+          </a:prstGeom>
+          <a:noFill/>
+        </p:spPr>
+        <p:txBody>
+          <a:bodyPr wrap="square" lIns="0" rIns="0" tIns="0" bIns="0" anchor="ctr">
+            <a:spAutoFit/>
+          </a:bodyPr>
+          <a:lstStyle/>
+          <a:p>
+            <a:pPr algn="l">
+              <a:lnSpc>
+                <a:spcPct val="135000"/>
+              </a:lnSpc>
+            </a:pPr>
+            <a:r>
+              <a:rPr sz="1500" b="0">
+                <a:solidFill>
+                  <a:srgbClr val="1A2230"/>
+                </a:solidFill>
+                <a:latin typeface="Microsoft YaHei"/>
+              </a:rPr>
+              <a:t>先补 S5 业务逻辑，再把会话改为 JWT，最后接入支付沙箱与 CI</a:t>
+            </a:r>
+          </a:p>
+        </p:txBody>
+      </p:sp>
+      <p:sp>
+        <p:nvSpPr>
+          <p:cNvPr id="27" name="Rectangle 26"/>
+          <p:cNvSpPr/>
+          <p:nvPr/>
+        </p:nvSpPr>
+        <p:spPr>
+          <a:xfrm>
+            <a:off x="381000" y="6286500"/>
+            <a:ext cx="11430000" cy="9525"/>
+          </a:xfrm>
+          <a:prstGeom prst="rect">
+            <a:avLst/>
+          </a:prstGeom>
+          <a:solidFill>
+            <a:srgbClr val="E5E7EB"/>
+          </a:solidFill>
+          <a:ln>
+            <a:noFill/>
+          </a:ln>
+          <a:effectLst/>
+        </p:spPr>
+        <p:style>
+          <a:lnRef idx="1">
+            <a:schemeClr val="accent1"/>
+          </a:lnRef>
+          <a:fillRef idx="3">
+            <a:schemeClr val="accent1"/>
+          </a:fillRef>
+          <a:effectRef idx="2">
+            <a:schemeClr val="accent1"/>
+          </a:effectRef>
+          <a:fontRef idx="minor">
+            <a:schemeClr val="lt1"/>
+          </a:fontRef>
+        </p:style>
+        <p:txBody>
+          <a:bodyPr rtlCol="0" anchor="ctr" wrap="square"/>
+          <a:lstStyle/>
+          <a:p>
+            <a:pPr algn="ctr"/>
+          </a:p>
+        </p:txBody>
+      </p:sp>
+      <p:sp>
+        <p:nvSpPr>
+          <p:cNvPr id="28" name="TextBox 27"/>
+          <p:cNvSpPr txBox="1"/>
+          <p:nvPr/>
+        </p:nvSpPr>
+        <p:spPr>
+          <a:xfrm>
+            <a:off x="381000" y="6324600"/>
+            <a:ext cx="8763000" cy="285750"/>
+          </a:xfrm>
+          <a:prstGeom prst="rect">
+            <a:avLst/>
+          </a:prstGeom>
+          <a:noFill/>
+        </p:spPr>
+        <p:txBody>
+          <a:bodyPr wrap="square" lIns="0" rIns="0" tIns="0" bIns="0" anchor="ctr">
+            <a:spAutoFit/>
+          </a:bodyPr>
+          <a:lstStyle/>
+          <a:p>
+            <a:pPr algn="l">
+              <a:lnSpc>
+                <a:spcPct val="130000"/>
+              </a:lnSpc>
+            </a:pPr>
+            <a:r>
+              <a:rPr sz="1125" b="0">
+                <a:solidFill>
+                  <a:srgbClr val="8B97A8"/>
+                </a:solidFill>
+                <a:latin typeface="Microsoft YaHei"/>
+              </a:rPr>
+              <a:t>来源：代码实现与测试报告 · 开放问题台账</a:t>
+            </a:r>
+          </a:p>
+        </p:txBody>
+      </p:sp>
+      <p:sp>
+        <p:nvSpPr>
+          <p:cNvPr id="29" name="TextBox 28"/>
+          <p:cNvSpPr txBox="1"/>
+          <p:nvPr/>
+        </p:nvSpPr>
+        <p:spPr>
+          <a:xfrm>
+            <a:off x="9525000" y="6324600"/>
+            <a:ext cx="2286000" cy="285750"/>
+          </a:xfrm>
+          <a:prstGeom prst="rect">
+            <a:avLst/>
+          </a:prstGeom>
+          <a:noFill/>
+        </p:spPr>
+        <p:txBody>
+          <a:bodyPr wrap="square" lIns="0" rIns="0" tIns="0" bIns="0" anchor="ctr">
+            <a:spAutoFit/>
+          </a:bodyPr>
+          <a:lstStyle/>
+          <a:p>
+            <a:pPr algn="r">
+              <a:lnSpc>
+                <a:spcPct val="130000"/>
+              </a:lnSpc>
+            </a:pPr>
+            <a:r>
+              <a:rPr sz="1200" b="1">
+                <a:solidFill>
+                  <a:srgbClr val="1E4FA8"/>
+                </a:solidFill>
+                <a:latin typeface="Microsoft YaHei"/>
+              </a:rPr>
+              <a:t>24 / 25</a:t>
+            </a:r>
+          </a:p>
+        </p:txBody>
+      </p:sp>
+    </p:spTree>
+  </p:cSld>
+  <p:clrMapOvr>
+    <a:masterClrMapping/>
+  </p:clrMapOvr>
+</p:sld>
+</file>
+
+<file path=ppt/slides/slide25.xml><?xml version="1.0" encoding="utf-8"?>
+<p:sld xmlns:a="http://schemas.openxmlformats.org/drawingml/2006/main" xmlns:p="http://schemas.openxmlformats.org/presentationml/2006/main" xmlns:r="http://schemas.openxmlformats.org/officeDocument/2006/relationships">
+  <p:cSld>
+    <p:bg>
+      <p:bgPr>
+        <a:solidFill>
+          <a:srgbClr val="FFFFFF"/>
+        </a:solidFill>
+        <a:effectLst/>
+      </p:bgPr>
+    </p:bg>
+    <p:spTree>
+      <p:nvGrpSpPr>
+        <p:cNvPr id="1" name=""/>
+        <p:cNvGrpSpPr/>
+        <p:nvPr/>
+      </p:nvGrpSpPr>
+      <p:grpSpPr/>
+      <p:sp>
+        <p:nvSpPr>
+          <p:cNvPr id="2" name="Rectangle 1"/>
+          <p:cNvSpPr/>
+          <p:nvPr/>
+        </p:nvSpPr>
+        <p:spPr>
+          <a:xfrm>
+            <a:off x="0" y="0"/>
             <a:ext cx="12192000" cy="133350"/>
           </a:xfrm>
           <a:prstGeom prst="rect">
@@ -23496,7 +24679,7 @@
                 </a:solidFill>
                 <a:latin typeface="Microsoft YaHei"/>
               </a:rPr>
-              <a:t>03 / 24</a:t>
+              <a:t>03 / 25</a:t>
             </a:r>
           </a:p>
         </p:txBody>
@@ -24755,7 +25938,7 @@
                 </a:solidFill>
                 <a:latin typeface="Microsoft YaHei"/>
               </a:rPr>
-              <a:t>04 / 24</a:t>
+              <a:t>04 / 25</a:t>
             </a:r>
           </a:p>
         </p:txBody>
@@ -25679,7 +26862,7 @@
                 </a:solidFill>
                 <a:latin typeface="Microsoft YaHei"/>
               </a:rPr>
-              <a:t>05 / 24</a:t>
+              <a:t>05 / 25</a:t>
             </a:r>
           </a:p>
         </p:txBody>
@@ -26915,7 +28098,7 @@
                 </a:solidFill>
                 <a:latin typeface="Microsoft YaHei"/>
               </a:rPr>
-              <a:t>06 / 24</a:t>
+              <a:t>06 / 25</a:t>
             </a:r>
           </a:p>
         </p:txBody>
@@ -27611,7 +28794,7 @@
                 </a:solidFill>
                 <a:latin typeface="Microsoft YaHei"/>
               </a:rPr>
-              <a:t>07 / 24</a:t>
+              <a:t>07 / 25</a:t>
             </a:r>
           </a:p>
         </p:txBody>
@@ -29254,7 +30437,7 @@
                 </a:solidFill>
                 <a:latin typeface="Microsoft YaHei"/>
               </a:rPr>
-              <a:t>08 / 24</a:t>
+              <a:t>08 / 25</a:t>
             </a:r>
           </a:p>
         </p:txBody>
@@ -30333,7 +31516,7 @@
                 </a:solidFill>
                 <a:latin typeface="Microsoft YaHei"/>
               </a:rPr>
-              <a:t>09 / 24</a:t>
+              <a:t>09 / 25</a:t>
             </a:r>
           </a:p>
         </p:txBody>

--- a/10-展示汇报/健身房运营管理系统答辩/健身房运营管理系统答辩.pptx
+++ b/10-展示汇报/健身房运营管理系统答辩/健身房运营管理系统答辩.pptx
@@ -19022,7 +19022,7 @@
                 </a:solidFill>
                 <a:latin typeface="Microsoft YaHei"/>
               </a:rPr>
-              <a:t>243 项检查，覆盖七个层次</a:t>
+              <a:t>244 项检查，覆盖七个层次</a:t>
             </a:r>
           </a:p>
         </p:txBody>
@@ -19146,7 +19146,7 @@
                 </a:solidFill>
                 <a:latin typeface="Microsoft YaHei"/>
               </a:rPr>
-              <a:t>243</a:t>
+              <a:t>244</a:t>
             </a:r>
           </a:p>
         </p:txBody>
@@ -19508,7 +19508,7 @@
                 </a:solidFill>
                 <a:latin typeface="Microsoft YaHei"/>
               </a:rPr>
-              <a:t>68</a:t>
+              <a:t>69</a:t>
             </a:r>
           </a:p>
         </p:txBody>
@@ -23083,7 +23083,7 @@
                 </a:solidFill>
                 <a:latin typeface="Microsoft YaHei"/>
               </a:rPr>
-              <a:t>✓  七层 243 项自动化检查 + 一键启动脚本</a:t>
+              <a:t>✓  七层 244 项自动化检查 + 一键启动脚本</a:t>
             </a:r>
           </a:p>
         </p:txBody>
